--- a/docs/GDP_Nowcasting_종합리포트_한은_2026-08-10.pptx
+++ b/docs/GDP_Nowcasting_종합리포트_한은_2026-08-10.pptx
@@ -4532,7 +4532,7 @@
                 <a:latin typeface="Apple SD Gothic Neo"/>
                 <a:ea typeface="Apple SD Gothic Neo"/>
               </a:rPr>
-              <a:t>이를 수치상 상회하는 유일 구성 = 전망시계</a:t>
+              <a:t>이를 수치상 상회하는 유일 구성(0.740) =</a:t>
             </a:r>
           </a:p>
           <a:p>
@@ -4542,6 +4542,33 @@
               </a:spcAft>
             </a:pPr>
             <a:r>
+              <a:rPr sz="1000" b="1">
+                <a:solidFill>
+                  <a:srgbClr val="262626"/>
+                </a:solidFill>
+                <a:latin typeface="Apple SD Gothic Neo"/>
+                <a:ea typeface="Apple SD Gothic Neo"/>
+              </a:rPr>
+              <a:t>발표 19~14주 전: GBM·Chronos-2 예측의 평균,</a:t>
+            </a:r>
+          </a:p>
+          <a:p>
+            <a:pPr algn="l">
+              <a:spcAft>
+                <a:spcPts val="300"/>
+              </a:spcAft>
+            </a:pPr>
+            <a:r>
+              <a:rPr sz="1000" b="1">
+                <a:solidFill>
+                  <a:srgbClr val="262626"/>
+                </a:solidFill>
+                <a:latin typeface="Apple SD Gothic Neo"/>
+                <a:ea typeface="Apple SD Gothic Neo"/>
+              </a:rPr>
+              <a:t>발표 13~1주 전: XGBoost 단독</a:t>
+            </a:r>
+            <a:r>
               <a:rPr sz="1000" b="0">
                 <a:solidFill>
                   <a:srgbClr val="262626"/>
@@ -4549,24 +4576,7 @@
                 <a:latin typeface="Apple SD Gothic Neo"/>
                 <a:ea typeface="Apple SD Gothic Neo"/>
               </a:rPr>
-              <a:t>하이브리드(0.740) — 조기 주차만 사전학습</a:t>
-            </a:r>
-          </a:p>
-          <a:p>
-            <a:pPr algn="l">
-              <a:spcAft>
-                <a:spcPts val="300"/>
-              </a:spcAft>
-            </a:pPr>
-            <a:r>
-              <a:rPr sz="1000" b="0">
-                <a:solidFill>
-                  <a:srgbClr val="262626"/>
-                </a:solidFill>
-                <a:latin typeface="Apple SD Gothic Neo"/>
-                <a:ea typeface="Apple SD Gothic Neo"/>
-              </a:rPr>
-              <a:t>모델·GBM으로 보완, 이후는 XGBoost 그대로</a:t>
+              <a:t> — 주차별 교대</a:t>
             </a:r>
           </a:p>
           <a:p>
@@ -5792,7 +5802,7 @@
         <p:spPr>
           <a:xfrm>
             <a:off x="6766560" y="3657600"/>
-            <a:ext cx="4892040" cy="1737360"/>
+            <a:ext cx="4892040" cy="2240280"/>
           </a:xfrm>
           <a:prstGeom prst="roundRect">
             <a:avLst/>
@@ -5837,8 +5847,8 @@
         </p:nvSpPr>
         <p:spPr>
           <a:xfrm>
-            <a:off x="6967728" y="3794760"/>
-            <a:ext cx="4526280" cy="1508760"/>
+            <a:off x="6967728" y="3767328"/>
+            <a:ext cx="4526280" cy="320040"/>
           </a:xfrm>
           <a:prstGeom prst="rect">
             <a:avLst/>
@@ -5853,7 +5863,7 @@
           <a:p>
             <a:pPr algn="l">
               <a:spcAft>
-                <a:spcPts val="300"/>
+                <a:spcPts val="200"/>
               </a:spcAft>
             </a:pPr>
             <a:r>
@@ -5864,92 +5874,7 @@
                 <a:latin typeface="Apple SD Gothic Neo"/>
                 <a:ea typeface="Apple SD Gothic Neo"/>
               </a:rPr>
-              <a:t>전망시계 하이브리드 (리더보드 1위 구성)</a:t>
-            </a:r>
-          </a:p>
-          <a:p>
-            <a:pPr algn="l">
-              <a:spcAft>
-                <a:spcPts val="300"/>
-              </a:spcAft>
-            </a:pPr>
-            <a:r>
-              <a:rPr sz="1050" b="0">
-                <a:solidFill>
-                  <a:srgbClr val="262626"/>
-                </a:solidFill>
-                <a:latin typeface="Apple SD Gothic Neo"/>
-                <a:ea typeface="Apple SD Gothic Neo"/>
-              </a:rPr>
-              <a:t>조기 주차 = (GBM + Chronos-2f) 평균,</a:t>
-            </a:r>
-          </a:p>
-          <a:p>
-            <a:pPr algn="l">
-              <a:spcAft>
-                <a:spcPts val="300"/>
-              </a:spcAft>
-            </a:pPr>
-            <a:r>
-              <a:rPr sz="1050" b="0">
-                <a:solidFill>
-                  <a:srgbClr val="262626"/>
-                </a:solidFill>
-                <a:latin typeface="Apple SD Gothic Neo"/>
-                <a:ea typeface="Apple SD Gothic Neo"/>
-              </a:rPr>
-              <a:t>그 외 주차 = XGBoost 그대로 — 0.740 (-1.3%)</a:t>
-            </a:r>
-          </a:p>
-          <a:p>
-            <a:pPr algn="l">
-              <a:spcAft>
-                <a:spcPts val="300"/>
-              </a:spcAft>
-            </a:pPr>
-            <a:r>
-              <a:rPr sz="1000" b="0">
-                <a:solidFill>
-                  <a:srgbClr val="262626"/>
-                </a:solidFill>
-                <a:latin typeface="Apple SD Gothic Neo"/>
-                <a:ea typeface="Apple SD Gothic Neo"/>
-              </a:rPr>
-              <a:t>· 국면 판단 없음 — 전망 시계에 따른 조건화는</a:t>
-            </a:r>
-          </a:p>
-          <a:p>
-            <a:pPr algn="l">
-              <a:spcAft>
-                <a:spcPts val="300"/>
-              </a:spcAft>
-            </a:pPr>
-            <a:r>
-              <a:rPr sz="1000" b="0">
-                <a:solidFill>
-                  <a:srgbClr val="262626"/>
-                </a:solidFill>
-                <a:latin typeface="Apple SD Gothic Neo"/>
-                <a:ea typeface="Apple SD Gothic Neo"/>
-              </a:rPr>
-              <a:t>  예측 실무의 표준 관행</a:t>
-            </a:r>
-          </a:p>
-          <a:p>
-            <a:pPr algn="l">
-              <a:spcAft>
-                <a:spcPts val="300"/>
-              </a:spcAft>
-            </a:pPr>
-            <a:r>
-              <a:rPr sz="1000" b="0">
-                <a:solidFill>
-                  <a:srgbClr val="262626"/>
-                </a:solidFill>
-                <a:latin typeface="Apple SD Gothic Neo"/>
-                <a:ea typeface="Apple SD Gothic Neo"/>
-              </a:rPr>
-              <a:t>· 수위: 비열등 확인 + 개선 방향 (유의성 미달 명시)</a:t>
+              <a:t>리더보드 1위 구성 — 실제 결합 방식 (0.740, -1.3%)</a:t>
             </a:r>
           </a:p>
         </p:txBody>
@@ -5962,19 +5887,17 @@
         </p:nvSpPr>
         <p:spPr>
           <a:xfrm>
-            <a:off x="502920" y="6309360"/>
-            <a:ext cx="11183112" cy="365760"/>
+            <a:off x="6995160" y="4160520"/>
+            <a:ext cx="1400475" cy="384048"/>
           </a:xfrm>
           <a:prstGeom prst="rect">
             <a:avLst/>
           </a:prstGeom>
           <a:solidFill>
-            <a:srgbClr val="F3F4F5"/>
+            <a:srgbClr val="B0532F"/>
           </a:solidFill>
-          <a:ln w="9525">
-            <a:solidFill>
-              <a:srgbClr val="C9C9C9"/>
-            </a:solidFill>
+          <a:ln>
+            <a:noFill/>
           </a:ln>
           <a:effectLst/>
         </p:spPr>
@@ -6002,7 +5925,348 @@
       </p:sp>
       <p:sp>
         <p:nvSpPr>
-          <p:cNvPr id="9" name="TextBox 8"/>
+          <p:cNvPr id="9" name="Rectangle 8"/>
+          <p:cNvSpPr/>
+          <p:nvPr/>
+        </p:nvSpPr>
+        <p:spPr>
+          <a:xfrm>
+            <a:off x="8432211" y="4160520"/>
+            <a:ext cx="2997788" cy="384048"/>
+          </a:xfrm>
+          <a:prstGeom prst="rect">
+            <a:avLst/>
+          </a:prstGeom>
+          <a:solidFill>
+            <a:srgbClr val="1C5CAB"/>
+          </a:solidFill>
+          <a:ln>
+            <a:noFill/>
+          </a:ln>
+          <a:effectLst/>
+        </p:spPr>
+        <p:style>
+          <a:lnRef idx="1">
+            <a:schemeClr val="accent1"/>
+          </a:lnRef>
+          <a:fillRef idx="3">
+            <a:schemeClr val="accent1"/>
+          </a:fillRef>
+          <a:effectRef idx="2">
+            <a:schemeClr val="accent1"/>
+          </a:effectRef>
+          <a:fontRef idx="minor">
+            <a:schemeClr val="lt1"/>
+          </a:fontRef>
+        </p:style>
+        <p:txBody>
+          <a:bodyPr rtlCol="0" anchor="ctr"/>
+          <a:lstStyle/>
+          <a:p>
+            <a:pPr algn="ctr"/>
+          </a:p>
+        </p:txBody>
+      </p:sp>
+      <p:sp>
+        <p:nvSpPr>
+          <p:cNvPr id="10" name="TextBox 9"/>
+          <p:cNvSpPr txBox="1"/>
+          <p:nvPr/>
+        </p:nvSpPr>
+        <p:spPr>
+          <a:xfrm>
+            <a:off x="6949440" y="4215383"/>
+            <a:ext cx="1491915" cy="274320"/>
+          </a:xfrm>
+          <a:prstGeom prst="rect">
+            <a:avLst/>
+          </a:prstGeom>
+          <a:noFill/>
+        </p:spPr>
+        <p:txBody>
+          <a:bodyPr wrap="square" anchor="t" lIns="45720" rIns="45720" tIns="18288" bIns="18288">
+            <a:spAutoFit/>
+          </a:bodyPr>
+          <a:lstStyle/>
+          <a:p>
+            <a:pPr algn="ctr">
+              <a:spcAft>
+                <a:spcPts val="200"/>
+              </a:spcAft>
+            </a:pPr>
+            <a:r>
+              <a:rPr sz="1000" b="1">
+                <a:solidFill>
+                  <a:srgbClr val="FFFFFF"/>
+                </a:solidFill>
+                <a:latin typeface="Apple SD Gothic Neo"/>
+                <a:ea typeface="Apple SD Gothic Neo"/>
+              </a:rPr>
+              <a:t>6주</a:t>
+            </a:r>
+          </a:p>
+        </p:txBody>
+      </p:sp>
+      <p:sp>
+        <p:nvSpPr>
+          <p:cNvPr id="11" name="TextBox 10"/>
+          <p:cNvSpPr txBox="1"/>
+          <p:nvPr/>
+        </p:nvSpPr>
+        <p:spPr>
+          <a:xfrm>
+            <a:off x="8432211" y="4215383"/>
+            <a:ext cx="2997788" cy="274320"/>
+          </a:xfrm>
+          <a:prstGeom prst="rect">
+            <a:avLst/>
+          </a:prstGeom>
+          <a:noFill/>
+        </p:spPr>
+        <p:txBody>
+          <a:bodyPr wrap="square" anchor="t" lIns="45720" rIns="45720" tIns="18288" bIns="18288">
+            <a:spAutoFit/>
+          </a:bodyPr>
+          <a:lstStyle/>
+          <a:p>
+            <a:pPr algn="ctr">
+              <a:spcAft>
+                <a:spcPts val="200"/>
+              </a:spcAft>
+            </a:pPr>
+            <a:r>
+              <a:rPr sz="1000" b="1">
+                <a:solidFill>
+                  <a:srgbClr val="FFFFFF"/>
+                </a:solidFill>
+                <a:latin typeface="Apple SD Gothic Neo"/>
+                <a:ea typeface="Apple SD Gothic Neo"/>
+              </a:rPr>
+              <a:t>13주</a:t>
+            </a:r>
+          </a:p>
+        </p:txBody>
+      </p:sp>
+      <p:sp>
+        <p:nvSpPr>
+          <p:cNvPr id="12" name="TextBox 11"/>
+          <p:cNvSpPr txBox="1"/>
+          <p:nvPr/>
+        </p:nvSpPr>
+        <p:spPr>
+          <a:xfrm>
+            <a:off x="6858000" y="4599431"/>
+            <a:ext cx="1857675" cy="548640"/>
+          </a:xfrm>
+          <a:prstGeom prst="rect">
+            <a:avLst/>
+          </a:prstGeom>
+          <a:noFill/>
+        </p:spPr>
+        <p:txBody>
+          <a:bodyPr wrap="square" anchor="t" lIns="45720" rIns="45720" tIns="18288" bIns="18288">
+            <a:spAutoFit/>
+          </a:bodyPr>
+          <a:lstStyle/>
+          <a:p>
+            <a:pPr algn="ctr">
+              <a:spcAft>
+                <a:spcPts val="100"/>
+              </a:spcAft>
+            </a:pPr>
+            <a:r>
+              <a:rPr sz="900" b="1">
+                <a:solidFill>
+                  <a:srgbClr val="B0532F"/>
+                </a:solidFill>
+                <a:latin typeface="Apple SD Gothic Neo"/>
+                <a:ea typeface="Apple SD Gothic Neo"/>
+              </a:rPr>
+              <a:t>발표 19~14주 전</a:t>
+            </a:r>
+          </a:p>
+          <a:p>
+            <a:pPr algn="ctr">
+              <a:spcAft>
+                <a:spcPts val="100"/>
+              </a:spcAft>
+            </a:pPr>
+            <a:r>
+              <a:rPr sz="900" b="0">
+                <a:solidFill>
+                  <a:srgbClr val="262626"/>
+                </a:solidFill>
+                <a:latin typeface="Apple SD Gothic Neo"/>
+                <a:ea typeface="Apple SD Gothic Neo"/>
+              </a:rPr>
+              <a:t>(GBM+Chronos-2f)÷2</a:t>
+            </a:r>
+          </a:p>
+        </p:txBody>
+      </p:sp>
+      <p:sp>
+        <p:nvSpPr>
+          <p:cNvPr id="13" name="TextBox 12"/>
+          <p:cNvSpPr txBox="1"/>
+          <p:nvPr/>
+        </p:nvSpPr>
+        <p:spPr>
+          <a:xfrm>
+            <a:off x="8432211" y="4599431"/>
+            <a:ext cx="2997788" cy="548640"/>
+          </a:xfrm>
+          <a:prstGeom prst="rect">
+            <a:avLst/>
+          </a:prstGeom>
+          <a:noFill/>
+        </p:spPr>
+        <p:txBody>
+          <a:bodyPr wrap="square" anchor="t" lIns="45720" rIns="45720" tIns="18288" bIns="18288">
+            <a:spAutoFit/>
+          </a:bodyPr>
+          <a:lstStyle/>
+          <a:p>
+            <a:pPr algn="ctr">
+              <a:spcAft>
+                <a:spcPts val="100"/>
+              </a:spcAft>
+            </a:pPr>
+            <a:r>
+              <a:rPr sz="900" b="1">
+                <a:solidFill>
+                  <a:srgbClr val="1C5CAB"/>
+                </a:solidFill>
+                <a:latin typeface="Apple SD Gothic Neo"/>
+                <a:ea typeface="Apple SD Gothic Neo"/>
+              </a:rPr>
+              <a:t>발표 13~1주 전</a:t>
+            </a:r>
+          </a:p>
+          <a:p>
+            <a:pPr algn="ctr">
+              <a:spcAft>
+                <a:spcPts val="100"/>
+              </a:spcAft>
+            </a:pPr>
+            <a:r>
+              <a:rPr sz="900" b="0">
+                <a:solidFill>
+                  <a:srgbClr val="262626"/>
+                </a:solidFill>
+                <a:latin typeface="Apple SD Gothic Neo"/>
+                <a:ea typeface="Apple SD Gothic Neo"/>
+              </a:rPr>
+              <a:t>XGBoost 단독 (현행 그대로)</a:t>
+            </a:r>
+          </a:p>
+        </p:txBody>
+      </p:sp>
+      <p:sp>
+        <p:nvSpPr>
+          <p:cNvPr id="14" name="TextBox 13"/>
+          <p:cNvSpPr txBox="1"/>
+          <p:nvPr/>
+        </p:nvSpPr>
+        <p:spPr>
+          <a:xfrm>
+            <a:off x="6967728" y="5257800"/>
+            <a:ext cx="4526280" cy="594360"/>
+          </a:xfrm>
+          <a:prstGeom prst="rect">
+            <a:avLst/>
+          </a:prstGeom>
+          <a:noFill/>
+        </p:spPr>
+        <p:txBody>
+          <a:bodyPr wrap="square" anchor="t" lIns="45720" rIns="45720" tIns="18288" bIns="18288">
+            <a:spAutoFit/>
+          </a:bodyPr>
+          <a:lstStyle/>
+          <a:p>
+            <a:pPr algn="l">
+              <a:spcAft>
+                <a:spcPts val="200"/>
+              </a:spcAft>
+            </a:pPr>
+            <a:r>
+              <a:rPr sz="1000" b="0">
+                <a:solidFill>
+                  <a:srgbClr val="262626"/>
+                </a:solidFill>
+                <a:latin typeface="Apple SD Gothic Neo"/>
+                <a:ea typeface="Apple SD Gothic Neo"/>
+              </a:rPr>
+              <a:t>· 국면 판단 없음 — 주차에 따른 고정 교대 규칙</a:t>
+            </a:r>
+          </a:p>
+          <a:p>
+            <a:pPr algn="l">
+              <a:spcAft>
+                <a:spcPts val="200"/>
+              </a:spcAft>
+            </a:pPr>
+            <a:r>
+              <a:rPr sz="1000" b="0">
+                <a:solidFill>
+                  <a:srgbClr val="262626"/>
+                </a:solidFill>
+                <a:latin typeface="Apple SD Gothic Neo"/>
+                <a:ea typeface="Apple SD Gothic Neo"/>
+              </a:rPr>
+              <a:t>· 수위: 비열등 확인 + 개선 방향 (유의성 미달 명시)</a:t>
+            </a:r>
+          </a:p>
+        </p:txBody>
+      </p:sp>
+      <p:sp>
+        <p:nvSpPr>
+          <p:cNvPr id="15" name="Rectangle 14"/>
+          <p:cNvSpPr/>
+          <p:nvPr/>
+        </p:nvSpPr>
+        <p:spPr>
+          <a:xfrm>
+            <a:off x="502920" y="6309360"/>
+            <a:ext cx="11183112" cy="365760"/>
+          </a:xfrm>
+          <a:prstGeom prst="rect">
+            <a:avLst/>
+          </a:prstGeom>
+          <a:solidFill>
+            <a:srgbClr val="F3F4F5"/>
+          </a:solidFill>
+          <a:ln w="9525">
+            <a:solidFill>
+              <a:srgbClr val="C9C9C9"/>
+            </a:solidFill>
+          </a:ln>
+          <a:effectLst/>
+        </p:spPr>
+        <p:style>
+          <a:lnRef idx="1">
+            <a:schemeClr val="accent1"/>
+          </a:lnRef>
+          <a:fillRef idx="3">
+            <a:schemeClr val="accent1"/>
+          </a:fillRef>
+          <a:effectRef idx="2">
+            <a:schemeClr val="accent1"/>
+          </a:effectRef>
+          <a:fontRef idx="minor">
+            <a:schemeClr val="lt1"/>
+          </a:fontRef>
+        </p:style>
+        <p:txBody>
+          <a:bodyPr rtlCol="0" anchor="ctr"/>
+          <a:lstStyle/>
+          <a:p>
+            <a:pPr algn="ctr"/>
+          </a:p>
+        </p:txBody>
+      </p:sp>
+      <p:sp>
+        <p:nvSpPr>
+          <p:cNvPr id="16" name="TextBox 15"/>
           <p:cNvSpPr txBox="1"/>
           <p:nvPr/>
         </p:nvSpPr>
@@ -9239,7 +9503,7 @@
                 <a:latin typeface="Apple SD Gothic Neo"/>
                 <a:ea typeface="Apple SD Gothic Neo"/>
               </a:rPr>
-              <a:t>XGBoost 단독(개정 후)이 기준선 — 인정. 전망시계 하이브리드(0.740)는 비열등+개선 방향의 참고 옵션</a:t>
+              <a:t>XGBoost 단독(개정 후)이 기준선 — 인정. 주차별 결합(조기 6주 = GBM·Chronos-2 평균 → 이후 XGBoost, 0.740)은 비열등+개선 방향의 참고 옵션</a:t>
             </a:r>
           </a:p>
         </p:txBody>

--- a/docs/GDP_Nowcasting_종합리포트_한은_2026-08-10.pptx
+++ b/docs/GDP_Nowcasting_종합리포트_한은_2026-08-10.pptx
@@ -579,7 +579,7 @@
           <a:lstStyle/>
           <a:p>
             <a:r>
-              <a:t>리더보드는 schema v2(원 단위 예측) 기준으로 전면 재계산. 전망시계 하이브리드의 -1.3%는 DM 검정 유의성 미달(p=0.41)이며, 7개 후보 구성 중 최선을 선택한 값이므로 '비열등+개선 방향' 수위로 보고. 통계적 우월 주장이 아님.</a:t>
+              <a:t>리더보드는 schema v2(원 단위 예측) 기준으로 전면 재계산. 주차별 결합의 -1.3%는 DM 검정 유의성 미달(p=0.41)이며, 후보 구성 중 최선을 선택한 값이므로 '비열등+개선 방향' 수위로 보고. 통계적 우월 주장이 아님.</a:t>
             </a:r>
           </a:p>
         </p:txBody>
@@ -649,7 +649,7 @@
           <a:lstStyle/>
           <a:p>
             <a:r>
-              <a:t>①의 '학습형 전패'는 우연이 아니라 구조적 결과 — 유효 표본 32개에서 추정하는 모든 추가 파라미터가 과적합 비용을 지불함. ②는 당사와 한은이 독립적으로 같은 결론에 도달했다는 점이 중요. ③이 본 리포트의 축.</a:t>
+              <a:t>1의 '학습형 전패'는 우연이 아니라 구조적 결과 — 유효 표본 32개에서 추정하는 모든 추가 파라미터가 과적합 비용을 지불함. 2는 당사와 한은이 독립적으로 같은 결론에 도달했다는 점이 중요. 3이 본 리포트의 축.</a:t>
             </a:r>
           </a:p>
         </p:txBody>
@@ -999,7 +999,7 @@
           <a:lstStyle/>
           <a:p>
             <a:r>
-              <a:t>다음 회의 의사결정 요청 사항: ① 공동 논문 구도(제목 프레임·역할 분담·발표 경로) 협의 착수 여부 ② 하이브리드 병행 산출 여부(선택). 나머지는 보고 사항.</a:t>
+              <a:t>다음 회의 의사결정 요청 사항: ① 공동 논문 구도(제목 프레임·역할 분담·발표 경로) 협의 착수 여부 ② 주차별 결합 병행 산출 여부(선택). 나머지는 보고 사항.</a:t>
             </a:r>
           </a:p>
         </p:txBody>
@@ -4013,8 +4013,8 @@
         </p:nvSpPr>
         <p:spPr>
           <a:xfrm>
-            <a:off x="731520" y="2194560"/>
-            <a:ext cx="10698480" cy="822960"/>
+            <a:off x="685800" y="502920"/>
+            <a:ext cx="5486400" cy="320040"/>
           </a:xfrm>
           <a:prstGeom prst="rect">
             <a:avLst/>
@@ -4022,25 +4022,25 @@
           <a:noFill/>
         </p:spPr>
         <p:txBody>
-          <a:bodyPr wrap="square" anchor="t" lIns="45720" rIns="45720" tIns="18288" bIns="18288">
+          <a:bodyPr wrap="square" anchor="t" lIns="18288" rIns="18288" tIns="9144" bIns="9144">
             <a:spAutoFit/>
           </a:bodyPr>
           <a:lstStyle/>
           <a:p>
-            <a:pPr algn="ctr">
-              <a:spcAft>
-                <a:spcPts val="200"/>
-              </a:spcAft>
-            </a:pPr>
-            <a:r>
-              <a:rPr sz="3200" b="1">
-                <a:solidFill>
-                  <a:srgbClr val="243447"/>
-                </a:solidFill>
-                <a:latin typeface="Apple SD Gothic Neo"/>
-                <a:ea typeface="Apple SD Gothic Neo"/>
-              </a:rPr>
-              <a:t>GDP Nowcasting 협업 종합 리포트</a:t>
+            <a:pPr algn="l">
+              <a:spcAft>
+                <a:spcPts val="200"/>
+              </a:spcAft>
+            </a:pPr>
+            <a:r>
+              <a:rPr sz="1200" b="1">
+                <a:solidFill>
+                  <a:srgbClr val="6B6B6B"/>
+                </a:solidFill>
+                <a:latin typeface="Apple SD Gothic Neo"/>
+                <a:ea typeface="Apple SD Gothic Neo"/>
+              </a:rPr>
+              <a:t>네이버클라우드 AX Lab</a:t>
             </a:r>
           </a:p>
         </p:txBody>
@@ -4053,8 +4053,8 @@
         </p:nvSpPr>
         <p:spPr>
           <a:xfrm>
-            <a:off x="731520" y="3017520"/>
-            <a:ext cx="10698480" cy="548640"/>
+            <a:off x="685800" y="2423160"/>
+            <a:ext cx="10515600" cy="1463040"/>
           </a:xfrm>
           <a:prstGeom prst="rect">
             <a:avLst/>
@@ -4062,25 +4062,59 @@
           <a:noFill/>
         </p:spPr>
         <p:txBody>
-          <a:bodyPr wrap="square" anchor="t" lIns="45720" rIns="45720" tIns="18288" bIns="18288">
+          <a:bodyPr wrap="square" anchor="t" lIns="18288" rIns="18288" tIns="9144" bIns="9144">
             <a:spAutoFit/>
           </a:bodyPr>
           <a:lstStyle/>
           <a:p>
-            <a:pPr algn="ctr">
-              <a:spcAft>
-                <a:spcPts val="200"/>
-              </a:spcAft>
-            </a:pPr>
-            <a:r>
-              <a:rPr sz="1900" b="0">
+            <a:pPr algn="l">
+              <a:spcAft>
+                <a:spcPts val="200"/>
+              </a:spcAft>
+            </a:pPr>
+            <a:r>
+              <a:rPr sz="3300" b="1">
                 <a:solidFill>
                   <a:srgbClr val="243447"/>
                 </a:solidFill>
                 <a:latin typeface="Apple SD Gothic Neo"/>
                 <a:ea typeface="Apple SD Gothic Neo"/>
               </a:rPr>
-              <a:t>검증 총괄 · 방법론 시사점 · 공동 연구 제안</a:t>
+              <a:t>GDP Nowcasting 협업 종합 리포트</a:t>
+            </a:r>
+          </a:p>
+          <a:p>
+            <a:pPr algn="l">
+              <a:spcAft>
+                <a:spcPts val="200"/>
+              </a:spcAft>
+            </a:pPr>
+            <a:r>
+              <a:rPr sz="800" b="0">
+                <a:solidFill>
+                  <a:srgbClr val="262626"/>
+                </a:solidFill>
+                <a:latin typeface="Apple SD Gothic Neo"/>
+                <a:ea typeface="Apple SD Gothic Neo"/>
+              </a:rPr>
+              <a:t/>
+            </a:r>
+          </a:p>
+          <a:p>
+            <a:pPr algn="l">
+              <a:spcAft>
+                <a:spcPts val="200"/>
+              </a:spcAft>
+            </a:pPr>
+            <a:r>
+              <a:rPr sz="1700" b="0">
+                <a:solidFill>
+                  <a:srgbClr val="262626"/>
+                </a:solidFill>
+                <a:latin typeface="Apple SD Gothic Neo"/>
+                <a:ea typeface="Apple SD Gothic Neo"/>
+              </a:rPr>
+              <a:t>검증 총괄과 방법론 시사점, 그리고 공동 연구 제안</a:t>
             </a:r>
           </a:p>
         </p:txBody>
@@ -4093,15 +4127,15 @@
         </p:nvCxnSpPr>
         <p:spPr>
           <a:xfrm>
-            <a:off x="4956048" y="3840480"/>
-            <a:ext cx="2286000" cy="0"/>
+            <a:off x="713232" y="3977639"/>
+            <a:ext cx="3840480" cy="0"/>
           </a:xfrm>
           <a:prstGeom prst="line">
             <a:avLst/>
           </a:prstGeom>
-          <a:ln w="12700">
+          <a:ln w="20320">
             <a:solidFill>
-              <a:srgbClr val="C9C9C9"/>
+              <a:srgbClr val="243447"/>
             </a:solidFill>
           </a:ln>
         </p:spPr>
@@ -4128,8 +4162,8 @@
         </p:nvSpPr>
         <p:spPr>
           <a:xfrm>
-            <a:off x="731520" y="4023360"/>
-            <a:ext cx="10698480" cy="457200"/>
+            <a:off x="713232" y="4160520"/>
+            <a:ext cx="10058400" cy="822960"/>
           </a:xfrm>
           <a:prstGeom prst="rect">
             <a:avLst/>
@@ -4137,25 +4171,42 @@
           <a:noFill/>
         </p:spPr>
         <p:txBody>
-          <a:bodyPr wrap="square" anchor="t" lIns="45720" rIns="45720" tIns="18288" bIns="18288">
+          <a:bodyPr wrap="square" anchor="t" lIns="18288" rIns="18288" tIns="9144" bIns="9144">
             <a:spAutoFit/>
           </a:bodyPr>
           <a:lstStyle/>
           <a:p>
-            <a:pPr algn="ctr">
-              <a:spcAft>
-                <a:spcPts val="200"/>
-              </a:spcAft>
-            </a:pPr>
-            <a:r>
-              <a:rPr sz="1300" b="0">
+            <a:pPr algn="l">
+              <a:spcAft>
+                <a:spcPts val="300"/>
+              </a:spcAft>
+            </a:pPr>
+            <a:r>
+              <a:rPr sz="1200" b="0">
                 <a:solidFill>
                   <a:srgbClr val="6B6B6B"/>
                 </a:solidFill>
                 <a:latin typeface="Apple SD Gothic Neo"/>
                 <a:ea typeface="Apple SD Gothic Neo"/>
               </a:rPr>
-              <a:t>네이버클라우드 AX Lab  |  2026. 8.</a:t>
+              <a:t>두 달간 40여 개 모형 구성을 동일 규약으로 검증한 결과를 정리하고,</a:t>
+            </a:r>
+          </a:p>
+          <a:p>
+            <a:pPr algn="l">
+              <a:spcAft>
+                <a:spcPts val="300"/>
+              </a:spcAft>
+            </a:pPr>
+            <a:r>
+              <a:rPr sz="1200" b="0">
+                <a:solidFill>
+                  <a:srgbClr val="6B6B6B"/>
+                </a:solidFill>
+                <a:latin typeface="Apple SD Gothic Neo"/>
+                <a:ea typeface="Apple SD Gothic Neo"/>
+              </a:rPr>
+              <a:t>“사전학습 시계열 모델은 언제 가치를 더하는가”라는 공동 연구 방향을 제안드립니다.</a:t>
             </a:r>
           </a:p>
         </p:txBody>
@@ -4168,8 +4219,8 @@
         </p:nvSpPr>
         <p:spPr>
           <a:xfrm>
-            <a:off x="731520" y="4526280"/>
-            <a:ext cx="10698480" cy="457200"/>
+            <a:off x="713232" y="6035040"/>
+            <a:ext cx="5486400" cy="320040"/>
           </a:xfrm>
           <a:prstGeom prst="rect">
             <a:avLst/>
@@ -4177,25 +4228,25 @@
           <a:noFill/>
         </p:spPr>
         <p:txBody>
-          <a:bodyPr wrap="square" anchor="t" lIns="45720" rIns="45720" tIns="18288" bIns="18288">
+          <a:bodyPr wrap="square" anchor="t" lIns="18288" rIns="18288" tIns="9144" bIns="9144">
             <a:spAutoFit/>
           </a:bodyPr>
           <a:lstStyle/>
           <a:p>
-            <a:pPr algn="ctr">
-              <a:spcAft>
-                <a:spcPts val="200"/>
-              </a:spcAft>
-            </a:pPr>
-            <a:r>
-              <a:rPr sz="1050" b="0">
+            <a:pPr algn="l">
+              <a:spcAft>
+                <a:spcPts val="200"/>
+              </a:spcAft>
+            </a:pPr>
+            <a:r>
+              <a:rPr sz="1100" b="0">
                 <a:solidFill>
                   <a:srgbClr val="6B6B6B"/>
                 </a:solidFill>
                 <a:latin typeface="Apple SD Gothic Neo"/>
                 <a:ea typeface="Apple SD Gothic Neo"/>
               </a:rPr>
-              <a:t>구성: 리더보드 · 시사점 · 전망시계 진단 · 문맥학습(ICL) 방식의 한계 · 트랜스포머류의 한계와 기여 지점 · 공동 논문 방향</a:t>
+              <a:t>2026. 8.  |  한국은행 디지털혁신실 협업</a:t>
             </a:r>
           </a:p>
         </p:txBody>
@@ -4226,8 +4277,8 @@
         </p:nvSpPr>
         <p:spPr>
           <a:xfrm>
-            <a:off x="502920" y="274320"/>
-            <a:ext cx="11155680" cy="502920"/>
+            <a:off x="548640" y="292608"/>
+            <a:ext cx="10515600" cy="274320"/>
           </a:xfrm>
           <a:prstGeom prst="rect">
             <a:avLst/>
@@ -4235,7 +4286,7 @@
           <a:noFill/>
         </p:spPr>
         <p:txBody>
-          <a:bodyPr wrap="square" anchor="t" lIns="45720" rIns="45720" tIns="18288" bIns="18288">
+          <a:bodyPr wrap="square" anchor="t" lIns="18288" rIns="18288" tIns="9144" bIns="9144">
             <a:spAutoFit/>
           </a:bodyPr>
           <a:lstStyle/>
@@ -4246,43 +4297,73 @@
               </a:spcAft>
             </a:pPr>
             <a:r>
-              <a:rPr sz="1900" b="1">
-                <a:solidFill>
-                  <a:srgbClr val="008A3E"/>
-                </a:solidFill>
-                <a:latin typeface="Apple SD Gothic Neo"/>
-                <a:ea typeface="Apple SD Gothic Neo"/>
-              </a:rPr>
-              <a:t>01  </a:t>
-            </a:r>
-            <a:r>
-              <a:rPr sz="1900" b="1">
+              <a:rPr sz="1050" b="1">
+                <a:solidFill>
+                  <a:srgbClr val="6B6B6B"/>
+                </a:solidFill>
+                <a:latin typeface="Apple SD Gothic Neo"/>
+                <a:ea typeface="Apple SD Gothic Neo"/>
+              </a:rPr>
+              <a:t>1  |  검증 총괄</a:t>
+            </a:r>
+          </a:p>
+        </p:txBody>
+      </p:sp>
+      <p:sp>
+        <p:nvSpPr>
+          <p:cNvPr id="3" name="TextBox 2"/>
+          <p:cNvSpPr txBox="1"/>
+          <p:nvPr/>
+        </p:nvSpPr>
+        <p:spPr>
+          <a:xfrm>
+            <a:off x="548640" y="548640"/>
+            <a:ext cx="11064240" cy="548640"/>
+          </a:xfrm>
+          <a:prstGeom prst="rect">
+            <a:avLst/>
+          </a:prstGeom>
+          <a:noFill/>
+        </p:spPr>
+        <p:txBody>
+          <a:bodyPr wrap="square" anchor="t" lIns="18288" rIns="18288" tIns="9144" bIns="9144">
+            <a:spAutoFit/>
+          </a:bodyPr>
+          <a:lstStyle/>
+          <a:p>
+            <a:pPr algn="l">
+              <a:spcAft>
+                <a:spcPts val="200"/>
+              </a:spcAft>
+            </a:pPr>
+            <a:r>
+              <a:rPr sz="1700" b="1">
                 <a:solidFill>
                   <a:srgbClr val="243447"/>
                 </a:solidFill>
                 <a:latin typeface="Apple SD Gothic Neo"/>
                 <a:ea typeface="Apple SD Gothic Neo"/>
               </a:rPr>
-              <a:t>검증 리더보드 — 예측단위 개정(schema v2) 이후 통합 순위</a:t>
+              <a:t>개정 이후 기준선은 XGBoost 단독 — 이를 넘는 구성은 주차별 결합 하나였습니다</a:t>
             </a:r>
           </a:p>
         </p:txBody>
       </p:sp>
       <p:cxnSp>
         <p:nvCxnSpPr>
-          <p:cNvPr id="3" name="Connector 2"/>
+          <p:cNvPr id="4" name="Connector 3"/>
           <p:cNvCxnSpPr/>
           <p:nvPr/>
         </p:nvCxnSpPr>
         <p:spPr>
           <a:xfrm>
-            <a:off x="502920" y="841248"/>
-            <a:ext cx="11183112" cy="0"/>
+            <a:off x="548640" y="1115568"/>
+            <a:ext cx="11091672" cy="0"/>
           </a:xfrm>
           <a:prstGeom prst="line">
             <a:avLst/>
           </a:prstGeom>
-          <a:ln w="20320">
+          <a:ln w="15240">
             <a:solidFill>
               <a:srgbClr val="243447"/>
             </a:solidFill>
@@ -4305,7 +4386,7 @@
       </p:cxnSp>
       <p:pic>
         <p:nvPicPr>
-          <p:cNvPr id="4" name="Picture 3" descr="bokf_leader.png"/>
+          <p:cNvPr id="5" name="Picture 4" descr="bokf_leader.png"/>
           <p:cNvPicPr>
             <a:picLocks noChangeAspect="1"/>
           </p:cNvPicPr>
@@ -4319,336 +4400,14 @@
         </p:blipFill>
         <p:spPr>
           <a:xfrm>
-            <a:off x="411480" y="1188720"/>
-            <a:ext cx="6949440" cy="3461835"/>
+            <a:off x="457200" y="1463040"/>
+            <a:ext cx="6858000" cy="3416284"/>
           </a:xfrm>
           <a:prstGeom prst="rect">
             <a:avLst/>
           </a:prstGeom>
         </p:spPr>
       </p:pic>
-      <p:sp>
-        <p:nvSpPr>
-          <p:cNvPr id="5" name="TextBox 4"/>
-          <p:cNvSpPr txBox="1"/>
-          <p:nvPr/>
-        </p:nvSpPr>
-        <p:spPr>
-          <a:xfrm>
-            <a:off x="7635240" y="1280160"/>
-            <a:ext cx="4023360" cy="4754880"/>
-          </a:xfrm>
-          <a:prstGeom prst="rect">
-            <a:avLst/>
-          </a:prstGeom>
-          <a:noFill/>
-        </p:spPr>
-        <p:txBody>
-          <a:bodyPr wrap="square" anchor="t" lIns="45720" rIns="45720" tIns="18288" bIns="18288">
-            <a:spAutoFit/>
-          </a:bodyPr>
-          <a:lstStyle/>
-          <a:p>
-            <a:pPr algn="l">
-              <a:spcAft>
-                <a:spcPts val="300"/>
-              </a:spcAft>
-            </a:pPr>
-            <a:r>
-              <a:rPr sz="1150" b="1">
-                <a:solidFill>
-                  <a:srgbClr val="243447"/>
-                </a:solidFill>
-                <a:latin typeface="Apple SD Gothic Neo"/>
-                <a:ea typeface="Apple SD Gothic Neo"/>
-              </a:rPr>
-              <a:t>읽는 법</a:t>
-            </a:r>
-          </a:p>
-          <a:p>
-            <a:pPr algn="l">
-              <a:spcAft>
-                <a:spcPts val="300"/>
-              </a:spcAft>
-            </a:pPr>
-            <a:r>
-              <a:rPr sz="1000" b="0">
-                <a:solidFill>
-                  <a:srgbClr val="262626"/>
-                </a:solidFill>
-                <a:latin typeface="Apple SD Gothic Neo"/>
-                <a:ea typeface="Apple SD Gothic Neo"/>
-              </a:rPr>
-              <a:t>· 전 구성 동일 규약 — 직접 비교 가능</a:t>
-            </a:r>
-          </a:p>
-          <a:p>
-            <a:pPr algn="l">
-              <a:spcAft>
-                <a:spcPts val="300"/>
-              </a:spcAft>
-            </a:pPr>
-            <a:r>
-              <a:rPr sz="1000" b="0">
-                <a:solidFill>
-                  <a:srgbClr val="262626"/>
-                </a:solidFill>
-                <a:latin typeface="Apple SD Gothic Neo"/>
-                <a:ea typeface="Apple SD Gothic Neo"/>
-              </a:rPr>
-              <a:t>· 개정 전 수치(예: 종전 DFM+XGBoost 0.765)는</a:t>
-            </a:r>
-          </a:p>
-          <a:p>
-            <a:pPr algn="l">
-              <a:spcAft>
-                <a:spcPts val="300"/>
-              </a:spcAft>
-            </a:pPr>
-            <a:r>
-              <a:rPr sz="1000" b="0">
-                <a:solidFill>
-                  <a:srgbClr val="262626"/>
-                </a:solidFill>
-                <a:latin typeface="Apple SD Gothic Neo"/>
-                <a:ea typeface="Apple SD Gothic Neo"/>
-              </a:rPr>
-              <a:t>  단위 정합성 문제로 비교 불가 — 표에서 제외</a:t>
-            </a:r>
-          </a:p>
-          <a:p>
-            <a:pPr algn="l">
-              <a:spcAft>
-                <a:spcPts val="300"/>
-              </a:spcAft>
-            </a:pPr>
-            <a:r>
-              <a:rPr sz="500" b="0">
-                <a:solidFill>
-                  <a:srgbClr val="262626"/>
-                </a:solidFill>
-                <a:latin typeface="Apple SD Gothic Neo"/>
-                <a:ea typeface="Apple SD Gothic Neo"/>
-              </a:rPr>
-              <a:t/>
-            </a:r>
-          </a:p>
-          <a:p>
-            <a:pPr algn="l">
-              <a:spcAft>
-                <a:spcPts val="300"/>
-              </a:spcAft>
-            </a:pPr>
-            <a:r>
-              <a:rPr sz="1100" b="1">
-                <a:solidFill>
-                  <a:srgbClr val="008A3E"/>
-                </a:solidFill>
-                <a:latin typeface="Apple SD Gothic Neo"/>
-                <a:ea typeface="Apple SD Gothic Neo"/>
-              </a:rPr>
-              <a:t>관찰 1</a:t>
-            </a:r>
-          </a:p>
-          <a:p>
-            <a:pPr algn="l">
-              <a:spcAft>
-                <a:spcPts val="300"/>
-              </a:spcAft>
-            </a:pPr>
-            <a:r>
-              <a:rPr sz="1000" b="0">
-                <a:solidFill>
-                  <a:srgbClr val="262626"/>
-                </a:solidFill>
-                <a:latin typeface="Apple SD Gothic Neo"/>
-                <a:ea typeface="Apple SD Gothic Neo"/>
-              </a:rPr>
-              <a:t>개정 후 XGBoost 단독(0.750)이 사실상 기준선.</a:t>
-            </a:r>
-          </a:p>
-          <a:p>
-            <a:pPr algn="l">
-              <a:spcAft>
-                <a:spcPts val="300"/>
-              </a:spcAft>
-            </a:pPr>
-            <a:r>
-              <a:rPr sz="1000" b="0">
-                <a:solidFill>
-                  <a:srgbClr val="262626"/>
-                </a:solidFill>
-                <a:latin typeface="Apple SD Gothic Neo"/>
-                <a:ea typeface="Apple SD Gothic Neo"/>
-              </a:rPr>
-              <a:t>DFM 결합(0.787)을 포함한 대부분의 결합이 열세</a:t>
-            </a:r>
-          </a:p>
-          <a:p>
-            <a:pPr algn="l">
-              <a:spcAft>
-                <a:spcPts val="300"/>
-              </a:spcAft>
-            </a:pPr>
-            <a:r>
-              <a:rPr sz="500" b="0">
-                <a:solidFill>
-                  <a:srgbClr val="262626"/>
-                </a:solidFill>
-                <a:latin typeface="Apple SD Gothic Neo"/>
-                <a:ea typeface="Apple SD Gothic Neo"/>
-              </a:rPr>
-              <a:t/>
-            </a:r>
-          </a:p>
-          <a:p>
-            <a:pPr algn="l">
-              <a:spcAft>
-                <a:spcPts val="300"/>
-              </a:spcAft>
-            </a:pPr>
-            <a:r>
-              <a:rPr sz="1100" b="1">
-                <a:solidFill>
-                  <a:srgbClr val="008A3E"/>
-                </a:solidFill>
-                <a:latin typeface="Apple SD Gothic Neo"/>
-                <a:ea typeface="Apple SD Gothic Neo"/>
-              </a:rPr>
-              <a:t>관찰 2</a:t>
-            </a:r>
-          </a:p>
-          <a:p>
-            <a:pPr algn="l">
-              <a:spcAft>
-                <a:spcPts val="300"/>
-              </a:spcAft>
-            </a:pPr>
-            <a:r>
-              <a:rPr sz="1000" b="0">
-                <a:solidFill>
-                  <a:srgbClr val="262626"/>
-                </a:solidFill>
-                <a:latin typeface="Apple SD Gothic Neo"/>
-                <a:ea typeface="Apple SD Gothic Neo"/>
-              </a:rPr>
-              <a:t>이를 수치상 상회하는 유일 구성(0.740) =</a:t>
-            </a:r>
-          </a:p>
-          <a:p>
-            <a:pPr algn="l">
-              <a:spcAft>
-                <a:spcPts val="300"/>
-              </a:spcAft>
-            </a:pPr>
-            <a:r>
-              <a:rPr sz="1000" b="1">
-                <a:solidFill>
-                  <a:srgbClr val="262626"/>
-                </a:solidFill>
-                <a:latin typeface="Apple SD Gothic Neo"/>
-                <a:ea typeface="Apple SD Gothic Neo"/>
-              </a:rPr>
-              <a:t>발표 19~14주 전: GBM·Chronos-2 예측의 평균,</a:t>
-            </a:r>
-          </a:p>
-          <a:p>
-            <a:pPr algn="l">
-              <a:spcAft>
-                <a:spcPts val="300"/>
-              </a:spcAft>
-            </a:pPr>
-            <a:r>
-              <a:rPr sz="1000" b="1">
-                <a:solidFill>
-                  <a:srgbClr val="262626"/>
-                </a:solidFill>
-                <a:latin typeface="Apple SD Gothic Neo"/>
-                <a:ea typeface="Apple SD Gothic Neo"/>
-              </a:rPr>
-              <a:t>발표 13~1주 전: XGBoost 단독</a:t>
-            </a:r>
-            <a:r>
-              <a:rPr sz="1000" b="0">
-                <a:solidFill>
-                  <a:srgbClr val="262626"/>
-                </a:solidFill>
-                <a:latin typeface="Apple SD Gothic Neo"/>
-                <a:ea typeface="Apple SD Gothic Neo"/>
-              </a:rPr>
-              <a:t> — 주차별 교대</a:t>
-            </a:r>
-          </a:p>
-          <a:p>
-            <a:pPr algn="l">
-              <a:spcAft>
-                <a:spcPts val="300"/>
-              </a:spcAft>
-            </a:pPr>
-            <a:r>
-              <a:rPr sz="500" b="0">
-                <a:solidFill>
-                  <a:srgbClr val="262626"/>
-                </a:solidFill>
-                <a:latin typeface="Apple SD Gothic Neo"/>
-                <a:ea typeface="Apple SD Gothic Neo"/>
-              </a:rPr>
-              <a:t/>
-            </a:r>
-          </a:p>
-          <a:p>
-            <a:pPr algn="l">
-              <a:spcAft>
-                <a:spcPts val="300"/>
-              </a:spcAft>
-            </a:pPr>
-            <a:r>
-              <a:rPr sz="1100" b="1">
-                <a:solidFill>
-                  <a:srgbClr val="008A3E"/>
-                </a:solidFill>
-                <a:latin typeface="Apple SD Gothic Neo"/>
-                <a:ea typeface="Apple SD Gothic Neo"/>
-              </a:rPr>
-              <a:t>관찰 3</a:t>
-            </a:r>
-          </a:p>
-          <a:p>
-            <a:pPr algn="l">
-              <a:spcAft>
-                <a:spcPts val="300"/>
-              </a:spcAft>
-            </a:pPr>
-            <a:r>
-              <a:rPr sz="1000" b="0">
-                <a:solidFill>
-                  <a:srgbClr val="262626"/>
-                </a:solidFill>
-                <a:latin typeface="Apple SD Gothic Neo"/>
-                <a:ea typeface="Apple SD Gothic Neo"/>
-              </a:rPr>
-              <a:t>딥러닝 단독 최고는 Chronos-2+일별신호(0.808)</a:t>
-            </a:r>
-          </a:p>
-          <a:p>
-            <a:pPr algn="l">
-              <a:spcAft>
-                <a:spcPts val="300"/>
-              </a:spcAft>
-            </a:pPr>
-            <a:r>
-              <a:rPr sz="1000" b="0">
-                <a:solidFill>
-                  <a:srgbClr val="262626"/>
-                </a:solidFill>
-                <a:latin typeface="Apple SD Gothic Neo"/>
-                <a:ea typeface="Apple SD Gothic Neo"/>
-              </a:rPr>
-              <a:t>— 기준선 미달이나 특정 조건(3장)에서 우위</a:t>
-            </a:r>
-          </a:p>
-        </p:txBody>
-      </p:sp>
       <p:sp>
         <p:nvSpPr>
           <p:cNvPr id="6" name="Rectangle 5"/>
@@ -4657,19 +4416,17 @@
         </p:nvSpPr>
         <p:spPr>
           <a:xfrm>
-            <a:off x="502920" y="6309360"/>
-            <a:ext cx="11183112" cy="365760"/>
+            <a:off x="7726679" y="1600200"/>
+            <a:ext cx="41148" cy="1207008"/>
           </a:xfrm>
           <a:prstGeom prst="rect">
             <a:avLst/>
           </a:prstGeom>
           <a:solidFill>
-            <a:srgbClr val="F3F4F5"/>
+            <a:srgbClr val="243447"/>
           </a:solidFill>
-          <a:ln w="9525">
-            <a:solidFill>
-              <a:srgbClr val="C9C9C9"/>
-            </a:solidFill>
+          <a:ln>
+            <a:noFill/>
           </a:ln>
           <a:effectLst/>
         </p:spPr>
@@ -4703,8 +4460,8 @@
         </p:nvSpPr>
         <p:spPr>
           <a:xfrm>
-            <a:off x="685800" y="6364224"/>
-            <a:ext cx="10881360" cy="256032"/>
+            <a:off x="7891271" y="1600200"/>
+            <a:ext cx="3794760" cy="1280160"/>
           </a:xfrm>
           <a:prstGeom prst="rect">
             <a:avLst/>
@@ -4712,7 +4469,7 @@
           <a:noFill/>
         </p:spPr>
         <p:txBody>
-          <a:bodyPr wrap="square" anchor="ctr" lIns="45720" rIns="45720" tIns="18288" bIns="18288">
+          <a:bodyPr wrap="square" anchor="t" lIns="18288" rIns="18288" tIns="9144" bIns="9144">
             <a:spAutoFit/>
           </a:bodyPr>
           <a:lstStyle/>
@@ -4723,14 +4480,398 @@
               </a:spcAft>
             </a:pPr>
             <a:r>
-              <a:rPr sz="880" b="0">
+              <a:rPr sz="1100" b="1">
+                <a:solidFill>
+                  <a:srgbClr val="243447"/>
+                </a:solidFill>
+                <a:latin typeface="Apple SD Gothic Neo"/>
+                <a:ea typeface="Apple SD Gothic Neo"/>
+              </a:rPr>
+              <a:t>개정 전 수치는 표에서 제외했습니다</a:t>
+            </a:r>
+          </a:p>
+          <a:p>
+            <a:pPr algn="l">
+              <a:spcAft>
+                <a:spcPts val="200"/>
+              </a:spcAft>
+            </a:pPr>
+            <a:r>
+              <a:rPr sz="969" b="0">
+                <a:solidFill>
+                  <a:srgbClr val="262626"/>
+                </a:solidFill>
+                <a:latin typeface="Apple SD Gothic Neo"/>
+                <a:ea typeface="Apple SD Gothic Neo"/>
+              </a:rPr>
+              <a:t>종전 최고로 보고되던 DFM+XGBoost 0.765는 예측</a:t>
+            </a:r>
+          </a:p>
+          <a:p>
+            <a:pPr algn="l">
+              <a:spcAft>
+                <a:spcPts val="200"/>
+              </a:spcAft>
+            </a:pPr>
+            <a:r>
+              <a:rPr sz="969" b="0">
+                <a:solidFill>
+                  <a:srgbClr val="262626"/>
+                </a:solidFill>
+                <a:latin typeface="Apple SD Gothic Neo"/>
+                <a:ea typeface="Apple SD Gothic Neo"/>
+              </a:rPr>
+              <a:t>단위 정합성 문제로 비교 불가 — 개정 후 같은 구성은</a:t>
+            </a:r>
+          </a:p>
+          <a:p>
+            <a:pPr algn="l">
+              <a:spcAft>
+                <a:spcPts val="200"/>
+              </a:spcAft>
+            </a:pPr>
+            <a:r>
+              <a:rPr sz="969" b="0">
+                <a:solidFill>
+                  <a:srgbClr val="262626"/>
+                </a:solidFill>
+                <a:latin typeface="Apple SD Gothic Neo"/>
+                <a:ea typeface="Apple SD Gothic Neo"/>
+              </a:rPr>
+              <a:t>0.787로, XGBoost 단독(0.750)보다 오히려 열세입니다.</a:t>
+            </a:r>
+          </a:p>
+        </p:txBody>
+      </p:sp>
+      <p:sp>
+        <p:nvSpPr>
+          <p:cNvPr id="8" name="Rectangle 7"/>
+          <p:cNvSpPr/>
+          <p:nvPr/>
+        </p:nvSpPr>
+        <p:spPr>
+          <a:xfrm>
+            <a:off x="7726679" y="3063240"/>
+            <a:ext cx="41148" cy="1207008"/>
+          </a:xfrm>
+          <a:prstGeom prst="rect">
+            <a:avLst/>
+          </a:prstGeom>
+          <a:solidFill>
+            <a:srgbClr val="008A3E"/>
+          </a:solidFill>
+          <a:ln>
+            <a:noFill/>
+          </a:ln>
+          <a:effectLst/>
+        </p:spPr>
+        <p:style>
+          <a:lnRef idx="1">
+            <a:schemeClr val="accent1"/>
+          </a:lnRef>
+          <a:fillRef idx="3">
+            <a:schemeClr val="accent1"/>
+          </a:fillRef>
+          <a:effectRef idx="2">
+            <a:schemeClr val="accent1"/>
+          </a:effectRef>
+          <a:fontRef idx="minor">
+            <a:schemeClr val="lt1"/>
+          </a:fontRef>
+        </p:style>
+        <p:txBody>
+          <a:bodyPr rtlCol="0" anchor="ctr"/>
+          <a:lstStyle/>
+          <a:p>
+            <a:pPr algn="ctr"/>
+          </a:p>
+        </p:txBody>
+      </p:sp>
+      <p:sp>
+        <p:nvSpPr>
+          <p:cNvPr id="9" name="TextBox 8"/>
+          <p:cNvSpPr txBox="1"/>
+          <p:nvPr/>
+        </p:nvSpPr>
+        <p:spPr>
+          <a:xfrm>
+            <a:off x="7891271" y="3063240"/>
+            <a:ext cx="3794760" cy="1280160"/>
+          </a:xfrm>
+          <a:prstGeom prst="rect">
+            <a:avLst/>
+          </a:prstGeom>
+          <a:noFill/>
+        </p:spPr>
+        <p:txBody>
+          <a:bodyPr wrap="square" anchor="t" lIns="18288" rIns="18288" tIns="9144" bIns="9144">
+            <a:spAutoFit/>
+          </a:bodyPr>
+          <a:lstStyle/>
+          <a:p>
+            <a:pPr algn="l">
+              <a:spcAft>
+                <a:spcPts val="200"/>
+              </a:spcAft>
+            </a:pPr>
+            <a:r>
+              <a:rPr sz="1100" b="1">
+                <a:solidFill>
+                  <a:srgbClr val="008A3E"/>
+                </a:solidFill>
+                <a:latin typeface="Apple SD Gothic Neo"/>
+                <a:ea typeface="Apple SD Gothic Neo"/>
+              </a:rPr>
+              <a:t>유일하게 앞선 구성 (0.740, -1.3%)</a:t>
+            </a:r>
+          </a:p>
+          <a:p>
+            <a:pPr algn="l">
+              <a:spcAft>
+                <a:spcPts val="200"/>
+              </a:spcAft>
+            </a:pPr>
+            <a:r>
+              <a:rPr sz="969" b="0">
+                <a:solidFill>
+                  <a:srgbClr val="262626"/>
+                </a:solidFill>
+                <a:latin typeface="Apple SD Gothic Neo"/>
+                <a:ea typeface="Apple SD Gothic Neo"/>
+              </a:rPr>
+              <a:t>발표 19~14주 전에는 GBM·Chronos-2 예측의 평균,</a:t>
+            </a:r>
+          </a:p>
+          <a:p>
+            <a:pPr algn="l">
+              <a:spcAft>
+                <a:spcPts val="200"/>
+              </a:spcAft>
+            </a:pPr>
+            <a:r>
+              <a:rPr sz="969" b="0">
+                <a:solidFill>
+                  <a:srgbClr val="262626"/>
+                </a:solidFill>
+                <a:latin typeface="Apple SD Gothic Neo"/>
+                <a:ea typeface="Apple SD Gothic Neo"/>
+              </a:rPr>
+              <a:t>13주 전부터는 XGBoost 단독 — 주차별 교대입니다.</a:t>
+            </a:r>
+          </a:p>
+          <a:p>
+            <a:pPr algn="l">
+              <a:spcAft>
+                <a:spcPts val="200"/>
+              </a:spcAft>
+            </a:pPr>
+            <a:r>
+              <a:rPr sz="969" b="0">
+                <a:solidFill>
+                  <a:srgbClr val="262626"/>
+                </a:solidFill>
+                <a:latin typeface="Apple SD Gothic Neo"/>
+                <a:ea typeface="Apple SD Gothic Neo"/>
+              </a:rPr>
+              <a:t>다만 이 개선폭은 통계적 유의성에 미달합니다(3장).</a:t>
+            </a:r>
+          </a:p>
+        </p:txBody>
+      </p:sp>
+      <p:sp>
+        <p:nvSpPr>
+          <p:cNvPr id="10" name="Rectangle 9"/>
+          <p:cNvSpPr/>
+          <p:nvPr/>
+        </p:nvSpPr>
+        <p:spPr>
+          <a:xfrm>
+            <a:off x="7726679" y="4526280"/>
+            <a:ext cx="41148" cy="1005840"/>
+          </a:xfrm>
+          <a:prstGeom prst="rect">
+            <a:avLst/>
+          </a:prstGeom>
+          <a:solidFill>
+            <a:srgbClr val="243447"/>
+          </a:solidFill>
+          <a:ln>
+            <a:noFill/>
+          </a:ln>
+          <a:effectLst/>
+        </p:spPr>
+        <p:style>
+          <a:lnRef idx="1">
+            <a:schemeClr val="accent1"/>
+          </a:lnRef>
+          <a:fillRef idx="3">
+            <a:schemeClr val="accent1"/>
+          </a:fillRef>
+          <a:effectRef idx="2">
+            <a:schemeClr val="accent1"/>
+          </a:effectRef>
+          <a:fontRef idx="minor">
+            <a:schemeClr val="lt1"/>
+          </a:fontRef>
+        </p:style>
+        <p:txBody>
+          <a:bodyPr rtlCol="0" anchor="ctr"/>
+          <a:lstStyle/>
+          <a:p>
+            <a:pPr algn="ctr"/>
+          </a:p>
+        </p:txBody>
+      </p:sp>
+      <p:sp>
+        <p:nvSpPr>
+          <p:cNvPr id="11" name="TextBox 10"/>
+          <p:cNvSpPr txBox="1"/>
+          <p:nvPr/>
+        </p:nvSpPr>
+        <p:spPr>
+          <a:xfrm>
+            <a:off x="7891271" y="4526280"/>
+            <a:ext cx="3794760" cy="1097280"/>
+          </a:xfrm>
+          <a:prstGeom prst="rect">
+            <a:avLst/>
+          </a:prstGeom>
+          <a:noFill/>
+        </p:spPr>
+        <p:txBody>
+          <a:bodyPr wrap="square" anchor="t" lIns="18288" rIns="18288" tIns="9144" bIns="9144">
+            <a:spAutoFit/>
+          </a:bodyPr>
+          <a:lstStyle/>
+          <a:p>
+            <a:pPr algn="l">
+              <a:spcAft>
+                <a:spcPts val="200"/>
+              </a:spcAft>
+            </a:pPr>
+            <a:r>
+              <a:rPr sz="1100" b="1">
+                <a:solidFill>
+                  <a:srgbClr val="243447"/>
+                </a:solidFill>
+                <a:latin typeface="Apple SD Gothic Neo"/>
+                <a:ea typeface="Apple SD Gothic Neo"/>
+              </a:rPr>
+              <a:t>딥러닝 단독 최고는 0.808</a:t>
+            </a:r>
+          </a:p>
+          <a:p>
+            <a:pPr algn="l">
+              <a:spcAft>
+                <a:spcPts val="200"/>
+              </a:spcAft>
+            </a:pPr>
+            <a:r>
+              <a:rPr sz="969" b="0">
+                <a:solidFill>
+                  <a:srgbClr val="262626"/>
+                </a:solidFill>
+                <a:latin typeface="Apple SD Gothic Neo"/>
+                <a:ea typeface="Apple SD Gothic Neo"/>
+              </a:rPr>
+              <a:t>Chronos-2 + 일별신호. 기준선에는 미달하지만</a:t>
+            </a:r>
+          </a:p>
+          <a:p>
+            <a:pPr algn="l">
+              <a:spcAft>
+                <a:spcPts val="200"/>
+              </a:spcAft>
+            </a:pPr>
+            <a:r>
+              <a:rPr sz="969" b="0">
+                <a:solidFill>
+                  <a:srgbClr val="262626"/>
+                </a:solidFill>
+                <a:latin typeface="Apple SD Gothic Neo"/>
+                <a:ea typeface="Apple SD Gothic Neo"/>
+              </a:rPr>
+              <a:t>특정 조건에서 일관된 우위가 있습니다(3장).</a:t>
+            </a:r>
+          </a:p>
+        </p:txBody>
+      </p:sp>
+      <p:sp>
+        <p:nvSpPr>
+          <p:cNvPr id="12" name="TextBox 11"/>
+          <p:cNvSpPr txBox="1"/>
+          <p:nvPr/>
+        </p:nvSpPr>
+        <p:spPr>
+          <a:xfrm>
+            <a:off x="548640" y="6455664"/>
+            <a:ext cx="9875520" cy="274320"/>
+          </a:xfrm>
+          <a:prstGeom prst="rect">
+            <a:avLst/>
+          </a:prstGeom>
+          <a:noFill/>
+        </p:spPr>
+        <p:txBody>
+          <a:bodyPr wrap="square" anchor="t" lIns="18288" rIns="18288" tIns="9144" bIns="9144">
+            <a:spAutoFit/>
+          </a:bodyPr>
+          <a:lstStyle/>
+          <a:p>
+            <a:pPr algn="l">
+              <a:spcAft>
+                <a:spcPts val="200"/>
+              </a:spcAft>
+            </a:pPr>
+            <a:r>
+              <a:rPr sz="800" b="0">
                 <a:solidFill>
                   <a:srgbClr val="6B6B6B"/>
                 </a:solidFill>
                 <a:latin typeface="Apple SD Gothic Neo"/>
                 <a:ea typeface="Apple SD Gothic Neo"/>
               </a:rPr>
-              <a:t>공통 검증 규약: 실시간 빈티지 · 속보치 기준 · 전망주차 w[-19,-1] 평균 RMSE · 2018Q1~2025Q4 (32개 분기) · 예측단위 개정(schema v2) 반영 · 이외 30여 개 구성(직접학습 신경망, 학습형 결합 등)은 전부 기준선 미달로 생략</a:t>
+              <a:t>주: 실시간 빈티지 · 속보치 기준 · 전망주차 w[-19,-1] 평균 RMSE · 2018Q1~2025Q4(32개 분기) · 예측단위 개정(schema v2) 반영. 낮을수록 정확. 직접학습 신경망·학습형 결합 등 30여 개 구성은 전부 기준선 미달로 생략.</a:t>
+            </a:r>
+          </a:p>
+        </p:txBody>
+      </p:sp>
+      <p:sp>
+        <p:nvSpPr>
+          <p:cNvPr id="13" name="TextBox 12"/>
+          <p:cNvSpPr txBox="1"/>
+          <p:nvPr/>
+        </p:nvSpPr>
+        <p:spPr>
+          <a:xfrm>
+            <a:off x="11292840" y="6455664"/>
+            <a:ext cx="457200" cy="274320"/>
+          </a:xfrm>
+          <a:prstGeom prst="rect">
+            <a:avLst/>
+          </a:prstGeom>
+          <a:noFill/>
+        </p:spPr>
+        <p:txBody>
+          <a:bodyPr wrap="square" anchor="t" lIns="18288" rIns="18288" tIns="9144" bIns="9144">
+            <a:spAutoFit/>
+          </a:bodyPr>
+          <a:lstStyle/>
+          <a:p>
+            <a:pPr algn="r">
+              <a:spcAft>
+                <a:spcPts val="200"/>
+              </a:spcAft>
+            </a:pPr>
+            <a:r>
+              <a:rPr sz="900" b="0">
+                <a:solidFill>
+                  <a:srgbClr val="6B6B6B"/>
+                </a:solidFill>
+                <a:latin typeface="Apple SD Gothic Neo"/>
+                <a:ea typeface="Apple SD Gothic Neo"/>
+              </a:rPr>
+              <a:t>2</a:t>
             </a:r>
           </a:p>
         </p:txBody>
@@ -4761,8 +4902,8 @@
         </p:nvSpPr>
         <p:spPr>
           <a:xfrm>
-            <a:off x="502920" y="274320"/>
-            <a:ext cx="11155680" cy="502920"/>
+            <a:off x="548640" y="292608"/>
+            <a:ext cx="10515600" cy="274320"/>
           </a:xfrm>
           <a:prstGeom prst="rect">
             <a:avLst/>
@@ -4770,7 +4911,7 @@
           <a:noFill/>
         </p:spPr>
         <p:txBody>
-          <a:bodyPr wrap="square" anchor="t" lIns="45720" rIns="45720" tIns="18288" bIns="18288">
+          <a:bodyPr wrap="square" anchor="t" lIns="18288" rIns="18288" tIns="9144" bIns="9144">
             <a:spAutoFit/>
           </a:bodyPr>
           <a:lstStyle/>
@@ -4781,43 +4922,73 @@
               </a:spcAft>
             </a:pPr>
             <a:r>
-              <a:rPr sz="1900" b="1">
-                <a:solidFill>
-                  <a:srgbClr val="008A3E"/>
-                </a:solidFill>
-                <a:latin typeface="Apple SD Gothic Neo"/>
-                <a:ea typeface="Apple SD Gothic Neo"/>
-              </a:rPr>
-              <a:t>02  </a:t>
-            </a:r>
-            <a:r>
-              <a:rPr sz="1900" b="1">
+              <a:rPr sz="1050" b="1">
+                <a:solidFill>
+                  <a:srgbClr val="6B6B6B"/>
+                </a:solidFill>
+                <a:latin typeface="Apple SD Gothic Neo"/>
+                <a:ea typeface="Apple SD Gothic Neo"/>
+              </a:rPr>
+              <a:t>2  |  시사점</a:t>
+            </a:r>
+          </a:p>
+        </p:txBody>
+      </p:sp>
+      <p:sp>
+        <p:nvSpPr>
+          <p:cNvPr id="3" name="TextBox 2"/>
+          <p:cNvSpPr txBox="1"/>
+          <p:nvPr/>
+        </p:nvSpPr>
+        <p:spPr>
+          <a:xfrm>
+            <a:off x="548640" y="548640"/>
+            <a:ext cx="11064240" cy="548640"/>
+          </a:xfrm>
+          <a:prstGeom prst="rect">
+            <a:avLst/>
+          </a:prstGeom>
+          <a:noFill/>
+        </p:spPr>
+        <p:txBody>
+          <a:bodyPr wrap="square" anchor="t" lIns="18288" rIns="18288" tIns="9144" bIns="9144">
+            <a:spAutoFit/>
+          </a:bodyPr>
+          <a:lstStyle/>
+          <a:p>
+            <a:pPr algn="l">
+              <a:spcAft>
+                <a:spcPts val="200"/>
+              </a:spcAft>
+            </a:pPr>
+            <a:r>
+              <a:rPr sz="1700" b="1">
                 <a:solidFill>
                   <a:srgbClr val="243447"/>
                 </a:solidFill>
                 <a:latin typeface="Apple SD Gothic Neo"/>
                 <a:ea typeface="Apple SD Gothic Neo"/>
               </a:rPr>
-              <a:t>시사점 — 32개 분기 표본이 가르쳐준 세 가지</a:t>
+              <a:t>32개 분기 표본이 가르쳐준 것은 세 가지입니다</a:t>
             </a:r>
           </a:p>
         </p:txBody>
       </p:sp>
       <p:cxnSp>
         <p:nvCxnSpPr>
-          <p:cNvPr id="3" name="Connector 2"/>
+          <p:cNvPr id="4" name="Connector 3"/>
           <p:cNvCxnSpPr/>
           <p:nvPr/>
         </p:nvCxnSpPr>
         <p:spPr>
           <a:xfrm>
-            <a:off x="502920" y="841248"/>
-            <a:ext cx="11183112" cy="0"/>
+            <a:off x="548640" y="1115568"/>
+            <a:ext cx="11091672" cy="0"/>
           </a:xfrm>
           <a:prstGeom prst="line">
             <a:avLst/>
           </a:prstGeom>
-          <a:ln w="20320">
+          <a:ln w="15240">
             <a:solidFill>
               <a:srgbClr val="243447"/>
             </a:solidFill>
@@ -4840,25 +5011,23 @@
       </p:cxnSp>
       <p:sp>
         <p:nvSpPr>
-          <p:cNvPr id="4" name="Rounded Rectangle 3"/>
+          <p:cNvPr id="5" name="Rectangle 4"/>
           <p:cNvSpPr/>
           <p:nvPr/>
         </p:nvSpPr>
         <p:spPr>
           <a:xfrm>
-            <a:off x="502920" y="1188720"/>
-            <a:ext cx="11183112" cy="1536192"/>
-          </a:xfrm>
-          <a:prstGeom prst="roundRect">
+            <a:off x="548640" y="1600200"/>
+            <a:ext cx="41148" cy="1234440"/>
+          </a:xfrm>
+          <a:prstGeom prst="rect">
             <a:avLst/>
           </a:prstGeom>
           <a:solidFill>
-            <a:srgbClr val="F3F4F5"/>
+            <a:srgbClr val="243447"/>
           </a:solidFill>
-          <a:ln w="9525">
-            <a:solidFill>
-              <a:srgbClr val="C9C9C9"/>
-            </a:solidFill>
+          <a:ln>
+            <a:noFill/>
           </a:ln>
           <a:effectLst/>
         </p:spPr>
@@ -4886,14 +5055,14 @@
       </p:sp>
       <p:sp>
         <p:nvSpPr>
-          <p:cNvPr id="5" name="TextBox 4"/>
+          <p:cNvPr id="6" name="TextBox 5"/>
           <p:cNvSpPr txBox="1"/>
           <p:nvPr/>
         </p:nvSpPr>
         <p:spPr>
           <a:xfrm>
-            <a:off x="731520" y="1325880"/>
-            <a:ext cx="548640" cy="457200"/>
+            <a:off x="777240" y="1600200"/>
+            <a:ext cx="10698480" cy="365760"/>
           </a:xfrm>
           <a:prstGeom prst="rect">
             <a:avLst/>
@@ -4901,7 +5070,7 @@
           <a:noFill/>
         </p:spPr>
         <p:txBody>
-          <a:bodyPr wrap="square" anchor="t" lIns="45720" rIns="45720" tIns="18288" bIns="18288">
+          <a:bodyPr wrap="square" anchor="t" lIns="18288" rIns="18288" tIns="9144" bIns="9144">
             <a:spAutoFit/>
           </a:bodyPr>
           <a:lstStyle/>
@@ -4912,28 +5081,38 @@
               </a:spcAft>
             </a:pPr>
             <a:r>
-              <a:rPr sz="1600" b="1">
-                <a:solidFill>
-                  <a:srgbClr val="008A3E"/>
-                </a:solidFill>
-                <a:latin typeface="Apple SD Gothic Neo"/>
-                <a:ea typeface="Apple SD Gothic Neo"/>
-              </a:rPr>
-              <a:t>①</a:t>
-            </a:r>
-          </a:p>
-        </p:txBody>
-      </p:sp>
-      <p:sp>
-        <p:nvSpPr>
-          <p:cNvPr id="6" name="TextBox 5"/>
+              <a:rPr sz="1300" b="1">
+                <a:solidFill>
+                  <a:srgbClr val="243447"/>
+                </a:solidFill>
+                <a:latin typeface="Apple SD Gothic Neo"/>
+                <a:ea typeface="Apple SD Gothic Neo"/>
+              </a:rPr>
+              <a:t>1.  </a:t>
+            </a:r>
+            <a:r>
+              <a:rPr sz="1300" b="1">
+                <a:solidFill>
+                  <a:srgbClr val="243447"/>
+                </a:solidFill>
+                <a:latin typeface="Apple SD Gothic Neo"/>
+                <a:ea typeface="Apple SD Gothic Neo"/>
+              </a:rPr>
+              <a:t>소표본에서는 단순한 고정 구조만 살아남았습니다</a:t>
+            </a:r>
+          </a:p>
+        </p:txBody>
+      </p:sp>
+      <p:sp>
+        <p:nvSpPr>
+          <p:cNvPr id="7" name="TextBox 6"/>
           <p:cNvSpPr txBox="1"/>
           <p:nvPr/>
         </p:nvSpPr>
         <p:spPr>
           <a:xfrm>
-            <a:off x="1325880" y="1335024"/>
-            <a:ext cx="10058400" cy="365760"/>
+            <a:off x="1051560" y="1984248"/>
+            <a:ext cx="10332720" cy="914400"/>
           </a:xfrm>
           <a:prstGeom prst="rect">
             <a:avLst/>
@@ -4941,7 +5120,7 @@
           <a:noFill/>
         </p:spPr>
         <p:txBody>
-          <a:bodyPr wrap="square" anchor="t" lIns="45720" rIns="45720" tIns="18288" bIns="18288">
+          <a:bodyPr wrap="square" anchor="t" lIns="18288" rIns="18288" tIns="9144" bIns="9144">
             <a:spAutoFit/>
           </a:bodyPr>
           <a:lstStyle/>
@@ -4952,113 +5131,71 @@
               </a:spcAft>
             </a:pPr>
             <a:r>
-              <a:rPr sz="1250" b="1">
-                <a:solidFill>
-                  <a:srgbClr val="243447"/>
-                </a:solidFill>
-                <a:latin typeface="Apple SD Gothic Neo"/>
-                <a:ea typeface="Apple SD Gothic Neo"/>
-              </a:rPr>
-              <a:t>소표본에서는 단순한 고정 구조만 살아남습니다</a:t>
-            </a:r>
-          </a:p>
-        </p:txBody>
-      </p:sp>
-      <p:sp>
-        <p:nvSpPr>
-          <p:cNvPr id="7" name="TextBox 6"/>
-          <p:cNvSpPr txBox="1"/>
-          <p:nvPr/>
-        </p:nvSpPr>
-        <p:spPr>
-          <a:xfrm>
-            <a:off x="1325880" y="1719072"/>
-            <a:ext cx="10149840" cy="914400"/>
-          </a:xfrm>
-          <a:prstGeom prst="rect">
-            <a:avLst/>
-          </a:prstGeom>
-          <a:noFill/>
-        </p:spPr>
-        <p:txBody>
-          <a:bodyPr wrap="square" anchor="t" lIns="45720" rIns="45720" tIns="18288" bIns="18288">
-            <a:spAutoFit/>
-          </a:bodyPr>
-          <a:lstStyle/>
-          <a:p>
-            <a:pPr algn="l">
-              <a:spcAft>
-                <a:spcPts val="200"/>
-              </a:spcAft>
-            </a:pPr>
-            <a:r>
-              <a:rPr sz="1000" b="0">
+              <a:rPr sz="1050" b="0">
                 <a:solidFill>
                   <a:srgbClr val="262626"/>
                 </a:solidFill>
                 <a:latin typeface="Apple SD Gothic Neo"/>
                 <a:ea typeface="Apple SD Gothic Neo"/>
               </a:rPr>
-              <a:t>데이터로부터 배우려는 개선책 — 결합 가중치 학습, 성과 기반 적응 가중, 잔차 보정 학습,</a:t>
-            </a:r>
-          </a:p>
-          <a:p>
-            <a:pPr algn="l">
-              <a:spcAft>
-                <a:spcPts val="200"/>
-              </a:spcAft>
-            </a:pPr>
-            <a:r>
-              <a:rPr sz="1000" b="0">
+              <a:t>결합 가중치 학습, 성과 기반 적응 가중, 잔차 보정 학습, 합성데이터 미세조정 — “데이터로부터 배우는”</a:t>
+            </a:r>
+          </a:p>
+          <a:p>
+            <a:pPr algn="l">
+              <a:spcAft>
+                <a:spcPts val="200"/>
+              </a:spcAft>
+            </a:pPr>
+            <a:r>
+              <a:rPr sz="1050" b="0">
                 <a:solidFill>
                   <a:srgbClr val="262626"/>
                 </a:solidFill>
                 <a:latin typeface="Apple SD Gothic Neo"/>
                 <a:ea typeface="Apple SD Gothic Neo"/>
               </a:rPr>
-              <a:t>합성데이터 미세조정 — 을 모두 동일 규약으로 검증한 결과 전부 기준선 미달.</a:t>
-            </a:r>
-          </a:p>
-          <a:p>
-            <a:pPr algn="l">
-              <a:spcAft>
-                <a:spcPts val="200"/>
-              </a:spcAft>
-            </a:pPr>
-            <a:r>
-              <a:rPr sz="1000" b="0">
+              <a:t>개선책 네 계열을 모두 동일 규약으로 검증한 결과 전부 기준선 미달이었습니다. 살아남은 것은 사람이</a:t>
+            </a:r>
+          </a:p>
+          <a:p>
+            <a:pPr algn="l">
+              <a:spcAft>
+                <a:spcPts val="200"/>
+              </a:spcAft>
+            </a:pPr>
+            <a:r>
+              <a:rPr sz="1050" b="1">
                 <a:solidFill>
                   <a:srgbClr val="262626"/>
                 </a:solidFill>
                 <a:latin typeface="Apple SD Gothic Neo"/>
                 <a:ea typeface="Apple SD Gothic Neo"/>
               </a:rPr>
-              <a:t>생존한 것은 사람이 고정한 단순 규칙(균등 평균, 주차별 교대)뿐 — 4개 계열 일관된 결론.</a:t>
-            </a:r>
-          </a:p>
-        </p:txBody>
-      </p:sp>
-      <p:sp>
-        <p:nvSpPr>
-          <p:cNvPr id="8" name="Rounded Rectangle 7"/>
+              <a:t>고정한 단순 규칙(균등 평균, 주차별 교대)뿐입니다.</a:t>
+            </a:r>
+          </a:p>
+        </p:txBody>
+      </p:sp>
+      <p:sp>
+        <p:nvSpPr>
+          <p:cNvPr id="8" name="Rectangle 7"/>
           <p:cNvSpPr/>
           <p:nvPr/>
         </p:nvSpPr>
         <p:spPr>
           <a:xfrm>
-            <a:off x="502920" y="2871216"/>
-            <a:ext cx="11183112" cy="1536192"/>
-          </a:xfrm>
-          <a:prstGeom prst="roundRect">
+            <a:off x="548640" y="3172968"/>
+            <a:ext cx="41148" cy="1234440"/>
+          </a:xfrm>
+          <a:prstGeom prst="rect">
             <a:avLst/>
           </a:prstGeom>
           <a:solidFill>
-            <a:srgbClr val="F3F4F5"/>
+            <a:srgbClr val="243447"/>
           </a:solidFill>
-          <a:ln w="9525">
-            <a:solidFill>
-              <a:srgbClr val="C9C9C9"/>
-            </a:solidFill>
+          <a:ln>
+            <a:noFill/>
           </a:ln>
           <a:effectLst/>
         </p:spPr>
@@ -5092,8 +5229,8 @@
         </p:nvSpPr>
         <p:spPr>
           <a:xfrm>
-            <a:off x="731520" y="3008376"/>
-            <a:ext cx="548640" cy="457200"/>
+            <a:off x="777240" y="3172968"/>
+            <a:ext cx="10698480" cy="365760"/>
           </a:xfrm>
           <a:prstGeom prst="rect">
             <a:avLst/>
@@ -5101,7 +5238,7 @@
           <a:noFill/>
         </p:spPr>
         <p:txBody>
-          <a:bodyPr wrap="square" anchor="t" lIns="45720" rIns="45720" tIns="18288" bIns="18288">
+          <a:bodyPr wrap="square" anchor="t" lIns="18288" rIns="18288" tIns="9144" bIns="9144">
             <a:spAutoFit/>
           </a:bodyPr>
           <a:lstStyle/>
@@ -5112,14 +5249,24 @@
               </a:spcAft>
             </a:pPr>
             <a:r>
-              <a:rPr sz="1600" b="1">
-                <a:solidFill>
-                  <a:srgbClr val="008A3E"/>
-                </a:solidFill>
-                <a:latin typeface="Apple SD Gothic Neo"/>
-                <a:ea typeface="Apple SD Gothic Neo"/>
-              </a:rPr>
-              <a:t>②</a:t>
+              <a:rPr sz="1300" b="1">
+                <a:solidFill>
+                  <a:srgbClr val="243447"/>
+                </a:solidFill>
+                <a:latin typeface="Apple SD Gothic Neo"/>
+                <a:ea typeface="Apple SD Gothic Neo"/>
+              </a:rPr>
+              <a:t>2.  </a:t>
+            </a:r>
+            <a:r>
+              <a:rPr sz="1300" b="1">
+                <a:solidFill>
+                  <a:srgbClr val="243447"/>
+                </a:solidFill>
+                <a:latin typeface="Apple SD Gothic Neo"/>
+                <a:ea typeface="Apple SD Gothic Neo"/>
+              </a:rPr>
+              <a:t>이 표본에서는 어떤 우월성도 통계적으로 입증되지 않습니다</a:t>
             </a:r>
           </a:p>
         </p:txBody>
@@ -5132,8 +5279,8 @@
         </p:nvSpPr>
         <p:spPr>
           <a:xfrm>
-            <a:off x="1325880" y="3017520"/>
-            <a:ext cx="10058400" cy="365760"/>
+            <a:off x="1051560" y="3557015"/>
+            <a:ext cx="10332720" cy="914400"/>
           </a:xfrm>
           <a:prstGeom prst="rect">
             <a:avLst/>
@@ -5141,7 +5288,7 @@
           <a:noFill/>
         </p:spPr>
         <p:txBody>
-          <a:bodyPr wrap="square" anchor="t" lIns="45720" rIns="45720" tIns="18288" bIns="18288">
+          <a:bodyPr wrap="square" anchor="t" lIns="18288" rIns="18288" tIns="9144" bIns="9144">
             <a:spAutoFit/>
           </a:bodyPr>
           <a:lstStyle/>
@@ -5152,113 +5299,71 @@
               </a:spcAft>
             </a:pPr>
             <a:r>
-              <a:rPr sz="1250" b="1">
-                <a:solidFill>
-                  <a:srgbClr val="243447"/>
-                </a:solidFill>
-                <a:latin typeface="Apple SD Gothic Neo"/>
-                <a:ea typeface="Apple SD Gothic Neo"/>
-              </a:rPr>
-              <a:t>이 표본에서는 어떤 우월성도 통계적으로 입증되지 않습니다</a:t>
-            </a:r>
-          </a:p>
-        </p:txBody>
-      </p:sp>
-      <p:sp>
-        <p:nvSpPr>
-          <p:cNvPr id="11" name="TextBox 10"/>
-          <p:cNvSpPr txBox="1"/>
-          <p:nvPr/>
-        </p:nvSpPr>
-        <p:spPr>
-          <a:xfrm>
-            <a:off x="1325880" y="3401568"/>
-            <a:ext cx="10149840" cy="914400"/>
-          </a:xfrm>
-          <a:prstGeom prst="rect">
-            <a:avLst/>
-          </a:prstGeom>
-          <a:noFill/>
-        </p:spPr>
-        <p:txBody>
-          <a:bodyPr wrap="square" anchor="t" lIns="45720" rIns="45720" tIns="18288" bIns="18288">
-            <a:spAutoFit/>
-          </a:bodyPr>
-          <a:lstStyle/>
-          <a:p>
-            <a:pPr algn="l">
-              <a:spcAft>
-                <a:spcPts val="200"/>
-              </a:spcAft>
-            </a:pPr>
-            <a:r>
-              <a:rPr sz="1000" b="0">
+              <a:rPr sz="1050" b="0">
                 <a:solidFill>
                   <a:srgbClr val="262626"/>
                 </a:solidFill>
                 <a:latin typeface="Apple SD Gothic Neo"/>
                 <a:ea typeface="Apple SD Gothic Neo"/>
               </a:rPr>
-              <a:t>당사 검정력 분석: 32개 분기에서는 6% 개선도 DM p=0.088. 한은 측 MCS 검정에서도</a:t>
-            </a:r>
-          </a:p>
-          <a:p>
-            <a:pPr algn="l">
-              <a:spcAft>
-                <a:spcPts val="200"/>
-              </a:spcAft>
-            </a:pPr>
-            <a:r>
-              <a:rPr sz="1000" b="0">
+              <a:t>당사 검정력 분석으로는 32개 분기에서 6% 개선도 DM p=0.088에 그칩니다. 귀 기관의 MCS 검정에서도</a:t>
+            </a:r>
+          </a:p>
+          <a:p>
+            <a:pPr algn="l">
+              <a:spcAft>
+                <a:spcPts val="200"/>
+              </a:spcAft>
+            </a:pPr>
+            <a:r>
+              <a:rPr sz="1050" b="0">
                 <a:solidFill>
                   <a:srgbClr val="262626"/>
                 </a:solidFill>
                 <a:latin typeface="Apple SD Gothic Neo"/>
                 <a:ea typeface="Apple SD Gothic Neo"/>
               </a:rPr>
-              <a:t>비교 대상 12개 모형 전원이 5% Model Confidence Set에 잔류 — 동일한 결론.</a:t>
-            </a:r>
-          </a:p>
-          <a:p>
-            <a:pPr algn="l">
-              <a:spcAft>
-                <a:spcPts val="200"/>
-              </a:spcAft>
-            </a:pPr>
-            <a:r>
-              <a:rPr sz="1000" b="0">
+              <a:t>비교 대상 12개 모형 전원이 5% Model Confidence Set에 잔류했습니다 — 양측 분석이 같은 결론입니다.</a:t>
+            </a:r>
+          </a:p>
+          <a:p>
+            <a:pPr algn="l">
+              <a:spcAft>
+                <a:spcPts val="200"/>
+              </a:spcAft>
+            </a:pPr>
+            <a:r>
+              <a:rPr sz="1050" b="1">
                 <a:solidFill>
                   <a:srgbClr val="262626"/>
                 </a:solidFill>
                 <a:latin typeface="Apple SD Gothic Neo"/>
                 <a:ea typeface="Apple SD Gothic Neo"/>
               </a:rPr>
-              <a:t>따라서 점 예측 정확도 '순위 경쟁'은 이 표본에서 판정 불가능한 게임입니다.</a:t>
-            </a:r>
-          </a:p>
-        </p:txBody>
-      </p:sp>
-      <p:sp>
-        <p:nvSpPr>
-          <p:cNvPr id="12" name="Rounded Rectangle 11"/>
+              <a:t>점 예측 정확도의 “순위 경쟁”은 이 표본에서 판정이 불가능한 게임입니다.</a:t>
+            </a:r>
+          </a:p>
+        </p:txBody>
+      </p:sp>
+      <p:sp>
+        <p:nvSpPr>
+          <p:cNvPr id="11" name="Rectangle 10"/>
           <p:cNvSpPr/>
           <p:nvPr/>
         </p:nvSpPr>
         <p:spPr>
           <a:xfrm>
-            <a:off x="502920" y="4553712"/>
-            <a:ext cx="11183112" cy="1536192"/>
-          </a:xfrm>
-          <a:prstGeom prst="roundRect">
+            <a:off x="548640" y="4745736"/>
+            <a:ext cx="41148" cy="1234440"/>
+          </a:xfrm>
+          <a:prstGeom prst="rect">
             <a:avLst/>
           </a:prstGeom>
           <a:solidFill>
-            <a:srgbClr val="F3F4F5"/>
+            <a:srgbClr val="008A3E"/>
           </a:solidFill>
-          <a:ln w="9525">
-            <a:solidFill>
-              <a:srgbClr val="C9C9C9"/>
-            </a:solidFill>
+          <a:ln>
+            <a:noFill/>
           </a:ln>
           <a:effectLst/>
         </p:spPr>
@@ -5286,14 +5391,64 @@
       </p:sp>
       <p:sp>
         <p:nvSpPr>
+          <p:cNvPr id="12" name="TextBox 11"/>
+          <p:cNvSpPr txBox="1"/>
+          <p:nvPr/>
+        </p:nvSpPr>
+        <p:spPr>
+          <a:xfrm>
+            <a:off x="777240" y="4745736"/>
+            <a:ext cx="10698480" cy="365760"/>
+          </a:xfrm>
+          <a:prstGeom prst="rect">
+            <a:avLst/>
+          </a:prstGeom>
+          <a:noFill/>
+        </p:spPr>
+        <p:txBody>
+          <a:bodyPr wrap="square" anchor="t" lIns="18288" rIns="18288" tIns="9144" bIns="9144">
+            <a:spAutoFit/>
+          </a:bodyPr>
+          <a:lstStyle/>
+          <a:p>
+            <a:pPr algn="l">
+              <a:spcAft>
+                <a:spcPts val="200"/>
+              </a:spcAft>
+            </a:pPr>
+            <a:r>
+              <a:rPr sz="1300" b="1">
+                <a:solidFill>
+                  <a:srgbClr val="008A3E"/>
+                </a:solidFill>
+                <a:latin typeface="Apple SD Gothic Neo"/>
+                <a:ea typeface="Apple SD Gothic Neo"/>
+              </a:rPr>
+              <a:t>3.  </a:t>
+            </a:r>
+            <a:r>
+              <a:rPr sz="1300" b="1">
+                <a:solidFill>
+                  <a:srgbClr val="008A3E"/>
+                </a:solidFill>
+                <a:latin typeface="Apple SD Gothic Neo"/>
+                <a:ea typeface="Apple SD Gothic Neo"/>
+              </a:rPr>
+              <a:t>질문을 “누가 이기나”에서 “언제 기여하나”로 바꾸면 답이 있습니다</a:t>
+            </a:r>
+          </a:p>
+        </p:txBody>
+      </p:sp>
+      <p:sp>
+        <p:nvSpPr>
           <p:cNvPr id="13" name="TextBox 12"/>
           <p:cNvSpPr txBox="1"/>
           <p:nvPr/>
         </p:nvSpPr>
         <p:spPr>
           <a:xfrm>
-            <a:off x="731520" y="4690872"/>
-            <a:ext cx="548640" cy="457200"/>
+            <a:off x="1051560" y="5129783"/>
+            <a:ext cx="10332720" cy="914400"/>
           </a:xfrm>
           <a:prstGeom prst="rect">
             <a:avLst/>
@@ -5301,7 +5456,7 @@
           <a:noFill/>
         </p:spPr>
         <p:txBody>
-          <a:bodyPr wrap="square" anchor="t" lIns="45720" rIns="45720" tIns="18288" bIns="18288">
+          <a:bodyPr wrap="square" anchor="t" lIns="18288" rIns="18288" tIns="9144" bIns="9144">
             <a:spAutoFit/>
           </a:bodyPr>
           <a:lstStyle/>
@@ -5312,14 +5467,31 @@
               </a:spcAft>
             </a:pPr>
             <a:r>
-              <a:rPr sz="1600" b="1">
-                <a:solidFill>
-                  <a:srgbClr val="008A3E"/>
-                </a:solidFill>
-                <a:latin typeface="Apple SD Gothic Neo"/>
-                <a:ea typeface="Apple SD Gothic Neo"/>
-              </a:rPr>
-              <a:t>③</a:t>
+              <a:rPr sz="1050" b="0">
+                <a:solidFill>
+                  <a:srgbClr val="262626"/>
+                </a:solidFill>
+                <a:latin typeface="Apple SD Gothic Neo"/>
+                <a:ea typeface="Apple SD Gothic Neo"/>
+              </a:rPr>
+              <a:t>모형 간 우열 대신 조건별 기여를 보면 — 정보가 얇은 조기 전망주차와 경기 반등기에서 사전학습</a:t>
+            </a:r>
+          </a:p>
+          <a:p>
+            <a:pPr algn="l">
+              <a:spcAft>
+                <a:spcPts val="200"/>
+              </a:spcAft>
+            </a:pPr>
+            <a:r>
+              <a:rPr sz="1050" b="0">
+                <a:solidFill>
+                  <a:srgbClr val="262626"/>
+                </a:solidFill>
+                <a:latin typeface="Apple SD Gothic Neo"/>
+                <a:ea typeface="Apple SD Gothic Neo"/>
+              </a:rPr>
+              <a:t>모델의 기여가 일관되게 관찰됩니다. 이 조건부 발견이 공동 연구 제안(6장)의 핵심 재료입니다.</a:t>
             </a:r>
           </a:p>
         </p:txBody>
@@ -5332,8 +5504,8 @@
         </p:nvSpPr>
         <p:spPr>
           <a:xfrm>
-            <a:off x="1325880" y="4700016"/>
-            <a:ext cx="10058400" cy="365760"/>
+            <a:off x="548640" y="6455664"/>
+            <a:ext cx="9875520" cy="274320"/>
           </a:xfrm>
           <a:prstGeom prst="rect">
             <a:avLst/>
@@ -5341,7 +5513,7 @@
           <a:noFill/>
         </p:spPr>
         <p:txBody>
-          <a:bodyPr wrap="square" anchor="t" lIns="45720" rIns="45720" tIns="18288" bIns="18288">
+          <a:bodyPr wrap="square" anchor="t" lIns="18288" rIns="18288" tIns="9144" bIns="9144">
             <a:spAutoFit/>
           </a:bodyPr>
           <a:lstStyle/>
@@ -5352,14 +5524,14 @@
               </a:spcAft>
             </a:pPr>
             <a:r>
-              <a:rPr sz="1250" b="1">
-                <a:solidFill>
-                  <a:srgbClr val="243447"/>
-                </a:solidFill>
-                <a:latin typeface="Apple SD Gothic Neo"/>
-                <a:ea typeface="Apple SD Gothic Neo"/>
-              </a:rPr>
-              <a:t>정확도 경쟁 대신 '조건부 가치'로 질문을 바꾸면 답이 있습니다</a:t>
+              <a:rPr sz="800" b="0">
+                <a:solidFill>
+                  <a:srgbClr val="6B6B6B"/>
+                </a:solidFill>
+                <a:latin typeface="Apple SD Gothic Neo"/>
+                <a:ea typeface="Apple SD Gothic Neo"/>
+              </a:rPr>
+              <a:t>주: 실시간 빈티지 · 속보치 기준 · 전망주차 w[-19,-1] 평균 RMSE · 2018Q1~2025Q4(32개 분기) · 예측단위 개정(schema v2) 반영. 낮을수록 정확.</a:t>
             </a:r>
           </a:p>
         </p:txBody>
@@ -5372,8 +5544,8 @@
         </p:nvSpPr>
         <p:spPr>
           <a:xfrm>
-            <a:off x="1325880" y="5084064"/>
-            <a:ext cx="10149840" cy="914400"/>
+            <a:off x="11292840" y="6455664"/>
+            <a:ext cx="457200" cy="274320"/>
           </a:xfrm>
           <a:prstGeom prst="rect">
             <a:avLst/>
@@ -5381,145 +5553,25 @@
           <a:noFill/>
         </p:spPr>
         <p:txBody>
-          <a:bodyPr wrap="square" anchor="t" lIns="45720" rIns="45720" tIns="18288" bIns="18288">
+          <a:bodyPr wrap="square" anchor="t" lIns="18288" rIns="18288" tIns="9144" bIns="9144">
             <a:spAutoFit/>
           </a:bodyPr>
           <a:lstStyle/>
           <a:p>
-            <a:pPr algn="l">
-              <a:spcAft>
-                <a:spcPts val="200"/>
-              </a:spcAft>
-            </a:pPr>
-            <a:r>
-              <a:rPr sz="1000" b="0">
-                <a:solidFill>
-                  <a:srgbClr val="262626"/>
-                </a:solidFill>
-                <a:latin typeface="Apple SD Gothic Neo"/>
-                <a:ea typeface="Apple SD Gothic Neo"/>
-              </a:rPr>
-              <a:t>"어느 모델이 이기나"가 아니라 "어떤 조건에서 무엇이 기여하나"로 바꾸면 —</a:t>
-            </a:r>
-          </a:p>
-          <a:p>
-            <a:pPr algn="l">
-              <a:spcAft>
-                <a:spcPts val="200"/>
-              </a:spcAft>
-            </a:pPr>
-            <a:r>
-              <a:rPr sz="1000" b="0">
-                <a:solidFill>
-                  <a:srgbClr val="262626"/>
-                </a:solidFill>
-                <a:latin typeface="Apple SD Gothic Neo"/>
-                <a:ea typeface="Apple SD Gothic Neo"/>
-              </a:rPr>
-              <a:t>정보 빈곤 구간(발표 19~14주 전, 경기 반등기)에서 사전학습 모델의 기여가 일관되게 관찰됩니다.</a:t>
-            </a:r>
-          </a:p>
-          <a:p>
-            <a:pPr algn="l">
-              <a:spcAft>
-                <a:spcPts val="200"/>
-              </a:spcAft>
-            </a:pPr>
-            <a:r>
-              <a:rPr sz="1000" b="0">
-                <a:solidFill>
-                  <a:srgbClr val="262626"/>
-                </a:solidFill>
-                <a:latin typeface="Apple SD Gothic Neo"/>
-                <a:ea typeface="Apple SD Gothic Neo"/>
-              </a:rPr>
-              <a:t>이 조건부 발견이 공동 연구(6장)의 핵심 재료입니다.</a:t>
-            </a:r>
-          </a:p>
-        </p:txBody>
-      </p:sp>
-      <p:sp>
-        <p:nvSpPr>
-          <p:cNvPr id="16" name="Rectangle 15"/>
-          <p:cNvSpPr/>
-          <p:nvPr/>
-        </p:nvSpPr>
-        <p:spPr>
-          <a:xfrm>
-            <a:off x="502920" y="6309360"/>
-            <a:ext cx="11183112" cy="365760"/>
-          </a:xfrm>
-          <a:prstGeom prst="rect">
-            <a:avLst/>
-          </a:prstGeom>
-          <a:solidFill>
-            <a:srgbClr val="F3F4F5"/>
-          </a:solidFill>
-          <a:ln w="9525">
-            <a:solidFill>
-              <a:srgbClr val="C9C9C9"/>
-            </a:solidFill>
-          </a:ln>
-          <a:effectLst/>
-        </p:spPr>
-        <p:style>
-          <a:lnRef idx="1">
-            <a:schemeClr val="accent1"/>
-          </a:lnRef>
-          <a:fillRef idx="3">
-            <a:schemeClr val="accent1"/>
-          </a:fillRef>
-          <a:effectRef idx="2">
-            <a:schemeClr val="accent1"/>
-          </a:effectRef>
-          <a:fontRef idx="minor">
-            <a:schemeClr val="lt1"/>
-          </a:fontRef>
-        </p:style>
-        <p:txBody>
-          <a:bodyPr rtlCol="0" anchor="ctr"/>
-          <a:lstStyle/>
-          <a:p>
-            <a:pPr algn="ctr"/>
-          </a:p>
-        </p:txBody>
-      </p:sp>
-      <p:sp>
-        <p:nvSpPr>
-          <p:cNvPr id="17" name="TextBox 16"/>
-          <p:cNvSpPr txBox="1"/>
-          <p:nvPr/>
-        </p:nvSpPr>
-        <p:spPr>
-          <a:xfrm>
-            <a:off x="685800" y="6364224"/>
-            <a:ext cx="10881360" cy="256032"/>
-          </a:xfrm>
-          <a:prstGeom prst="rect">
-            <a:avLst/>
-          </a:prstGeom>
-          <a:noFill/>
-        </p:spPr>
-        <p:txBody>
-          <a:bodyPr wrap="square" anchor="ctr" lIns="45720" rIns="45720" tIns="18288" bIns="18288">
-            <a:spAutoFit/>
-          </a:bodyPr>
-          <a:lstStyle/>
-          <a:p>
-            <a:pPr algn="l">
-              <a:spcAft>
-                <a:spcPts val="200"/>
-              </a:spcAft>
-            </a:pPr>
-            <a:r>
-              <a:rPr sz="880" b="0">
+            <a:pPr algn="r">
+              <a:spcAft>
+                <a:spcPts val="200"/>
+              </a:spcAft>
+            </a:pPr>
+            <a:r>
+              <a:rPr sz="900" b="0">
                 <a:solidFill>
                   <a:srgbClr val="6B6B6B"/>
                 </a:solidFill>
                 <a:latin typeface="Apple SD Gothic Neo"/>
                 <a:ea typeface="Apple SD Gothic Neo"/>
               </a:rPr>
-              <a:t>공통 검증 규약: 실시간 빈티지 · 속보치 기준 · 전망주차 w[-19,-1] 평균 RMSE · 2018Q1~2025Q4 (32개 분기) · 예측단위 개정(schema v2) 반영</a:t>
+              <a:t>3</a:t>
             </a:r>
           </a:p>
         </p:txBody>
@@ -5550,8 +5602,8 @@
         </p:nvSpPr>
         <p:spPr>
           <a:xfrm>
-            <a:off x="502920" y="274320"/>
-            <a:ext cx="11155680" cy="502920"/>
+            <a:off x="548640" y="292608"/>
+            <a:ext cx="10515600" cy="274320"/>
           </a:xfrm>
           <a:prstGeom prst="rect">
             <a:avLst/>
@@ -5559,7 +5611,7 @@
           <a:noFill/>
         </p:spPr>
         <p:txBody>
-          <a:bodyPr wrap="square" anchor="t" lIns="45720" rIns="45720" tIns="18288" bIns="18288">
+          <a:bodyPr wrap="square" anchor="t" lIns="18288" rIns="18288" tIns="9144" bIns="9144">
             <a:spAutoFit/>
           </a:bodyPr>
           <a:lstStyle/>
@@ -5570,43 +5622,73 @@
               </a:spcAft>
             </a:pPr>
             <a:r>
-              <a:rPr sz="1900" b="1">
-                <a:solidFill>
-                  <a:srgbClr val="008A3E"/>
-                </a:solidFill>
-                <a:latin typeface="Apple SD Gothic Neo"/>
-                <a:ea typeface="Apple SD Gothic Neo"/>
-              </a:rPr>
-              <a:t>03  </a:t>
-            </a:r>
-            <a:r>
-              <a:rPr sz="1900" b="1">
+              <a:rPr sz="1050" b="1">
+                <a:solidFill>
+                  <a:srgbClr val="6B6B6B"/>
+                </a:solidFill>
+                <a:latin typeface="Apple SD Gothic Neo"/>
+                <a:ea typeface="Apple SD Gothic Neo"/>
+              </a:rPr>
+              <a:t>3  |  전망시계 진단</a:t>
+            </a:r>
+          </a:p>
+        </p:txBody>
+      </p:sp>
+      <p:sp>
+        <p:nvSpPr>
+          <p:cNvPr id="3" name="TextBox 2"/>
+          <p:cNvSpPr txBox="1"/>
+          <p:nvPr/>
+        </p:nvSpPr>
+        <p:spPr>
+          <a:xfrm>
+            <a:off x="548640" y="548640"/>
+            <a:ext cx="11064240" cy="548640"/>
+          </a:xfrm>
+          <a:prstGeom prst="rect">
+            <a:avLst/>
+          </a:prstGeom>
+          <a:noFill/>
+        </p:spPr>
+        <p:txBody>
+          <a:bodyPr wrap="square" anchor="t" lIns="18288" rIns="18288" tIns="9144" bIns="9144">
+            <a:spAutoFit/>
+          </a:bodyPr>
+          <a:lstStyle/>
+          <a:p>
+            <a:pPr algn="l">
+              <a:spcAft>
+                <a:spcPts val="200"/>
+              </a:spcAft>
+            </a:pPr>
+            <a:r>
+              <a:rPr sz="1700" b="1">
                 <a:solidFill>
                   <a:srgbClr val="243447"/>
                 </a:solidFill>
                 <a:latin typeface="Apple SD Gothic Neo"/>
                 <a:ea typeface="Apple SD Gothic Neo"/>
               </a:rPr>
-              <a:t>전망시계 진단 — 사전학습 모델이 기여하는 조건</a:t>
+              <a:t>정보가 얇은 조기 구간에서는 XGBoost의 우위가 사라집니다</a:t>
             </a:r>
           </a:p>
         </p:txBody>
       </p:sp>
       <p:cxnSp>
         <p:nvCxnSpPr>
-          <p:cNvPr id="3" name="Connector 2"/>
+          <p:cNvPr id="4" name="Connector 3"/>
           <p:cNvCxnSpPr/>
           <p:nvPr/>
         </p:nvCxnSpPr>
         <p:spPr>
           <a:xfrm>
-            <a:off x="502920" y="841248"/>
-            <a:ext cx="11183112" cy="0"/>
+            <a:off x="548640" y="1115568"/>
+            <a:ext cx="11091672" cy="0"/>
           </a:xfrm>
           <a:prstGeom prst="line">
             <a:avLst/>
           </a:prstGeom>
-          <a:ln w="20320">
+          <a:ln w="15240">
             <a:solidFill>
               <a:srgbClr val="243447"/>
             </a:solidFill>
@@ -5629,7 +5711,7 @@
       </p:cxnSp>
       <p:pic>
         <p:nvPicPr>
-          <p:cNvPr id="4" name="Picture 3" descr="bokf_horizon.png"/>
+          <p:cNvPr id="5" name="Picture 4" descr="bokf_horizon.png"/>
           <p:cNvPicPr>
             <a:picLocks noChangeAspect="1"/>
           </p:cNvPicPr>
@@ -5643,8 +5725,8 @@
         </p:blipFill>
         <p:spPr>
           <a:xfrm>
-            <a:off x="411480" y="1234440"/>
-            <a:ext cx="6035040" cy="4085519"/>
+            <a:off x="457200" y="1463040"/>
+            <a:ext cx="5943600" cy="4023617"/>
           </a:xfrm>
           <a:prstGeom prst="rect">
             <a:avLst/>
@@ -5653,14 +5735,14 @@
       </p:pic>
       <p:sp>
         <p:nvSpPr>
-          <p:cNvPr id="5" name="TextBox 4"/>
+          <p:cNvPr id="6" name="TextBox 5"/>
           <p:cNvSpPr txBox="1"/>
           <p:nvPr/>
         </p:nvSpPr>
         <p:spPr>
           <a:xfrm>
-            <a:off x="6766560" y="1280160"/>
-            <a:ext cx="4892040" cy="2286000"/>
+            <a:off x="6720840" y="1554480"/>
+            <a:ext cx="4937760" cy="1965960"/>
           </a:xfrm>
           <a:prstGeom prst="rect">
             <a:avLst/>
@@ -5668,7 +5750,7 @@
           <a:noFill/>
         </p:spPr>
         <p:txBody>
-          <a:bodyPr wrap="square" anchor="t" lIns="45720" rIns="45720" tIns="18288" bIns="18288">
+          <a:bodyPr wrap="square" anchor="t" lIns="18288" rIns="18288" tIns="9144" bIns="9144">
             <a:spAutoFit/>
           </a:bodyPr>
           <a:lstStyle/>
@@ -5679,141 +5761,231 @@
               </a:spcAft>
             </a:pPr>
             <a:r>
+              <a:rPr sz="1050" b="0">
+                <a:solidFill>
+                  <a:srgbClr val="262626"/>
+                </a:solidFill>
+                <a:latin typeface="Apple SD Gothic Neo"/>
+                <a:ea typeface="Apple SD Gothic Neo"/>
+              </a:rPr>
+              <a:t>조기 구간(발표 19~14주 전)은 해당 분기의 공식지표가 거의</a:t>
+            </a:r>
+          </a:p>
+          <a:p>
+            <a:pPr algn="l">
+              <a:spcAft>
+                <a:spcPts val="200"/>
+              </a:spcAft>
+            </a:pPr>
+            <a:r>
+              <a:rPr sz="1050" b="0">
+                <a:solidFill>
+                  <a:srgbClr val="262626"/>
+                </a:solidFill>
+                <a:latin typeface="Apple SD Gothic Neo"/>
+                <a:ea typeface="Apple SD Gothic Neo"/>
+              </a:rPr>
+              <a:t>없는 시기입니다. 이때는 튜닝된 XGBoost의 우위가 사라지고,</a:t>
+            </a:r>
+          </a:p>
+          <a:p>
+            <a:pPr algn="l">
+              <a:spcAft>
+                <a:spcPts val="200"/>
+              </a:spcAft>
+            </a:pPr>
+            <a:r>
+              <a:rPr sz="1050" b="0">
+                <a:solidFill>
+                  <a:srgbClr val="262626"/>
+                </a:solidFill>
+                <a:latin typeface="Apple SD Gothic Neo"/>
+                <a:ea typeface="Apple SD Gothic Neo"/>
+              </a:rPr>
+              <a:t>세계 지식과 일별 신호(주가·환율·심리 원지수)를 쓰는</a:t>
+            </a:r>
+          </a:p>
+          <a:p>
+            <a:pPr algn="l">
+              <a:spcAft>
+                <a:spcPts val="200"/>
+              </a:spcAft>
+            </a:pPr>
+            <a:r>
+              <a:rPr sz="1050" b="1">
+                <a:solidFill>
+                  <a:srgbClr val="262626"/>
+                </a:solidFill>
+                <a:latin typeface="Apple SD Gothic Neo"/>
+                <a:ea typeface="Apple SD Gothic Neo"/>
+              </a:rPr>
+              <a:t>사전학습 모델이 근소하게 앞섭니다.</a:t>
+            </a:r>
+          </a:p>
+          <a:p>
+            <a:pPr algn="l">
+              <a:spcAft>
+                <a:spcPts val="200"/>
+              </a:spcAft>
+            </a:pPr>
+            <a:r>
+              <a:rPr sz="500" b="0">
+                <a:solidFill>
+                  <a:srgbClr val="262626"/>
+                </a:solidFill>
+                <a:latin typeface="Apple SD Gothic Neo"/>
+                <a:ea typeface="Apple SD Gothic Neo"/>
+              </a:rPr>
+              <a:t/>
+            </a:r>
+          </a:p>
+          <a:p>
+            <a:pPr algn="l">
+              <a:spcAft>
+                <a:spcPts val="200"/>
+              </a:spcAft>
+            </a:pPr>
+            <a:r>
+              <a:rPr sz="1050" b="0">
+                <a:solidFill>
+                  <a:srgbClr val="262626"/>
+                </a:solidFill>
+                <a:latin typeface="Apple SD Gothic Neo"/>
+                <a:ea typeface="Apple SD Gothic Neo"/>
+              </a:rPr>
+              <a:t>경기 반등 분기 6개 평균에서도 같은 패턴입니다 —</a:t>
+            </a:r>
+          </a:p>
+          <a:p>
+            <a:pPr algn="l">
+              <a:spcAft>
+                <a:spcPts val="200"/>
+              </a:spcAft>
+            </a:pPr>
+            <a:r>
+              <a:rPr sz="1050" b="0">
+                <a:solidFill>
+                  <a:srgbClr val="262626"/>
+                </a:solidFill>
+                <a:latin typeface="Apple SD Gothic Neo"/>
+                <a:ea typeface="Apple SD Gothic Neo"/>
+              </a:rPr>
+              <a:t>Chronos-2f 0.581 &lt; XGBoost 0.717. 공식 지표의 발표</a:t>
+            </a:r>
+          </a:p>
+          <a:p>
+            <a:pPr algn="l">
+              <a:spcAft>
+                <a:spcPts val="200"/>
+              </a:spcAft>
+            </a:pPr>
+            <a:r>
+              <a:rPr sz="1050" b="0">
+                <a:solidFill>
+                  <a:srgbClr val="262626"/>
+                </a:solidFill>
+                <a:latin typeface="Apple SD Gothic Neo"/>
+                <a:ea typeface="Apple SD Gothic Neo"/>
+              </a:rPr>
+              <a:t>시차를 일별 금융·심리 신호가 메우는 구간입니다.</a:t>
+            </a:r>
+          </a:p>
+        </p:txBody>
+      </p:sp>
+      <p:sp>
+        <p:nvSpPr>
+          <p:cNvPr id="7" name="TextBox 6"/>
+          <p:cNvSpPr txBox="1"/>
+          <p:nvPr/>
+        </p:nvSpPr>
+        <p:spPr>
+          <a:xfrm>
+            <a:off x="6720840" y="3703320"/>
+            <a:ext cx="4937760" cy="320040"/>
+          </a:xfrm>
+          <a:prstGeom prst="rect">
+            <a:avLst/>
+          </a:prstGeom>
+          <a:noFill/>
+        </p:spPr>
+        <p:txBody>
+          <a:bodyPr wrap="square" anchor="t" lIns="18288" rIns="18288" tIns="9144" bIns="9144">
+            <a:spAutoFit/>
+          </a:bodyPr>
+          <a:lstStyle/>
+          <a:p>
+            <a:pPr algn="l">
+              <a:spcAft>
+                <a:spcPts val="200"/>
+              </a:spcAft>
+            </a:pPr>
+            <a:r>
               <a:rPr sz="1200" b="1">
                 <a:solidFill>
-                  <a:srgbClr val="243447"/>
-                </a:solidFill>
-                <a:latin typeface="Apple SD Gothic Neo"/>
-                <a:ea typeface="Apple SD Gothic Neo"/>
-              </a:rPr>
-              <a:t>발견</a:t>
-            </a:r>
-          </a:p>
-          <a:p>
-            <a:pPr algn="l">
-              <a:spcAft>
-                <a:spcPts val="200"/>
-              </a:spcAft>
-            </a:pPr>
-            <a:r>
-              <a:rPr sz="1000" b="0">
-                <a:solidFill>
-                  <a:srgbClr val="262626"/>
-                </a:solidFill>
-                <a:latin typeface="Apple SD Gothic Neo"/>
-                <a:ea typeface="Apple SD Gothic Neo"/>
-              </a:rPr>
-              <a:t>· 조기 구간(발표 19~14주 전): 해당 분기 공식지표가</a:t>
-            </a:r>
-          </a:p>
-          <a:p>
-            <a:pPr algn="l">
-              <a:spcAft>
-                <a:spcPts val="200"/>
-              </a:spcAft>
-            </a:pPr>
-            <a:r>
-              <a:rPr sz="1000" b="0">
-                <a:solidFill>
-                  <a:srgbClr val="262626"/>
-                </a:solidFill>
-                <a:latin typeface="Apple SD Gothic Neo"/>
-                <a:ea typeface="Apple SD Gothic Neo"/>
-              </a:rPr>
-              <a:t>  거의 없는 정보 빈곤기 — XGBoost 우위 소멸,</a:t>
-            </a:r>
-          </a:p>
-          <a:p>
-            <a:pPr algn="l">
-              <a:spcAft>
-                <a:spcPts val="200"/>
-              </a:spcAft>
-            </a:pPr>
-            <a:r>
-              <a:rPr sz="1000" b="0">
-                <a:solidFill>
-                  <a:srgbClr val="262626"/>
-                </a:solidFill>
-                <a:latin typeface="Apple SD Gothic Neo"/>
-                <a:ea typeface="Apple SD Gothic Neo"/>
-              </a:rPr>
-              <a:t>  사전학습 모델(Chronos-2f)·GBM이 근소 우위</a:t>
-            </a:r>
-          </a:p>
-          <a:p>
-            <a:pPr algn="l">
-              <a:spcAft>
-                <a:spcPts val="200"/>
-              </a:spcAft>
-            </a:pPr>
-            <a:r>
-              <a:rPr sz="1000" b="0">
-                <a:solidFill>
-                  <a:srgbClr val="262626"/>
-                </a:solidFill>
-                <a:latin typeface="Apple SD Gothic Neo"/>
-                <a:ea typeface="Apple SD Gothic Neo"/>
-              </a:rPr>
-              <a:t>· 중반 이후: 지표 축적과 함께 XGBoost 독주</a:t>
-            </a:r>
-          </a:p>
-          <a:p>
-            <a:pPr algn="l">
-              <a:spcAft>
-                <a:spcPts val="200"/>
-              </a:spcAft>
-            </a:pPr>
-            <a:r>
-              <a:rPr sz="1000" b="0">
-                <a:solidFill>
-                  <a:srgbClr val="262626"/>
-                </a:solidFill>
-                <a:latin typeface="Apple SD Gothic Neo"/>
-                <a:ea typeface="Apple SD Gothic Neo"/>
-              </a:rPr>
-              <a:t>· 경기 반등 분기 6개 평균: Chronos-2f 0.581 &lt;</a:t>
-            </a:r>
-          </a:p>
-          <a:p>
-            <a:pPr algn="l">
-              <a:spcAft>
-                <a:spcPts val="200"/>
-              </a:spcAft>
-            </a:pPr>
-            <a:r>
-              <a:rPr sz="1000" b="0">
-                <a:solidFill>
-                  <a:srgbClr val="262626"/>
-                </a:solidFill>
-                <a:latin typeface="Apple SD Gothic Neo"/>
-                <a:ea typeface="Apple SD Gothic Neo"/>
-              </a:rPr>
-              <a:t>  XGBoost 0.717 — 일별 금융·심리 신호의 기여</a:t>
-            </a:r>
-          </a:p>
-        </p:txBody>
-      </p:sp>
-      <p:sp>
-        <p:nvSpPr>
-          <p:cNvPr id="6" name="Rounded Rectangle 5"/>
-          <p:cNvSpPr/>
-          <p:nvPr/>
-        </p:nvSpPr>
-        <p:spPr>
-          <a:xfrm>
-            <a:off x="6766560" y="3657600"/>
-            <a:ext cx="4892040" cy="2240280"/>
-          </a:xfrm>
-          <a:prstGeom prst="roundRect">
-            <a:avLst/>
-          </a:prstGeom>
-          <a:solidFill>
-            <a:srgbClr val="E8F3EC"/>
-          </a:solidFill>
-          <a:ln w="9525">
+                  <a:srgbClr val="008A3E"/>
+                </a:solidFill>
+                <a:latin typeface="Apple SD Gothic Neo"/>
+                <a:ea typeface="Apple SD Gothic Neo"/>
+              </a:rPr>
+              <a:t>리더보드 1위 구성 — 실제 결합 방식 (0.740)</a:t>
+            </a:r>
+          </a:p>
+        </p:txBody>
+      </p:sp>
+      <p:cxnSp>
+        <p:nvCxnSpPr>
+          <p:cNvPr id="8" name="Connector 7"/>
+          <p:cNvCxnSpPr/>
+          <p:nvPr/>
+        </p:nvCxnSpPr>
+        <p:spPr>
+          <a:xfrm>
+            <a:off x="6720840" y="4041648"/>
+            <a:ext cx="4937760" cy="0"/>
+          </a:xfrm>
+          <a:prstGeom prst="line">
+            <a:avLst/>
+          </a:prstGeom>
+          <a:ln w="12700">
             <a:solidFill>
               <a:srgbClr val="008A3E"/>
             </a:solidFill>
+          </a:ln>
+        </p:spPr>
+        <p:style>
+          <a:lnRef idx="2">
+            <a:schemeClr val="accent1"/>
+          </a:lnRef>
+          <a:fillRef idx="0">
+            <a:schemeClr val="accent1"/>
+          </a:fillRef>
+          <a:effectRef idx="1">
+            <a:schemeClr val="accent1"/>
+          </a:effectRef>
+          <a:fontRef idx="minor">
+            <a:schemeClr val="tx1"/>
+          </a:fontRef>
+        </p:style>
+      </p:cxnSp>
+      <p:sp>
+        <p:nvSpPr>
+          <p:cNvPr id="9" name="Rectangle 8"/>
+          <p:cNvSpPr/>
+          <p:nvPr/>
+        </p:nvSpPr>
+        <p:spPr>
+          <a:xfrm>
+            <a:off x="6766559" y="4224528"/>
+            <a:ext cx="1515978" cy="365760"/>
+          </a:xfrm>
+          <a:prstGeom prst="rect">
+            <a:avLst/>
+          </a:prstGeom>
+          <a:solidFill>
+            <a:srgbClr val="B0532F"/>
+          </a:solidFill>
+          <a:ln>
+            <a:noFill/>
           </a:ln>
           <a:effectLst/>
         </p:spPr>
@@ -5841,60 +6013,20 @@
       </p:sp>
       <p:sp>
         <p:nvSpPr>
-          <p:cNvPr id="7" name="TextBox 6"/>
-          <p:cNvSpPr txBox="1"/>
-          <p:nvPr/>
-        </p:nvSpPr>
-        <p:spPr>
-          <a:xfrm>
-            <a:off x="6967728" y="3767328"/>
-            <a:ext cx="4526280" cy="320040"/>
-          </a:xfrm>
-          <a:prstGeom prst="rect">
-            <a:avLst/>
-          </a:prstGeom>
-          <a:noFill/>
-        </p:spPr>
-        <p:txBody>
-          <a:bodyPr wrap="square" anchor="t" lIns="45720" rIns="45720" tIns="18288" bIns="18288">
-            <a:spAutoFit/>
-          </a:bodyPr>
-          <a:lstStyle/>
-          <a:p>
-            <a:pPr algn="l">
-              <a:spcAft>
-                <a:spcPts val="200"/>
-              </a:spcAft>
-            </a:pPr>
-            <a:r>
-              <a:rPr sz="1150" b="1">
-                <a:solidFill>
-                  <a:srgbClr val="008A3E"/>
-                </a:solidFill>
-                <a:latin typeface="Apple SD Gothic Neo"/>
-                <a:ea typeface="Apple SD Gothic Neo"/>
-              </a:rPr>
-              <a:t>리더보드 1위 구성 — 실제 결합 방식 (0.740, -1.3%)</a:t>
-            </a:r>
-          </a:p>
-        </p:txBody>
-      </p:sp>
-      <p:sp>
-        <p:nvSpPr>
-          <p:cNvPr id="8" name="Rectangle 7"/>
+          <p:cNvPr id="10" name="Rectangle 9"/>
           <p:cNvSpPr/>
           <p:nvPr/>
         </p:nvSpPr>
         <p:spPr>
           <a:xfrm>
-            <a:off x="6995160" y="4160520"/>
-            <a:ext cx="1400475" cy="384048"/>
+            <a:off x="8319114" y="4224528"/>
+            <a:ext cx="3248045" cy="365760"/>
           </a:xfrm>
           <a:prstGeom prst="rect">
             <a:avLst/>
           </a:prstGeom>
           <a:solidFill>
-            <a:srgbClr val="B0532F"/>
+            <a:srgbClr val="1C5CAB"/>
           </a:solidFill>
           <a:ln>
             <a:noFill/>
@@ -5925,58 +6057,14 @@
       </p:sp>
       <p:sp>
         <p:nvSpPr>
-          <p:cNvPr id="9" name="Rectangle 8"/>
-          <p:cNvSpPr/>
-          <p:nvPr/>
-        </p:nvSpPr>
-        <p:spPr>
-          <a:xfrm>
-            <a:off x="8432211" y="4160520"/>
-            <a:ext cx="2997788" cy="384048"/>
-          </a:xfrm>
-          <a:prstGeom prst="rect">
-            <a:avLst/>
-          </a:prstGeom>
-          <a:solidFill>
-            <a:srgbClr val="1C5CAB"/>
-          </a:solidFill>
-          <a:ln>
-            <a:noFill/>
-          </a:ln>
-          <a:effectLst/>
-        </p:spPr>
-        <p:style>
-          <a:lnRef idx="1">
-            <a:schemeClr val="accent1"/>
-          </a:lnRef>
-          <a:fillRef idx="3">
-            <a:schemeClr val="accent1"/>
-          </a:fillRef>
-          <a:effectRef idx="2">
-            <a:schemeClr val="accent1"/>
-          </a:effectRef>
-          <a:fontRef idx="minor">
-            <a:schemeClr val="lt1"/>
-          </a:fontRef>
-        </p:style>
-        <p:txBody>
-          <a:bodyPr rtlCol="0" anchor="ctr"/>
-          <a:lstStyle/>
-          <a:p>
-            <a:pPr algn="ctr"/>
-          </a:p>
-        </p:txBody>
-      </p:sp>
-      <p:sp>
-        <p:nvSpPr>
-          <p:cNvPr id="10" name="TextBox 9"/>
+          <p:cNvPr id="11" name="TextBox 10"/>
           <p:cNvSpPr txBox="1"/>
           <p:nvPr/>
         </p:nvSpPr>
         <p:spPr>
           <a:xfrm>
-            <a:off x="6949440" y="4215383"/>
-            <a:ext cx="1491915" cy="274320"/>
+            <a:off x="6720840" y="4279392"/>
+            <a:ext cx="1607418" cy="274320"/>
           </a:xfrm>
           <a:prstGeom prst="rect">
             <a:avLst/>
@@ -5984,7 +6072,7 @@
           <a:noFill/>
         </p:spPr>
         <p:txBody>
-          <a:bodyPr wrap="square" anchor="t" lIns="45720" rIns="45720" tIns="18288" bIns="18288">
+          <a:bodyPr wrap="square" anchor="t" lIns="18288" rIns="18288" tIns="9144" bIns="9144">
             <a:spAutoFit/>
           </a:bodyPr>
           <a:lstStyle/>
@@ -6009,14 +6097,14 @@
       </p:sp>
       <p:sp>
         <p:nvSpPr>
-          <p:cNvPr id="11" name="TextBox 10"/>
+          <p:cNvPr id="12" name="TextBox 11"/>
           <p:cNvSpPr txBox="1"/>
           <p:nvPr/>
         </p:nvSpPr>
         <p:spPr>
           <a:xfrm>
-            <a:off x="8432211" y="4215383"/>
-            <a:ext cx="2997788" cy="274320"/>
+            <a:off x="8319114" y="4279392"/>
+            <a:ext cx="3248045" cy="274320"/>
           </a:xfrm>
           <a:prstGeom prst="rect">
             <a:avLst/>
@@ -6024,7 +6112,7 @@
           <a:noFill/>
         </p:spPr>
         <p:txBody>
-          <a:bodyPr wrap="square" anchor="t" lIns="45720" rIns="45720" tIns="18288" bIns="18288">
+          <a:bodyPr wrap="square" anchor="t" lIns="18288" rIns="18288" tIns="9144" bIns="9144">
             <a:spAutoFit/>
           </a:bodyPr>
           <a:lstStyle/>
@@ -6049,14 +6137,14 @@
       </p:sp>
       <p:sp>
         <p:nvSpPr>
-          <p:cNvPr id="12" name="TextBox 11"/>
+          <p:cNvPr id="13" name="TextBox 12"/>
           <p:cNvSpPr txBox="1"/>
           <p:nvPr/>
         </p:nvSpPr>
         <p:spPr>
           <a:xfrm>
-            <a:off x="6858000" y="4599431"/>
-            <a:ext cx="1857675" cy="548640"/>
+            <a:off x="6629399" y="4645152"/>
+            <a:ext cx="1973178" cy="548640"/>
           </a:xfrm>
           <a:prstGeom prst="rect">
             <a:avLst/>
@@ -6064,7 +6152,7 @@
           <a:noFill/>
         </p:spPr>
         <p:txBody>
-          <a:bodyPr wrap="square" anchor="t" lIns="45720" rIns="45720" tIns="18288" bIns="18288">
+          <a:bodyPr wrap="square" anchor="t" lIns="18288" rIns="18288" tIns="9144" bIns="9144">
             <a:spAutoFit/>
           </a:bodyPr>
           <a:lstStyle/>
@@ -6106,14 +6194,14 @@
       </p:sp>
       <p:sp>
         <p:nvSpPr>
-          <p:cNvPr id="13" name="TextBox 12"/>
+          <p:cNvPr id="14" name="TextBox 13"/>
           <p:cNvSpPr txBox="1"/>
           <p:nvPr/>
         </p:nvSpPr>
         <p:spPr>
           <a:xfrm>
-            <a:off x="8432211" y="4599431"/>
-            <a:ext cx="2997788" cy="548640"/>
+            <a:off x="8319114" y="4645152"/>
+            <a:ext cx="3248045" cy="548640"/>
           </a:xfrm>
           <a:prstGeom prst="rect">
             <a:avLst/>
@@ -6121,7 +6209,7 @@
           <a:noFill/>
         </p:spPr>
         <p:txBody>
-          <a:bodyPr wrap="square" anchor="t" lIns="45720" rIns="45720" tIns="18288" bIns="18288">
+          <a:bodyPr wrap="square" anchor="t" lIns="18288" rIns="18288" tIns="9144" bIns="9144">
             <a:spAutoFit/>
           </a:bodyPr>
           <a:lstStyle/>
@@ -6163,14 +6251,14 @@
       </p:sp>
       <p:sp>
         <p:nvSpPr>
-          <p:cNvPr id="14" name="TextBox 13"/>
+          <p:cNvPr id="15" name="TextBox 14"/>
           <p:cNvSpPr txBox="1"/>
           <p:nvPr/>
         </p:nvSpPr>
         <p:spPr>
           <a:xfrm>
-            <a:off x="6967728" y="5257800"/>
-            <a:ext cx="4526280" cy="594360"/>
+            <a:off x="6720840" y="5349240"/>
+            <a:ext cx="4937760" cy="640080"/>
           </a:xfrm>
           <a:prstGeom prst="rect">
             <a:avLst/>
@@ -6178,7 +6266,7 @@
           <a:noFill/>
         </p:spPr>
         <p:txBody>
-          <a:bodyPr wrap="square" anchor="t" lIns="45720" rIns="45720" tIns="18288" bIns="18288">
+          <a:bodyPr wrap="square" anchor="t" lIns="18288" rIns="18288" tIns="9144" bIns="9144">
             <a:spAutoFit/>
           </a:bodyPr>
           <a:lstStyle/>
@@ -6189,78 +6277,32 @@
               </a:spcAft>
             </a:pPr>
             <a:r>
-              <a:rPr sz="1000" b="0">
-                <a:solidFill>
-                  <a:srgbClr val="262626"/>
-                </a:solidFill>
-                <a:latin typeface="Apple SD Gothic Neo"/>
-                <a:ea typeface="Apple SD Gothic Neo"/>
-              </a:rPr>
-              <a:t>· 국면 판단 없음 — 주차에 따른 고정 교대 규칙</a:t>
-            </a:r>
-          </a:p>
-          <a:p>
-            <a:pPr algn="l">
-              <a:spcAft>
-                <a:spcPts val="200"/>
-              </a:spcAft>
-            </a:pPr>
-            <a:r>
-              <a:rPr sz="1000" b="0">
-                <a:solidFill>
-                  <a:srgbClr val="262626"/>
-                </a:solidFill>
-                <a:latin typeface="Apple SD Gothic Neo"/>
-                <a:ea typeface="Apple SD Gothic Neo"/>
-              </a:rPr>
-              <a:t>· 수위: 비열등 확인 + 개선 방향 (유의성 미달 명시)</a:t>
-            </a:r>
-          </a:p>
-        </p:txBody>
-      </p:sp>
-      <p:sp>
-        <p:nvSpPr>
-          <p:cNvPr id="15" name="Rectangle 14"/>
-          <p:cNvSpPr/>
-          <p:nvPr/>
-        </p:nvSpPr>
-        <p:spPr>
-          <a:xfrm>
-            <a:off x="502920" y="6309360"/>
-            <a:ext cx="11183112" cy="365760"/>
-          </a:xfrm>
-          <a:prstGeom prst="rect">
-            <a:avLst/>
-          </a:prstGeom>
-          <a:solidFill>
-            <a:srgbClr val="F3F4F5"/>
-          </a:solidFill>
-          <a:ln w="9525">
-            <a:solidFill>
-              <a:srgbClr val="C9C9C9"/>
-            </a:solidFill>
-          </a:ln>
-          <a:effectLst/>
-        </p:spPr>
-        <p:style>
-          <a:lnRef idx="1">
-            <a:schemeClr val="accent1"/>
-          </a:lnRef>
-          <a:fillRef idx="3">
-            <a:schemeClr val="accent1"/>
-          </a:fillRef>
-          <a:effectRef idx="2">
-            <a:schemeClr val="accent1"/>
-          </a:effectRef>
-          <a:fontRef idx="minor">
-            <a:schemeClr val="lt1"/>
-          </a:fontRef>
-        </p:style>
-        <p:txBody>
-          <a:bodyPr rtlCol="0" anchor="ctr"/>
-          <a:lstStyle/>
-          <a:p>
-            <a:pPr algn="ctr"/>
+              <a:rPr sz="950" b="0">
+                <a:solidFill>
+                  <a:srgbClr val="6B6B6B"/>
+                </a:solidFill>
+                <a:latin typeface="Apple SD Gothic Neo"/>
+                <a:ea typeface="Apple SD Gothic Neo"/>
+              </a:rPr>
+              <a:t>국면 판단은 없습니다 — 주차에 따른 고정 교대 규칙이며, 19주 중</a:t>
+            </a:r>
+          </a:p>
+          <a:p>
+            <a:pPr algn="l">
+              <a:spcAft>
+                <a:spcPts val="200"/>
+              </a:spcAft>
+            </a:pPr>
+            <a:r>
+              <a:rPr sz="950" b="0">
+                <a:solidFill>
+                  <a:srgbClr val="6B6B6B"/>
+                </a:solidFill>
+                <a:latin typeface="Apple SD Gothic Neo"/>
+                <a:ea typeface="Apple SD Gothic Neo"/>
+              </a:rPr>
+              <a:t>13주는 현행 그대로입니다. 보고 수위는 “비열등 + 개선 방향”입니다.</a:t>
+            </a:r>
           </a:p>
         </p:txBody>
       </p:sp>
@@ -6272,8 +6314,8 @@
         </p:nvSpPr>
         <p:spPr>
           <a:xfrm>
-            <a:off x="685800" y="6364224"/>
-            <a:ext cx="10881360" cy="256032"/>
+            <a:off x="548640" y="6455664"/>
+            <a:ext cx="9875520" cy="274320"/>
           </a:xfrm>
           <a:prstGeom prst="rect">
             <a:avLst/>
@@ -6281,7 +6323,7 @@
           <a:noFill/>
         </p:spPr>
         <p:txBody>
-          <a:bodyPr wrap="square" anchor="ctr" lIns="45720" rIns="45720" tIns="18288" bIns="18288">
+          <a:bodyPr wrap="square" anchor="t" lIns="18288" rIns="18288" tIns="9144" bIns="9144">
             <a:spAutoFit/>
           </a:bodyPr>
           <a:lstStyle/>
@@ -6292,14 +6334,54 @@
               </a:spcAft>
             </a:pPr>
             <a:r>
-              <a:rPr sz="880" b="0">
+              <a:rPr sz="800" b="0">
                 <a:solidFill>
                   <a:srgbClr val="6B6B6B"/>
                 </a:solidFill>
                 <a:latin typeface="Apple SD Gothic Neo"/>
                 <a:ea typeface="Apple SD Gothic Neo"/>
               </a:rPr>
-              <a:t>공통 검증 규약: 실시간 빈티지 · 속보치 기준 · 전망주차 w[-19,-1] 평균 RMSE · 2018Q1~2025Q4 (32개 분기) · 예측단위 개정(schema v2) 반영 · 반등 분기 6개: 2018Q1·2019Q2·2020Q3·2023Q1·2024Q3·2025Q2</a:t>
+              <a:t>주: 실시간 빈티지 · 속보치 기준 · 전망주차 w[-19,-1] 평균 RMSE · 2018Q1~2025Q4(32개 분기) · 예측단위 개정(schema v2) 반영. 낮을수록 정확. 반등 분기 6개: 2018Q1·2019Q2·2020Q3·2023Q1·2024Q3·2025Q2.</a:t>
+            </a:r>
+          </a:p>
+        </p:txBody>
+      </p:sp>
+      <p:sp>
+        <p:nvSpPr>
+          <p:cNvPr id="17" name="TextBox 16"/>
+          <p:cNvSpPr txBox="1"/>
+          <p:nvPr/>
+        </p:nvSpPr>
+        <p:spPr>
+          <a:xfrm>
+            <a:off x="11292840" y="6455664"/>
+            <a:ext cx="457200" cy="274320"/>
+          </a:xfrm>
+          <a:prstGeom prst="rect">
+            <a:avLst/>
+          </a:prstGeom>
+          <a:noFill/>
+        </p:spPr>
+        <p:txBody>
+          <a:bodyPr wrap="square" anchor="t" lIns="18288" rIns="18288" tIns="9144" bIns="9144">
+            <a:spAutoFit/>
+          </a:bodyPr>
+          <a:lstStyle/>
+          <a:p>
+            <a:pPr algn="r">
+              <a:spcAft>
+                <a:spcPts val="200"/>
+              </a:spcAft>
+            </a:pPr>
+            <a:r>
+              <a:rPr sz="900" b="0">
+                <a:solidFill>
+                  <a:srgbClr val="6B6B6B"/>
+                </a:solidFill>
+                <a:latin typeface="Apple SD Gothic Neo"/>
+                <a:ea typeface="Apple SD Gothic Neo"/>
+              </a:rPr>
+              <a:t>4</a:t>
             </a:r>
           </a:p>
         </p:txBody>
@@ -6330,8 +6412,8 @@
         </p:nvSpPr>
         <p:spPr>
           <a:xfrm>
-            <a:off x="502920" y="274320"/>
-            <a:ext cx="11155680" cy="502920"/>
+            <a:off x="548640" y="292608"/>
+            <a:ext cx="10515600" cy="274320"/>
           </a:xfrm>
           <a:prstGeom prst="rect">
             <a:avLst/>
@@ -6339,7 +6421,7 @@
           <a:noFill/>
         </p:spPr>
         <p:txBody>
-          <a:bodyPr wrap="square" anchor="t" lIns="45720" rIns="45720" tIns="18288" bIns="18288">
+          <a:bodyPr wrap="square" anchor="t" lIns="18288" rIns="18288" tIns="9144" bIns="9144">
             <a:spAutoFit/>
           </a:bodyPr>
           <a:lstStyle/>
@@ -6350,43 +6432,73 @@
               </a:spcAft>
             </a:pPr>
             <a:r>
-              <a:rPr sz="1900" b="1">
-                <a:solidFill>
-                  <a:srgbClr val="008A3E"/>
-                </a:solidFill>
-                <a:latin typeface="Apple SD Gothic Neo"/>
-                <a:ea typeface="Apple SD Gothic Neo"/>
-              </a:rPr>
-              <a:t>04  </a:t>
-            </a:r>
-            <a:r>
-              <a:rPr sz="1900" b="1">
+              <a:rPr sz="1050" b="1">
+                <a:solidFill>
+                  <a:srgbClr val="6B6B6B"/>
+                </a:solidFill>
+                <a:latin typeface="Apple SD Gothic Neo"/>
+                <a:ea typeface="Apple SD Gothic Neo"/>
+              </a:rPr>
+              <a:t>4  |  문맥학습(ICL) 계열</a:t>
+            </a:r>
+          </a:p>
+        </p:txBody>
+      </p:sp>
+      <p:sp>
+        <p:nvSpPr>
+          <p:cNvPr id="3" name="TextBox 2"/>
+          <p:cNvSpPr txBox="1"/>
+          <p:nvPr/>
+        </p:nvSpPr>
+        <p:spPr>
+          <a:xfrm>
+            <a:off x="548640" y="548640"/>
+            <a:ext cx="11064240" cy="548640"/>
+          </a:xfrm>
+          <a:prstGeom prst="rect">
+            <a:avLst/>
+          </a:prstGeom>
+          <a:noFill/>
+        </p:spPr>
+        <p:txBody>
+          <a:bodyPr wrap="square" anchor="t" lIns="18288" rIns="18288" tIns="9144" bIns="9144">
+            <a:spAutoFit/>
+          </a:bodyPr>
+          <a:lstStyle/>
+          <a:p>
+            <a:pPr algn="l">
+              <a:spcAft>
+                <a:spcPts val="200"/>
+              </a:spcAft>
+            </a:pPr>
+            <a:r>
+              <a:rPr sz="1700" b="1">
                 <a:solidFill>
                   <a:srgbClr val="243447"/>
                 </a:solidFill>
                 <a:latin typeface="Apple SD Gothic Neo"/>
                 <a:ea typeface="Apple SD Gothic Neo"/>
               </a:rPr>
-              <a:t>문맥학습(ICL) 계열의 한계 — GDP 나우캐스팅 관점</a:t>
+              <a:t>성능 이전에, “공정한 채점” 자체가 성립하지 않습니다</a:t>
             </a:r>
           </a:p>
         </p:txBody>
       </p:sp>
       <p:cxnSp>
         <p:nvCxnSpPr>
-          <p:cNvPr id="3" name="Connector 2"/>
+          <p:cNvPr id="4" name="Connector 3"/>
           <p:cNvCxnSpPr/>
           <p:nvPr/>
         </p:nvCxnSpPr>
         <p:spPr>
           <a:xfrm>
-            <a:off x="502920" y="841248"/>
-            <a:ext cx="11183112" cy="0"/>
+            <a:off x="548640" y="1115568"/>
+            <a:ext cx="11091672" cy="0"/>
           </a:xfrm>
           <a:prstGeom prst="line">
             <a:avLst/>
           </a:prstGeom>
-          <a:ln w="20320">
+          <a:ln w="15240">
             <a:solidFill>
               <a:srgbClr val="243447"/>
             </a:solidFill>
@@ -6409,14 +6521,14 @@
       </p:cxnSp>
       <p:sp>
         <p:nvSpPr>
-          <p:cNvPr id="4" name="TextBox 3"/>
+          <p:cNvPr id="5" name="TextBox 4"/>
           <p:cNvSpPr txBox="1"/>
           <p:nvPr/>
         </p:nvSpPr>
         <p:spPr>
           <a:xfrm>
-            <a:off x="502920" y="1143000"/>
-            <a:ext cx="11155680" cy="365760"/>
+            <a:off x="548640" y="1298448"/>
+            <a:ext cx="11064240" cy="274320"/>
           </a:xfrm>
           <a:prstGeom prst="rect">
             <a:avLst/>
@@ -6424,7 +6536,7 @@
           <a:noFill/>
         </p:spPr>
         <p:txBody>
-          <a:bodyPr wrap="square" anchor="t" lIns="45720" rIns="45720" tIns="18288" bIns="18288">
+          <a:bodyPr wrap="square" anchor="t" lIns="18288" rIns="18288" tIns="9144" bIns="9144">
             <a:spAutoFit/>
           </a:bodyPr>
           <a:lstStyle/>
@@ -6435,28 +6547,28 @@
               </a:spcAft>
             </a:pPr>
             <a:r>
-              <a:rPr sz="1050" b="0">
+              <a:rPr sz="950" b="0">
                 <a:solidFill>
                   <a:srgbClr val="6B6B6B"/>
                 </a:solidFill>
                 <a:latin typeface="Apple SD Gothic Neo"/>
                 <a:ea typeface="Apple SD Gothic Neo"/>
               </a:rPr>
-              <a:t>ICL(In-Context Learning) = 모델 파라미터를 학습하지 않고, 과거 데이터를 문맥(프롬프트)으로 제시해 예측을 얻는 방식 (LLM 활용 계열 포함)</a:t>
-            </a:r>
-          </a:p>
-        </p:txBody>
-      </p:sp>
-      <p:sp>
-        <p:nvSpPr>
-          <p:cNvPr id="5" name="TextBox 4"/>
+              <a:t>문맥학습(ICL) = 모델 파라미터를 학습하지 않고 과거 데이터를 문맥(프롬프트)으로 제시해 예측을 얻는 방식 — LLM 활용 계열 포함</a:t>
+            </a:r>
+          </a:p>
+        </p:txBody>
+      </p:sp>
+      <p:sp>
+        <p:nvSpPr>
+          <p:cNvPr id="6" name="TextBox 5"/>
           <p:cNvSpPr txBox="1"/>
           <p:nvPr/>
         </p:nvSpPr>
         <p:spPr>
           <a:xfrm>
-            <a:off x="502920" y="1645920"/>
-            <a:ext cx="5394960" cy="365760"/>
+            <a:off x="548640" y="1783080"/>
+            <a:ext cx="5257800" cy="320040"/>
           </a:xfrm>
           <a:prstGeom prst="rect">
             <a:avLst/>
@@ -6464,7 +6576,7 @@
           <a:noFill/>
         </p:spPr>
         <p:txBody>
-          <a:bodyPr wrap="square" anchor="t" lIns="45720" rIns="45720" tIns="18288" bIns="18288">
+          <a:bodyPr wrap="square" anchor="t" lIns="18288" rIns="18288" tIns="9144" bIns="9144">
             <a:spAutoFit/>
           </a:bodyPr>
           <a:lstStyle/>
@@ -6482,21 +6594,21 @@
                 <a:latin typeface="Apple SD Gothic Neo"/>
                 <a:ea typeface="Apple SD Gothic Neo"/>
               </a:rPr>
-              <a:t>LLM 기반 ICL 예측의 구조적 한계</a:t>
+              <a:t>LLM 기반 ICL의 구조적 한계</a:t>
             </a:r>
           </a:p>
         </p:txBody>
       </p:sp>
       <p:cxnSp>
         <p:nvCxnSpPr>
-          <p:cNvPr id="6" name="Connector 5"/>
+          <p:cNvPr id="7" name="Connector 6"/>
           <p:cNvCxnSpPr/>
           <p:nvPr/>
         </p:nvCxnSpPr>
         <p:spPr>
           <a:xfrm>
-            <a:off x="502920" y="1993392"/>
-            <a:ext cx="5394960" cy="0"/>
+            <a:off x="548640" y="2121408"/>
+            <a:ext cx="5257800" cy="0"/>
           </a:xfrm>
           <a:prstGeom prst="line">
             <a:avLst/>
@@ -6524,14 +6636,14 @@
       </p:cxnSp>
       <p:sp>
         <p:nvSpPr>
-          <p:cNvPr id="7" name="TextBox 6"/>
+          <p:cNvPr id="8" name="TextBox 7"/>
           <p:cNvSpPr txBox="1"/>
           <p:nvPr/>
         </p:nvSpPr>
         <p:spPr>
           <a:xfrm>
-            <a:off x="502920" y="2103120"/>
-            <a:ext cx="5394960" cy="3931920"/>
+            <a:off x="548640" y="2267712"/>
+            <a:ext cx="5257800" cy="3840480"/>
           </a:xfrm>
           <a:prstGeom prst="rect">
             <a:avLst/>
@@ -6539,7 +6651,7 @@
           <a:noFill/>
         </p:spPr>
         <p:txBody>
-          <a:bodyPr wrap="square" anchor="t" lIns="45720" rIns="45720" tIns="18288" bIns="18288">
+          <a:bodyPr wrap="square" anchor="t" lIns="18288" rIns="18288" tIns="9144" bIns="9144">
             <a:spAutoFit/>
           </a:bodyPr>
           <a:lstStyle/>
@@ -6550,65 +6662,75 @@
               </a:spcAft>
             </a:pPr>
             <a:r>
-              <a:rPr sz="1100" b="1">
+              <a:rPr sz="1050" b="1">
                 <a:solidFill>
                   <a:srgbClr val="B0532F"/>
                 </a:solidFill>
                 <a:latin typeface="Apple SD Gothic Neo"/>
                 <a:ea typeface="Apple SD Gothic Neo"/>
               </a:rPr>
-              <a:t>① 학습데이터 오염 (가장 결정적)</a:t>
-            </a:r>
-          </a:p>
-          <a:p>
-            <a:pPr algn="l">
-              <a:spcAft>
-                <a:spcPts val="200"/>
-              </a:spcAft>
-            </a:pPr>
-            <a:r>
-              <a:rPr sz="1000" b="0">
+              <a:t>학습데이터 오염 — 가장 결정적입니다. </a:t>
+            </a:r>
+            <a:r>
+              <a:rPr sz="1050" b="0">
                 <a:solidFill>
                   <a:srgbClr val="262626"/>
                 </a:solidFill>
                 <a:latin typeface="Apple SD Gothic Neo"/>
                 <a:ea typeface="Apple SD Gothic Neo"/>
               </a:rPr>
-              <a:t>과거 GDP 실적·경제 뉴스가 LLM 사전학습에 이미 포함 —</a:t>
-            </a:r>
-          </a:p>
-          <a:p>
-            <a:pPr algn="l">
-              <a:spcAft>
-                <a:spcPts val="200"/>
-              </a:spcAft>
-            </a:pPr>
-            <a:r>
-              <a:rPr sz="1000" b="0">
+              <a:t>과거 GDP 실적과 경제</a:t>
+            </a:r>
+          </a:p>
+          <a:p>
+            <a:pPr algn="l">
+              <a:spcAft>
+                <a:spcPts val="200"/>
+              </a:spcAft>
+            </a:pPr>
+            <a:r>
+              <a:rPr sz="1050" b="0">
                 <a:solidFill>
                   <a:srgbClr val="262626"/>
                 </a:solidFill>
                 <a:latin typeface="Apple SD Gothic Neo"/>
                 <a:ea typeface="Apple SD Gothic Neo"/>
               </a:rPr>
-              <a:t>"그 시점에 몰랐던 값"을 모델이 알고 있을 가능성을 배제 불가.</a:t>
-            </a:r>
-          </a:p>
-          <a:p>
-            <a:pPr algn="l">
-              <a:spcAft>
-                <a:spcPts val="200"/>
-              </a:spcAft>
-            </a:pPr>
-            <a:r>
-              <a:rPr sz="1000" b="1">
+              <a:t>뉴스가 LLM 사전학습에 이미 들어 있어, “그 시점에 몰랐던 값”을</a:t>
+            </a:r>
+          </a:p>
+          <a:p>
+            <a:pPr algn="l">
+              <a:spcAft>
+                <a:spcPts val="200"/>
+              </a:spcAft>
+            </a:pPr>
+            <a:r>
+              <a:rPr sz="1050" b="0">
                 <a:solidFill>
                   <a:srgbClr val="262626"/>
                 </a:solidFill>
                 <a:latin typeface="Apple SD Gothic Neo"/>
                 <a:ea typeface="Apple SD Gothic Neo"/>
               </a:rPr>
-              <a:t>실시간 재현 채점 자체가 성립하지 않아 리더보드에서 제외.</a:t>
+              <a:t>모델이 알고 있을 가능성을 배제할 수 없습니다. 실시간 재현 채점</a:t>
+            </a:r>
+          </a:p>
+          <a:p>
+            <a:pPr algn="l">
+              <a:spcAft>
+                <a:spcPts val="200"/>
+              </a:spcAft>
+            </a:pPr>
+            <a:r>
+              <a:rPr sz="1050" b="1">
+                <a:solidFill>
+                  <a:srgbClr val="262626"/>
+                </a:solidFill>
+                <a:latin typeface="Apple SD Gothic Neo"/>
+                <a:ea typeface="Apple SD Gothic Neo"/>
+              </a:rPr>
+              <a:t>자체가 성립하지 않아 리더보드에서 제외했습니다.</a:t>
             </a:r>
           </a:p>
           <a:p>
@@ -6625,17 +6747,17 @@
                 <a:latin typeface="Apple SD Gothic Neo"/>
                 <a:ea typeface="Apple SD Gothic Neo"/>
               </a:rPr>
-              <a:t>당사 예비실험도 '오염 상한'으로만 해석 (공정 점수 아님)</a:t>
-            </a:r>
-          </a:p>
-          <a:p>
-            <a:pPr algn="l">
-              <a:spcAft>
-                <a:spcPts val="200"/>
-              </a:spcAft>
-            </a:pPr>
-            <a:r>
-              <a:rPr sz="400" b="0">
+              <a:t>당사 예비실험 결과도 ‘오염 상한’으로만 해석합니다.</a:t>
+            </a:r>
+          </a:p>
+          <a:p>
+            <a:pPr algn="l">
+              <a:spcAft>
+                <a:spcPts val="200"/>
+              </a:spcAft>
+            </a:pPr>
+            <a:r>
+              <a:rPr sz="600" b="0">
                 <a:solidFill>
                   <a:srgbClr val="262626"/>
                 </a:solidFill>
@@ -6652,64 +6774,74 @@
               </a:spcAft>
             </a:pPr>
             <a:r>
-              <a:rPr sz="1100" b="1">
+              <a:rPr sz="1050" b="1">
                 <a:solidFill>
                   <a:srgbClr val="B0532F"/>
                 </a:solidFill>
                 <a:latin typeface="Apple SD Gothic Neo"/>
                 <a:ea typeface="Apple SD Gothic Neo"/>
               </a:rPr>
-              <a:t>② 재현성·감사가능성</a:t>
-            </a:r>
-          </a:p>
-          <a:p>
-            <a:pPr algn="l">
-              <a:spcAft>
-                <a:spcPts val="200"/>
-              </a:spcAft>
-            </a:pPr>
-            <a:r>
-              <a:rPr sz="1000" b="0">
+              <a:t>재현성과 감사가능성. </a:t>
+            </a:r>
+            <a:r>
+              <a:rPr sz="1050" b="0">
                 <a:solidFill>
                   <a:srgbClr val="262626"/>
                 </a:solidFill>
                 <a:latin typeface="Apple SD Gothic Neo"/>
                 <a:ea typeface="Apple SD Gothic Neo"/>
               </a:rPr>
-              <a:t>동일 입력에도 출력 변동, 모델 버전 변경 시 결과 비복원 —</a:t>
-            </a:r>
-          </a:p>
-          <a:p>
-            <a:pPr algn="l">
-              <a:spcAft>
-                <a:spcPts val="200"/>
-              </a:spcAft>
-            </a:pPr>
-            <a:r>
-              <a:rPr sz="1000" b="0">
+              <a:t>동일 입력에도 출력이 변동하고 모델 버전</a:t>
+            </a:r>
+          </a:p>
+          <a:p>
+            <a:pPr algn="l">
+              <a:spcAft>
+                <a:spcPts val="200"/>
+              </a:spcAft>
+            </a:pPr>
+            <a:r>
+              <a:rPr sz="1050" b="0">
                 <a:solidFill>
                   <a:srgbClr val="262626"/>
                 </a:solidFill>
                 <a:latin typeface="Apple SD Gothic Neo"/>
                 <a:ea typeface="Apple SD Gothic Neo"/>
               </a:rPr>
-              <a:t>중앙은행 운영 요건(재현·감사·설명책임)과 정면 충돌</a:t>
-            </a:r>
-          </a:p>
-          <a:p>
-            <a:pPr algn="l">
-              <a:spcAft>
-                <a:spcPts val="200"/>
-              </a:spcAft>
-            </a:pPr>
-            <a:r>
-              <a:rPr sz="400" b="0">
+              <a:t>변경 시 결과가 복원되지 않습니다 — 중앙은행 운영 요건(재현·</a:t>
+            </a:r>
+          </a:p>
+          <a:p>
+            <a:pPr algn="l">
+              <a:spcAft>
+                <a:spcPts val="200"/>
+              </a:spcAft>
+            </a:pPr>
+            <a:r>
+              <a:rPr sz="1050" b="0">
                 <a:solidFill>
                   <a:srgbClr val="262626"/>
                 </a:solidFill>
                 <a:latin typeface="Apple SD Gothic Neo"/>
                 <a:ea typeface="Apple SD Gothic Neo"/>
               </a:rPr>
+              <a:t>감사·설명책임)과 정면으로 충돌합니다.</a:t>
+            </a:r>
+          </a:p>
+          <a:p>
+            <a:pPr algn="l">
+              <a:spcAft>
+                <a:spcPts val="200"/>
+              </a:spcAft>
+            </a:pPr>
+            <a:r>
+              <a:rPr sz="600" b="0">
+                <a:solidFill>
+                  <a:srgbClr val="262626"/>
+                </a:solidFill>
+                <a:latin typeface="Apple SD Gothic Neo"/>
+                <a:ea typeface="Apple SD Gothic Neo"/>
+              </a:rPr>
               <a:t/>
             </a:r>
           </a:p>
@@ -6720,45 +6852,38 @@
               </a:spcAft>
             </a:pPr>
             <a:r>
-              <a:rPr sz="1100" b="1">
+              <a:rPr sz="1050" b="1">
                 <a:solidFill>
                   <a:srgbClr val="B0532F"/>
                 </a:solidFill>
                 <a:latin typeface="Apple SD Gothic Neo"/>
                 <a:ea typeface="Apple SD Gothic Neo"/>
               </a:rPr>
-              <a:t>③ 수치 정밀도</a:t>
-            </a:r>
-          </a:p>
-          <a:p>
-            <a:pPr algn="l">
-              <a:spcAft>
-                <a:spcPts val="200"/>
-              </a:spcAft>
-            </a:pPr>
-            <a:r>
-              <a:rPr sz="1000" b="0">
+              <a:t>수치 정밀도. </a:t>
+            </a:r>
+            <a:r>
+              <a:rPr sz="1050" b="0">
                 <a:solidFill>
                   <a:srgbClr val="262626"/>
                 </a:solidFill>
                 <a:latin typeface="Apple SD Gothic Neo"/>
                 <a:ea typeface="Apple SD Gothic Neo"/>
               </a:rPr>
-              <a:t>토큰 단위 수치 처리 특성상 소수점 정밀 회귀에 부적합</a:t>
-            </a:r>
-          </a:p>
-        </p:txBody>
-      </p:sp>
-      <p:sp>
-        <p:nvSpPr>
-          <p:cNvPr id="8" name="TextBox 7"/>
+              <a:t>토큰 단위 수치 처리 특성상 소수점 회귀에 부적합.</a:t>
+            </a:r>
+          </a:p>
+        </p:txBody>
+      </p:sp>
+      <p:sp>
+        <p:nvSpPr>
+          <p:cNvPr id="9" name="TextBox 8"/>
           <p:cNvSpPr txBox="1"/>
           <p:nvPr/>
         </p:nvSpPr>
         <p:spPr>
           <a:xfrm>
-            <a:off x="6309360" y="1645920"/>
-            <a:ext cx="5394960" cy="365760"/>
+            <a:off x="6400800" y="1783080"/>
+            <a:ext cx="5257800" cy="320040"/>
           </a:xfrm>
           <a:prstGeom prst="rect">
             <a:avLst/>
@@ -6766,7 +6891,7 @@
           <a:noFill/>
         </p:spPr>
         <p:txBody>
-          <a:bodyPr wrap="square" anchor="t" lIns="45720" rIns="45720" tIns="18288" bIns="18288">
+          <a:bodyPr wrap="square" anchor="t" lIns="18288" rIns="18288" tIns="9144" bIns="9144">
             <a:spAutoFit/>
           </a:bodyPr>
           <a:lstStyle/>
@@ -6791,14 +6916,14 @@
       </p:sp>
       <p:cxnSp>
         <p:nvCxnSpPr>
-          <p:cNvPr id="9" name="Connector 8"/>
+          <p:cNvPr id="10" name="Connector 9"/>
           <p:cNvCxnSpPr/>
           <p:nvPr/>
         </p:nvCxnSpPr>
         <p:spPr>
           <a:xfrm>
-            <a:off x="6309360" y="1993392"/>
-            <a:ext cx="5394960" cy="0"/>
+            <a:off x="6400800" y="2121408"/>
+            <a:ext cx="5257800" cy="0"/>
           </a:xfrm>
           <a:prstGeom prst="line">
             <a:avLst/>
@@ -6826,14 +6951,14 @@
       </p:cxnSp>
       <p:sp>
         <p:nvSpPr>
-          <p:cNvPr id="10" name="TextBox 9"/>
+          <p:cNvPr id="11" name="TextBox 10"/>
           <p:cNvSpPr txBox="1"/>
           <p:nvPr/>
         </p:nvSpPr>
         <p:spPr>
           <a:xfrm>
-            <a:off x="6309360" y="2103120"/>
-            <a:ext cx="5394960" cy="3931920"/>
+            <a:off x="6400800" y="2267712"/>
+            <a:ext cx="5257800" cy="2926080"/>
           </a:xfrm>
           <a:prstGeom prst="rect">
             <a:avLst/>
@@ -6841,52 +6966,52 @@
           <a:noFill/>
         </p:spPr>
         <p:txBody>
-          <a:bodyPr wrap="square" anchor="t" lIns="45720" rIns="45720" tIns="18288" bIns="18288">
+          <a:bodyPr wrap="square" anchor="t" lIns="18288" rIns="18288" tIns="9144" bIns="9144">
             <a:spAutoFit/>
           </a:bodyPr>
           <a:lstStyle/>
           <a:p>
             <a:pPr algn="l">
               <a:spcAft>
-                <a:spcPts val="200"/>
-              </a:spcAft>
-            </a:pPr>
-            <a:r>
-              <a:rPr sz="1000" b="0">
+                <a:spcPts val="250"/>
+              </a:spcAft>
+            </a:pPr>
+            <a:r>
+              <a:rPr sz="1050" b="0">
                 <a:solidFill>
                   <a:srgbClr val="262626"/>
                 </a:solidFill>
                 <a:latin typeface="Apple SD Gothic Neo"/>
                 <a:ea typeface="Apple SD Gothic Neo"/>
               </a:rPr>
-              <a:t>사내 어텐션 LSTM 계열(BISTRO 유사 구조)을 당사가 GDP</a:t>
-            </a:r>
-          </a:p>
-          <a:p>
-            <a:pPr algn="l">
-              <a:spcAft>
-                <a:spcPts val="200"/>
-              </a:spcAft>
-            </a:pPr>
-            <a:r>
-              <a:rPr sz="1000" b="0">
+              <a:t>사내 어텐션 LSTM 계열(BISTRO 유사 구조)을 당사가 GDP 과제용</a:t>
+            </a:r>
+          </a:p>
+          <a:p>
+            <a:pPr algn="l">
+              <a:spcAft>
+                <a:spcPts val="250"/>
+              </a:spcAft>
+            </a:pPr>
+            <a:r>
+              <a:rPr sz="1050" b="0">
                 <a:solidFill>
                   <a:srgbClr val="262626"/>
                 </a:solidFill>
                 <a:latin typeface="Apple SD Gothic Neo"/>
                 <a:ea typeface="Apple SD Gothic Neo"/>
               </a:rPr>
-              <a:t>과제용으로 재구현해 동일 규약으로 채점한 결과:</a:t>
-            </a:r>
-          </a:p>
-          <a:p>
-            <a:pPr algn="l">
-              <a:spcAft>
-                <a:spcPts val="200"/>
-              </a:spcAft>
-            </a:pPr>
-            <a:r>
-              <a:rPr sz="300" b="0">
+              <a:t>으로 재구현해 동일 규약으로 채점했습니다.</a:t>
+            </a:r>
+          </a:p>
+          <a:p>
+            <a:pPr algn="l">
+              <a:spcAft>
+                <a:spcPts val="250"/>
+              </a:spcAft>
+            </a:pPr>
+            <a:r>
+              <a:rPr sz="500" b="0">
                 <a:solidFill>
                   <a:srgbClr val="262626"/>
                 </a:solidFill>
@@ -6899,7 +7024,7 @@
           <a:p>
             <a:pPr algn="l">
               <a:spcAft>
-                <a:spcPts val="200"/>
+                <a:spcPts val="250"/>
               </a:spcAft>
             </a:pPr>
             <a:r>
@@ -6916,7 +7041,7 @@
           <a:p>
             <a:pPr algn="l">
               <a:spcAft>
-                <a:spcPts val="200"/>
+                <a:spcPts val="250"/>
               </a:spcAft>
             </a:pPr>
             <a:r>
@@ -6933,7 +7058,7 @@
           <a:p>
             <a:pPr algn="l">
               <a:spcAft>
-                <a:spcPts val="200"/>
+                <a:spcPts val="250"/>
               </a:spcAft>
             </a:pPr>
             <a:r>
@@ -6944,13 +7069,13 @@
                 <a:latin typeface="Apple SD Gothic Neo"/>
                 <a:ea typeface="Apple SD Gothic Neo"/>
               </a:rPr>
-              <a:t>· XGBoost와 오차 상관 0.847 — 동일 패널 소비로</a:t>
-            </a:r>
-          </a:p>
-          <a:p>
-            <a:pPr algn="l">
-              <a:spcAft>
-                <a:spcPts val="200"/>
+              <a:t>· XGBoost와 오차 상관 0.847 — 같은 패널을 소비해 결합</a:t>
+            </a:r>
+          </a:p>
+          <a:p>
+            <a:pPr algn="l">
+              <a:spcAft>
+                <a:spcPts val="250"/>
               </a:spcAft>
             </a:pPr>
             <a:r>
@@ -6961,13 +7086,13 @@
                 <a:latin typeface="Apple SD Gothic Neo"/>
                 <a:ea typeface="Apple SD Gothic Neo"/>
               </a:rPr>
-              <a:t>  결합 다양성 부재 (모든 결합 배합에서 단조 열화)</a:t>
-            </a:r>
-          </a:p>
-          <a:p>
-            <a:pPr algn="l">
-              <a:spcAft>
-                <a:spcPts val="200"/>
+              <a:t>  다양성이 없고, 모든 결합 배합에서 단조 열화</a:t>
+            </a:r>
+          </a:p>
+          <a:p>
+            <a:pPr algn="l">
+              <a:spcAft>
+                <a:spcPts val="250"/>
               </a:spcAft>
             </a:pPr>
             <a:r>
@@ -6978,100 +7103,30 @@
                 <a:latin typeface="Apple SD Gothic Neo"/>
                 <a:ea typeface="Apple SD Gothic Neo"/>
               </a:rPr>
-              <a:t>· 원인: 월 140행 표본으로 다수 파라미터 직접학습</a:t>
-            </a:r>
-          </a:p>
-          <a:p>
-            <a:pPr algn="l">
-              <a:spcAft>
-                <a:spcPts val="200"/>
-              </a:spcAft>
-            </a:pPr>
-            <a:r>
-              <a:rPr sz="500" b="0">
-                <a:solidFill>
-                  <a:srgbClr val="262626"/>
-                </a:solidFill>
-                <a:latin typeface="Apple SD Gothic Neo"/>
-                <a:ea typeface="Apple SD Gothic Neo"/>
-              </a:rPr>
-              <a:t/>
-            </a:r>
-          </a:p>
-          <a:p>
-            <a:pPr algn="l">
-              <a:spcAft>
-                <a:spcPts val="200"/>
-              </a:spcAft>
-            </a:pPr>
-            <a:r>
-              <a:rPr sz="950" b="1">
-                <a:solidFill>
-                  <a:srgbClr val="6B6B6B"/>
-                </a:solidFill>
-                <a:latin typeface="Apple SD Gothic Neo"/>
-                <a:ea typeface="Apple SD Gothic Neo"/>
-              </a:rPr>
-              <a:t>※ 유의: 본 결과는 당사 재구현 이식판에 대한 동일 규약</a:t>
-            </a:r>
-          </a:p>
-          <a:p>
-            <a:pPr algn="l">
-              <a:spcAft>
-                <a:spcPts val="200"/>
-              </a:spcAft>
-            </a:pPr>
-            <a:r>
-              <a:rPr sz="950" b="0">
-                <a:solidFill>
-                  <a:srgbClr val="6B6B6B"/>
-                </a:solidFill>
-                <a:latin typeface="Apple SD Gothic Neo"/>
-                <a:ea typeface="Apple SD Gothic Neo"/>
-              </a:rPr>
-              <a:t>   판정이며, 원 연구·타 과제(물가 등)에서의 성능에 대한</a:t>
-            </a:r>
-          </a:p>
-          <a:p>
-            <a:pPr algn="l">
-              <a:spcAft>
-                <a:spcPts val="200"/>
-              </a:spcAft>
-            </a:pPr>
-            <a:r>
-              <a:rPr sz="950" b="0">
-                <a:solidFill>
-                  <a:srgbClr val="6B6B6B"/>
-                </a:solidFill>
-                <a:latin typeface="Apple SD Gothic Neo"/>
-                <a:ea typeface="Apple SD Gothic Neo"/>
-              </a:rPr>
-              <a:t>   판정이 아님. 원본도 동일 규약 채점 시 공정 비교 가능.</a:t>
-            </a:r>
-          </a:p>
-        </p:txBody>
-      </p:sp>
-      <p:sp>
-        <p:nvSpPr>
-          <p:cNvPr id="11" name="Rectangle 10"/>
+              <a:t>· 원인: 월 140행 표본으로 다수 파라미터를 직접 학습</a:t>
+            </a:r>
+          </a:p>
+        </p:txBody>
+      </p:sp>
+      <p:sp>
+        <p:nvSpPr>
+          <p:cNvPr id="12" name="Rectangle 11"/>
           <p:cNvSpPr/>
           <p:nvPr/>
         </p:nvSpPr>
         <p:spPr>
           <a:xfrm>
-            <a:off x="502920" y="6309360"/>
-            <a:ext cx="11183112" cy="365760"/>
+            <a:off x="6400800" y="5120640"/>
+            <a:ext cx="5257800" cy="868680"/>
           </a:xfrm>
           <a:prstGeom prst="rect">
             <a:avLst/>
           </a:prstGeom>
           <a:solidFill>
-            <a:srgbClr val="F3F4F5"/>
+            <a:srgbClr val="F5F5F4"/>
           </a:solidFill>
-          <a:ln w="9525">
-            <a:solidFill>
-              <a:srgbClr val="C9C9C9"/>
-            </a:solidFill>
+          <a:ln>
+            <a:noFill/>
           </a:ln>
           <a:effectLst/>
         </p:spPr>
@@ -7099,14 +7154,58 @@
       </p:sp>
       <p:sp>
         <p:nvSpPr>
-          <p:cNvPr id="12" name="TextBox 11"/>
+          <p:cNvPr id="13" name="Rectangle 12"/>
+          <p:cNvSpPr/>
+          <p:nvPr/>
+        </p:nvSpPr>
+        <p:spPr>
+          <a:xfrm>
+            <a:off x="6400800" y="5120640"/>
+            <a:ext cx="41148" cy="868680"/>
+          </a:xfrm>
+          <a:prstGeom prst="rect">
+            <a:avLst/>
+          </a:prstGeom>
+          <a:solidFill>
+            <a:srgbClr val="6B6B6B"/>
+          </a:solidFill>
+          <a:ln>
+            <a:noFill/>
+          </a:ln>
+          <a:effectLst/>
+        </p:spPr>
+        <p:style>
+          <a:lnRef idx="1">
+            <a:schemeClr val="accent1"/>
+          </a:lnRef>
+          <a:fillRef idx="3">
+            <a:schemeClr val="accent1"/>
+          </a:fillRef>
+          <a:effectRef idx="2">
+            <a:schemeClr val="accent1"/>
+          </a:effectRef>
+          <a:fontRef idx="minor">
+            <a:schemeClr val="lt1"/>
+          </a:fontRef>
+        </p:style>
+        <p:txBody>
+          <a:bodyPr rtlCol="0" anchor="ctr"/>
+          <a:lstStyle/>
+          <a:p>
+            <a:pPr algn="ctr"/>
+          </a:p>
+        </p:txBody>
+      </p:sp>
+      <p:sp>
+        <p:nvSpPr>
+          <p:cNvPr id="14" name="TextBox 13"/>
           <p:cNvSpPr txBox="1"/>
           <p:nvPr/>
         </p:nvSpPr>
         <p:spPr>
           <a:xfrm>
-            <a:off x="685800" y="6364224"/>
-            <a:ext cx="10881360" cy="256032"/>
+            <a:off x="6583680" y="5212080"/>
+            <a:ext cx="4892040" cy="731520"/>
           </a:xfrm>
           <a:prstGeom prst="rect">
             <a:avLst/>
@@ -7114,25 +7213,139 @@
           <a:noFill/>
         </p:spPr>
         <p:txBody>
-          <a:bodyPr wrap="square" anchor="ctr" lIns="45720" rIns="45720" tIns="18288" bIns="18288">
+          <a:bodyPr wrap="square" anchor="t" lIns="18288" rIns="18288" tIns="9144" bIns="9144">
             <a:spAutoFit/>
           </a:bodyPr>
           <a:lstStyle/>
           <a:p>
             <a:pPr algn="l">
               <a:spcAft>
-                <a:spcPts val="200"/>
-              </a:spcAft>
-            </a:pPr>
-            <a:r>
-              <a:rPr sz="880" b="0">
+                <a:spcPts val="150"/>
+              </a:spcAft>
+            </a:pPr>
+            <a:r>
+              <a:rPr sz="930" b="0">
                 <a:solidFill>
                   <a:srgbClr val="6B6B6B"/>
                 </a:solidFill>
                 <a:latin typeface="Apple SD Gothic Neo"/>
                 <a:ea typeface="Apple SD Gothic Neo"/>
               </a:rPr>
-              <a:t>공통 검증 규약: 실시간 빈티지 · 속보치 기준 · 전망주차 w[-19,-1] 평균 RMSE · 2018Q1~2025Q4 (32개 분기) · 예측단위 개정(schema v2) 반영</a:t>
+              <a:t>유의: 본 결과는 당사 재구현 이식판에 대한 동일 규약 판정이며, 원 연구나</a:t>
+            </a:r>
+          </a:p>
+          <a:p>
+            <a:pPr algn="l">
+              <a:spcAft>
+                <a:spcPts val="150"/>
+              </a:spcAft>
+            </a:pPr>
+            <a:r>
+              <a:rPr sz="930" b="0">
+                <a:solidFill>
+                  <a:srgbClr val="6B6B6B"/>
+                </a:solidFill>
+                <a:latin typeface="Apple SD Gothic Neo"/>
+                <a:ea typeface="Apple SD Gothic Neo"/>
+              </a:rPr>
+              <a:t>타 과제(물가 등) 성능에 대한 판정이 아닙니다. 원본도 동일 규약으로 채점</a:t>
+            </a:r>
+          </a:p>
+          <a:p>
+            <a:pPr algn="l">
+              <a:spcAft>
+                <a:spcPts val="150"/>
+              </a:spcAft>
+            </a:pPr>
+            <a:r>
+              <a:rPr sz="930" b="0">
+                <a:solidFill>
+                  <a:srgbClr val="6B6B6B"/>
+                </a:solidFill>
+                <a:latin typeface="Apple SD Gothic Neo"/>
+                <a:ea typeface="Apple SD Gothic Neo"/>
+              </a:rPr>
+              <a:t>하면 공정 비교가 가능합니다.</a:t>
+            </a:r>
+          </a:p>
+        </p:txBody>
+      </p:sp>
+      <p:sp>
+        <p:nvSpPr>
+          <p:cNvPr id="15" name="TextBox 14"/>
+          <p:cNvSpPr txBox="1"/>
+          <p:nvPr/>
+        </p:nvSpPr>
+        <p:spPr>
+          <a:xfrm>
+            <a:off x="548640" y="6455664"/>
+            <a:ext cx="9875520" cy="274320"/>
+          </a:xfrm>
+          <a:prstGeom prst="rect">
+            <a:avLst/>
+          </a:prstGeom>
+          <a:noFill/>
+        </p:spPr>
+        <p:txBody>
+          <a:bodyPr wrap="square" anchor="t" lIns="18288" rIns="18288" tIns="9144" bIns="9144">
+            <a:spAutoFit/>
+          </a:bodyPr>
+          <a:lstStyle/>
+          <a:p>
+            <a:pPr algn="l">
+              <a:spcAft>
+                <a:spcPts val="200"/>
+              </a:spcAft>
+            </a:pPr>
+            <a:r>
+              <a:rPr sz="800" b="0">
+                <a:solidFill>
+                  <a:srgbClr val="6B6B6B"/>
+                </a:solidFill>
+                <a:latin typeface="Apple SD Gothic Neo"/>
+                <a:ea typeface="Apple SD Gothic Neo"/>
+              </a:rPr>
+              <a:t>주: 실시간 빈티지 · 속보치 기준 · 전망주차 w[-19,-1] 평균 RMSE · 2018Q1~2025Q4(32개 분기) · 예측단위 개정(schema v2) 반영. 낮을수록 정확.</a:t>
+            </a:r>
+          </a:p>
+        </p:txBody>
+      </p:sp>
+      <p:sp>
+        <p:nvSpPr>
+          <p:cNvPr id="16" name="TextBox 15"/>
+          <p:cNvSpPr txBox="1"/>
+          <p:nvPr/>
+        </p:nvSpPr>
+        <p:spPr>
+          <a:xfrm>
+            <a:off x="11292840" y="6455664"/>
+            <a:ext cx="457200" cy="274320"/>
+          </a:xfrm>
+          <a:prstGeom prst="rect">
+            <a:avLst/>
+          </a:prstGeom>
+          <a:noFill/>
+        </p:spPr>
+        <p:txBody>
+          <a:bodyPr wrap="square" anchor="t" lIns="18288" rIns="18288" tIns="9144" bIns="9144">
+            <a:spAutoFit/>
+          </a:bodyPr>
+          <a:lstStyle/>
+          <a:p>
+            <a:pPr algn="r">
+              <a:spcAft>
+                <a:spcPts val="200"/>
+              </a:spcAft>
+            </a:pPr>
+            <a:r>
+              <a:rPr sz="900" b="0">
+                <a:solidFill>
+                  <a:srgbClr val="6B6B6B"/>
+                </a:solidFill>
+                <a:latin typeface="Apple SD Gothic Neo"/>
+                <a:ea typeface="Apple SD Gothic Neo"/>
+              </a:rPr>
+              <a:t>5</a:t>
             </a:r>
           </a:p>
         </p:txBody>
@@ -7163,8 +7376,8 @@
         </p:nvSpPr>
         <p:spPr>
           <a:xfrm>
-            <a:off x="502920" y="274320"/>
-            <a:ext cx="11155680" cy="502920"/>
+            <a:off x="548640" y="292608"/>
+            <a:ext cx="10515600" cy="274320"/>
           </a:xfrm>
           <a:prstGeom prst="rect">
             <a:avLst/>
@@ -7172,7 +7385,7 @@
           <a:noFill/>
         </p:spPr>
         <p:txBody>
-          <a:bodyPr wrap="square" anchor="t" lIns="45720" rIns="45720" tIns="18288" bIns="18288">
+          <a:bodyPr wrap="square" anchor="t" lIns="18288" rIns="18288" tIns="9144" bIns="9144">
             <a:spAutoFit/>
           </a:bodyPr>
           <a:lstStyle/>
@@ -7183,43 +7396,73 @@
               </a:spcAft>
             </a:pPr>
             <a:r>
-              <a:rPr sz="1900" b="1">
-                <a:solidFill>
-                  <a:srgbClr val="008A3E"/>
-                </a:solidFill>
-                <a:latin typeface="Apple SD Gothic Neo"/>
-                <a:ea typeface="Apple SD Gothic Neo"/>
-              </a:rPr>
-              <a:t>05  </a:t>
-            </a:r>
-            <a:r>
-              <a:rPr sz="1900" b="1">
+              <a:rPr sz="1050" b="1">
+                <a:solidFill>
+                  <a:srgbClr val="6B6B6B"/>
+                </a:solidFill>
+                <a:latin typeface="Apple SD Gothic Neo"/>
+                <a:ea typeface="Apple SD Gothic Neo"/>
+              </a:rPr>
+              <a:t>5  |  트랜스포머류(파운데이션 모델)</a:t>
+            </a:r>
+          </a:p>
+        </p:txBody>
+      </p:sp>
+      <p:sp>
+        <p:nvSpPr>
+          <p:cNvPr id="3" name="TextBox 2"/>
+          <p:cNvSpPr txBox="1"/>
+          <p:nvPr/>
+        </p:nvSpPr>
+        <p:spPr>
+          <a:xfrm>
+            <a:off x="548640" y="548640"/>
+            <a:ext cx="11064240" cy="548640"/>
+          </a:xfrm>
+          <a:prstGeom prst="rect">
+            <a:avLst/>
+          </a:prstGeom>
+          <a:noFill/>
+        </p:spPr>
+        <p:txBody>
+          <a:bodyPr wrap="square" anchor="t" lIns="18288" rIns="18288" tIns="9144" bIns="9144">
+            <a:spAutoFit/>
+          </a:bodyPr>
+          <a:lstStyle/>
+          <a:p>
+            <a:pPr algn="l">
+              <a:spcAft>
+                <a:spcPts val="200"/>
+              </a:spcAft>
+            </a:pPr>
+            <a:r>
+              <a:rPr sz="1700" b="1">
                 <a:solidFill>
                   <a:srgbClr val="243447"/>
                 </a:solidFill>
                 <a:latin typeface="Apple SD Gothic Neo"/>
                 <a:ea typeface="Apple SD Gothic Neo"/>
               </a:rPr>
-              <a:t>트랜스포머류(파운데이션 모델)가 점 예측에 기여하기 어려운 이유</a:t>
+              <a:t>점 예측의 대체재는 아니지만, 조건부 보완재로는 유효합니다</a:t>
             </a:r>
           </a:p>
         </p:txBody>
       </p:sp>
       <p:cxnSp>
         <p:nvCxnSpPr>
-          <p:cNvPr id="3" name="Connector 2"/>
+          <p:cNvPr id="4" name="Connector 3"/>
           <p:cNvCxnSpPr/>
           <p:nvPr/>
         </p:nvCxnSpPr>
         <p:spPr>
           <a:xfrm>
-            <a:off x="502920" y="841248"/>
-            <a:ext cx="11183112" cy="0"/>
+            <a:off x="548640" y="1115568"/>
+            <a:ext cx="11091672" cy="0"/>
           </a:xfrm>
           <a:prstGeom prst="line">
             <a:avLst/>
           </a:prstGeom>
-          <a:ln w="20320">
+          <a:ln w="15240">
             <a:solidFill>
               <a:srgbClr val="243447"/>
             </a:solidFill>
@@ -7242,25 +7485,458 @@
       </p:cxnSp>
       <p:sp>
         <p:nvSpPr>
-          <p:cNvPr id="4" name="Rounded Rectangle 3"/>
-          <p:cNvSpPr/>
-          <p:nvPr/>
-        </p:nvSpPr>
-        <p:spPr>
-          <a:xfrm>
-            <a:off x="502920" y="1188720"/>
-            <a:ext cx="6858000" cy="1115568"/>
-          </a:xfrm>
-          <a:prstGeom prst="roundRect">
-            <a:avLst/>
-          </a:prstGeom>
-          <a:solidFill>
-            <a:srgbClr val="F3F4F5"/>
-          </a:solidFill>
-          <a:ln w="9525">
+          <p:cNvPr id="5" name="TextBox 4"/>
+          <p:cNvSpPr txBox="1"/>
+          <p:nvPr/>
+        </p:nvSpPr>
+        <p:spPr>
+          <a:xfrm>
+            <a:off x="548640" y="1463040"/>
+            <a:ext cx="6583680" cy="320040"/>
+          </a:xfrm>
+          <a:prstGeom prst="rect">
+            <a:avLst/>
+          </a:prstGeom>
+          <a:noFill/>
+        </p:spPr>
+        <p:txBody>
+          <a:bodyPr wrap="square" anchor="t" lIns="18288" rIns="18288" tIns="9144" bIns="9144">
+            <a:spAutoFit/>
+          </a:bodyPr>
+          <a:lstStyle/>
+          <a:p>
+            <a:pPr algn="l">
+              <a:spcAft>
+                <a:spcPts val="200"/>
+              </a:spcAft>
+            </a:pPr>
+            <a:r>
+              <a:rPr sz="1250" b="1">
+                <a:solidFill>
+                  <a:srgbClr val="243447"/>
+                </a:solidFill>
+                <a:latin typeface="Apple SD Gothic Neo"/>
+                <a:ea typeface="Apple SD Gothic Neo"/>
+              </a:rPr>
+              <a:t>점 예측에 기여하기 어려운 네 가지 이유</a:t>
+            </a:r>
+          </a:p>
+        </p:txBody>
+      </p:sp>
+      <p:cxnSp>
+        <p:nvCxnSpPr>
+          <p:cNvPr id="6" name="Connector 5"/>
+          <p:cNvCxnSpPr/>
+          <p:nvPr/>
+        </p:nvCxnSpPr>
+        <p:spPr>
+          <a:xfrm>
+            <a:off x="548640" y="1801368"/>
+            <a:ext cx="6583680" cy="0"/>
+          </a:xfrm>
+          <a:prstGeom prst="line">
+            <a:avLst/>
+          </a:prstGeom>
+          <a:ln w="12700">
             <a:solidFill>
               <a:srgbClr val="C9C9C9"/>
             </a:solidFill>
+          </a:ln>
+        </p:spPr>
+        <p:style>
+          <a:lnRef idx="2">
+            <a:schemeClr val="accent1"/>
+          </a:lnRef>
+          <a:fillRef idx="0">
+            <a:schemeClr val="accent1"/>
+          </a:fillRef>
+          <a:effectRef idx="1">
+            <a:schemeClr val="accent1"/>
+          </a:effectRef>
+          <a:fontRef idx="minor">
+            <a:schemeClr val="tx1"/>
+          </a:fontRef>
+        </p:style>
+      </p:cxnSp>
+      <p:sp>
+        <p:nvSpPr>
+          <p:cNvPr id="7" name="TextBox 6"/>
+          <p:cNvSpPr txBox="1"/>
+          <p:nvPr/>
+        </p:nvSpPr>
+        <p:spPr>
+          <a:xfrm>
+            <a:off x="548640" y="1938528"/>
+            <a:ext cx="6583680" cy="320040"/>
+          </a:xfrm>
+          <a:prstGeom prst="rect">
+            <a:avLst/>
+          </a:prstGeom>
+          <a:noFill/>
+        </p:spPr>
+        <p:txBody>
+          <a:bodyPr wrap="square" anchor="t" lIns="18288" rIns="18288" tIns="9144" bIns="9144">
+            <a:spAutoFit/>
+          </a:bodyPr>
+          <a:lstStyle/>
+          <a:p>
+            <a:pPr algn="l">
+              <a:spcAft>
+                <a:spcPts val="200"/>
+              </a:spcAft>
+            </a:pPr>
+            <a:r>
+              <a:rPr sz="1200" b="1">
+                <a:solidFill>
+                  <a:srgbClr val="B0532F"/>
+                </a:solidFill>
+                <a:latin typeface="Apple SD Gothic Neo"/>
+                <a:ea typeface="Apple SD Gothic Neo"/>
+              </a:rPr>
+              <a:t>1  </a:t>
+            </a:r>
+            <a:r>
+              <a:rPr sz="1100" b="1">
+                <a:solidFill>
+                  <a:srgbClr val="262626"/>
+                </a:solidFill>
+                <a:latin typeface="Apple SD Gothic Neo"/>
+                <a:ea typeface="Apple SD Gothic Neo"/>
+              </a:rPr>
+              <a:t>소표본 정형 데이터는 GBDT의 영역입니다.</a:t>
+            </a:r>
+          </a:p>
+        </p:txBody>
+      </p:sp>
+      <p:sp>
+        <p:nvSpPr>
+          <p:cNvPr id="8" name="TextBox 7"/>
+          <p:cNvSpPr txBox="1"/>
+          <p:nvPr/>
+        </p:nvSpPr>
+        <p:spPr>
+          <a:xfrm>
+            <a:off x="804672" y="2249424"/>
+            <a:ext cx="6309360" cy="548640"/>
+          </a:xfrm>
+          <a:prstGeom prst="rect">
+            <a:avLst/>
+          </a:prstGeom>
+          <a:noFill/>
+        </p:spPr>
+        <p:txBody>
+          <a:bodyPr wrap="square" anchor="t" lIns="18288" rIns="18288" tIns="9144" bIns="9144">
+            <a:spAutoFit/>
+          </a:bodyPr>
+          <a:lstStyle/>
+          <a:p>
+            <a:pPr algn="l">
+              <a:spcAft>
+                <a:spcPts val="200"/>
+              </a:spcAft>
+            </a:pPr>
+            <a:r>
+              <a:rPr sz="980" b="0">
+                <a:solidFill>
+                  <a:srgbClr val="262626"/>
+                </a:solidFill>
+                <a:latin typeface="Apple SD Gothic Neo"/>
+                <a:ea typeface="Apple SD Gothic Neo"/>
+              </a:rPr>
+              <a:t>월 140행·지표 34종 조건에서 튜닝된 트리 모델의 우위는 문헌 일반 결과(Grinsztajn et al., NeurIPS 2022)와 당사 실측(직접학습 신경망 전멸)이 일치합니다.</a:t>
+            </a:r>
+          </a:p>
+        </p:txBody>
+      </p:sp>
+      <p:sp>
+        <p:nvSpPr>
+          <p:cNvPr id="9" name="TextBox 8"/>
+          <p:cNvSpPr txBox="1"/>
+          <p:nvPr/>
+        </p:nvSpPr>
+        <p:spPr>
+          <a:xfrm>
+            <a:off x="548640" y="2971800"/>
+            <a:ext cx="6583680" cy="320040"/>
+          </a:xfrm>
+          <a:prstGeom prst="rect">
+            <a:avLst/>
+          </a:prstGeom>
+          <a:noFill/>
+        </p:spPr>
+        <p:txBody>
+          <a:bodyPr wrap="square" anchor="t" lIns="18288" rIns="18288" tIns="9144" bIns="9144">
+            <a:spAutoFit/>
+          </a:bodyPr>
+          <a:lstStyle/>
+          <a:p>
+            <a:pPr algn="l">
+              <a:spcAft>
+                <a:spcPts val="200"/>
+              </a:spcAft>
+            </a:pPr>
+            <a:r>
+              <a:rPr sz="1200" b="1">
+                <a:solidFill>
+                  <a:srgbClr val="B0532F"/>
+                </a:solidFill>
+                <a:latin typeface="Apple SD Gothic Neo"/>
+                <a:ea typeface="Apple SD Gothic Neo"/>
+              </a:rPr>
+              <a:t>2  </a:t>
+            </a:r>
+            <a:r>
+              <a:rPr sz="1100" b="1">
+                <a:solidFill>
+                  <a:srgbClr val="262626"/>
+                </a:solidFill>
+                <a:latin typeface="Apple SD Gothic Neo"/>
+                <a:ea typeface="Apple SD Gothic Neo"/>
+              </a:rPr>
+              <a:t>사전학습 지식은 한국 거시 구조가 아닙니다.</a:t>
+            </a:r>
+          </a:p>
+        </p:txBody>
+      </p:sp>
+      <p:sp>
+        <p:nvSpPr>
+          <p:cNvPr id="10" name="TextBox 9"/>
+          <p:cNvSpPr txBox="1"/>
+          <p:nvPr/>
+        </p:nvSpPr>
+        <p:spPr>
+          <a:xfrm>
+            <a:off x="804672" y="3282696"/>
+            <a:ext cx="6309360" cy="548640"/>
+          </a:xfrm>
+          <a:prstGeom prst="rect">
+            <a:avLst/>
+          </a:prstGeom>
+          <a:noFill/>
+        </p:spPr>
+        <p:txBody>
+          <a:bodyPr wrap="square" anchor="t" lIns="18288" rIns="18288" tIns="9144" bIns="9144">
+            <a:spAutoFit/>
+          </a:bodyPr>
+          <a:lstStyle/>
+          <a:p>
+            <a:pPr algn="l">
+              <a:spcAft>
+                <a:spcPts val="200"/>
+              </a:spcAft>
+            </a:pPr>
+            <a:r>
+              <a:rPr sz="980" b="0">
+                <a:solidFill>
+                  <a:srgbClr val="262626"/>
+                </a:solidFill>
+                <a:latin typeface="Apple SD Gothic Neo"/>
+                <a:ea typeface="Apple SD Gothic Neo"/>
+              </a:rPr>
+              <a:t>파운데이션 모델이 배운 것은 추세·계절성 같은 시계열의 보편 문법입니다. 지표 간 인과나 한국 특수성은 없고, 공변량 소화력도 XGBoost(34종 비선형)에 미달합니다.</a:t>
+            </a:r>
+          </a:p>
+        </p:txBody>
+      </p:sp>
+      <p:sp>
+        <p:nvSpPr>
+          <p:cNvPr id="11" name="TextBox 10"/>
+          <p:cNvSpPr txBox="1"/>
+          <p:nvPr/>
+        </p:nvSpPr>
+        <p:spPr>
+          <a:xfrm>
+            <a:off x="548640" y="4005072"/>
+            <a:ext cx="6583680" cy="320040"/>
+          </a:xfrm>
+          <a:prstGeom prst="rect">
+            <a:avLst/>
+          </a:prstGeom>
+          <a:noFill/>
+        </p:spPr>
+        <p:txBody>
+          <a:bodyPr wrap="square" anchor="t" lIns="18288" rIns="18288" tIns="9144" bIns="9144">
+            <a:spAutoFit/>
+          </a:bodyPr>
+          <a:lstStyle/>
+          <a:p>
+            <a:pPr algn="l">
+              <a:spcAft>
+                <a:spcPts val="200"/>
+              </a:spcAft>
+            </a:pPr>
+            <a:r>
+              <a:rPr sz="1200" b="1">
+                <a:solidFill>
+                  <a:srgbClr val="B0532F"/>
+                </a:solidFill>
+                <a:latin typeface="Apple SD Gothic Neo"/>
+                <a:ea typeface="Apple SD Gothic Neo"/>
+              </a:rPr>
+              <a:t>3  </a:t>
+            </a:r>
+            <a:r>
+              <a:rPr sz="1100" b="1">
+                <a:solidFill>
+                  <a:srgbClr val="262626"/>
+                </a:solidFill>
+                <a:latin typeface="Apple SD Gothic Neo"/>
+                <a:ea typeface="Apple SD Gothic Neo"/>
+              </a:rPr>
+              <a:t>병목은 모델이 아니라 정보입니다.</a:t>
+            </a:r>
+          </a:p>
+        </p:txBody>
+      </p:sp>
+      <p:sp>
+        <p:nvSpPr>
+          <p:cNvPr id="12" name="TextBox 11"/>
+          <p:cNvSpPr txBox="1"/>
+          <p:nvPr/>
+        </p:nvSpPr>
+        <p:spPr>
+          <a:xfrm>
+            <a:off x="804672" y="4315968"/>
+            <a:ext cx="6309360" cy="548640"/>
+          </a:xfrm>
+          <a:prstGeom prst="rect">
+            <a:avLst/>
+          </a:prstGeom>
+          <a:noFill/>
+        </p:spPr>
+        <p:txBody>
+          <a:bodyPr wrap="square" anchor="t" lIns="18288" rIns="18288" tIns="9144" bIns="9144">
+            <a:spAutoFit/>
+          </a:bodyPr>
+          <a:lstStyle/>
+          <a:p>
+            <a:pPr algn="l">
+              <a:spcAft>
+                <a:spcPts val="200"/>
+              </a:spcAft>
+            </a:pPr>
+            <a:r>
+              <a:rPr sz="980" b="0">
+                <a:solidFill>
+                  <a:srgbClr val="262626"/>
+                </a:solidFill>
+                <a:latin typeface="Apple SD Gothic Neo"/>
+                <a:ea typeface="Apple SD Gothic Neo"/>
+              </a:rPr>
+              <a:t>합성데이터로 추가 미세조정해도 예측이 거의 변하지 않았습니다(상관 0.990) — 입력 패널이 가진 정보 자체가 상한입니다.</a:t>
+            </a:r>
+          </a:p>
+        </p:txBody>
+      </p:sp>
+      <p:sp>
+        <p:nvSpPr>
+          <p:cNvPr id="13" name="TextBox 12"/>
+          <p:cNvSpPr txBox="1"/>
+          <p:nvPr/>
+        </p:nvSpPr>
+        <p:spPr>
+          <a:xfrm>
+            <a:off x="548640" y="5038344"/>
+            <a:ext cx="6583680" cy="320040"/>
+          </a:xfrm>
+          <a:prstGeom prst="rect">
+            <a:avLst/>
+          </a:prstGeom>
+          <a:noFill/>
+        </p:spPr>
+        <p:txBody>
+          <a:bodyPr wrap="square" anchor="t" lIns="18288" rIns="18288" tIns="9144" bIns="9144">
+            <a:spAutoFit/>
+          </a:bodyPr>
+          <a:lstStyle/>
+          <a:p>
+            <a:pPr algn="l">
+              <a:spcAft>
+                <a:spcPts val="200"/>
+              </a:spcAft>
+            </a:pPr>
+            <a:r>
+              <a:rPr sz="1200" b="1">
+                <a:solidFill>
+                  <a:srgbClr val="B0532F"/>
+                </a:solidFill>
+                <a:latin typeface="Apple SD Gothic Neo"/>
+                <a:ea typeface="Apple SD Gothic Neo"/>
+              </a:rPr>
+              <a:t>4  </a:t>
+            </a:r>
+            <a:r>
+              <a:rPr sz="1100" b="1">
+                <a:solidFill>
+                  <a:srgbClr val="262626"/>
+                </a:solidFill>
+                <a:latin typeface="Apple SD Gothic Neo"/>
+                <a:ea typeface="Apple SD Gothic Neo"/>
+              </a:rPr>
+              <a:t>분포 출력은 그대로 쓸 수 없습니다.</a:t>
+            </a:r>
+          </a:p>
+        </p:txBody>
+      </p:sp>
+      <p:sp>
+        <p:nvSpPr>
+          <p:cNvPr id="14" name="TextBox 13"/>
+          <p:cNvSpPr txBox="1"/>
+          <p:nvPr/>
+        </p:nvSpPr>
+        <p:spPr>
+          <a:xfrm>
+            <a:off x="804672" y="5349240"/>
+            <a:ext cx="6309360" cy="548640"/>
+          </a:xfrm>
+          <a:prstGeom prst="rect">
+            <a:avLst/>
+          </a:prstGeom>
+          <a:noFill/>
+        </p:spPr>
+        <p:txBody>
+          <a:bodyPr wrap="square" anchor="t" lIns="18288" rIns="18288" tIns="9144" bIns="9144">
+            <a:spAutoFit/>
+          </a:bodyPr>
+          <a:lstStyle/>
+          <a:p>
+            <a:pPr algn="l">
+              <a:spcAft>
+                <a:spcPts val="200"/>
+              </a:spcAft>
+            </a:pPr>
+            <a:r>
+              <a:rPr sz="980" b="0">
+                <a:solidFill>
+                  <a:srgbClr val="262626"/>
+                </a:solidFill>
+                <a:latin typeface="Apple SD Gothic Neo"/>
+                <a:ea typeface="Apple SD Gothic Neo"/>
+              </a:rPr>
+              <a:t>원시 분위수의 실측 커버리지는 49%(명목 80%) — 과소산포로, 사후 보정이 필수입니다.</a:t>
+            </a:r>
+          </a:p>
+        </p:txBody>
+      </p:sp>
+      <p:sp>
+        <p:nvSpPr>
+          <p:cNvPr id="15" name="Rectangle 14"/>
+          <p:cNvSpPr/>
+          <p:nvPr/>
+        </p:nvSpPr>
+        <p:spPr>
+          <a:xfrm>
+            <a:off x="7543800" y="1463040"/>
+            <a:ext cx="4114800" cy="4526280"/>
+          </a:xfrm>
+          <a:prstGeom prst="rect">
+            <a:avLst/>
+          </a:prstGeom>
+          <a:solidFill>
+            <a:srgbClr val="EEF5F0"/>
+          </a:solidFill>
+          <a:ln>
+            <a:noFill/>
           </a:ln>
           <a:effectLst/>
         </p:spPr>
@@ -7288,145 +7964,23 @@
       </p:sp>
       <p:sp>
         <p:nvSpPr>
-          <p:cNvPr id="5" name="TextBox 4"/>
-          <p:cNvSpPr txBox="1"/>
-          <p:nvPr/>
-        </p:nvSpPr>
-        <p:spPr>
-          <a:xfrm>
-            <a:off x="713232" y="1298448"/>
-            <a:ext cx="457200" cy="365760"/>
-          </a:xfrm>
-          <a:prstGeom prst="rect">
-            <a:avLst/>
-          </a:prstGeom>
-          <a:noFill/>
-        </p:spPr>
-        <p:txBody>
-          <a:bodyPr wrap="square" anchor="t" lIns="45720" rIns="45720" tIns="18288" bIns="18288">
-            <a:spAutoFit/>
-          </a:bodyPr>
-          <a:lstStyle/>
-          <a:p>
-            <a:pPr algn="l">
-              <a:spcAft>
-                <a:spcPts val="200"/>
-              </a:spcAft>
-            </a:pPr>
-            <a:r>
-              <a:rPr sz="1400" b="1">
-                <a:solidFill>
-                  <a:srgbClr val="B0532F"/>
-                </a:solidFill>
-                <a:latin typeface="Apple SD Gothic Neo"/>
-                <a:ea typeface="Apple SD Gothic Neo"/>
-              </a:rPr>
-              <a:t>1</a:t>
-            </a:r>
-          </a:p>
-        </p:txBody>
-      </p:sp>
-      <p:sp>
-        <p:nvSpPr>
-          <p:cNvPr id="6" name="TextBox 5"/>
-          <p:cNvSpPr txBox="1"/>
-          <p:nvPr/>
-        </p:nvSpPr>
-        <p:spPr>
-          <a:xfrm>
-            <a:off x="1234440" y="1307592"/>
-            <a:ext cx="5943600" cy="320040"/>
-          </a:xfrm>
-          <a:prstGeom prst="rect">
-            <a:avLst/>
-          </a:prstGeom>
-          <a:noFill/>
-        </p:spPr>
-        <p:txBody>
-          <a:bodyPr wrap="square" anchor="t" lIns="45720" rIns="45720" tIns="18288" bIns="18288">
-            <a:spAutoFit/>
-          </a:bodyPr>
-          <a:lstStyle/>
-          <a:p>
-            <a:pPr algn="l">
-              <a:spcAft>
-                <a:spcPts val="200"/>
-              </a:spcAft>
-            </a:pPr>
-            <a:r>
-              <a:rPr sz="1150" b="1">
-                <a:solidFill>
-                  <a:srgbClr val="243447"/>
-                </a:solidFill>
-                <a:latin typeface="Apple SD Gothic Neo"/>
-                <a:ea typeface="Apple SD Gothic Neo"/>
-              </a:rPr>
-              <a:t>소표본 정형 데이터는 GBDT의 영역</a:t>
-            </a:r>
-          </a:p>
-        </p:txBody>
-      </p:sp>
-      <p:sp>
-        <p:nvSpPr>
-          <p:cNvPr id="7" name="TextBox 6"/>
-          <p:cNvSpPr txBox="1"/>
-          <p:nvPr/>
-        </p:nvSpPr>
-        <p:spPr>
-          <a:xfrm>
-            <a:off x="1234440" y="1645920"/>
-            <a:ext cx="5989320" cy="594360"/>
-          </a:xfrm>
-          <a:prstGeom prst="rect">
-            <a:avLst/>
-          </a:prstGeom>
-          <a:noFill/>
-        </p:spPr>
-        <p:txBody>
-          <a:bodyPr wrap="square" anchor="t" lIns="45720" rIns="45720" tIns="18288" bIns="18288">
-            <a:spAutoFit/>
-          </a:bodyPr>
-          <a:lstStyle/>
-          <a:p>
-            <a:pPr algn="l">
-              <a:spcAft>
-                <a:spcPts val="200"/>
-              </a:spcAft>
-            </a:pPr>
-            <a:r>
-              <a:rPr sz="950" b="0">
-                <a:solidFill>
-                  <a:srgbClr val="262626"/>
-                </a:solidFill>
-                <a:latin typeface="Apple SD Gothic Neo"/>
-                <a:ea typeface="Apple SD Gothic Neo"/>
-              </a:rPr>
-              <a:t>월 140행·지표 34종 조건에서 튜닝된 트리 모델 우위는 문헌 일반 결과(Grinsztajn et al., NeurIPS 2022)와 당사 실측(직접학습 신경망 전멸)이 일치</a:t>
-            </a:r>
-          </a:p>
-        </p:txBody>
-      </p:sp>
-      <p:sp>
-        <p:nvSpPr>
-          <p:cNvPr id="8" name="Rounded Rectangle 7"/>
+          <p:cNvPr id="16" name="Rectangle 15"/>
           <p:cNvSpPr/>
           <p:nvPr/>
         </p:nvSpPr>
         <p:spPr>
           <a:xfrm>
-            <a:off x="502920" y="2432304"/>
-            <a:ext cx="6858000" cy="1115568"/>
-          </a:xfrm>
-          <a:prstGeom prst="roundRect">
+            <a:off x="7543800" y="1463040"/>
+            <a:ext cx="41148" cy="4526280"/>
+          </a:xfrm>
+          <a:prstGeom prst="rect">
             <a:avLst/>
           </a:prstGeom>
           <a:solidFill>
-            <a:srgbClr val="F3F4F5"/>
+            <a:srgbClr val="008A3E"/>
           </a:solidFill>
-          <a:ln w="9525">
-            <a:solidFill>
-              <a:srgbClr val="C9C9C9"/>
-            </a:solidFill>
+          <a:ln>
+            <a:noFill/>
           </a:ln>
           <a:effectLst/>
         </p:spPr>
@@ -7454,14 +8008,14 @@
       </p:sp>
       <p:sp>
         <p:nvSpPr>
-          <p:cNvPr id="9" name="TextBox 8"/>
+          <p:cNvPr id="17" name="TextBox 16"/>
           <p:cNvSpPr txBox="1"/>
           <p:nvPr/>
         </p:nvSpPr>
         <p:spPr>
           <a:xfrm>
-            <a:off x="713232" y="2542032"/>
-            <a:ext cx="457200" cy="365760"/>
+            <a:off x="7772400" y="1627632"/>
+            <a:ext cx="3703320" cy="4206240"/>
           </a:xfrm>
           <a:prstGeom prst="rect">
             <a:avLst/>
@@ -7469,7 +8023,7 @@
           <a:noFill/>
         </p:spPr>
         <p:txBody>
-          <a:bodyPr wrap="square" anchor="t" lIns="45720" rIns="45720" tIns="18288" bIns="18288">
+          <a:bodyPr wrap="square" anchor="t" lIns="18288" rIns="18288" tIns="9144" bIns="9144">
             <a:spAutoFit/>
           </a:bodyPr>
           <a:lstStyle/>
@@ -7480,28 +8034,296 @@
               </a:spcAft>
             </a:pPr>
             <a:r>
-              <a:rPr sz="1400" b="1">
-                <a:solidFill>
-                  <a:srgbClr val="B0532F"/>
-                </a:solidFill>
-                <a:latin typeface="Apple SD Gothic Neo"/>
-                <a:ea typeface="Apple SD Gothic Neo"/>
-              </a:rPr>
-              <a:t>2</a:t>
-            </a:r>
-          </a:p>
-        </p:txBody>
-      </p:sp>
-      <p:sp>
-        <p:nvSpPr>
-          <p:cNvPr id="10" name="TextBox 9"/>
+              <a:rPr sz="1250" b="1">
+                <a:solidFill>
+                  <a:srgbClr val="008A3E"/>
+                </a:solidFill>
+                <a:latin typeface="Apple SD Gothic Neo"/>
+                <a:ea typeface="Apple SD Gothic Neo"/>
+              </a:rPr>
+              <a:t>그럼에도 기여가 확인된 지점</a:t>
+            </a:r>
+          </a:p>
+          <a:p>
+            <a:pPr algn="l">
+              <a:spcAft>
+                <a:spcPts val="200"/>
+              </a:spcAft>
+            </a:pPr>
+            <a:r>
+              <a:rPr sz="500" b="0">
+                <a:solidFill>
+                  <a:srgbClr val="262626"/>
+                </a:solidFill>
+                <a:latin typeface="Apple SD Gothic Neo"/>
+                <a:ea typeface="Apple SD Gothic Neo"/>
+              </a:rPr>
+              <a:t/>
+            </a:r>
+          </a:p>
+          <a:p>
+            <a:pPr algn="l">
+              <a:spcAft>
+                <a:spcPts val="200"/>
+              </a:spcAft>
+            </a:pPr>
+            <a:r>
+              <a:rPr sz="1050" b="1">
+                <a:solidFill>
+                  <a:srgbClr val="262626"/>
+                </a:solidFill>
+                <a:latin typeface="Apple SD Gothic Neo"/>
+                <a:ea typeface="Apple SD Gothic Neo"/>
+              </a:rPr>
+              <a:t>정보 빈곤 구간. </a:t>
+            </a:r>
+            <a:r>
+              <a:rPr sz="1050" b="0">
+                <a:solidFill>
+                  <a:srgbClr val="262626"/>
+                </a:solidFill>
+                <a:latin typeface="Apple SD Gothic Neo"/>
+                <a:ea typeface="Apple SD Gothic Neo"/>
+              </a:rPr>
+              <a:t>발표 19~14주 전 —</a:t>
+            </a:r>
+          </a:p>
+          <a:p>
+            <a:pPr algn="l">
+              <a:spcAft>
+                <a:spcPts val="200"/>
+              </a:spcAft>
+            </a:pPr>
+            <a:r>
+              <a:rPr sz="1050" b="0">
+                <a:solidFill>
+                  <a:srgbClr val="262626"/>
+                </a:solidFill>
+                <a:latin typeface="Apple SD Gothic Neo"/>
+                <a:ea typeface="Apple SD Gothic Neo"/>
+              </a:rPr>
+              <a:t>공식지표 공백기를 세계 지식과 일별 신호로</a:t>
+            </a:r>
+          </a:p>
+          <a:p>
+            <a:pPr algn="l">
+              <a:spcAft>
+                <a:spcPts val="200"/>
+              </a:spcAft>
+            </a:pPr>
+            <a:r>
+              <a:rPr sz="1050" b="0">
+                <a:solidFill>
+                  <a:srgbClr val="262626"/>
+                </a:solidFill>
+                <a:latin typeface="Apple SD Gothic Neo"/>
+                <a:ea typeface="Apple SD Gothic Neo"/>
+              </a:rPr>
+              <a:t>보완합니다(3장).</a:t>
+            </a:r>
+          </a:p>
+          <a:p>
+            <a:pPr algn="l">
+              <a:spcAft>
+                <a:spcPts val="200"/>
+              </a:spcAft>
+            </a:pPr>
+            <a:r>
+              <a:rPr sz="500" b="0">
+                <a:solidFill>
+                  <a:srgbClr val="262626"/>
+                </a:solidFill>
+                <a:latin typeface="Apple SD Gothic Neo"/>
+                <a:ea typeface="Apple SD Gothic Neo"/>
+              </a:rPr>
+              <a:t/>
+            </a:r>
+          </a:p>
+          <a:p>
+            <a:pPr algn="l">
+              <a:spcAft>
+                <a:spcPts val="200"/>
+              </a:spcAft>
+            </a:pPr>
+            <a:r>
+              <a:rPr sz="1050" b="1">
+                <a:solidFill>
+                  <a:srgbClr val="262626"/>
+                </a:solidFill>
+                <a:latin typeface="Apple SD Gothic Neo"/>
+                <a:ea typeface="Apple SD Gothic Neo"/>
+              </a:rPr>
+              <a:t>경기 반등기. </a:t>
+            </a:r>
+            <a:r>
+              <a:rPr sz="1050" b="0">
+                <a:solidFill>
+                  <a:srgbClr val="262626"/>
+                </a:solidFill>
+                <a:latin typeface="Apple SD Gothic Neo"/>
+                <a:ea typeface="Apple SD Gothic Neo"/>
+              </a:rPr>
+              <a:t>반등 6개 분기 평균 0.581로</a:t>
+            </a:r>
+          </a:p>
+          <a:p>
+            <a:pPr algn="l">
+              <a:spcAft>
+                <a:spcPts val="200"/>
+              </a:spcAft>
+            </a:pPr>
+            <a:r>
+              <a:rPr sz="1050" b="0">
+                <a:solidFill>
+                  <a:srgbClr val="262626"/>
+                </a:solidFill>
+                <a:latin typeface="Apple SD Gothic Neo"/>
+                <a:ea typeface="Apple SD Gothic Neo"/>
+              </a:rPr>
+              <a:t>전 구성 중 최강 — 주가·환율·심리 원지수가</a:t>
+            </a:r>
+          </a:p>
+          <a:p>
+            <a:pPr algn="l">
+              <a:spcAft>
+                <a:spcPts val="200"/>
+              </a:spcAft>
+            </a:pPr>
+            <a:r>
+              <a:rPr sz="1050" b="0">
+                <a:solidFill>
+                  <a:srgbClr val="262626"/>
+                </a:solidFill>
+                <a:latin typeface="Apple SD Gothic Neo"/>
+                <a:ea typeface="Apple SD Gothic Neo"/>
+              </a:rPr>
+              <a:t>공식 지표의 발표 시차를 메웁니다.</a:t>
+            </a:r>
+          </a:p>
+          <a:p>
+            <a:pPr algn="l">
+              <a:spcAft>
+                <a:spcPts val="200"/>
+              </a:spcAft>
+            </a:pPr>
+            <a:r>
+              <a:rPr sz="500" b="0">
+                <a:solidFill>
+                  <a:srgbClr val="262626"/>
+                </a:solidFill>
+                <a:latin typeface="Apple SD Gothic Neo"/>
+                <a:ea typeface="Apple SD Gothic Neo"/>
+              </a:rPr>
+              <a:t/>
+            </a:r>
+          </a:p>
+          <a:p>
+            <a:pPr algn="l">
+              <a:spcAft>
+                <a:spcPts val="200"/>
+              </a:spcAft>
+            </a:pPr>
+            <a:r>
+              <a:rPr sz="1050" b="1">
+                <a:solidFill>
+                  <a:srgbClr val="262626"/>
+                </a:solidFill>
+                <a:latin typeface="Apple SD Gothic Neo"/>
+                <a:ea typeface="Apple SD Gothic Neo"/>
+              </a:rPr>
+              <a:t>불확실성 정량화 재료. </a:t>
+            </a:r>
+            <a:r>
+              <a:rPr sz="1050" b="0">
+                <a:solidFill>
+                  <a:srgbClr val="262626"/>
+                </a:solidFill>
+                <a:latin typeface="Apple SD Gothic Neo"/>
+                <a:ea typeface="Apple SD Gothic Neo"/>
+              </a:rPr>
+              <a:t>보정(conformal)</a:t>
+            </a:r>
+          </a:p>
+          <a:p>
+            <a:pPr algn="l">
+              <a:spcAft>
+                <a:spcPts val="200"/>
+              </a:spcAft>
+            </a:pPr>
+            <a:r>
+              <a:rPr sz="1050" b="0">
+                <a:solidFill>
+                  <a:srgbClr val="262626"/>
+                </a:solidFill>
+                <a:latin typeface="Apple SD Gothic Neo"/>
+                <a:ea typeface="Apple SD Gothic Neo"/>
+              </a:rPr>
+              <a:t>결합 시 예측구간 품질 개선을 확인 — 연구</a:t>
+            </a:r>
+          </a:p>
+          <a:p>
+            <a:pPr algn="l">
+              <a:spcAft>
+                <a:spcPts val="200"/>
+              </a:spcAft>
+            </a:pPr>
+            <a:r>
+              <a:rPr sz="1050" b="0">
+                <a:solidFill>
+                  <a:srgbClr val="262626"/>
+                </a:solidFill>
+                <a:latin typeface="Apple SD Gothic Neo"/>
+                <a:ea typeface="Apple SD Gothic Neo"/>
+              </a:rPr>
+              <a:t>재료로 유효합니다.</a:t>
+            </a:r>
+          </a:p>
+          <a:p>
+            <a:pPr algn="l">
+              <a:spcAft>
+                <a:spcPts val="200"/>
+              </a:spcAft>
+            </a:pPr>
+            <a:r>
+              <a:rPr sz="600" b="0">
+                <a:solidFill>
+                  <a:srgbClr val="262626"/>
+                </a:solidFill>
+                <a:latin typeface="Apple SD Gothic Neo"/>
+                <a:ea typeface="Apple SD Gothic Neo"/>
+              </a:rPr>
+              <a:t/>
+            </a:r>
+          </a:p>
+          <a:p>
+            <a:pPr algn="l">
+              <a:spcAft>
+                <a:spcPts val="200"/>
+              </a:spcAft>
+            </a:pPr>
+            <a:r>
+              <a:rPr sz="1150" b="1">
+                <a:solidFill>
+                  <a:srgbClr val="008A3E"/>
+                </a:solidFill>
+                <a:latin typeface="Apple SD Gothic Neo"/>
+                <a:ea typeface="Apple SD Gothic Neo"/>
+              </a:rPr>
+              <a:t>요약: 대체재가 아니라 조건부 보완재</a:t>
+            </a:r>
+          </a:p>
+        </p:txBody>
+      </p:sp>
+      <p:sp>
+        <p:nvSpPr>
+          <p:cNvPr id="18" name="TextBox 17"/>
           <p:cNvSpPr txBox="1"/>
           <p:nvPr/>
         </p:nvSpPr>
         <p:spPr>
           <a:xfrm>
-            <a:off x="1234440" y="2551176"/>
-            <a:ext cx="5943600" cy="320040"/>
+            <a:off x="548640" y="6455664"/>
+            <a:ext cx="9875520" cy="274320"/>
           </a:xfrm>
           <a:prstGeom prst="rect">
             <a:avLst/>
@@ -7509,7 +8331,7 @@
           <a:noFill/>
         </p:spPr>
         <p:txBody>
-          <a:bodyPr wrap="square" anchor="t" lIns="45720" rIns="45720" tIns="18288" bIns="18288">
+          <a:bodyPr wrap="square" anchor="t" lIns="18288" rIns="18288" tIns="9144" bIns="9144">
             <a:spAutoFit/>
           </a:bodyPr>
           <a:lstStyle/>
@@ -7520,28 +8342,28 @@
               </a:spcAft>
             </a:pPr>
             <a:r>
-              <a:rPr sz="1150" b="1">
-                <a:solidFill>
-                  <a:srgbClr val="243447"/>
-                </a:solidFill>
-                <a:latin typeface="Apple SD Gothic Neo"/>
-                <a:ea typeface="Apple SD Gothic Neo"/>
-              </a:rPr>
-              <a:t>사전학습 지식 ≠ 한국 거시 구조</a:t>
-            </a:r>
-          </a:p>
-        </p:txBody>
-      </p:sp>
-      <p:sp>
-        <p:nvSpPr>
-          <p:cNvPr id="11" name="TextBox 10"/>
+              <a:rPr sz="800" b="0">
+                <a:solidFill>
+                  <a:srgbClr val="6B6B6B"/>
+                </a:solidFill>
+                <a:latin typeface="Apple SD Gothic Neo"/>
+                <a:ea typeface="Apple SD Gothic Neo"/>
+              </a:rPr>
+              <a:t>주: 실시간 빈티지 · 속보치 기준 · 전망주차 w[-19,-1] 평균 RMSE · 2018Q1~2025Q4(32개 분기) · 예측단위 개정(schema v2) 반영. 낮을수록 정확.</a:t>
+            </a:r>
+          </a:p>
+        </p:txBody>
+      </p:sp>
+      <p:sp>
+        <p:nvSpPr>
+          <p:cNvPr id="19" name="TextBox 18"/>
           <p:cNvSpPr txBox="1"/>
           <p:nvPr/>
         </p:nvSpPr>
         <p:spPr>
           <a:xfrm>
-            <a:off x="1234440" y="2889504"/>
-            <a:ext cx="5989320" cy="594360"/>
+            <a:off x="11292840" y="6455664"/>
+            <a:ext cx="457200" cy="274320"/>
           </a:xfrm>
           <a:prstGeom prst="rect">
             <a:avLst/>
@@ -7549,784 +8371,25 @@
           <a:noFill/>
         </p:spPr>
         <p:txBody>
-          <a:bodyPr wrap="square" anchor="t" lIns="45720" rIns="45720" tIns="18288" bIns="18288">
+          <a:bodyPr wrap="square" anchor="t" lIns="18288" rIns="18288" tIns="9144" bIns="9144">
             <a:spAutoFit/>
           </a:bodyPr>
           <a:lstStyle/>
           <a:p>
-            <a:pPr algn="l">
-              <a:spcAft>
-                <a:spcPts val="200"/>
-              </a:spcAft>
-            </a:pPr>
-            <a:r>
-              <a:rPr sz="950" b="0">
-                <a:solidFill>
-                  <a:srgbClr val="262626"/>
-                </a:solidFill>
-                <a:latin typeface="Apple SD Gothic Neo"/>
-                <a:ea typeface="Apple SD Gothic Neo"/>
-              </a:rPr>
-              <a:t>파운데이션 모델이 배운 것은 시계열의 보편 문법(추세·계절성) — 지표 간 인과·한국 특수성은 없음. 공변량 소화력도 XGBoost(34종 비선형)에 미달</a:t>
-            </a:r>
-          </a:p>
-        </p:txBody>
-      </p:sp>
-      <p:sp>
-        <p:nvSpPr>
-          <p:cNvPr id="12" name="Rounded Rectangle 11"/>
-          <p:cNvSpPr/>
-          <p:nvPr/>
-        </p:nvSpPr>
-        <p:spPr>
-          <a:xfrm>
-            <a:off x="502920" y="3675888"/>
-            <a:ext cx="6858000" cy="1115568"/>
-          </a:xfrm>
-          <a:prstGeom prst="roundRect">
-            <a:avLst/>
-          </a:prstGeom>
-          <a:solidFill>
-            <a:srgbClr val="F3F4F5"/>
-          </a:solidFill>
-          <a:ln w="9525">
-            <a:solidFill>
-              <a:srgbClr val="C9C9C9"/>
-            </a:solidFill>
-          </a:ln>
-          <a:effectLst/>
-        </p:spPr>
-        <p:style>
-          <a:lnRef idx="1">
-            <a:schemeClr val="accent1"/>
-          </a:lnRef>
-          <a:fillRef idx="3">
-            <a:schemeClr val="accent1"/>
-          </a:fillRef>
-          <a:effectRef idx="2">
-            <a:schemeClr val="accent1"/>
-          </a:effectRef>
-          <a:fontRef idx="minor">
-            <a:schemeClr val="lt1"/>
-          </a:fontRef>
-        </p:style>
-        <p:txBody>
-          <a:bodyPr rtlCol="0" anchor="ctr"/>
-          <a:lstStyle/>
-          <a:p>
-            <a:pPr algn="ctr"/>
-          </a:p>
-        </p:txBody>
-      </p:sp>
-      <p:sp>
-        <p:nvSpPr>
-          <p:cNvPr id="13" name="TextBox 12"/>
-          <p:cNvSpPr txBox="1"/>
-          <p:nvPr/>
-        </p:nvSpPr>
-        <p:spPr>
-          <a:xfrm>
-            <a:off x="713232" y="3785616"/>
-            <a:ext cx="457200" cy="365760"/>
-          </a:xfrm>
-          <a:prstGeom prst="rect">
-            <a:avLst/>
-          </a:prstGeom>
-          <a:noFill/>
-        </p:spPr>
-        <p:txBody>
-          <a:bodyPr wrap="square" anchor="t" lIns="45720" rIns="45720" tIns="18288" bIns="18288">
-            <a:spAutoFit/>
-          </a:bodyPr>
-          <a:lstStyle/>
-          <a:p>
-            <a:pPr algn="l">
-              <a:spcAft>
-                <a:spcPts val="200"/>
-              </a:spcAft>
-            </a:pPr>
-            <a:r>
-              <a:rPr sz="1400" b="1">
-                <a:solidFill>
-                  <a:srgbClr val="B0532F"/>
-                </a:solidFill>
-                <a:latin typeface="Apple SD Gothic Neo"/>
-                <a:ea typeface="Apple SD Gothic Neo"/>
-              </a:rPr>
-              <a:t>3</a:t>
-            </a:r>
-          </a:p>
-        </p:txBody>
-      </p:sp>
-      <p:sp>
-        <p:nvSpPr>
-          <p:cNvPr id="14" name="TextBox 13"/>
-          <p:cNvSpPr txBox="1"/>
-          <p:nvPr/>
-        </p:nvSpPr>
-        <p:spPr>
-          <a:xfrm>
-            <a:off x="1234440" y="3794760"/>
-            <a:ext cx="5943600" cy="320040"/>
-          </a:xfrm>
-          <a:prstGeom prst="rect">
-            <a:avLst/>
-          </a:prstGeom>
-          <a:noFill/>
-        </p:spPr>
-        <p:txBody>
-          <a:bodyPr wrap="square" anchor="t" lIns="45720" rIns="45720" tIns="18288" bIns="18288">
-            <a:spAutoFit/>
-          </a:bodyPr>
-          <a:lstStyle/>
-          <a:p>
-            <a:pPr algn="l">
-              <a:spcAft>
-                <a:spcPts val="200"/>
-              </a:spcAft>
-            </a:pPr>
-            <a:r>
-              <a:rPr sz="1150" b="1">
-                <a:solidFill>
-                  <a:srgbClr val="243447"/>
-                </a:solidFill>
-                <a:latin typeface="Apple SD Gothic Neo"/>
-                <a:ea typeface="Apple SD Gothic Neo"/>
-              </a:rPr>
-              <a:t>정보 상한</a:t>
-            </a:r>
-          </a:p>
-        </p:txBody>
-      </p:sp>
-      <p:sp>
-        <p:nvSpPr>
-          <p:cNvPr id="15" name="TextBox 14"/>
-          <p:cNvSpPr txBox="1"/>
-          <p:nvPr/>
-        </p:nvSpPr>
-        <p:spPr>
-          <a:xfrm>
-            <a:off x="1234440" y="4133088"/>
-            <a:ext cx="5989320" cy="594360"/>
-          </a:xfrm>
-          <a:prstGeom prst="rect">
-            <a:avLst/>
-          </a:prstGeom>
-          <a:noFill/>
-        </p:spPr>
-        <p:txBody>
-          <a:bodyPr wrap="square" anchor="t" lIns="45720" rIns="45720" tIns="18288" bIns="18288">
-            <a:spAutoFit/>
-          </a:bodyPr>
-          <a:lstStyle/>
-          <a:p>
-            <a:pPr algn="l">
-              <a:spcAft>
-                <a:spcPts val="200"/>
-              </a:spcAft>
-            </a:pPr>
-            <a:r>
-              <a:rPr sz="950" b="0">
-                <a:solidFill>
-                  <a:srgbClr val="262626"/>
-                </a:solidFill>
-                <a:latin typeface="Apple SD Gothic Neo"/>
-                <a:ea typeface="Apple SD Gothic Neo"/>
-              </a:rPr>
-              <a:t>합성데이터로 추가 미세조정해도 예측이 거의 불변(상관 0.990) — 병목은 모델·표본량이 아니라 입력 패널이 가진 정보 자체</a:t>
-            </a:r>
-          </a:p>
-        </p:txBody>
-      </p:sp>
-      <p:sp>
-        <p:nvSpPr>
-          <p:cNvPr id="16" name="Rounded Rectangle 15"/>
-          <p:cNvSpPr/>
-          <p:nvPr/>
-        </p:nvSpPr>
-        <p:spPr>
-          <a:xfrm>
-            <a:off x="502920" y="4919472"/>
-            <a:ext cx="6858000" cy="1115568"/>
-          </a:xfrm>
-          <a:prstGeom prst="roundRect">
-            <a:avLst/>
-          </a:prstGeom>
-          <a:solidFill>
-            <a:srgbClr val="F3F4F5"/>
-          </a:solidFill>
-          <a:ln w="9525">
-            <a:solidFill>
-              <a:srgbClr val="C9C9C9"/>
-            </a:solidFill>
-          </a:ln>
-          <a:effectLst/>
-        </p:spPr>
-        <p:style>
-          <a:lnRef idx="1">
-            <a:schemeClr val="accent1"/>
-          </a:lnRef>
-          <a:fillRef idx="3">
-            <a:schemeClr val="accent1"/>
-          </a:fillRef>
-          <a:effectRef idx="2">
-            <a:schemeClr val="accent1"/>
-          </a:effectRef>
-          <a:fontRef idx="minor">
-            <a:schemeClr val="lt1"/>
-          </a:fontRef>
-        </p:style>
-        <p:txBody>
-          <a:bodyPr rtlCol="0" anchor="ctr"/>
-          <a:lstStyle/>
-          <a:p>
-            <a:pPr algn="ctr"/>
-          </a:p>
-        </p:txBody>
-      </p:sp>
-      <p:sp>
-        <p:nvSpPr>
-          <p:cNvPr id="17" name="TextBox 16"/>
-          <p:cNvSpPr txBox="1"/>
-          <p:nvPr/>
-        </p:nvSpPr>
-        <p:spPr>
-          <a:xfrm>
-            <a:off x="713232" y="5029200"/>
-            <a:ext cx="457200" cy="365760"/>
-          </a:xfrm>
-          <a:prstGeom prst="rect">
-            <a:avLst/>
-          </a:prstGeom>
-          <a:noFill/>
-        </p:spPr>
-        <p:txBody>
-          <a:bodyPr wrap="square" anchor="t" lIns="45720" rIns="45720" tIns="18288" bIns="18288">
-            <a:spAutoFit/>
-          </a:bodyPr>
-          <a:lstStyle/>
-          <a:p>
-            <a:pPr algn="l">
-              <a:spcAft>
-                <a:spcPts val="200"/>
-              </a:spcAft>
-            </a:pPr>
-            <a:r>
-              <a:rPr sz="1400" b="1">
-                <a:solidFill>
-                  <a:srgbClr val="B0532F"/>
-                </a:solidFill>
-                <a:latin typeface="Apple SD Gothic Neo"/>
-                <a:ea typeface="Apple SD Gothic Neo"/>
-              </a:rPr>
-              <a:t>4</a:t>
-            </a:r>
-          </a:p>
-        </p:txBody>
-      </p:sp>
-      <p:sp>
-        <p:nvSpPr>
-          <p:cNvPr id="18" name="TextBox 17"/>
-          <p:cNvSpPr txBox="1"/>
-          <p:nvPr/>
-        </p:nvSpPr>
-        <p:spPr>
-          <a:xfrm>
-            <a:off x="1234440" y="5038344"/>
-            <a:ext cx="5943600" cy="320040"/>
-          </a:xfrm>
-          <a:prstGeom prst="rect">
-            <a:avLst/>
-          </a:prstGeom>
-          <a:noFill/>
-        </p:spPr>
-        <p:txBody>
-          <a:bodyPr wrap="square" anchor="t" lIns="45720" rIns="45720" tIns="18288" bIns="18288">
-            <a:spAutoFit/>
-          </a:bodyPr>
-          <a:lstStyle/>
-          <a:p>
-            <a:pPr algn="l">
-              <a:spcAft>
-                <a:spcPts val="200"/>
-              </a:spcAft>
-            </a:pPr>
-            <a:r>
-              <a:rPr sz="1150" b="1">
-                <a:solidFill>
-                  <a:srgbClr val="243447"/>
-                </a:solidFill>
-                <a:latin typeface="Apple SD Gothic Neo"/>
-                <a:ea typeface="Apple SD Gothic Neo"/>
-              </a:rPr>
-              <a:t>분포 출력의 과소산포</a:t>
-            </a:r>
-          </a:p>
-        </p:txBody>
-      </p:sp>
-      <p:sp>
-        <p:nvSpPr>
-          <p:cNvPr id="19" name="TextBox 18"/>
-          <p:cNvSpPr txBox="1"/>
-          <p:nvPr/>
-        </p:nvSpPr>
-        <p:spPr>
-          <a:xfrm>
-            <a:off x="1234440" y="5376672"/>
-            <a:ext cx="5989320" cy="594360"/>
-          </a:xfrm>
-          <a:prstGeom prst="rect">
-            <a:avLst/>
-          </a:prstGeom>
-          <a:noFill/>
-        </p:spPr>
-        <p:txBody>
-          <a:bodyPr wrap="square" anchor="t" lIns="45720" rIns="45720" tIns="18288" bIns="18288">
-            <a:spAutoFit/>
-          </a:bodyPr>
-          <a:lstStyle/>
-          <a:p>
-            <a:pPr algn="l">
-              <a:spcAft>
-                <a:spcPts val="200"/>
-              </a:spcAft>
-            </a:pPr>
-            <a:r>
-              <a:rPr sz="950" b="0">
-                <a:solidFill>
-                  <a:srgbClr val="262626"/>
-                </a:solidFill>
-                <a:latin typeface="Apple SD Gothic Neo"/>
-                <a:ea typeface="Apple SD Gothic Neo"/>
-              </a:rPr>
-              <a:t>원시 분위수의 실측 커버리지 49%(명목 80%) — 그대로 사용 불가, 사후 보정 필수</a:t>
-            </a:r>
-          </a:p>
-        </p:txBody>
-      </p:sp>
-      <p:sp>
-        <p:nvSpPr>
-          <p:cNvPr id="20" name="Rounded Rectangle 19"/>
-          <p:cNvSpPr/>
-          <p:nvPr/>
-        </p:nvSpPr>
-        <p:spPr>
-          <a:xfrm>
-            <a:off x="7589520" y="1188720"/>
-            <a:ext cx="4096512" cy="4937760"/>
-          </a:xfrm>
-          <a:prstGeom prst="roundRect">
-            <a:avLst/>
-          </a:prstGeom>
-          <a:solidFill>
-            <a:srgbClr val="E8F3EC"/>
-          </a:solidFill>
-          <a:ln w="9525">
-            <a:solidFill>
-              <a:srgbClr val="008A3E"/>
-            </a:solidFill>
-          </a:ln>
-          <a:effectLst/>
-        </p:spPr>
-        <p:style>
-          <a:lnRef idx="1">
-            <a:schemeClr val="accent1"/>
-          </a:lnRef>
-          <a:fillRef idx="3">
-            <a:schemeClr val="accent1"/>
-          </a:fillRef>
-          <a:effectRef idx="2">
-            <a:schemeClr val="accent1"/>
-          </a:effectRef>
-          <a:fontRef idx="minor">
-            <a:schemeClr val="lt1"/>
-          </a:fontRef>
-        </p:style>
-        <p:txBody>
-          <a:bodyPr rtlCol="0" anchor="ctr"/>
-          <a:lstStyle/>
-          <a:p>
-            <a:pPr algn="ctr"/>
-          </a:p>
-        </p:txBody>
-      </p:sp>
-      <p:sp>
-        <p:nvSpPr>
-          <p:cNvPr id="21" name="TextBox 20"/>
-          <p:cNvSpPr txBox="1"/>
-          <p:nvPr/>
-        </p:nvSpPr>
-        <p:spPr>
-          <a:xfrm>
-            <a:off x="7818120" y="1371600"/>
-            <a:ext cx="3657600" cy="4572000"/>
-          </a:xfrm>
-          <a:prstGeom prst="rect">
-            <a:avLst/>
-          </a:prstGeom>
-          <a:noFill/>
-        </p:spPr>
-        <p:txBody>
-          <a:bodyPr wrap="square" anchor="t" lIns="45720" rIns="45720" tIns="18288" bIns="18288">
-            <a:spAutoFit/>
-          </a:bodyPr>
-          <a:lstStyle/>
-          <a:p>
-            <a:pPr algn="l">
-              <a:spcAft>
-                <a:spcPts val="250"/>
-              </a:spcAft>
-            </a:pPr>
-            <a:r>
-              <a:rPr sz="1250" b="1">
-                <a:solidFill>
-                  <a:srgbClr val="008A3E"/>
-                </a:solidFill>
-                <a:latin typeface="Apple SD Gothic Neo"/>
-                <a:ea typeface="Apple SD Gothic Neo"/>
-              </a:rPr>
-              <a:t>그럼에도 기여가 확인된 지점</a:t>
-            </a:r>
-          </a:p>
-          <a:p>
-            <a:pPr algn="l">
-              <a:spcAft>
-                <a:spcPts val="250"/>
-              </a:spcAft>
-            </a:pPr>
-            <a:r>
-              <a:rPr sz="400" b="0">
-                <a:solidFill>
-                  <a:srgbClr val="262626"/>
-                </a:solidFill>
-                <a:latin typeface="Apple SD Gothic Neo"/>
-                <a:ea typeface="Apple SD Gothic Neo"/>
-              </a:rPr>
-              <a:t/>
-            </a:r>
-          </a:p>
-          <a:p>
-            <a:pPr algn="l">
-              <a:spcAft>
-                <a:spcPts val="250"/>
-              </a:spcAft>
-            </a:pPr>
-            <a:r>
-              <a:rPr sz="1100" b="1">
-                <a:solidFill>
-                  <a:srgbClr val="262626"/>
-                </a:solidFill>
-                <a:latin typeface="Apple SD Gothic Neo"/>
-                <a:ea typeface="Apple SD Gothic Neo"/>
-              </a:rPr>
-              <a:t>① 정보 빈곤 구간</a:t>
-            </a:r>
-          </a:p>
-          <a:p>
-            <a:pPr algn="l">
-              <a:spcAft>
-                <a:spcPts val="250"/>
-              </a:spcAft>
-            </a:pPr>
-            <a:r>
-              <a:rPr sz="1000" b="0">
-                <a:solidFill>
-                  <a:srgbClr val="262626"/>
-                </a:solidFill>
-                <a:latin typeface="Apple SD Gothic Neo"/>
-                <a:ea typeface="Apple SD Gothic Neo"/>
-              </a:rPr>
-              <a:t>발표 19~14주 전 — 공식지표 공백기에</a:t>
-            </a:r>
-          </a:p>
-          <a:p>
-            <a:pPr algn="l">
-              <a:spcAft>
-                <a:spcPts val="250"/>
-              </a:spcAft>
-            </a:pPr>
-            <a:r>
-              <a:rPr sz="1000" b="0">
-                <a:solidFill>
-                  <a:srgbClr val="262626"/>
-                </a:solidFill>
-                <a:latin typeface="Apple SD Gothic Neo"/>
-                <a:ea typeface="Apple SD Gothic Neo"/>
-              </a:rPr>
-              <a:t>세계 지식 + 일별 신호로 보완 (3장)</a:t>
-            </a:r>
-          </a:p>
-          <a:p>
-            <a:pPr algn="l">
-              <a:spcAft>
-                <a:spcPts val="250"/>
-              </a:spcAft>
-            </a:pPr>
-            <a:r>
-              <a:rPr sz="400" b="0">
-                <a:solidFill>
-                  <a:srgbClr val="262626"/>
-                </a:solidFill>
-                <a:latin typeface="Apple SD Gothic Neo"/>
-                <a:ea typeface="Apple SD Gothic Neo"/>
-              </a:rPr>
-              <a:t/>
-            </a:r>
-          </a:p>
-          <a:p>
-            <a:pPr algn="l">
-              <a:spcAft>
-                <a:spcPts val="250"/>
-              </a:spcAft>
-            </a:pPr>
-            <a:r>
-              <a:rPr sz="1100" b="1">
-                <a:solidFill>
-                  <a:srgbClr val="262626"/>
-                </a:solidFill>
-                <a:latin typeface="Apple SD Gothic Neo"/>
-                <a:ea typeface="Apple SD Gothic Neo"/>
-              </a:rPr>
-              <a:t>② 경기 반등기</a:t>
-            </a:r>
-          </a:p>
-          <a:p>
-            <a:pPr algn="l">
-              <a:spcAft>
-                <a:spcPts val="250"/>
-              </a:spcAft>
-            </a:pPr>
-            <a:r>
-              <a:rPr sz="1000" b="0">
-                <a:solidFill>
-                  <a:srgbClr val="262626"/>
-                </a:solidFill>
-                <a:latin typeface="Apple SD Gothic Neo"/>
-                <a:ea typeface="Apple SD Gothic Neo"/>
-              </a:rPr>
-              <a:t>반등 6개 분기 평균 0.581 — 전 구성 중</a:t>
-            </a:r>
-          </a:p>
-          <a:p>
-            <a:pPr algn="l">
-              <a:spcAft>
-                <a:spcPts val="250"/>
-              </a:spcAft>
-            </a:pPr>
-            <a:r>
-              <a:rPr sz="1000" b="0">
-                <a:solidFill>
-                  <a:srgbClr val="262626"/>
-                </a:solidFill>
-                <a:latin typeface="Apple SD Gothic Neo"/>
-                <a:ea typeface="Apple SD Gothic Neo"/>
-              </a:rPr>
-              <a:t>최강. 주가·환율·심리 원지수가 공식</a:t>
-            </a:r>
-          </a:p>
-          <a:p>
-            <a:pPr algn="l">
-              <a:spcAft>
-                <a:spcPts val="250"/>
-              </a:spcAft>
-            </a:pPr>
-            <a:r>
-              <a:rPr sz="1000" b="0">
-                <a:solidFill>
-                  <a:srgbClr val="262626"/>
-                </a:solidFill>
-                <a:latin typeface="Apple SD Gothic Neo"/>
-                <a:ea typeface="Apple SD Gothic Neo"/>
-              </a:rPr>
-              <a:t>지표의 발표 시차를 메움</a:t>
-            </a:r>
-          </a:p>
-          <a:p>
-            <a:pPr algn="l">
-              <a:spcAft>
-                <a:spcPts val="250"/>
-              </a:spcAft>
-            </a:pPr>
-            <a:r>
-              <a:rPr sz="400" b="0">
-                <a:solidFill>
-                  <a:srgbClr val="262626"/>
-                </a:solidFill>
-                <a:latin typeface="Apple SD Gothic Neo"/>
-                <a:ea typeface="Apple SD Gothic Neo"/>
-              </a:rPr>
-              <a:t/>
-            </a:r>
-          </a:p>
-          <a:p>
-            <a:pPr algn="l">
-              <a:spcAft>
-                <a:spcPts val="250"/>
-              </a:spcAft>
-            </a:pPr>
-            <a:r>
-              <a:rPr sz="1100" b="1">
-                <a:solidFill>
-                  <a:srgbClr val="262626"/>
-                </a:solidFill>
-                <a:latin typeface="Apple SD Gothic Neo"/>
-                <a:ea typeface="Apple SD Gothic Neo"/>
-              </a:rPr>
-              <a:t>③ 불확실성 정량화 재료</a:t>
-            </a:r>
-          </a:p>
-          <a:p>
-            <a:pPr algn="l">
-              <a:spcAft>
-                <a:spcPts val="250"/>
-              </a:spcAft>
-            </a:pPr>
-            <a:r>
-              <a:rPr sz="1000" b="0">
-                <a:solidFill>
-                  <a:srgbClr val="262626"/>
-                </a:solidFill>
-                <a:latin typeface="Apple SD Gothic Neo"/>
-                <a:ea typeface="Apple SD Gothic Neo"/>
-              </a:rPr>
-              <a:t>보정(conformal) 결합 시 예측구간의</a:t>
-            </a:r>
-          </a:p>
-          <a:p>
-            <a:pPr algn="l">
-              <a:spcAft>
-                <a:spcPts val="250"/>
-              </a:spcAft>
-            </a:pPr>
-            <a:r>
-              <a:rPr sz="1000" b="0">
-                <a:solidFill>
-                  <a:srgbClr val="262626"/>
-                </a:solidFill>
-                <a:latin typeface="Apple SD Gothic Neo"/>
-                <a:ea typeface="Apple SD Gothic Neo"/>
-              </a:rPr>
-              <a:t>품질 개선 확인 — 연구 재료로 유효</a:t>
-            </a:r>
-          </a:p>
-          <a:p>
-            <a:pPr algn="l">
-              <a:spcAft>
-                <a:spcPts val="250"/>
-              </a:spcAft>
-            </a:pPr>
-            <a:r>
-              <a:rPr sz="400" b="0">
-                <a:solidFill>
-                  <a:srgbClr val="262626"/>
-                </a:solidFill>
-                <a:latin typeface="Apple SD Gothic Neo"/>
-                <a:ea typeface="Apple SD Gothic Neo"/>
-              </a:rPr>
-              <a:t/>
-            </a:r>
-          </a:p>
-          <a:p>
-            <a:pPr algn="l">
-              <a:spcAft>
-                <a:spcPts val="250"/>
-              </a:spcAft>
-            </a:pPr>
-            <a:r>
-              <a:rPr sz="1100" b="1">
-                <a:solidFill>
-                  <a:srgbClr val="008A3E"/>
-                </a:solidFill>
-                <a:latin typeface="Apple SD Gothic Neo"/>
-                <a:ea typeface="Apple SD Gothic Neo"/>
-              </a:rPr>
-              <a:t>요약: 대체재가 아니라 조건부 보완재</a:t>
-            </a:r>
-          </a:p>
-        </p:txBody>
-      </p:sp>
-      <p:sp>
-        <p:nvSpPr>
-          <p:cNvPr id="22" name="Rectangle 21"/>
-          <p:cNvSpPr/>
-          <p:nvPr/>
-        </p:nvSpPr>
-        <p:spPr>
-          <a:xfrm>
-            <a:off x="502920" y="6309360"/>
-            <a:ext cx="11183112" cy="365760"/>
-          </a:xfrm>
-          <a:prstGeom prst="rect">
-            <a:avLst/>
-          </a:prstGeom>
-          <a:solidFill>
-            <a:srgbClr val="F3F4F5"/>
-          </a:solidFill>
-          <a:ln w="9525">
-            <a:solidFill>
-              <a:srgbClr val="C9C9C9"/>
-            </a:solidFill>
-          </a:ln>
-          <a:effectLst/>
-        </p:spPr>
-        <p:style>
-          <a:lnRef idx="1">
-            <a:schemeClr val="accent1"/>
-          </a:lnRef>
-          <a:fillRef idx="3">
-            <a:schemeClr val="accent1"/>
-          </a:fillRef>
-          <a:effectRef idx="2">
-            <a:schemeClr val="accent1"/>
-          </a:effectRef>
-          <a:fontRef idx="minor">
-            <a:schemeClr val="lt1"/>
-          </a:fontRef>
-        </p:style>
-        <p:txBody>
-          <a:bodyPr rtlCol="0" anchor="ctr"/>
-          <a:lstStyle/>
-          <a:p>
-            <a:pPr algn="ctr"/>
-          </a:p>
-        </p:txBody>
-      </p:sp>
-      <p:sp>
-        <p:nvSpPr>
-          <p:cNvPr id="23" name="TextBox 22"/>
-          <p:cNvSpPr txBox="1"/>
-          <p:nvPr/>
-        </p:nvSpPr>
-        <p:spPr>
-          <a:xfrm>
-            <a:off x="685800" y="6364224"/>
-            <a:ext cx="10881360" cy="256032"/>
-          </a:xfrm>
-          <a:prstGeom prst="rect">
-            <a:avLst/>
-          </a:prstGeom>
-          <a:noFill/>
-        </p:spPr>
-        <p:txBody>
-          <a:bodyPr wrap="square" anchor="ctr" lIns="45720" rIns="45720" tIns="18288" bIns="18288">
-            <a:spAutoFit/>
-          </a:bodyPr>
-          <a:lstStyle/>
-          <a:p>
-            <a:pPr algn="l">
-              <a:spcAft>
-                <a:spcPts val="200"/>
-              </a:spcAft>
-            </a:pPr>
-            <a:r>
-              <a:rPr sz="880" b="0">
+            <a:pPr algn="r">
+              <a:spcAft>
+                <a:spcPts val="200"/>
+              </a:spcAft>
+            </a:pPr>
+            <a:r>
+              <a:rPr sz="900" b="0">
                 <a:solidFill>
                   <a:srgbClr val="6B6B6B"/>
                 </a:solidFill>
                 <a:latin typeface="Apple SD Gothic Neo"/>
                 <a:ea typeface="Apple SD Gothic Neo"/>
               </a:rPr>
-              <a:t>공통 검증 규약: 실시간 빈티지 · 속보치 기준 · 전망주차 w[-19,-1] 평균 RMSE · 2018Q1~2025Q4 (32개 분기) · 예측단위 개정(schema v2) 반영</a:t>
+              <a:t>6</a:t>
             </a:r>
           </a:p>
         </p:txBody>
@@ -8357,8 +8420,8 @@
         </p:nvSpPr>
         <p:spPr>
           <a:xfrm>
-            <a:off x="502920" y="274320"/>
-            <a:ext cx="11155680" cy="502920"/>
+            <a:off x="548640" y="292608"/>
+            <a:ext cx="10515600" cy="274320"/>
           </a:xfrm>
           <a:prstGeom prst="rect">
             <a:avLst/>
@@ -8366,7 +8429,7 @@
           <a:noFill/>
         </p:spPr>
         <p:txBody>
-          <a:bodyPr wrap="square" anchor="t" lIns="45720" rIns="45720" tIns="18288" bIns="18288">
+          <a:bodyPr wrap="square" anchor="t" lIns="18288" rIns="18288" tIns="9144" bIns="9144">
             <a:spAutoFit/>
           </a:bodyPr>
           <a:lstStyle/>
@@ -8377,43 +8440,73 @@
               </a:spcAft>
             </a:pPr>
             <a:r>
-              <a:rPr sz="1900" b="1">
-                <a:solidFill>
-                  <a:srgbClr val="008A3E"/>
-                </a:solidFill>
-                <a:latin typeface="Apple SD Gothic Neo"/>
-                <a:ea typeface="Apple SD Gothic Neo"/>
-              </a:rPr>
-              <a:t>06  </a:t>
-            </a:r>
-            <a:r>
-              <a:rPr sz="1900" b="1">
+              <a:rPr sz="1050" b="1">
+                <a:solidFill>
+                  <a:srgbClr val="6B6B6B"/>
+                </a:solidFill>
+                <a:latin typeface="Apple SD Gothic Neo"/>
+                <a:ea typeface="Apple SD Gothic Neo"/>
+              </a:rPr>
+              <a:t>6  |  공동 논문 제안</a:t>
+            </a:r>
+          </a:p>
+        </p:txBody>
+      </p:sp>
+      <p:sp>
+        <p:nvSpPr>
+          <p:cNvPr id="3" name="TextBox 2"/>
+          <p:cNvSpPr txBox="1"/>
+          <p:nvPr/>
+        </p:nvSpPr>
+        <p:spPr>
+          <a:xfrm>
+            <a:off x="548640" y="548640"/>
+            <a:ext cx="11064240" cy="548640"/>
+          </a:xfrm>
+          <a:prstGeom prst="rect">
+            <a:avLst/>
+          </a:prstGeom>
+          <a:noFill/>
+        </p:spPr>
+        <p:txBody>
+          <a:bodyPr wrap="square" anchor="t" lIns="18288" rIns="18288" tIns="9144" bIns="9144">
+            <a:spAutoFit/>
+          </a:bodyPr>
+          <a:lstStyle/>
+          <a:p>
+            <a:pPr algn="l">
+              <a:spcAft>
+                <a:spcPts val="200"/>
+              </a:spcAft>
+            </a:pPr>
+            <a:r>
+              <a:rPr sz="1700" b="1">
                 <a:solidFill>
                   <a:srgbClr val="243447"/>
                 </a:solidFill>
                 <a:latin typeface="Apple SD Gothic Neo"/>
                 <a:ea typeface="Apple SD Gothic Neo"/>
               </a:rPr>
-              <a:t>공동 논문 제안 — "사전학습 시계열 모델은 언제 가치를 더하는가"</a:t>
+              <a:t>“사전학습 시계열 모델은 언제 가치를 더하는가”를 묻는 논문을 제안드립니다</a:t>
             </a:r>
           </a:p>
         </p:txBody>
       </p:sp>
       <p:cxnSp>
         <p:nvCxnSpPr>
-          <p:cNvPr id="3" name="Connector 2"/>
+          <p:cNvPr id="4" name="Connector 3"/>
           <p:cNvCxnSpPr/>
           <p:nvPr/>
         </p:nvCxnSpPr>
         <p:spPr>
           <a:xfrm>
-            <a:off x="502920" y="841248"/>
-            <a:ext cx="11183112" cy="0"/>
+            <a:off x="548640" y="1115568"/>
+            <a:ext cx="11091672" cy="0"/>
           </a:xfrm>
           <a:prstGeom prst="line">
             <a:avLst/>
           </a:prstGeom>
-          <a:ln w="20320">
+          <a:ln w="15240">
             <a:solidFill>
               <a:srgbClr val="243447"/>
             </a:solidFill>
@@ -8436,14 +8529,14 @@
       </p:cxnSp>
       <p:sp>
         <p:nvSpPr>
-          <p:cNvPr id="4" name="TextBox 3"/>
+          <p:cNvPr id="5" name="TextBox 4"/>
           <p:cNvSpPr txBox="1"/>
           <p:nvPr/>
         </p:nvSpPr>
         <p:spPr>
           <a:xfrm>
-            <a:off x="502920" y="1143000"/>
-            <a:ext cx="11155680" cy="502920"/>
+            <a:off x="548640" y="1325880"/>
+            <a:ext cx="11064240" cy="320040"/>
           </a:xfrm>
           <a:prstGeom prst="rect">
             <a:avLst/>
@@ -8451,7 +8544,7 @@
           <a:noFill/>
         </p:spPr>
         <p:txBody>
-          <a:bodyPr wrap="square" anchor="t" lIns="45720" rIns="45720" tIns="18288" bIns="18288">
+          <a:bodyPr wrap="square" anchor="t" lIns="18288" rIns="18288" tIns="9144" bIns="9144">
             <a:spAutoFit/>
           </a:bodyPr>
           <a:lstStyle/>
@@ -8462,38 +8555,48 @@
               </a:spcAft>
             </a:pPr>
             <a:r>
-              <a:rPr sz="1100" b="0">
-                <a:solidFill>
-                  <a:srgbClr val="262626"/>
-                </a:solidFill>
-                <a:latin typeface="Apple SD Gothic Neo"/>
-                <a:ea typeface="Apple SD Gothic Neo"/>
-              </a:rPr>
-              <a:t>프레임: 우월성 주장이 아닌 조건부 가치 규명 — </a:t>
-            </a:r>
-            <a:r>
-              <a:rPr sz="1100" b="1">
+              <a:rPr sz="1050" b="0">
+                <a:solidFill>
+                  <a:srgbClr val="6B6B6B"/>
+                </a:solidFill>
+                <a:latin typeface="Apple SD Gothic Neo"/>
+                <a:ea typeface="Apple SD Gothic Neo"/>
+              </a:rPr>
+              <a:t>가제: </a:t>
+            </a:r>
+            <a:r>
+              <a:rPr sz="1150" b="1">
                 <a:solidFill>
                   <a:srgbClr val="243447"/>
                 </a:solidFill>
                 <a:latin typeface="Apple SD Gothic Neo"/>
                 <a:ea typeface="Apple SD Gothic Neo"/>
               </a:rPr>
-              <a:t>"When do time-series foundation models add value? A real-time evaluation of GDP nowcasting"</a:t>
-            </a:r>
-          </a:p>
-        </p:txBody>
-      </p:sp>
-      <p:sp>
-        <p:nvSpPr>
-          <p:cNvPr id="5" name="TextBox 4"/>
+              <a:t>When do time-series foundation models add value? A real-time evaluation of GDP nowcasting</a:t>
+            </a:r>
+            <a:r>
+              <a:rPr sz="1050" b="0">
+                <a:solidFill>
+                  <a:srgbClr val="6B6B6B"/>
+                </a:solidFill>
+                <a:latin typeface="Apple SD Gothic Neo"/>
+                <a:ea typeface="Apple SD Gothic Neo"/>
+              </a:rPr>
+              <a:t>   — 우월성 주장이 아닌 조건부 가치 규명 프레임</a:t>
+            </a:r>
+          </a:p>
+        </p:txBody>
+      </p:sp>
+      <p:sp>
+        <p:nvSpPr>
+          <p:cNvPr id="6" name="TextBox 5"/>
           <p:cNvSpPr txBox="1"/>
           <p:nvPr/>
         </p:nvSpPr>
         <p:spPr>
           <a:xfrm>
-            <a:off x="502920" y="1737360"/>
-            <a:ext cx="5852160" cy="365760"/>
+            <a:off x="548640" y="1828800"/>
+            <a:ext cx="5943600" cy="320040"/>
           </a:xfrm>
           <a:prstGeom prst="rect">
             <a:avLst/>
@@ -8501,7 +8604,7 @@
           <a:noFill/>
         </p:spPr>
         <p:txBody>
-          <a:bodyPr wrap="square" anchor="t" lIns="45720" rIns="45720" tIns="18288" bIns="18288">
+          <a:bodyPr wrap="square" anchor="t" lIns="18288" rIns="18288" tIns="9144" bIns="9144">
             <a:spAutoFit/>
           </a:bodyPr>
           <a:lstStyle/>
@@ -8519,21 +8622,21 @@
                 <a:latin typeface="Apple SD Gothic Neo"/>
                 <a:ea typeface="Apple SD Gothic Neo"/>
               </a:rPr>
-              <a:t>기여 (모두 실측 완료)</a:t>
+              <a:t>기여 다섯 가지 — 실측은 모두 완료되어 있습니다</a:t>
             </a:r>
           </a:p>
         </p:txBody>
       </p:sp>
       <p:cxnSp>
         <p:nvCxnSpPr>
-          <p:cNvPr id="6" name="Connector 5"/>
+          <p:cNvPr id="7" name="Connector 6"/>
           <p:cNvCxnSpPr/>
           <p:nvPr/>
         </p:nvCxnSpPr>
         <p:spPr>
           <a:xfrm>
-            <a:off x="502920" y="2066543"/>
-            <a:ext cx="5852160" cy="0"/>
+            <a:off x="548640" y="2167128"/>
+            <a:ext cx="5943600" cy="0"/>
           </a:xfrm>
           <a:prstGeom prst="line">
             <a:avLst/>
@@ -8561,14 +8664,14 @@
       </p:cxnSp>
       <p:sp>
         <p:nvSpPr>
-          <p:cNvPr id="7" name="TextBox 6"/>
+          <p:cNvPr id="8" name="TextBox 7"/>
           <p:cNvSpPr txBox="1"/>
           <p:nvPr/>
         </p:nvSpPr>
         <p:spPr>
           <a:xfrm>
-            <a:off x="502920" y="2176272"/>
-            <a:ext cx="5852160" cy="3291840"/>
+            <a:off x="548640" y="2304288"/>
+            <a:ext cx="5943600" cy="274320"/>
           </a:xfrm>
           <a:prstGeom prst="rect">
             <a:avLst/>
@@ -8576,7 +8679,7 @@
           <a:noFill/>
         </p:spPr>
         <p:txBody>
-          <a:bodyPr wrap="square" anchor="t" lIns="45720" rIns="45720" tIns="18288" bIns="18288">
+          <a:bodyPr wrap="square" anchor="t" lIns="18288" rIns="18288" tIns="9144" bIns="9144">
             <a:spAutoFit/>
           </a:bodyPr>
           <a:lstStyle/>
@@ -8607,211 +8710,6 @@
               <a:t>2세대 TSFM의 실시간 빈티지 평가 최초 사례</a:t>
             </a:r>
           </a:p>
-          <a:p>
-            <a:pPr algn="l">
-              <a:spcAft>
-                <a:spcPts val="200"/>
-              </a:spcAft>
-            </a:pPr>
-            <a:r>
-              <a:rPr sz="930" b="0">
-                <a:solidFill>
-                  <a:srgbClr val="6B6B6B"/>
-                </a:solidFill>
-                <a:latin typeface="Apple SD Gothic Neo"/>
-                <a:ea typeface="Apple SD Gothic Neo"/>
-              </a:rPr>
-              <a:t>   주 단위 19회 예측 그리드 — 기존 문헌은 대부분 사후 확정 데이터</a:t>
-            </a:r>
-          </a:p>
-          <a:p>
-            <a:pPr algn="l">
-              <a:spcAft>
-                <a:spcPts val="200"/>
-              </a:spcAft>
-            </a:pPr>
-            <a:r>
-              <a:rPr sz="1050" b="1">
-                <a:solidFill>
-                  <a:srgbClr val="008A3E"/>
-                </a:solidFill>
-                <a:latin typeface="Apple SD Gothic Neo"/>
-                <a:ea typeface="Apple SD Gothic Neo"/>
-              </a:rPr>
-              <a:t>2. </a:t>
-            </a:r>
-            <a:r>
-              <a:rPr sz="1050" b="1">
-                <a:solidFill>
-                  <a:srgbClr val="262626"/>
-                </a:solidFill>
-                <a:latin typeface="Apple SD Gothic Neo"/>
-                <a:ea typeface="Apple SD Gothic Neo"/>
-              </a:rPr>
-              <a:t>전망시계 조건부 보완성</a:t>
-            </a:r>
-          </a:p>
-          <a:p>
-            <a:pPr algn="l">
-              <a:spcAft>
-                <a:spcPts val="200"/>
-              </a:spcAft>
-            </a:pPr>
-            <a:r>
-              <a:rPr sz="930" b="0">
-                <a:solidFill>
-                  <a:srgbClr val="6B6B6B"/>
-                </a:solidFill>
-                <a:latin typeface="Apple SD Gothic Neo"/>
-                <a:ea typeface="Apple SD Gothic Neo"/>
-              </a:rPr>
-              <a:t>   정보 빈곤 구간·반등기에서만 기여 — 메커니즘 있는 조건부 발견</a:t>
-            </a:r>
-          </a:p>
-          <a:p>
-            <a:pPr algn="l">
-              <a:spcAft>
-                <a:spcPts val="200"/>
-              </a:spcAft>
-            </a:pPr>
-            <a:r>
-              <a:rPr sz="1050" b="1">
-                <a:solidFill>
-                  <a:srgbClr val="008A3E"/>
-                </a:solidFill>
-                <a:latin typeface="Apple SD Gothic Neo"/>
-                <a:ea typeface="Apple SD Gothic Neo"/>
-              </a:rPr>
-              <a:t>3. </a:t>
-            </a:r>
-            <a:r>
-              <a:rPr sz="1050" b="1">
-                <a:solidFill>
-                  <a:srgbClr val="262626"/>
-                </a:solidFill>
-                <a:latin typeface="Apple SD Gothic Neo"/>
-                <a:ea typeface="Apple SD Gothic Neo"/>
-              </a:rPr>
-              <a:t>무개정 일별 신호의 식별 깨끗한 효과 (0.836→0.808)</a:t>
-            </a:r>
-          </a:p>
-          <a:p>
-            <a:pPr algn="l">
-              <a:spcAft>
-                <a:spcPts val="200"/>
-              </a:spcAft>
-            </a:pPr>
-            <a:r>
-              <a:rPr sz="1050" b="1">
-                <a:solidFill>
-                  <a:srgbClr val="008A3E"/>
-                </a:solidFill>
-                <a:latin typeface="Apple SD Gothic Neo"/>
-                <a:ea typeface="Apple SD Gothic Neo"/>
-              </a:rPr>
-              <a:t>4. </a:t>
-            </a:r>
-            <a:r>
-              <a:rPr sz="1050" b="1">
-                <a:solidFill>
-                  <a:srgbClr val="262626"/>
-                </a:solidFill>
-                <a:latin typeface="Apple SD Gothic Neo"/>
-                <a:ea typeface="Apple SD Gothic Neo"/>
-              </a:rPr>
-              <a:t>TSFM 분위수 과소산포 실측 + 사후보정 처방</a:t>
-            </a:r>
-          </a:p>
-          <a:p>
-            <a:pPr algn="l">
-              <a:spcAft>
-                <a:spcPts val="200"/>
-              </a:spcAft>
-            </a:pPr>
-            <a:r>
-              <a:rPr sz="1050" b="1">
-                <a:solidFill>
-                  <a:srgbClr val="008A3E"/>
-                </a:solidFill>
-                <a:latin typeface="Apple SD Gothic Neo"/>
-                <a:ea typeface="Apple SD Gothic Neo"/>
-              </a:rPr>
-              <a:t>5. </a:t>
-            </a:r>
-            <a:r>
-              <a:rPr sz="1050" b="1">
-                <a:solidFill>
-                  <a:srgbClr val="262626"/>
-                </a:solidFill>
-                <a:latin typeface="Apple SD Gothic Neo"/>
-                <a:ea typeface="Apple SD Gothic Neo"/>
-              </a:rPr>
-              <a:t>소표본 결합 퍼즐 — 학습형 전패·고정 구조 생존 + 검정력 분석</a:t>
-            </a:r>
-          </a:p>
-          <a:p>
-            <a:pPr algn="l">
-              <a:spcAft>
-                <a:spcPts val="200"/>
-              </a:spcAft>
-            </a:pPr>
-            <a:r>
-              <a:rPr sz="930" b="0">
-                <a:solidFill>
-                  <a:srgbClr val="6B6B6B"/>
-                </a:solidFill>
-                <a:latin typeface="Apple SD Gothic Neo"/>
-                <a:ea typeface="Apple SD Gothic Neo"/>
-              </a:rPr>
-              <a:t>   MCS 전원 생존 결과와 함께 '평가 축 재설계' 논의로 승격</a:t>
-            </a:r>
-          </a:p>
-        </p:txBody>
-      </p:sp>
-      <p:sp>
-        <p:nvSpPr>
-          <p:cNvPr id="8" name="Rounded Rectangle 7"/>
-          <p:cNvSpPr/>
-          <p:nvPr/>
-        </p:nvSpPr>
-        <p:spPr>
-          <a:xfrm>
-            <a:off x="502920" y="5120640"/>
-            <a:ext cx="5852160" cy="1005840"/>
-          </a:xfrm>
-          <a:prstGeom prst="roundRect">
-            <a:avLst/>
-          </a:prstGeom>
-          <a:solidFill>
-            <a:srgbClr val="F3F4F5"/>
-          </a:solidFill>
-          <a:ln w="9525">
-            <a:solidFill>
-              <a:srgbClr val="C9C9C9"/>
-            </a:solidFill>
-          </a:ln>
-          <a:effectLst/>
-        </p:spPr>
-        <p:style>
-          <a:lnRef idx="1">
-            <a:schemeClr val="accent1"/>
-          </a:lnRef>
-          <a:fillRef idx="3">
-            <a:schemeClr val="accent1"/>
-          </a:fillRef>
-          <a:effectRef idx="2">
-            <a:schemeClr val="accent1"/>
-          </a:effectRef>
-          <a:fontRef idx="minor">
-            <a:schemeClr val="lt1"/>
-          </a:fontRef>
-        </p:style>
-        <p:txBody>
-          <a:bodyPr rtlCol="0" anchor="ctr"/>
-          <a:lstStyle/>
-          <a:p>
-            <a:pPr algn="ctr"/>
-          </a:p>
         </p:txBody>
       </p:sp>
       <p:sp>
@@ -8822,8 +8720,8 @@
         </p:nvSpPr>
         <p:spPr>
           <a:xfrm>
-            <a:off x="685800" y="5230368"/>
-            <a:ext cx="5486400" cy="822960"/>
+            <a:off x="777240" y="2569464"/>
+            <a:ext cx="5715000" cy="274320"/>
           </a:xfrm>
           <a:prstGeom prst="rect">
             <a:avLst/>
@@ -8831,62 +8729,25 @@
           <a:noFill/>
         </p:spPr>
         <p:txBody>
-          <a:bodyPr wrap="square" anchor="t" lIns="45720" rIns="45720" tIns="18288" bIns="18288">
+          <a:bodyPr wrap="square" anchor="t" lIns="18288" rIns="18288" tIns="9144" bIns="9144">
             <a:spAutoFit/>
           </a:bodyPr>
           <a:lstStyle/>
           <a:p>
             <a:pPr algn="l">
               <a:spcAft>
-                <a:spcPts val="300"/>
-              </a:spcAft>
-            </a:pPr>
-            <a:r>
-              <a:rPr sz="1050" b="1">
-                <a:solidFill>
-                  <a:srgbClr val="243447"/>
-                </a:solidFill>
-                <a:latin typeface="Apple SD Gothic Neo"/>
-                <a:ea typeface="Apple SD Gothic Neo"/>
-              </a:rPr>
-              <a:t>역할 분담(안)  </a:t>
-            </a:r>
-            <a:r>
-              <a:rPr sz="1000" b="0">
-                <a:solidFill>
-                  <a:srgbClr val="262626"/>
-                </a:solidFill>
-                <a:latin typeface="Apple SD Gothic Neo"/>
-                <a:ea typeface="Apple SD Gothic Neo"/>
-              </a:rPr>
-              <a:t>한은: 실시간 빈티지·도메인 검증·정책 함의  |  당사: 모델·평가 인프라·실험 재현 패키지</a:t>
-            </a:r>
-          </a:p>
-          <a:p>
-            <a:pPr algn="l">
-              <a:spcAft>
-                <a:spcPts val="300"/>
-              </a:spcAft>
-            </a:pPr>
-            <a:r>
-              <a:rPr sz="1050" b="1">
-                <a:solidFill>
-                  <a:srgbClr val="243447"/>
-                </a:solidFill>
-                <a:latin typeface="Apple SD Gothic Neo"/>
-                <a:ea typeface="Apple SD Gothic Neo"/>
-              </a:rPr>
-              <a:t>발표 경로(안)  </a:t>
-            </a:r>
-            <a:r>
-              <a:rPr sz="1000" b="0">
-                <a:solidFill>
-                  <a:srgbClr val="262626"/>
-                </a:solidFill>
-                <a:latin typeface="Apple SD Gothic Neo"/>
-                <a:ea typeface="Apple SD Gothic Neo"/>
-              </a:rPr>
-              <a:t>한은 Working Paper 선행 공개 → International Journal of Forecasting 투고</a:t>
+                <a:spcPts val="200"/>
+              </a:spcAft>
+            </a:pPr>
+            <a:r>
+              <a:rPr sz="900" b="0">
+                <a:solidFill>
+                  <a:srgbClr val="6B6B6B"/>
+                </a:solidFill>
+                <a:latin typeface="Apple SD Gothic Neo"/>
+                <a:ea typeface="Apple SD Gothic Neo"/>
+              </a:rPr>
+              <a:t>주 단위 19회 예측 그리드 — 기존 문헌은 대부분 사후 확정 데이터</a:t>
             </a:r>
           </a:p>
         </p:txBody>
@@ -8899,8 +8760,8 @@
         </p:nvSpPr>
         <p:spPr>
           <a:xfrm>
-            <a:off x="6720840" y="1737360"/>
-            <a:ext cx="4965192" cy="365760"/>
+            <a:off x="548640" y="2907792"/>
+            <a:ext cx="5943600" cy="274320"/>
           </a:xfrm>
           <a:prstGeom prst="rect">
             <a:avLst/>
@@ -8908,7 +8769,7 @@
           <a:noFill/>
         </p:spPr>
         <p:txBody>
-          <a:bodyPr wrap="square" anchor="t" lIns="45720" rIns="45720" tIns="18288" bIns="18288">
+          <a:bodyPr wrap="square" anchor="t" lIns="18288" rIns="18288" tIns="9144" bIns="9144">
             <a:spAutoFit/>
           </a:bodyPr>
           <a:lstStyle/>
@@ -8919,28 +8780,465 @@
               </a:spcAft>
             </a:pPr>
             <a:r>
-              <a:rPr sz="1150" b="1">
+              <a:rPr sz="1050" b="1">
+                <a:solidFill>
+                  <a:srgbClr val="008A3E"/>
+                </a:solidFill>
+                <a:latin typeface="Apple SD Gothic Neo"/>
+                <a:ea typeface="Apple SD Gothic Neo"/>
+              </a:rPr>
+              <a:t>2. </a:t>
+            </a:r>
+            <a:r>
+              <a:rPr sz="1050" b="1">
+                <a:solidFill>
+                  <a:srgbClr val="262626"/>
+                </a:solidFill>
+                <a:latin typeface="Apple SD Gothic Neo"/>
+                <a:ea typeface="Apple SD Gothic Neo"/>
+              </a:rPr>
+              <a:t>전망시계 조건부 보완성</a:t>
+            </a:r>
+          </a:p>
+        </p:txBody>
+      </p:sp>
+      <p:sp>
+        <p:nvSpPr>
+          <p:cNvPr id="11" name="TextBox 10"/>
+          <p:cNvSpPr txBox="1"/>
+          <p:nvPr/>
+        </p:nvSpPr>
+        <p:spPr>
+          <a:xfrm>
+            <a:off x="777240" y="3172968"/>
+            <a:ext cx="5715000" cy="274320"/>
+          </a:xfrm>
+          <a:prstGeom prst="rect">
+            <a:avLst/>
+          </a:prstGeom>
+          <a:noFill/>
+        </p:spPr>
+        <p:txBody>
+          <a:bodyPr wrap="square" anchor="t" lIns="18288" rIns="18288" tIns="9144" bIns="9144">
+            <a:spAutoFit/>
+          </a:bodyPr>
+          <a:lstStyle/>
+          <a:p>
+            <a:pPr algn="l">
+              <a:spcAft>
+                <a:spcPts val="200"/>
+              </a:spcAft>
+            </a:pPr>
+            <a:r>
+              <a:rPr sz="900" b="0">
+                <a:solidFill>
+                  <a:srgbClr val="6B6B6B"/>
+                </a:solidFill>
+                <a:latin typeface="Apple SD Gothic Neo"/>
+                <a:ea typeface="Apple SD Gothic Neo"/>
+              </a:rPr>
+              <a:t>정보 빈곤 구간·반등기에서만 기여 — 메커니즘 있는 조건부 발견</a:t>
+            </a:r>
+          </a:p>
+        </p:txBody>
+      </p:sp>
+      <p:sp>
+        <p:nvSpPr>
+          <p:cNvPr id="12" name="TextBox 11"/>
+          <p:cNvSpPr txBox="1"/>
+          <p:nvPr/>
+        </p:nvSpPr>
+        <p:spPr>
+          <a:xfrm>
+            <a:off x="548640" y="3511296"/>
+            <a:ext cx="5943600" cy="274320"/>
+          </a:xfrm>
+          <a:prstGeom prst="rect">
+            <a:avLst/>
+          </a:prstGeom>
+          <a:noFill/>
+        </p:spPr>
+        <p:txBody>
+          <a:bodyPr wrap="square" anchor="t" lIns="18288" rIns="18288" tIns="9144" bIns="9144">
+            <a:spAutoFit/>
+          </a:bodyPr>
+          <a:lstStyle/>
+          <a:p>
+            <a:pPr algn="l">
+              <a:spcAft>
+                <a:spcPts val="200"/>
+              </a:spcAft>
+            </a:pPr>
+            <a:r>
+              <a:rPr sz="1050" b="1">
+                <a:solidFill>
+                  <a:srgbClr val="008A3E"/>
+                </a:solidFill>
+                <a:latin typeface="Apple SD Gothic Neo"/>
+                <a:ea typeface="Apple SD Gothic Neo"/>
+              </a:rPr>
+              <a:t>3. </a:t>
+            </a:r>
+            <a:r>
+              <a:rPr sz="1050" b="1">
+                <a:solidFill>
+                  <a:srgbClr val="262626"/>
+                </a:solidFill>
+                <a:latin typeface="Apple SD Gothic Neo"/>
+                <a:ea typeface="Apple SD Gothic Neo"/>
+              </a:rPr>
+              <a:t>무개정 일별 신호의 식별 깨끗한 효과</a:t>
+            </a:r>
+          </a:p>
+        </p:txBody>
+      </p:sp>
+      <p:sp>
+        <p:nvSpPr>
+          <p:cNvPr id="13" name="TextBox 12"/>
+          <p:cNvSpPr txBox="1"/>
+          <p:nvPr/>
+        </p:nvSpPr>
+        <p:spPr>
+          <a:xfrm>
+            <a:off x="777240" y="3776472"/>
+            <a:ext cx="5715000" cy="274320"/>
+          </a:xfrm>
+          <a:prstGeom prst="rect">
+            <a:avLst/>
+          </a:prstGeom>
+          <a:noFill/>
+        </p:spPr>
+        <p:txBody>
+          <a:bodyPr wrap="square" anchor="t" lIns="18288" rIns="18288" tIns="9144" bIns="9144">
+            <a:spAutoFit/>
+          </a:bodyPr>
+          <a:lstStyle/>
+          <a:p>
+            <a:pPr algn="l">
+              <a:spcAft>
+                <a:spcPts val="200"/>
+              </a:spcAft>
+            </a:pPr>
+            <a:r>
+              <a:rPr sz="900" b="0">
+                <a:solidFill>
+                  <a:srgbClr val="6B6B6B"/>
+                </a:solidFill>
+                <a:latin typeface="Apple SD Gothic Neo"/>
+                <a:ea typeface="Apple SD Gothic Neo"/>
+              </a:rPr>
+              <a:t>가격 데이터는 개정이 없어 look-ahead 논란 원천 차단 (0.836→0.808)</a:t>
+            </a:r>
+          </a:p>
+        </p:txBody>
+      </p:sp>
+      <p:sp>
+        <p:nvSpPr>
+          <p:cNvPr id="14" name="TextBox 13"/>
+          <p:cNvSpPr txBox="1"/>
+          <p:nvPr/>
+        </p:nvSpPr>
+        <p:spPr>
+          <a:xfrm>
+            <a:off x="548640" y="4114800"/>
+            <a:ext cx="5943600" cy="274320"/>
+          </a:xfrm>
+          <a:prstGeom prst="rect">
+            <a:avLst/>
+          </a:prstGeom>
+          <a:noFill/>
+        </p:spPr>
+        <p:txBody>
+          <a:bodyPr wrap="square" anchor="t" lIns="18288" rIns="18288" tIns="9144" bIns="9144">
+            <a:spAutoFit/>
+          </a:bodyPr>
+          <a:lstStyle/>
+          <a:p>
+            <a:pPr algn="l">
+              <a:spcAft>
+                <a:spcPts val="200"/>
+              </a:spcAft>
+            </a:pPr>
+            <a:r>
+              <a:rPr sz="1050" b="1">
+                <a:solidFill>
+                  <a:srgbClr val="008A3E"/>
+                </a:solidFill>
+                <a:latin typeface="Apple SD Gothic Neo"/>
+                <a:ea typeface="Apple SD Gothic Neo"/>
+              </a:rPr>
+              <a:t>4. </a:t>
+            </a:r>
+            <a:r>
+              <a:rPr sz="1050" b="1">
+                <a:solidFill>
+                  <a:srgbClr val="262626"/>
+                </a:solidFill>
+                <a:latin typeface="Apple SD Gothic Neo"/>
+                <a:ea typeface="Apple SD Gothic Neo"/>
+              </a:rPr>
+              <a:t>TSFM 분위수 과소산포 실측과 처방</a:t>
+            </a:r>
+          </a:p>
+        </p:txBody>
+      </p:sp>
+      <p:sp>
+        <p:nvSpPr>
+          <p:cNvPr id="15" name="TextBox 14"/>
+          <p:cNvSpPr txBox="1"/>
+          <p:nvPr/>
+        </p:nvSpPr>
+        <p:spPr>
+          <a:xfrm>
+            <a:off x="777240" y="4379976"/>
+            <a:ext cx="5715000" cy="274320"/>
+          </a:xfrm>
+          <a:prstGeom prst="rect">
+            <a:avLst/>
+          </a:prstGeom>
+          <a:noFill/>
+        </p:spPr>
+        <p:txBody>
+          <a:bodyPr wrap="square" anchor="t" lIns="18288" rIns="18288" tIns="9144" bIns="9144">
+            <a:spAutoFit/>
+          </a:bodyPr>
+          <a:lstStyle/>
+          <a:p>
+            <a:pPr algn="l">
+              <a:spcAft>
+                <a:spcPts val="200"/>
+              </a:spcAft>
+            </a:pPr>
+            <a:r>
+              <a:rPr sz="900" b="0">
+                <a:solidFill>
+                  <a:srgbClr val="6B6B6B"/>
+                </a:solidFill>
+                <a:latin typeface="Apple SD Gothic Neo"/>
+                <a:ea typeface="Apple SD Gothic Neo"/>
+              </a:rPr>
+              <a:t>커버리지 49% → 컨포멀 보정으로 복원</a:t>
+            </a:r>
+          </a:p>
+        </p:txBody>
+      </p:sp>
+      <p:sp>
+        <p:nvSpPr>
+          <p:cNvPr id="16" name="TextBox 15"/>
+          <p:cNvSpPr txBox="1"/>
+          <p:nvPr/>
+        </p:nvSpPr>
+        <p:spPr>
+          <a:xfrm>
+            <a:off x="548640" y="4718304"/>
+            <a:ext cx="5943600" cy="274320"/>
+          </a:xfrm>
+          <a:prstGeom prst="rect">
+            <a:avLst/>
+          </a:prstGeom>
+          <a:noFill/>
+        </p:spPr>
+        <p:txBody>
+          <a:bodyPr wrap="square" anchor="t" lIns="18288" rIns="18288" tIns="9144" bIns="9144">
+            <a:spAutoFit/>
+          </a:bodyPr>
+          <a:lstStyle/>
+          <a:p>
+            <a:pPr algn="l">
+              <a:spcAft>
+                <a:spcPts val="200"/>
+              </a:spcAft>
+            </a:pPr>
+            <a:r>
+              <a:rPr sz="1050" b="1">
+                <a:solidFill>
+                  <a:srgbClr val="008A3E"/>
+                </a:solidFill>
+                <a:latin typeface="Apple SD Gothic Neo"/>
+                <a:ea typeface="Apple SD Gothic Neo"/>
+              </a:rPr>
+              <a:t>5. </a:t>
+            </a:r>
+            <a:r>
+              <a:rPr sz="1050" b="1">
+                <a:solidFill>
+                  <a:srgbClr val="262626"/>
+                </a:solidFill>
+                <a:latin typeface="Apple SD Gothic Neo"/>
+                <a:ea typeface="Apple SD Gothic Neo"/>
+              </a:rPr>
+              <a:t>소표본 결합 퍼즐 + 검정력 분석</a:t>
+            </a:r>
+          </a:p>
+        </p:txBody>
+      </p:sp>
+      <p:sp>
+        <p:nvSpPr>
+          <p:cNvPr id="17" name="TextBox 16"/>
+          <p:cNvSpPr txBox="1"/>
+          <p:nvPr/>
+        </p:nvSpPr>
+        <p:spPr>
+          <a:xfrm>
+            <a:off x="777240" y="4983480"/>
+            <a:ext cx="5715000" cy="274320"/>
+          </a:xfrm>
+          <a:prstGeom prst="rect">
+            <a:avLst/>
+          </a:prstGeom>
+          <a:noFill/>
+        </p:spPr>
+        <p:txBody>
+          <a:bodyPr wrap="square" anchor="t" lIns="18288" rIns="18288" tIns="9144" bIns="9144">
+            <a:spAutoFit/>
+          </a:bodyPr>
+          <a:lstStyle/>
+          <a:p>
+            <a:pPr algn="l">
+              <a:spcAft>
+                <a:spcPts val="200"/>
+              </a:spcAft>
+            </a:pPr>
+            <a:r>
+              <a:rPr sz="900" b="0">
+                <a:solidFill>
+                  <a:srgbClr val="6B6B6B"/>
+                </a:solidFill>
+                <a:latin typeface="Apple SD Gothic Neo"/>
+                <a:ea typeface="Apple SD Gothic Neo"/>
+              </a:rPr>
+              <a:t>학습형 전패·고정 구조 생존, MCS 전원 잔류 — ‘평가 축 재설계’ 논의로 승격</a:t>
+            </a:r>
+          </a:p>
+        </p:txBody>
+      </p:sp>
+      <p:sp>
+        <p:nvSpPr>
+          <p:cNvPr id="18" name="TextBox 17"/>
+          <p:cNvSpPr txBox="1"/>
+          <p:nvPr/>
+        </p:nvSpPr>
+        <p:spPr>
+          <a:xfrm>
+            <a:off x="548640" y="5413248"/>
+            <a:ext cx="5943600" cy="640080"/>
+          </a:xfrm>
+          <a:prstGeom prst="rect">
+            <a:avLst/>
+          </a:prstGeom>
+          <a:noFill/>
+        </p:spPr>
+        <p:txBody>
+          <a:bodyPr wrap="square" anchor="t" lIns="18288" rIns="18288" tIns="9144" bIns="9144">
+            <a:spAutoFit/>
+          </a:bodyPr>
+          <a:lstStyle/>
+          <a:p>
+            <a:pPr algn="l">
+              <a:spcAft>
+                <a:spcPts val="300"/>
+              </a:spcAft>
+            </a:pPr>
+            <a:r>
+              <a:rPr sz="1050" b="1">
                 <a:solidFill>
                   <a:srgbClr val="243447"/>
                 </a:solidFill>
                 <a:latin typeface="Apple SD Gothic Neo"/>
                 <a:ea typeface="Apple SD Gothic Neo"/>
               </a:rPr>
-              <a:t>표본 한계의 정면 돌파 (Future Work 아님 — 설계에 포함)</a:t>
+              <a:t>역할 분담(안)  </a:t>
+            </a:r>
+            <a:r>
+              <a:rPr sz="1000" b="0">
+                <a:solidFill>
+                  <a:srgbClr val="262626"/>
+                </a:solidFill>
+                <a:latin typeface="Apple SD Gothic Neo"/>
+                <a:ea typeface="Apple SD Gothic Neo"/>
+              </a:rPr>
+              <a:t>한은: 실시간 빈티지·도메인 검증·정책 함의  /  당사: 모델·평가 인프라·재현 패키지</a:t>
+            </a:r>
+          </a:p>
+          <a:p>
+            <a:pPr algn="l">
+              <a:spcAft>
+                <a:spcPts val="300"/>
+              </a:spcAft>
+            </a:pPr>
+            <a:r>
+              <a:rPr sz="1050" b="1">
+                <a:solidFill>
+                  <a:srgbClr val="243447"/>
+                </a:solidFill>
+                <a:latin typeface="Apple SD Gothic Neo"/>
+                <a:ea typeface="Apple SD Gothic Neo"/>
+              </a:rPr>
+              <a:t>발표 경로(안)  </a:t>
+            </a:r>
+            <a:r>
+              <a:rPr sz="1000" b="0">
+                <a:solidFill>
+                  <a:srgbClr val="262626"/>
+                </a:solidFill>
+                <a:latin typeface="Apple SD Gothic Neo"/>
+                <a:ea typeface="Apple SD Gothic Neo"/>
+              </a:rPr>
+              <a:t>한은 Working Paper 선행 공개 → International Journal of Forecasting 투고</a:t>
+            </a:r>
+          </a:p>
+        </p:txBody>
+      </p:sp>
+      <p:sp>
+        <p:nvSpPr>
+          <p:cNvPr id="19" name="TextBox 18"/>
+          <p:cNvSpPr txBox="1"/>
+          <p:nvPr/>
+        </p:nvSpPr>
+        <p:spPr>
+          <a:xfrm>
+            <a:off x="6903720" y="1828800"/>
+            <a:ext cx="4754880" cy="320040"/>
+          </a:xfrm>
+          <a:prstGeom prst="rect">
+            <a:avLst/>
+          </a:prstGeom>
+          <a:noFill/>
+        </p:spPr>
+        <p:txBody>
+          <a:bodyPr wrap="square" anchor="t" lIns="18288" rIns="18288" tIns="9144" bIns="9144">
+            <a:spAutoFit/>
+          </a:bodyPr>
+          <a:lstStyle/>
+          <a:p>
+            <a:pPr algn="l">
+              <a:spcAft>
+                <a:spcPts val="200"/>
+              </a:spcAft>
+            </a:pPr>
+            <a:r>
+              <a:rPr sz="1200" b="1">
+                <a:solidFill>
+                  <a:srgbClr val="243447"/>
+                </a:solidFill>
+                <a:latin typeface="Apple SD Gothic Neo"/>
+                <a:ea typeface="Apple SD Gothic Neo"/>
+              </a:rPr>
+              <a:t>표본 한계는 Future Work가 아니라 설계로 풉니다</a:t>
             </a:r>
           </a:p>
         </p:txBody>
       </p:sp>
       <p:cxnSp>
         <p:nvCxnSpPr>
-          <p:cNvPr id="11" name="Connector 10"/>
+          <p:cNvPr id="20" name="Connector 19"/>
           <p:cNvCxnSpPr/>
           <p:nvPr/>
         </p:nvCxnSpPr>
         <p:spPr>
           <a:xfrm>
-            <a:off x="6720840" y="2066543"/>
-            <a:ext cx="4965192" cy="0"/>
+            <a:off x="6903720" y="2167128"/>
+            <a:ext cx="4754880" cy="0"/>
           </a:xfrm>
           <a:prstGeom prst="line">
             <a:avLst/>
@@ -8968,14 +9266,14 @@
       </p:cxnSp>
       <p:sp>
         <p:nvSpPr>
-          <p:cNvPr id="12" name="TextBox 11"/>
+          <p:cNvPr id="21" name="TextBox 20"/>
           <p:cNvSpPr txBox="1"/>
           <p:nvPr/>
         </p:nvSpPr>
         <p:spPr>
           <a:xfrm>
-            <a:off x="6720840" y="2176272"/>
-            <a:ext cx="4965192" cy="2743200"/>
+            <a:off x="6903720" y="2304288"/>
+            <a:ext cx="4754880" cy="3657600"/>
           </a:xfrm>
           <a:prstGeom prst="rect">
             <a:avLst/>
@@ -8983,7 +9281,7 @@
           <a:noFill/>
         </p:spPr>
         <p:txBody>
-          <a:bodyPr wrap="square" anchor="t" lIns="45720" rIns="45720" tIns="18288" bIns="18288">
+          <a:bodyPr wrap="square" anchor="t" lIns="18288" rIns="18288" tIns="9144" bIns="9144">
             <a:spAutoFit/>
           </a:bodyPr>
           <a:lstStyle/>
@@ -9001,68 +9299,61 @@
                 <a:latin typeface="Apple SD Gothic Neo"/>
                 <a:ea typeface="Apple SD Gothic Neo"/>
               </a:rPr>
-              <a:t>· 다국가 복제</a:t>
-            </a:r>
-          </a:p>
-          <a:p>
-            <a:pPr algn="l">
-              <a:spcAft>
-                <a:spcPts val="200"/>
-              </a:spcAft>
-            </a:pPr>
-            <a:r>
-              <a:rPr sz="1000" b="0">
+              <a:t>다국가 복제. </a:t>
+            </a:r>
+            <a:r>
+              <a:rPr sz="1050" b="0">
                 <a:solidFill>
                   <a:srgbClr val="262626"/>
                 </a:solidFill>
                 <a:latin typeface="Apple SD Gothic Neo"/>
                 <a:ea typeface="Apple SD Gothic Neo"/>
               </a:rPr>
-              <a:t>  미국 ALFRED(세인트루이스 연준 실시간 DB, 공개) ·</a:t>
-            </a:r>
-          </a:p>
-          <a:p>
-            <a:pPr algn="l">
-              <a:spcAft>
-                <a:spcPts val="200"/>
-              </a:spcAft>
-            </a:pPr>
-            <a:r>
-              <a:rPr sz="1000" b="0">
+              <a:t>미국 ALFRED(세인트루이스 연준 실시간</a:t>
+            </a:r>
+          </a:p>
+          <a:p>
+            <a:pPr algn="l">
+              <a:spcAft>
+                <a:spcPts val="200"/>
+              </a:spcAft>
+            </a:pPr>
+            <a:r>
+              <a:rPr sz="1050" b="0">
                 <a:solidFill>
                   <a:srgbClr val="262626"/>
                 </a:solidFill>
                 <a:latin typeface="Apple SD Gothic Neo"/>
                 <a:ea typeface="Apple SD Gothic Neo"/>
               </a:rPr>
-              <a:t>  유로존 ECB 실시간 DB로 동일 프레임 재현 —</a:t>
-            </a:r>
-          </a:p>
-          <a:p>
-            <a:pPr algn="l">
-              <a:spcAft>
-                <a:spcPts val="200"/>
-              </a:spcAft>
-            </a:pPr>
-            <a:r>
-              <a:rPr sz="1000" b="0">
+              <a:t>DB, 공개)·유로존 ECB 실시간 DB로 동일 프레임을 재현해,</a:t>
+            </a:r>
+          </a:p>
+          <a:p>
+            <a:pPr algn="l">
+              <a:spcAft>
+                <a:spcPts val="200"/>
+              </a:spcAft>
+            </a:pPr>
+            <a:r>
+              <a:rPr sz="1050" b="0">
                 <a:solidFill>
                   <a:srgbClr val="262626"/>
                 </a:solidFill>
                 <a:latin typeface="Apple SD Gothic Neo"/>
                 <a:ea typeface="Apple SD Gothic Neo"/>
               </a:rPr>
-              <a:t>  3개 지역 일관 결과로 소표본 반론에 선제 대응</a:t>
-            </a:r>
-          </a:p>
-          <a:p>
-            <a:pPr algn="l">
-              <a:spcAft>
-                <a:spcPts val="200"/>
-              </a:spcAft>
-            </a:pPr>
-            <a:r>
-              <a:rPr sz="400" b="0">
+              <a:t>‘단일국 32분기’라는 예상 반론에 선제 대응합니다.</a:t>
+            </a:r>
+          </a:p>
+          <a:p>
+            <a:pPr algn="l">
+              <a:spcAft>
+                <a:spcPts val="200"/>
+              </a:spcAft>
+            </a:pPr>
+            <a:r>
+              <a:rPr sz="600" b="0">
                 <a:solidFill>
                   <a:srgbClr val="262626"/>
                 </a:solidFill>
@@ -9086,57 +9377,67 @@
                 <a:latin typeface="Apple SD Gothic Neo"/>
                 <a:ea typeface="Apple SD Gothic Neo"/>
               </a:rPr>
-              <a:t>· 사전등록 라이브 추적</a:t>
-            </a:r>
-          </a:p>
-          <a:p>
-            <a:pPr algn="l">
-              <a:spcAft>
-                <a:spcPts val="200"/>
-              </a:spcAft>
-            </a:pPr>
-            <a:r>
-              <a:rPr sz="1000" b="0">
+              <a:t>사전등록 라이브 추적. </a:t>
+            </a:r>
+            <a:r>
+              <a:rPr sz="1050" b="0">
                 <a:solidFill>
                   <a:srgbClr val="262626"/>
                 </a:solidFill>
                 <a:latin typeface="Apple SD Gothic Neo"/>
                 <a:ea typeface="Apple SD Gothic Neo"/>
               </a:rPr>
-              <a:t>  하이브리드 구성을 고정·공개 후 향후 분기를 실전</a:t>
-            </a:r>
-          </a:p>
-          <a:p>
-            <a:pPr algn="l">
-              <a:spcAft>
-                <a:spcPts val="200"/>
-              </a:spcAft>
-            </a:pPr>
-            <a:r>
-              <a:rPr sz="1000" b="0">
+              <a:t>주차별 결합 구성을 고정·공개한</a:t>
+            </a:r>
+          </a:p>
+          <a:p>
+            <a:pPr algn="l">
+              <a:spcAft>
+                <a:spcPts val="200"/>
+              </a:spcAft>
+            </a:pPr>
+            <a:r>
+              <a:rPr sz="1050" b="0">
                 <a:solidFill>
                   <a:srgbClr val="262626"/>
                 </a:solidFill>
                 <a:latin typeface="Apple SD Gothic Neo"/>
                 <a:ea typeface="Apple SD Gothic Neo"/>
               </a:rPr>
-              <a:t>  축적 — 선택편의 없는 표본외 증거 확보</a:t>
-            </a:r>
-          </a:p>
-          <a:p>
-            <a:pPr algn="l">
-              <a:spcAft>
-                <a:spcPts val="200"/>
-              </a:spcAft>
-            </a:pPr>
-            <a:r>
-              <a:rPr sz="400" b="0">
+              <a:t>뒤 향후 분기를 실전 축적 — 선택편의 없는 표본외 증거를</a:t>
+            </a:r>
+          </a:p>
+          <a:p>
+            <a:pPr algn="l">
+              <a:spcAft>
+                <a:spcPts val="200"/>
+              </a:spcAft>
+            </a:pPr>
+            <a:r>
+              <a:rPr sz="1050" b="0">
                 <a:solidFill>
                   <a:srgbClr val="262626"/>
                 </a:solidFill>
                 <a:latin typeface="Apple SD Gothic Neo"/>
                 <a:ea typeface="Apple SD Gothic Neo"/>
               </a:rPr>
+              <a:t>만듭니다.</a:t>
+            </a:r>
+          </a:p>
+          <a:p>
+            <a:pPr algn="l">
+              <a:spcAft>
+                <a:spcPts val="200"/>
+              </a:spcAft>
+            </a:pPr>
+            <a:r>
+              <a:rPr sz="600" b="0">
+                <a:solidFill>
+                  <a:srgbClr val="262626"/>
+                </a:solidFill>
+                <a:latin typeface="Apple SD Gothic Neo"/>
+                <a:ea typeface="Apple SD Gothic Neo"/>
+              </a:rPr>
               <a:t/>
             </a:r>
           </a:p>
@@ -9154,101 +9455,65 @@
                 <a:latin typeface="Apple SD Gothic Neo"/>
                 <a:ea typeface="Apple SD Gothic Neo"/>
               </a:rPr>
-              <a:t>· 유의성 논의는 본문에서 정면 처리</a:t>
-            </a:r>
-          </a:p>
-          <a:p>
-            <a:pPr algn="l">
-              <a:spcAft>
-                <a:spcPts val="200"/>
-              </a:spcAft>
-            </a:pPr>
-            <a:r>
-              <a:rPr sz="1000" b="0">
+              <a:t>유의성 논의는 본문에서 정면 처리. </a:t>
+            </a:r>
+            <a:r>
+              <a:rPr sz="1050" b="0">
                 <a:solidFill>
                   <a:srgbClr val="262626"/>
                 </a:solidFill>
                 <a:latin typeface="Apple SD Gothic Neo"/>
                 <a:ea typeface="Apple SD Gothic Neo"/>
               </a:rPr>
-              <a:t>  검정력 분석 + MCS를 '평가 방법론 기여'로 배치 —</a:t>
-            </a:r>
-          </a:p>
-          <a:p>
-            <a:pPr algn="l">
-              <a:spcAft>
-                <a:spcPts val="200"/>
-              </a:spcAft>
-            </a:pPr>
-            <a:r>
-              <a:rPr sz="1000" b="0">
+              <a:t>검정력 분석과</a:t>
+            </a:r>
+          </a:p>
+          <a:p>
+            <a:pPr algn="l">
+              <a:spcAft>
+                <a:spcPts val="200"/>
+              </a:spcAft>
+            </a:pPr>
+            <a:r>
+              <a:rPr sz="1050" b="0">
                 <a:solidFill>
                   <a:srgbClr val="262626"/>
                 </a:solidFill>
                 <a:latin typeface="Apple SD Gothic Neo"/>
                 <a:ea typeface="Apple SD Gothic Neo"/>
               </a:rPr>
-              <a:t>  약점 고백이 아니라 논문 주장의 일부</a:t>
-            </a:r>
-          </a:p>
-        </p:txBody>
-      </p:sp>
-      <p:sp>
-        <p:nvSpPr>
-          <p:cNvPr id="13" name="Rectangle 12"/>
-          <p:cNvSpPr/>
-          <p:nvPr/>
-        </p:nvSpPr>
-        <p:spPr>
-          <a:xfrm>
-            <a:off x="502920" y="6309360"/>
-            <a:ext cx="11183112" cy="365760"/>
-          </a:xfrm>
-          <a:prstGeom prst="rect">
-            <a:avLst/>
-          </a:prstGeom>
-          <a:solidFill>
-            <a:srgbClr val="F3F4F5"/>
-          </a:solidFill>
-          <a:ln w="9525">
-            <a:solidFill>
-              <a:srgbClr val="C9C9C9"/>
-            </a:solidFill>
-          </a:ln>
-          <a:effectLst/>
-        </p:spPr>
-        <p:style>
-          <a:lnRef idx="1">
-            <a:schemeClr val="accent1"/>
-          </a:lnRef>
-          <a:fillRef idx="3">
-            <a:schemeClr val="accent1"/>
-          </a:fillRef>
-          <a:effectRef idx="2">
-            <a:schemeClr val="accent1"/>
-          </a:effectRef>
-          <a:fontRef idx="minor">
-            <a:schemeClr val="lt1"/>
-          </a:fontRef>
-        </p:style>
-        <p:txBody>
-          <a:bodyPr rtlCol="0" anchor="ctr"/>
-          <a:lstStyle/>
-          <a:p>
-            <a:pPr algn="ctr"/>
-          </a:p>
-        </p:txBody>
-      </p:sp>
-      <p:sp>
-        <p:nvSpPr>
-          <p:cNvPr id="14" name="TextBox 13"/>
+              <a:t>MCS를 ‘평가 방법론 기여’로 배치합니다 — 약점 고백이</a:t>
+            </a:r>
+          </a:p>
+          <a:p>
+            <a:pPr algn="l">
+              <a:spcAft>
+                <a:spcPts val="200"/>
+              </a:spcAft>
+            </a:pPr>
+            <a:r>
+              <a:rPr sz="1050" b="0">
+                <a:solidFill>
+                  <a:srgbClr val="262626"/>
+                </a:solidFill>
+                <a:latin typeface="Apple SD Gothic Neo"/>
+                <a:ea typeface="Apple SD Gothic Neo"/>
+              </a:rPr>
+              <a:t>아니라 논문 주장의 일부입니다.</a:t>
+            </a:r>
+          </a:p>
+        </p:txBody>
+      </p:sp>
+      <p:sp>
+        <p:nvSpPr>
+          <p:cNvPr id="22" name="TextBox 21"/>
           <p:cNvSpPr txBox="1"/>
           <p:nvPr/>
         </p:nvSpPr>
         <p:spPr>
           <a:xfrm>
-            <a:off x="685800" y="6364224"/>
-            <a:ext cx="10881360" cy="256032"/>
+            <a:off x="548640" y="6455664"/>
+            <a:ext cx="9875520" cy="274320"/>
           </a:xfrm>
           <a:prstGeom prst="rect">
             <a:avLst/>
@@ -9256,7 +9521,7 @@
           <a:noFill/>
         </p:spPr>
         <p:txBody>
-          <a:bodyPr wrap="square" anchor="ctr" lIns="45720" rIns="45720" tIns="18288" bIns="18288">
+          <a:bodyPr wrap="square" anchor="t" lIns="18288" rIns="18288" tIns="9144" bIns="9144">
             <a:spAutoFit/>
           </a:bodyPr>
           <a:lstStyle/>
@@ -9267,14 +9532,54 @@
               </a:spcAft>
             </a:pPr>
             <a:r>
-              <a:rPr sz="880" b="0">
+              <a:rPr sz="800" b="0">
                 <a:solidFill>
                   <a:srgbClr val="6B6B6B"/>
                 </a:solidFill>
                 <a:latin typeface="Apple SD Gothic Neo"/>
                 <a:ea typeface="Apple SD Gothic Neo"/>
               </a:rPr>
-              <a:t>데이터 공개 방식(코드 공개 + 빈티지 데이터 접근 절차)은 초기 합의 필요 · 기준선 개정 경위의 서술 수위는 공동저자 협의 사항</a:t>
+              <a:t>주: 데이터 공개 방식(코드 공개 + 빈티지 접근 절차)은 초기 합의 필요. 기준선 개정 경위의 서술 수위는 공동저자 협의 사항.</a:t>
+            </a:r>
+          </a:p>
+        </p:txBody>
+      </p:sp>
+      <p:sp>
+        <p:nvSpPr>
+          <p:cNvPr id="23" name="TextBox 22"/>
+          <p:cNvSpPr txBox="1"/>
+          <p:nvPr/>
+        </p:nvSpPr>
+        <p:spPr>
+          <a:xfrm>
+            <a:off x="11292840" y="6455664"/>
+            <a:ext cx="457200" cy="274320"/>
+          </a:xfrm>
+          <a:prstGeom prst="rect">
+            <a:avLst/>
+          </a:prstGeom>
+          <a:noFill/>
+        </p:spPr>
+        <p:txBody>
+          <a:bodyPr wrap="square" anchor="t" lIns="18288" rIns="18288" tIns="9144" bIns="9144">
+            <a:spAutoFit/>
+          </a:bodyPr>
+          <a:lstStyle/>
+          <a:p>
+            <a:pPr algn="r">
+              <a:spcAft>
+                <a:spcPts val="200"/>
+              </a:spcAft>
+            </a:pPr>
+            <a:r>
+              <a:rPr sz="900" b="0">
+                <a:solidFill>
+                  <a:srgbClr val="6B6B6B"/>
+                </a:solidFill>
+                <a:latin typeface="Apple SD Gothic Neo"/>
+                <a:ea typeface="Apple SD Gothic Neo"/>
+              </a:rPr>
+              <a:t>7</a:t>
             </a:r>
           </a:p>
         </p:txBody>
@@ -9305,8 +9610,8 @@
         </p:nvSpPr>
         <p:spPr>
           <a:xfrm>
-            <a:off x="502920" y="274320"/>
-            <a:ext cx="11155680" cy="502920"/>
+            <a:off x="548640" y="292608"/>
+            <a:ext cx="10515600" cy="274320"/>
           </a:xfrm>
           <a:prstGeom prst="rect">
             <a:avLst/>
@@ -9314,7 +9619,7 @@
           <a:noFill/>
         </p:spPr>
         <p:txBody>
-          <a:bodyPr wrap="square" anchor="t" lIns="45720" rIns="45720" tIns="18288" bIns="18288">
+          <a:bodyPr wrap="square" anchor="t" lIns="18288" rIns="18288" tIns="9144" bIns="9144">
             <a:spAutoFit/>
           </a:bodyPr>
           <a:lstStyle/>
@@ -9325,43 +9630,73 @@
               </a:spcAft>
             </a:pPr>
             <a:r>
-              <a:rPr sz="1900" b="1">
-                <a:solidFill>
-                  <a:srgbClr val="008A3E"/>
-                </a:solidFill>
-                <a:latin typeface="Apple SD Gothic Neo"/>
-                <a:ea typeface="Apple SD Gothic Neo"/>
-              </a:rPr>
-              <a:t>07  </a:t>
-            </a:r>
-            <a:r>
-              <a:rPr sz="1900" b="1">
+              <a:rPr sz="1050" b="1">
+                <a:solidFill>
+                  <a:srgbClr val="6B6B6B"/>
+                </a:solidFill>
+                <a:latin typeface="Apple SD Gothic Neo"/>
+                <a:ea typeface="Apple SD Gothic Neo"/>
+              </a:rPr>
+              <a:t>7  |  요약</a:t>
+            </a:r>
+          </a:p>
+        </p:txBody>
+      </p:sp>
+      <p:sp>
+        <p:nvSpPr>
+          <p:cNvPr id="3" name="TextBox 2"/>
+          <p:cNvSpPr txBox="1"/>
+          <p:nvPr/>
+        </p:nvSpPr>
+        <p:spPr>
+          <a:xfrm>
+            <a:off x="548640" y="548640"/>
+            <a:ext cx="11064240" cy="548640"/>
+          </a:xfrm>
+          <a:prstGeom prst="rect">
+            <a:avLst/>
+          </a:prstGeom>
+          <a:noFill/>
+        </p:spPr>
+        <p:txBody>
+          <a:bodyPr wrap="square" anchor="t" lIns="18288" rIns="18288" tIns="9144" bIns="9144">
+            <a:spAutoFit/>
+          </a:bodyPr>
+          <a:lstStyle/>
+          <a:p>
+            <a:pPr algn="l">
+              <a:spcAft>
+                <a:spcPts val="200"/>
+              </a:spcAft>
+            </a:pPr>
+            <a:r>
+              <a:rPr sz="1700" b="1">
                 <a:solidFill>
                   <a:srgbClr val="243447"/>
                 </a:solidFill>
                 <a:latin typeface="Apple SD Gothic Neo"/>
                 <a:ea typeface="Apple SD Gothic Neo"/>
               </a:rPr>
-              <a:t>요약 및 다음 단계</a:t>
+              <a:t>네 가지로 정리드리고, 논문 구도 협의를 요청드립니다</a:t>
             </a:r>
           </a:p>
         </p:txBody>
       </p:sp>
       <p:cxnSp>
         <p:nvCxnSpPr>
-          <p:cNvPr id="3" name="Connector 2"/>
+          <p:cNvPr id="4" name="Connector 3"/>
           <p:cNvCxnSpPr/>
           <p:nvPr/>
         </p:nvCxnSpPr>
         <p:spPr>
           <a:xfrm>
-            <a:off x="502920" y="841248"/>
-            <a:ext cx="11183112" cy="0"/>
+            <a:off x="548640" y="1115568"/>
+            <a:ext cx="11091672" cy="0"/>
           </a:xfrm>
           <a:prstGeom prst="line">
             <a:avLst/>
           </a:prstGeom>
-          <a:ln w="20320">
+          <a:ln w="15240">
             <a:solidFill>
               <a:srgbClr val="243447"/>
             </a:solidFill>
@@ -9382,62 +9717,51 @@
           </a:fontRef>
         </p:style>
       </p:cxnSp>
-      <p:sp>
-        <p:nvSpPr>
-          <p:cNvPr id="4" name="Rounded Rectangle 3"/>
-          <p:cNvSpPr/>
-          <p:nvPr/>
-        </p:nvSpPr>
-        <p:spPr>
-          <a:xfrm>
-            <a:off x="502920" y="1234440"/>
-            <a:ext cx="11183112" cy="1024128"/>
-          </a:xfrm>
-          <a:prstGeom prst="roundRect">
-            <a:avLst/>
-          </a:prstGeom>
-          <a:solidFill>
-            <a:srgbClr val="F3F4F5"/>
-          </a:solidFill>
+      <p:cxnSp>
+        <p:nvCxnSpPr>
+          <p:cNvPr id="5" name="Connector 4"/>
+          <p:cNvCxnSpPr/>
+          <p:nvPr/>
+        </p:nvCxnSpPr>
+        <p:spPr>
+          <a:xfrm>
+            <a:off x="548640" y="1490472"/>
+            <a:ext cx="11091672" cy="0"/>
+          </a:xfrm>
+          <a:prstGeom prst="line">
+            <a:avLst/>
+          </a:prstGeom>
           <a:ln w="9525">
             <a:solidFill>
               <a:srgbClr val="C9C9C9"/>
             </a:solidFill>
           </a:ln>
-          <a:effectLst/>
         </p:spPr>
         <p:style>
-          <a:lnRef idx="1">
+          <a:lnRef idx="2">
             <a:schemeClr val="accent1"/>
           </a:lnRef>
-          <a:fillRef idx="3">
+          <a:fillRef idx="0">
             <a:schemeClr val="accent1"/>
           </a:fillRef>
-          <a:effectRef idx="2">
+          <a:effectRef idx="1">
             <a:schemeClr val="accent1"/>
           </a:effectRef>
           <a:fontRef idx="minor">
-            <a:schemeClr val="lt1"/>
+            <a:schemeClr val="tx1"/>
           </a:fontRef>
         </p:style>
-        <p:txBody>
-          <a:bodyPr rtlCol="0" anchor="ctr"/>
-          <a:lstStyle/>
-          <a:p>
-            <a:pPr algn="ctr"/>
-          </a:p>
-        </p:txBody>
-      </p:sp>
-      <p:sp>
-        <p:nvSpPr>
-          <p:cNvPr id="5" name="TextBox 4"/>
+      </p:cxnSp>
+      <p:sp>
+        <p:nvSpPr>
+          <p:cNvPr id="6" name="TextBox 5"/>
           <p:cNvSpPr txBox="1"/>
           <p:nvPr/>
         </p:nvSpPr>
         <p:spPr>
           <a:xfrm>
-            <a:off x="731520" y="1353312"/>
-            <a:ext cx="1737360" cy="365760"/>
+            <a:off x="594360" y="1600200"/>
+            <a:ext cx="1828800" cy="365760"/>
           </a:xfrm>
           <a:prstGeom prst="rect">
             <a:avLst/>
@@ -9445,7 +9769,7 @@
           <a:noFill/>
         </p:spPr>
         <p:txBody>
-          <a:bodyPr wrap="square" anchor="t" lIns="45720" rIns="45720" tIns="18288" bIns="18288">
+          <a:bodyPr wrap="square" anchor="t" lIns="18288" rIns="18288" tIns="9144" bIns="9144">
             <a:spAutoFit/>
           </a:bodyPr>
           <a:lstStyle/>
@@ -9456,7 +9780,7 @@
               </a:spcAft>
             </a:pPr>
             <a:r>
-              <a:rPr sz="1200" b="1">
+              <a:rPr sz="1250" b="1">
                 <a:solidFill>
                   <a:srgbClr val="243447"/>
                 </a:solidFill>
@@ -9470,13 +9794,13 @@
       </p:sp>
       <p:sp>
         <p:nvSpPr>
-          <p:cNvPr id="6" name="TextBox 5"/>
+          <p:cNvPr id="7" name="TextBox 6"/>
           <p:cNvSpPr txBox="1"/>
           <p:nvPr/>
         </p:nvSpPr>
         <p:spPr>
           <a:xfrm>
-            <a:off x="2560320" y="1353312"/>
+            <a:off x="2606040" y="1600200"/>
             <a:ext cx="6949440" cy="777240"/>
           </a:xfrm>
           <a:prstGeom prst="rect">
@@ -9485,7 +9809,7 @@
           <a:noFill/>
         </p:spPr>
         <p:txBody>
-          <a:bodyPr wrap="square" anchor="t" lIns="45720" rIns="45720" tIns="18288" bIns="18288">
+          <a:bodyPr wrap="square" anchor="t" lIns="18288" rIns="18288" tIns="9144" bIns="9144">
             <a:spAutoFit/>
           </a:bodyPr>
           <a:lstStyle/>
@@ -9503,20 +9827,20 @@
                 <a:latin typeface="Apple SD Gothic Neo"/>
                 <a:ea typeface="Apple SD Gothic Neo"/>
               </a:rPr>
-              <a:t>XGBoost 단독(개정 후)이 기준선 — 인정. 주차별 결합(조기 6주 = GBM·Chronos-2 평균 → 이후 XGBoost, 0.740)은 비열등+개선 방향의 참고 옵션</a:t>
-            </a:r>
-          </a:p>
-        </p:txBody>
-      </p:sp>
-      <p:sp>
-        <p:nvSpPr>
-          <p:cNvPr id="7" name="TextBox 6"/>
+              <a:t>XGBoost 단독(개정 후)이 기준선 — 인정합니다. 주차별 결합(조기 6주 = GBM·Chronos-2 평균 → 이후 XGBoost, 0.740)은 비열등+개선 방향의 참고 옵션입니다.</a:t>
+            </a:r>
+          </a:p>
+        </p:txBody>
+      </p:sp>
+      <p:sp>
+        <p:nvSpPr>
+          <p:cNvPr id="8" name="TextBox 7"/>
           <p:cNvSpPr txBox="1"/>
           <p:nvPr/>
         </p:nvSpPr>
         <p:spPr>
           <a:xfrm>
-            <a:off x="9692640" y="1554480"/>
+            <a:off x="9784080" y="1709928"/>
             <a:ext cx="1828800" cy="365760"/>
           </a:xfrm>
           <a:prstGeom prst="rect">
@@ -9525,18 +9849,18 @@
           <a:noFill/>
         </p:spPr>
         <p:txBody>
-          <a:bodyPr wrap="square" anchor="t" lIns="45720" rIns="45720" tIns="18288" bIns="18288">
+          <a:bodyPr wrap="square" anchor="t" lIns="18288" rIns="18288" tIns="9144" bIns="9144">
             <a:spAutoFit/>
           </a:bodyPr>
           <a:lstStyle/>
           <a:p>
-            <a:pPr algn="ctr">
-              <a:spcAft>
-                <a:spcPts val="200"/>
-              </a:spcAft>
-            </a:pPr>
-            <a:r>
-              <a:rPr sz="1050" b="1">
+            <a:pPr algn="r">
+              <a:spcAft>
+                <a:spcPts val="200"/>
+              </a:spcAft>
+            </a:pPr>
+            <a:r>
+              <a:rPr sz="1100" b="1">
                 <a:solidFill>
                   <a:srgbClr val="008A3E"/>
                 </a:solidFill>
@@ -9548,62 +9872,51 @@
           </a:p>
         </p:txBody>
       </p:sp>
-      <p:sp>
-        <p:nvSpPr>
-          <p:cNvPr id="8" name="Rounded Rectangle 7"/>
-          <p:cNvSpPr/>
-          <p:nvPr/>
-        </p:nvSpPr>
-        <p:spPr>
-          <a:xfrm>
-            <a:off x="502920" y="2404872"/>
-            <a:ext cx="11183112" cy="1024128"/>
-          </a:xfrm>
-          <a:prstGeom prst="roundRect">
-            <a:avLst/>
-          </a:prstGeom>
-          <a:solidFill>
-            <a:srgbClr val="F3F4F5"/>
-          </a:solidFill>
+      <p:cxnSp>
+        <p:nvCxnSpPr>
+          <p:cNvPr id="9" name="Connector 8"/>
+          <p:cNvCxnSpPr/>
+          <p:nvPr/>
+        </p:nvCxnSpPr>
+        <p:spPr>
+          <a:xfrm>
+            <a:off x="548640" y="2514600"/>
+            <a:ext cx="11091672" cy="0"/>
+          </a:xfrm>
+          <a:prstGeom prst="line">
+            <a:avLst/>
+          </a:prstGeom>
           <a:ln w="9525">
             <a:solidFill>
               <a:srgbClr val="C9C9C9"/>
             </a:solidFill>
           </a:ln>
-          <a:effectLst/>
         </p:spPr>
         <p:style>
-          <a:lnRef idx="1">
+          <a:lnRef idx="2">
             <a:schemeClr val="accent1"/>
           </a:lnRef>
-          <a:fillRef idx="3">
+          <a:fillRef idx="0">
             <a:schemeClr val="accent1"/>
           </a:fillRef>
-          <a:effectRef idx="2">
+          <a:effectRef idx="1">
             <a:schemeClr val="accent1"/>
           </a:effectRef>
           <a:fontRef idx="minor">
-            <a:schemeClr val="lt1"/>
+            <a:schemeClr val="tx1"/>
           </a:fontRef>
         </p:style>
-        <p:txBody>
-          <a:bodyPr rtlCol="0" anchor="ctr"/>
-          <a:lstStyle/>
-          <a:p>
-            <a:pPr algn="ctr"/>
-          </a:p>
-        </p:txBody>
-      </p:sp>
-      <p:sp>
-        <p:nvSpPr>
-          <p:cNvPr id="9" name="TextBox 8"/>
+      </p:cxnSp>
+      <p:sp>
+        <p:nvSpPr>
+          <p:cNvPr id="10" name="TextBox 9"/>
           <p:cNvSpPr txBox="1"/>
           <p:nvPr/>
         </p:nvSpPr>
         <p:spPr>
           <a:xfrm>
-            <a:off x="731520" y="2523744"/>
-            <a:ext cx="1737360" cy="365760"/>
+            <a:off x="594360" y="2624328"/>
+            <a:ext cx="1828800" cy="365760"/>
           </a:xfrm>
           <a:prstGeom prst="rect">
             <a:avLst/>
@@ -9611,7 +9924,7 @@
           <a:noFill/>
         </p:spPr>
         <p:txBody>
-          <a:bodyPr wrap="square" anchor="t" lIns="45720" rIns="45720" tIns="18288" bIns="18288">
+          <a:bodyPr wrap="square" anchor="t" lIns="18288" rIns="18288" tIns="9144" bIns="9144">
             <a:spAutoFit/>
           </a:bodyPr>
           <a:lstStyle/>
@@ -9622,7 +9935,7 @@
               </a:spcAft>
             </a:pPr>
             <a:r>
-              <a:rPr sz="1200" b="1">
+              <a:rPr sz="1250" b="1">
                 <a:solidFill>
                   <a:srgbClr val="243447"/>
                 </a:solidFill>
@@ -9636,13 +9949,13 @@
       </p:sp>
       <p:sp>
         <p:nvSpPr>
-          <p:cNvPr id="10" name="TextBox 9"/>
+          <p:cNvPr id="11" name="TextBox 10"/>
           <p:cNvSpPr txBox="1"/>
           <p:nvPr/>
         </p:nvSpPr>
         <p:spPr>
           <a:xfrm>
-            <a:off x="2560320" y="2523744"/>
+            <a:off x="2606040" y="2624328"/>
             <a:ext cx="6949440" cy="777240"/>
           </a:xfrm>
           <a:prstGeom prst="rect">
@@ -9651,7 +9964,7 @@
           <a:noFill/>
         </p:spPr>
         <p:txBody>
-          <a:bodyPr wrap="square" anchor="t" lIns="45720" rIns="45720" tIns="18288" bIns="18288">
+          <a:bodyPr wrap="square" anchor="t" lIns="18288" rIns="18288" tIns="9144" bIns="9144">
             <a:spAutoFit/>
           </a:bodyPr>
           <a:lstStyle/>
@@ -9669,20 +9982,20 @@
                 <a:latin typeface="Apple SD Gothic Neo"/>
                 <a:ea typeface="Apple SD Gothic Neo"/>
               </a:rPr>
-              <a:t>LLM 계열은 오염 문제로 실시간 채점 자체가 비성립 · 직접학습 이식판은 소표본 한계 실측</a:t>
-            </a:r>
-          </a:p>
-        </p:txBody>
-      </p:sp>
-      <p:sp>
-        <p:nvSpPr>
-          <p:cNvPr id="11" name="TextBox 10"/>
+              <a:t>LLM 계열은 오염 문제로 실시간 채점 자체가 성립하지 않고, 직접학습 이식판은 소표본 한계를 실측했습니다.</a:t>
+            </a:r>
+          </a:p>
+        </p:txBody>
+      </p:sp>
+      <p:sp>
+        <p:nvSpPr>
+          <p:cNvPr id="12" name="TextBox 11"/>
           <p:cNvSpPr txBox="1"/>
           <p:nvPr/>
         </p:nvSpPr>
         <p:spPr>
           <a:xfrm>
-            <a:off x="9692640" y="2724912"/>
+            <a:off x="9784080" y="2734056"/>
             <a:ext cx="1828800" cy="365760"/>
           </a:xfrm>
           <a:prstGeom prst="rect">
@@ -9691,18 +10004,18 @@
           <a:noFill/>
         </p:spPr>
         <p:txBody>
-          <a:bodyPr wrap="square" anchor="t" lIns="45720" rIns="45720" tIns="18288" bIns="18288">
+          <a:bodyPr wrap="square" anchor="t" lIns="18288" rIns="18288" tIns="9144" bIns="9144">
             <a:spAutoFit/>
           </a:bodyPr>
           <a:lstStyle/>
           <a:p>
-            <a:pPr algn="ctr">
-              <a:spcAft>
-                <a:spcPts val="200"/>
-              </a:spcAft>
-            </a:pPr>
-            <a:r>
-              <a:rPr sz="1050" b="1">
+            <a:pPr algn="r">
+              <a:spcAft>
+                <a:spcPts val="200"/>
+              </a:spcAft>
+            </a:pPr>
+            <a:r>
+              <a:rPr sz="1100" b="1">
                 <a:solidFill>
                   <a:srgbClr val="008A3E"/>
                 </a:solidFill>
@@ -9714,62 +10027,51 @@
           </a:p>
         </p:txBody>
       </p:sp>
-      <p:sp>
-        <p:nvSpPr>
-          <p:cNvPr id="12" name="Rounded Rectangle 11"/>
-          <p:cNvSpPr/>
-          <p:nvPr/>
-        </p:nvSpPr>
-        <p:spPr>
-          <a:xfrm>
-            <a:off x="502920" y="3575304"/>
-            <a:ext cx="11183112" cy="1024128"/>
-          </a:xfrm>
-          <a:prstGeom prst="roundRect">
-            <a:avLst/>
-          </a:prstGeom>
-          <a:solidFill>
-            <a:srgbClr val="F3F4F5"/>
-          </a:solidFill>
+      <p:cxnSp>
+        <p:nvCxnSpPr>
+          <p:cNvPr id="13" name="Connector 12"/>
+          <p:cNvCxnSpPr/>
+          <p:nvPr/>
+        </p:nvCxnSpPr>
+        <p:spPr>
+          <a:xfrm>
+            <a:off x="548640" y="3538728"/>
+            <a:ext cx="11091672" cy="0"/>
+          </a:xfrm>
+          <a:prstGeom prst="line">
+            <a:avLst/>
+          </a:prstGeom>
           <a:ln w="9525">
             <a:solidFill>
               <a:srgbClr val="C9C9C9"/>
             </a:solidFill>
           </a:ln>
-          <a:effectLst/>
         </p:spPr>
         <p:style>
-          <a:lnRef idx="1">
+          <a:lnRef idx="2">
             <a:schemeClr val="accent1"/>
           </a:lnRef>
-          <a:fillRef idx="3">
+          <a:fillRef idx="0">
             <a:schemeClr val="accent1"/>
           </a:fillRef>
-          <a:effectRef idx="2">
+          <a:effectRef idx="1">
             <a:schemeClr val="accent1"/>
           </a:effectRef>
           <a:fontRef idx="minor">
-            <a:schemeClr val="lt1"/>
+            <a:schemeClr val="tx1"/>
           </a:fontRef>
         </p:style>
-        <p:txBody>
-          <a:bodyPr rtlCol="0" anchor="ctr"/>
-          <a:lstStyle/>
-          <a:p>
-            <a:pPr algn="ctr"/>
-          </a:p>
-        </p:txBody>
-      </p:sp>
-      <p:sp>
-        <p:nvSpPr>
-          <p:cNvPr id="13" name="TextBox 12"/>
+      </p:cxnSp>
+      <p:sp>
+        <p:nvSpPr>
+          <p:cNvPr id="14" name="TextBox 13"/>
           <p:cNvSpPr txBox="1"/>
           <p:nvPr/>
         </p:nvSpPr>
         <p:spPr>
           <a:xfrm>
-            <a:off x="731520" y="3694176"/>
-            <a:ext cx="1737360" cy="365760"/>
+            <a:off x="594360" y="3648456"/>
+            <a:ext cx="1828800" cy="365760"/>
           </a:xfrm>
           <a:prstGeom prst="rect">
             <a:avLst/>
@@ -9777,7 +10079,7 @@
           <a:noFill/>
         </p:spPr>
         <p:txBody>
-          <a:bodyPr wrap="square" anchor="t" lIns="45720" rIns="45720" tIns="18288" bIns="18288">
+          <a:bodyPr wrap="square" anchor="t" lIns="18288" rIns="18288" tIns="9144" bIns="9144">
             <a:spAutoFit/>
           </a:bodyPr>
           <a:lstStyle/>
@@ -9788,7 +10090,7 @@
               </a:spcAft>
             </a:pPr>
             <a:r>
-              <a:rPr sz="1200" b="1">
+              <a:rPr sz="1250" b="1">
                 <a:solidFill>
                   <a:srgbClr val="243447"/>
                 </a:solidFill>
@@ -9802,13 +10104,13 @@
       </p:sp>
       <p:sp>
         <p:nvSpPr>
-          <p:cNvPr id="14" name="TextBox 13"/>
+          <p:cNvPr id="15" name="TextBox 14"/>
           <p:cNvSpPr txBox="1"/>
           <p:nvPr/>
         </p:nvSpPr>
         <p:spPr>
           <a:xfrm>
-            <a:off x="2560320" y="3694176"/>
+            <a:off x="2606040" y="3648456"/>
             <a:ext cx="6949440" cy="777240"/>
           </a:xfrm>
           <a:prstGeom prst="rect">
@@ -9817,7 +10119,7 @@
           <a:noFill/>
         </p:spPr>
         <p:txBody>
-          <a:bodyPr wrap="square" anchor="t" lIns="45720" rIns="45720" tIns="18288" bIns="18288">
+          <a:bodyPr wrap="square" anchor="t" lIns="18288" rIns="18288" tIns="9144" bIns="9144">
             <a:spAutoFit/>
           </a:bodyPr>
           <a:lstStyle/>
@@ -9835,20 +10137,20 @@
                 <a:latin typeface="Apple SD Gothic Neo"/>
                 <a:ea typeface="Apple SD Gothic Neo"/>
               </a:rPr>
-              <a:t>점 예측 대체재 아님 — 정보 빈곤 구간·반등기의 조건부 보완재 + 불확실성 재료</a:t>
-            </a:r>
-          </a:p>
-        </p:txBody>
-      </p:sp>
-      <p:sp>
-        <p:nvSpPr>
-          <p:cNvPr id="15" name="TextBox 14"/>
+              <a:t>점 예측 대체재가 아니라 정보 빈곤 구간·반등기의 조건부 보완재이며, 불확실성 정량화의 재료입니다.</a:t>
+            </a:r>
+          </a:p>
+        </p:txBody>
+      </p:sp>
+      <p:sp>
+        <p:nvSpPr>
+          <p:cNvPr id="16" name="TextBox 15"/>
           <p:cNvSpPr txBox="1"/>
           <p:nvPr/>
         </p:nvSpPr>
         <p:spPr>
           <a:xfrm>
-            <a:off x="9692640" y="3895344"/>
+            <a:off x="9784080" y="3758184"/>
             <a:ext cx="1828800" cy="365760"/>
           </a:xfrm>
           <a:prstGeom prst="rect">
@@ -9857,18 +10159,18 @@
           <a:noFill/>
         </p:spPr>
         <p:txBody>
-          <a:bodyPr wrap="square" anchor="t" lIns="45720" rIns="45720" tIns="18288" bIns="18288">
+          <a:bodyPr wrap="square" anchor="t" lIns="18288" rIns="18288" tIns="9144" bIns="9144">
             <a:spAutoFit/>
           </a:bodyPr>
           <a:lstStyle/>
           <a:p>
-            <a:pPr algn="ctr">
-              <a:spcAft>
-                <a:spcPts val="200"/>
-              </a:spcAft>
-            </a:pPr>
-            <a:r>
-              <a:rPr sz="1050" b="1">
+            <a:pPr algn="r">
+              <a:spcAft>
+                <a:spcPts val="200"/>
+              </a:spcAft>
+            </a:pPr>
+            <a:r>
+              <a:rPr sz="1100" b="1">
                 <a:solidFill>
                   <a:srgbClr val="008A3E"/>
                 </a:solidFill>
@@ -9880,62 +10182,51 @@
           </a:p>
         </p:txBody>
       </p:sp>
-      <p:sp>
-        <p:nvSpPr>
-          <p:cNvPr id="16" name="Rounded Rectangle 15"/>
-          <p:cNvSpPr/>
-          <p:nvPr/>
-        </p:nvSpPr>
-        <p:spPr>
-          <a:xfrm>
-            <a:off x="502920" y="4745736"/>
-            <a:ext cx="11183112" cy="1024128"/>
-          </a:xfrm>
-          <a:prstGeom prst="roundRect">
-            <a:avLst/>
-          </a:prstGeom>
-          <a:solidFill>
-            <a:srgbClr val="F3F4F5"/>
-          </a:solidFill>
+      <p:cxnSp>
+        <p:nvCxnSpPr>
+          <p:cNvPr id="17" name="Connector 16"/>
+          <p:cNvCxnSpPr/>
+          <p:nvPr/>
+        </p:nvCxnSpPr>
+        <p:spPr>
+          <a:xfrm>
+            <a:off x="548640" y="4562856"/>
+            <a:ext cx="11091672" cy="0"/>
+          </a:xfrm>
+          <a:prstGeom prst="line">
+            <a:avLst/>
+          </a:prstGeom>
           <a:ln w="9525">
             <a:solidFill>
               <a:srgbClr val="C9C9C9"/>
             </a:solidFill>
           </a:ln>
-          <a:effectLst/>
         </p:spPr>
         <p:style>
-          <a:lnRef idx="1">
+          <a:lnRef idx="2">
             <a:schemeClr val="accent1"/>
           </a:lnRef>
-          <a:fillRef idx="3">
+          <a:fillRef idx="0">
             <a:schemeClr val="accent1"/>
           </a:fillRef>
-          <a:effectRef idx="2">
+          <a:effectRef idx="1">
             <a:schemeClr val="accent1"/>
           </a:effectRef>
           <a:fontRef idx="minor">
-            <a:schemeClr val="lt1"/>
+            <a:schemeClr val="tx1"/>
           </a:fontRef>
         </p:style>
-        <p:txBody>
-          <a:bodyPr rtlCol="0" anchor="ctr"/>
-          <a:lstStyle/>
-          <a:p>
-            <a:pPr algn="ctr"/>
-          </a:p>
-        </p:txBody>
-      </p:sp>
-      <p:sp>
-        <p:nvSpPr>
-          <p:cNvPr id="17" name="TextBox 16"/>
+      </p:cxnSp>
+      <p:sp>
+        <p:nvSpPr>
+          <p:cNvPr id="18" name="TextBox 17"/>
           <p:cNvSpPr txBox="1"/>
           <p:nvPr/>
         </p:nvSpPr>
         <p:spPr>
           <a:xfrm>
-            <a:off x="731520" y="4864608"/>
-            <a:ext cx="1737360" cy="365760"/>
+            <a:off x="594360" y="4672584"/>
+            <a:ext cx="1828800" cy="365760"/>
           </a:xfrm>
           <a:prstGeom prst="rect">
             <a:avLst/>
@@ -9943,7 +10234,7 @@
           <a:noFill/>
         </p:spPr>
         <p:txBody>
-          <a:bodyPr wrap="square" anchor="t" lIns="45720" rIns="45720" tIns="18288" bIns="18288">
+          <a:bodyPr wrap="square" anchor="t" lIns="18288" rIns="18288" tIns="9144" bIns="9144">
             <a:spAutoFit/>
           </a:bodyPr>
           <a:lstStyle/>
@@ -9954,7 +10245,7 @@
               </a:spcAft>
             </a:pPr>
             <a:r>
-              <a:rPr sz="1200" b="1">
+              <a:rPr sz="1250" b="1">
                 <a:solidFill>
                   <a:srgbClr val="243447"/>
                 </a:solidFill>
@@ -9968,13 +10259,13 @@
       </p:sp>
       <p:sp>
         <p:nvSpPr>
-          <p:cNvPr id="18" name="TextBox 17"/>
+          <p:cNvPr id="19" name="TextBox 18"/>
           <p:cNvSpPr txBox="1"/>
           <p:nvPr/>
         </p:nvSpPr>
         <p:spPr>
           <a:xfrm>
-            <a:off x="2560320" y="4864608"/>
+            <a:off x="2606040" y="4672584"/>
             <a:ext cx="6949440" cy="777240"/>
           </a:xfrm>
           <a:prstGeom prst="rect">
@@ -9983,7 +10274,7 @@
           <a:noFill/>
         </p:spPr>
         <p:txBody>
-          <a:bodyPr wrap="square" anchor="t" lIns="45720" rIns="45720" tIns="18288" bIns="18288">
+          <a:bodyPr wrap="square" anchor="t" lIns="18288" rIns="18288" tIns="9144" bIns="9144">
             <a:spAutoFit/>
           </a:bodyPr>
           <a:lstStyle/>
@@ -10001,20 +10292,20 @@
                 <a:latin typeface="Apple SD Gothic Neo"/>
                 <a:ea typeface="Apple SD Gothic Neo"/>
               </a:rPr>
-              <a:t>"언제 가치를 더하는가" 프레임 · 기여 5건 실측 완료 · 다국가 복제 설계 포함</a:t>
-            </a:r>
-          </a:p>
-        </p:txBody>
-      </p:sp>
-      <p:sp>
-        <p:nvSpPr>
-          <p:cNvPr id="19" name="TextBox 18"/>
+              <a:t>“언제 가치를 더하는가” 프레임으로 기여 5건의 실측이 완료되어 있고, 다국가 복제 설계를 포함합니다.</a:t>
+            </a:r>
+          </a:p>
+        </p:txBody>
+      </p:sp>
+      <p:sp>
+        <p:nvSpPr>
+          <p:cNvPr id="20" name="TextBox 19"/>
           <p:cNvSpPr txBox="1"/>
           <p:nvPr/>
         </p:nvSpPr>
         <p:spPr>
           <a:xfrm>
-            <a:off x="9692640" y="5065776"/>
+            <a:off x="9784080" y="4782312"/>
             <a:ext cx="1828800" cy="365760"/>
           </a:xfrm>
           <a:prstGeom prst="rect">
@@ -10023,18 +10314,18 @@
           <a:noFill/>
         </p:spPr>
         <p:txBody>
-          <a:bodyPr wrap="square" anchor="t" lIns="45720" rIns="45720" tIns="18288" bIns="18288">
+          <a:bodyPr wrap="square" anchor="t" lIns="18288" rIns="18288" tIns="9144" bIns="9144">
             <a:spAutoFit/>
           </a:bodyPr>
           <a:lstStyle/>
           <a:p>
-            <a:pPr algn="ctr">
-              <a:spcAft>
-                <a:spcPts val="200"/>
-              </a:spcAft>
-            </a:pPr>
-            <a:r>
-              <a:rPr sz="1050" b="1">
+            <a:pPr algn="r">
+              <a:spcAft>
+                <a:spcPts val="200"/>
+              </a:spcAft>
+            </a:pPr>
+            <a:r>
+              <a:rPr sz="1100" b="1">
                 <a:solidFill>
                   <a:srgbClr val="008A3E"/>
                 </a:solidFill>
@@ -10046,92 +10337,41 @@
           </a:p>
         </p:txBody>
       </p:sp>
-      <p:sp>
-        <p:nvSpPr>
-          <p:cNvPr id="20" name="TextBox 19"/>
-          <p:cNvSpPr txBox="1"/>
-          <p:nvPr/>
-        </p:nvSpPr>
-        <p:spPr>
-          <a:xfrm>
-            <a:off x="502920" y="5943600"/>
-            <a:ext cx="11155680" cy="320040"/>
-          </a:xfrm>
-          <a:prstGeom prst="rect">
-            <a:avLst/>
-          </a:prstGeom>
-          <a:noFill/>
-        </p:spPr>
-        <p:txBody>
-          <a:bodyPr wrap="square" anchor="t" lIns="45720" rIns="45720" tIns="18288" bIns="18288">
-            <a:spAutoFit/>
-          </a:bodyPr>
-          <a:lstStyle/>
-          <a:p>
-            <a:pPr algn="l">
-              <a:spcAft>
-                <a:spcPts val="200"/>
-              </a:spcAft>
-            </a:pPr>
-            <a:r>
-              <a:rPr sz="1000" b="0">
-                <a:solidFill>
-                  <a:srgbClr val="6B6B6B"/>
-                </a:solidFill>
-                <a:latin typeface="Apple SD Gothic Neo"/>
-                <a:ea typeface="Apple SD Gothic Neo"/>
-              </a:rPr>
-              <a:t>모든 실험은 재현 가능한 스크립트로 관리 중이며, 논문 착수 결정 시 재현 패키지 형태로 정리해 공유 가능합니다.</a:t>
-            </a:r>
-          </a:p>
-        </p:txBody>
-      </p:sp>
-      <p:sp>
-        <p:nvSpPr>
-          <p:cNvPr id="21" name="Rectangle 20"/>
-          <p:cNvSpPr/>
-          <p:nvPr/>
-        </p:nvSpPr>
-        <p:spPr>
-          <a:xfrm>
-            <a:off x="502920" y="6309360"/>
-            <a:ext cx="11183112" cy="365760"/>
-          </a:xfrm>
-          <a:prstGeom prst="rect">
-            <a:avLst/>
-          </a:prstGeom>
-          <a:solidFill>
-            <a:srgbClr val="F3F4F5"/>
-          </a:solidFill>
+      <p:cxnSp>
+        <p:nvCxnSpPr>
+          <p:cNvPr id="21" name="Connector 20"/>
+          <p:cNvCxnSpPr/>
+          <p:nvPr/>
+        </p:nvCxnSpPr>
+        <p:spPr>
+          <a:xfrm>
+            <a:off x="548640" y="5586984"/>
+            <a:ext cx="11091672" cy="0"/>
+          </a:xfrm>
+          <a:prstGeom prst="line">
+            <a:avLst/>
+          </a:prstGeom>
           <a:ln w="9525">
             <a:solidFill>
               <a:srgbClr val="C9C9C9"/>
             </a:solidFill>
           </a:ln>
-          <a:effectLst/>
         </p:spPr>
         <p:style>
-          <a:lnRef idx="1">
+          <a:lnRef idx="2">
             <a:schemeClr val="accent1"/>
           </a:lnRef>
-          <a:fillRef idx="3">
+          <a:fillRef idx="0">
             <a:schemeClr val="accent1"/>
           </a:fillRef>
-          <a:effectRef idx="2">
+          <a:effectRef idx="1">
             <a:schemeClr val="accent1"/>
           </a:effectRef>
           <a:fontRef idx="minor">
-            <a:schemeClr val="lt1"/>
+            <a:schemeClr val="tx1"/>
           </a:fontRef>
         </p:style>
-        <p:txBody>
-          <a:bodyPr rtlCol="0" anchor="ctr"/>
-          <a:lstStyle/>
-          <a:p>
-            <a:pPr algn="ctr"/>
-          </a:p>
-        </p:txBody>
-      </p:sp>
+      </p:cxnSp>
       <p:sp>
         <p:nvSpPr>
           <p:cNvPr id="22" name="TextBox 21"/>
@@ -10140,8 +10380,8 @@
         </p:nvSpPr>
         <p:spPr>
           <a:xfrm>
-            <a:off x="685800" y="6364224"/>
-            <a:ext cx="10881360" cy="256032"/>
+            <a:off x="548640" y="5925312"/>
+            <a:ext cx="11064240" cy="365760"/>
           </a:xfrm>
           <a:prstGeom prst="rect">
             <a:avLst/>
@@ -10149,7 +10389,7 @@
           <a:noFill/>
         </p:spPr>
         <p:txBody>
-          <a:bodyPr wrap="square" anchor="ctr" lIns="45720" rIns="45720" tIns="18288" bIns="18288">
+          <a:bodyPr wrap="square" anchor="t" lIns="18288" rIns="18288" tIns="9144" bIns="9144">
             <a:spAutoFit/>
           </a:bodyPr>
           <a:lstStyle/>
@@ -10160,14 +10400,94 @@
               </a:spcAft>
             </a:pPr>
             <a:r>
-              <a:rPr sz="880" b="0">
+              <a:rPr sz="1050" b="0">
                 <a:solidFill>
                   <a:srgbClr val="6B6B6B"/>
                 </a:solidFill>
                 <a:latin typeface="Apple SD Gothic Neo"/>
                 <a:ea typeface="Apple SD Gothic Neo"/>
               </a:rPr>
-              <a:t>공통 검증 규약: 실시간 빈티지 · 속보치 기준 · 전망주차 w[-19,-1] 평균 RMSE · 2018Q1~2025Q4 (32개 분기) · 예측단위 개정(schema v2) 반영</a:t>
+              <a:t>모든 실험은 재현 가능한 스크립트로 관리하고 있으며, 논문 착수 결정 시 재현 패키지 형태로 정리해 공유하겠습니다.</a:t>
+            </a:r>
+          </a:p>
+        </p:txBody>
+      </p:sp>
+      <p:sp>
+        <p:nvSpPr>
+          <p:cNvPr id="23" name="TextBox 22"/>
+          <p:cNvSpPr txBox="1"/>
+          <p:nvPr/>
+        </p:nvSpPr>
+        <p:spPr>
+          <a:xfrm>
+            <a:off x="548640" y="6455664"/>
+            <a:ext cx="9875520" cy="274320"/>
+          </a:xfrm>
+          <a:prstGeom prst="rect">
+            <a:avLst/>
+          </a:prstGeom>
+          <a:noFill/>
+        </p:spPr>
+        <p:txBody>
+          <a:bodyPr wrap="square" anchor="t" lIns="18288" rIns="18288" tIns="9144" bIns="9144">
+            <a:spAutoFit/>
+          </a:bodyPr>
+          <a:lstStyle/>
+          <a:p>
+            <a:pPr algn="l">
+              <a:spcAft>
+                <a:spcPts val="200"/>
+              </a:spcAft>
+            </a:pPr>
+            <a:r>
+              <a:rPr sz="800" b="0">
+                <a:solidFill>
+                  <a:srgbClr val="6B6B6B"/>
+                </a:solidFill>
+                <a:latin typeface="Apple SD Gothic Neo"/>
+                <a:ea typeface="Apple SD Gothic Neo"/>
+              </a:rPr>
+              <a:t>주: 실시간 빈티지 · 속보치 기준 · 전망주차 w[-19,-1] 평균 RMSE · 2018Q1~2025Q4(32개 분기) · 예측단위 개정(schema v2) 반영. 낮을수록 정확.</a:t>
+            </a:r>
+          </a:p>
+        </p:txBody>
+      </p:sp>
+      <p:sp>
+        <p:nvSpPr>
+          <p:cNvPr id="24" name="TextBox 23"/>
+          <p:cNvSpPr txBox="1"/>
+          <p:nvPr/>
+        </p:nvSpPr>
+        <p:spPr>
+          <a:xfrm>
+            <a:off x="11292840" y="6455664"/>
+            <a:ext cx="457200" cy="274320"/>
+          </a:xfrm>
+          <a:prstGeom prst="rect">
+            <a:avLst/>
+          </a:prstGeom>
+          <a:noFill/>
+        </p:spPr>
+        <p:txBody>
+          <a:bodyPr wrap="square" anchor="t" lIns="18288" rIns="18288" tIns="9144" bIns="9144">
+            <a:spAutoFit/>
+          </a:bodyPr>
+          <a:lstStyle/>
+          <a:p>
+            <a:pPr algn="r">
+              <a:spcAft>
+                <a:spcPts val="200"/>
+              </a:spcAft>
+            </a:pPr>
+            <a:r>
+              <a:rPr sz="900" b="0">
+                <a:solidFill>
+                  <a:srgbClr val="6B6B6B"/>
+                </a:solidFill>
+                <a:latin typeface="Apple SD Gothic Neo"/>
+                <a:ea typeface="Apple SD Gothic Neo"/>
+              </a:rPr>
+              <a:t>8</a:t>
             </a:r>
           </a:p>
         </p:txBody>

--- a/docs/GDP_Nowcasting_종합리포트_한은_2026-08-10.pptx
+++ b/docs/GDP_Nowcasting_종합리포트_한은_2026-08-10.pptx
@@ -4040,7 +4040,7 @@
                 <a:latin typeface="Apple SD Gothic Neo"/>
                 <a:ea typeface="Apple SD Gothic Neo"/>
               </a:rPr>
-              <a:t>네이버클라우드 AX Lab</a:t>
+              <a:t>네이버클라우드 AX Forward Lab</a:t>
             </a:r>
           </a:p>
         </p:txBody>
@@ -5474,7 +5474,7 @@
                 <a:latin typeface="Apple SD Gothic Neo"/>
                 <a:ea typeface="Apple SD Gothic Neo"/>
               </a:rPr>
-              <a:t>모형 간 우열 대신 조건별 기여를 보면 — 정보가 얇은 조기 전망주차와 경기 반등기에서 사전학습</a:t>
+              <a:t>모형 간 우열 대신 조건별 기여를 보면 — 해당 분기 지표가 발표되기 전인 조기 전망주차와 경기 반등기에서 사전학습</a:t>
             </a:r>
           </a:p>
           <a:p>
@@ -5669,7 +5669,7 @@
                 <a:latin typeface="Apple SD Gothic Neo"/>
                 <a:ea typeface="Apple SD Gothic Neo"/>
               </a:rPr>
-              <a:t>정보가 얇은 조기 구간에서는 XGBoost의 우위가 사라집니다</a:t>
+              <a:t>해당 분기 지표가 나오기 전(조기 구간)에는 XGBoost의 우위가 사라집니다</a:t>
             </a:r>
           </a:p>
         </p:txBody>
@@ -8075,7 +8075,7 @@
                 <a:latin typeface="Apple SD Gothic Neo"/>
                 <a:ea typeface="Apple SD Gothic Neo"/>
               </a:rPr>
-              <a:t>정보 빈곤 구간. </a:t>
+              <a:t>지표 공백 구간. </a:t>
             </a:r>
             <a:r>
               <a:rPr sz="1050" b="0">
@@ -8085,7 +8085,7 @@
                 <a:latin typeface="Apple SD Gothic Neo"/>
                 <a:ea typeface="Apple SD Gothic Neo"/>
               </a:rPr>
-              <a:t>발표 19~14주 전 —</a:t>
+              <a:t>발표 19~14주 전 — 해당 분기</a:t>
             </a:r>
           </a:p>
           <a:p>
@@ -8102,7 +8102,7 @@
                 <a:latin typeface="Apple SD Gothic Neo"/>
                 <a:ea typeface="Apple SD Gothic Neo"/>
               </a:rPr>
-              <a:t>공식지표 공백기를 세계 지식과 일별 신호로</a:t>
+              <a:t>공식지표가 나오기 전의 공백을 세계 지식과</a:t>
             </a:r>
           </a:p>
           <a:p>
@@ -8119,7 +8119,7 @@
                 <a:latin typeface="Apple SD Gothic Neo"/>
                 <a:ea typeface="Apple SD Gothic Neo"/>
               </a:rPr>
-              <a:t>보완합니다(3장).</a:t>
+              <a:t>일별 신호로 보완합니다(3장).</a:t>
             </a:r>
           </a:p>
           <a:p>
@@ -10137,7 +10137,7 @@
                 <a:latin typeface="Apple SD Gothic Neo"/>
                 <a:ea typeface="Apple SD Gothic Neo"/>
               </a:rPr>
-              <a:t>점 예측 대체재가 아니라 정보 빈곤 구간·반등기의 조건부 보완재이며, 불확실성 정량화의 재료입니다.</a:t>
+              <a:t>점 예측 대체재가 아니라 지표 공백 구간(조기 주차)·반등기의 조건부 보완재이며, 불확실성 정량화의 재료입니다.</a:t>
             </a:r>
           </a:p>
         </p:txBody>

--- a/docs/GDP_Nowcasting_종합리포트_한은_2026-08-10.pptx
+++ b/docs/GDP_Nowcasting_종합리포트_한은_2026-08-10.pptx
@@ -6909,7 +6909,7 @@
                 <a:latin typeface="Apple SD Gothic Neo"/>
                 <a:ea typeface="Apple SD Gothic Neo"/>
               </a:rPr>
-              <a:t>직접학습 신경망 이식판의 실측 (참고)</a:t>
+              <a:t>직접학습 소형 신경망 이식판의 실측 (참고)</a:t>
             </a:r>
           </a:p>
         </p:txBody>
@@ -6984,7 +6984,7 @@
                 <a:latin typeface="Apple SD Gothic Neo"/>
                 <a:ea typeface="Apple SD Gothic Neo"/>
               </a:rPr>
-              <a:t>사내 어텐션 LSTM 계열(BISTRO 유사 구조)을 당사가 GDP 과제용</a:t>
+              <a:t>직접학습 어텐션 LSTM 계열(과제특화 소형 모델)을 당사가 GDP</a:t>
             </a:r>
           </a:p>
           <a:p>
@@ -7001,7 +7001,7 @@
                 <a:latin typeface="Apple SD Gothic Neo"/>
                 <a:ea typeface="Apple SD Gothic Neo"/>
               </a:rPr>
-              <a:t>으로 재구현해 동일 규약으로 채점했습니다.</a:t>
+              <a:t>과제용으로 재구현해 동일 규약으로 채점했습니다.</a:t>
             </a:r>
           </a:p>
           <a:p>
@@ -7231,7 +7231,7 @@
                 <a:latin typeface="Apple SD Gothic Neo"/>
                 <a:ea typeface="Apple SD Gothic Neo"/>
               </a:rPr>
-              <a:t>유의: 본 결과는 당사 재구현 이식판에 대한 동일 규약 판정이며, 원 연구나</a:t>
+              <a:t>유의: 본 결과는 당사 재구현 이식판에 대한 동일 규약 판정이며, 특정 원</a:t>
             </a:r>
           </a:p>
           <a:p>
@@ -7248,7 +7248,7 @@
                 <a:latin typeface="Apple SD Gothic Neo"/>
                 <a:ea typeface="Apple SD Gothic Neo"/>
               </a:rPr>
-              <a:t>타 과제(물가 등) 성능에 대한 판정이 아닙니다. 원본도 동일 규약으로 채점</a:t>
+              <a:t>연구나 타 과제(물가 등) 성능에 대한 판정이 아닙니다. 사전학습 FM 계열의</a:t>
             </a:r>
           </a:p>
           <a:p>
@@ -7265,7 +7265,7 @@
                 <a:latin typeface="Apple SD Gothic Neo"/>
                 <a:ea typeface="Apple SD Gothic Neo"/>
               </a:rPr>
-              <a:t>하면 공정 비교가 가능합니다.</a:t>
+              <a:t>동일 프로토콜 비교는 별도 1p(부품 비교) 자료에 정리되어 있습니다.</a:t>
             </a:r>
           </a:p>
         </p:txBody>

--- a/docs/GDP_Nowcasting_종합리포트_한은_2026-08-10.pptx
+++ b/docs/GDP_Nowcasting_종합리포트_한은_2026-08-10.pptx
@@ -13,6 +13,7 @@
     <p:sldId id="261" r:id="rId13"/>
     <p:sldId id="262" r:id="rId14"/>
     <p:sldId id="263" r:id="rId15"/>
+    <p:sldId id="264" r:id="rId16"/>
   </p:sldIdLst>
   <p:sldSz cx="12191695" cy="6858000" type="screen4x3"/>
   <p:notesSz cx="6858000" cy="9144000"/>
@@ -1000,6 +1001,76 @@
           <a:p>
             <a:r>
               <a:t>다음 회의 의사결정 요청 사항: ① 공동 논문 구도(제목 프레임·역할 분담·발표 경로) 협의 착수 여부 ② 주차별 결합 병행 산출 여부(선택). 나머지는 보고 사항.</a:t>
+            </a:r>
+          </a:p>
+        </p:txBody>
+      </p:sp>
+      <p:sp>
+        <p:nvSpPr>
+          <p:cNvPr id="4" name="Slide Number Placeholder 3"/>
+          <p:cNvSpPr>
+            <a:spLocks noGrp="1"/>
+          </p:cNvSpPr>
+          <p:nvPr>
+            <p:ph type="sldNum" idx="5" sz="quarter"/>
+          </p:nvPr>
+        </p:nvSpPr>
+        <p:spPr/>
+      </p:sp>
+    </p:spTree>
+  </p:cSld>
+  <p:clrMapOvr>
+    <a:masterClrMapping/>
+  </p:clrMapOvr>
+</p:notes>
+</file>
+
+<file path=ppt/notesSlides/notesSlide9.xml><?xml version="1.0" encoding="utf-8"?>
+<p:notes xmlns:a="http://schemas.openxmlformats.org/drawingml/2006/main" xmlns:p="http://schemas.openxmlformats.org/presentationml/2006/main" xmlns:r="http://schemas.openxmlformats.org/officeDocument/2006/relationships">
+  <p:cSld>
+    <p:spTree>
+      <p:nvGrpSpPr>
+        <p:cNvPr id="1" name=""/>
+        <p:cNvGrpSpPr/>
+        <p:nvPr/>
+      </p:nvGrpSpPr>
+      <p:grpSpPr>
+        <a:xfrm>
+          <a:off x="0" y="0"/>
+          <a:ext cx="0" cy="0"/>
+          <a:chOff x="0" y="0"/>
+          <a:chExt cx="0" cy="0"/>
+        </a:xfrm>
+      </p:grpSpPr>
+      <p:sp>
+        <p:nvSpPr>
+          <p:cNvPr id="2" name="Slide Image Placeholder 1"/>
+          <p:cNvSpPr>
+            <a:spLocks noGrp="1"/>
+          </p:cNvSpPr>
+          <p:nvPr>
+            <p:ph type="sldImg" idx="2"/>
+          </p:nvPr>
+        </p:nvSpPr>
+        <p:spPr/>
+      </p:sp>
+      <p:sp>
+        <p:nvSpPr>
+          <p:cNvPr id="3" name="Notes Placeholder 2"/>
+          <p:cNvSpPr>
+            <a:spLocks noGrp="1"/>
+          </p:cNvSpPr>
+          <p:nvPr>
+            <p:ph type="body" idx="3" sz="quarter"/>
+          </p:nvPr>
+        </p:nvSpPr>
+        <p:spPr/>
+        <p:txBody>
+          <a:bodyPr/>
+          <a:lstStyle/>
+          <a:p>
+            <a:r>
+              <a:t>별첨 취지: 본문 결론(트랜스포머류 = 조건부 보완재)을 바꾸지 않는 보강 자료. 한은 측의 'Chronos-2 vs BISTRO 차이' 질문에 대응. 회의에서 다룰지는 현장 판단 — 본문 7장까지로 마쳐도 완결됨. BISTRO 관련 서술은 사실·수치 중심으로 유지(공개 체크포인트, 논문 표준 사용법 명시).</a:t>
             </a:r>
           </a:p>
         </p:txBody>
@@ -10488,6 +10559,1080 @@
                 <a:ea typeface="Apple SD Gothic Neo"/>
               </a:rPr>
               <a:t>8</a:t>
+            </a:r>
+          </a:p>
+        </p:txBody>
+      </p:sp>
+    </p:spTree>
+  </p:cSld>
+  <p:clrMapOvr>
+    <a:masterClrMapping/>
+  </p:clrMapOvr>
+</p:sld>
+</file>
+
+<file path=ppt/slides/slide9.xml><?xml version="1.0" encoding="utf-8"?>
+<p:sld xmlns:a="http://schemas.openxmlformats.org/drawingml/2006/main" xmlns:p="http://schemas.openxmlformats.org/presentationml/2006/main" xmlns:r="http://schemas.openxmlformats.org/officeDocument/2006/relationships">
+  <p:cSld>
+    <p:spTree>
+      <p:nvGrpSpPr>
+        <p:cNvPr id="1" name=""/>
+        <p:cNvGrpSpPr/>
+        <p:nvPr/>
+      </p:nvGrpSpPr>
+      <p:grpSpPr/>
+      <p:sp>
+        <p:nvSpPr>
+          <p:cNvPr id="2" name="TextBox 1"/>
+          <p:cNvSpPr txBox="1"/>
+          <p:nvPr/>
+        </p:nvSpPr>
+        <p:spPr>
+          <a:xfrm>
+            <a:off x="548640" y="292608"/>
+            <a:ext cx="10515600" cy="274320"/>
+          </a:xfrm>
+          <a:prstGeom prst="rect">
+            <a:avLst/>
+          </a:prstGeom>
+          <a:noFill/>
+        </p:spPr>
+        <p:txBody>
+          <a:bodyPr wrap="square" anchor="t" lIns="18288" rIns="18288" tIns="9144" bIns="9144">
+            <a:spAutoFit/>
+          </a:bodyPr>
+          <a:lstStyle/>
+          <a:p>
+            <a:pPr algn="l">
+              <a:spcAft>
+                <a:spcPts val="200"/>
+              </a:spcAft>
+            </a:pPr>
+            <a:r>
+              <a:rPr sz="1050" b="1">
+                <a:solidFill>
+                  <a:srgbClr val="6B6B6B"/>
+                </a:solidFill>
+                <a:latin typeface="Apple SD Gothic Neo"/>
+                <a:ea typeface="Apple SD Gothic Neo"/>
+              </a:rPr>
+              <a:t>별첨  |  시계열 FM 부품 비교</a:t>
+            </a:r>
+          </a:p>
+        </p:txBody>
+      </p:sp>
+      <p:sp>
+        <p:nvSpPr>
+          <p:cNvPr id="3" name="TextBox 2"/>
+          <p:cNvSpPr txBox="1"/>
+          <p:nvPr/>
+        </p:nvSpPr>
+        <p:spPr>
+          <a:xfrm>
+            <a:off x="548640" y="548640"/>
+            <a:ext cx="11064240" cy="548640"/>
+          </a:xfrm>
+          <a:prstGeom prst="rect">
+            <a:avLst/>
+          </a:prstGeom>
+          <a:noFill/>
+        </p:spPr>
+        <p:txBody>
+          <a:bodyPr wrap="square" anchor="t" lIns="18288" rIns="18288" tIns="9144" bIns="9144">
+            <a:spAutoFit/>
+          </a:bodyPr>
+          <a:lstStyle/>
+          <a:p>
+            <a:pPr algn="l">
+              <a:spcAft>
+                <a:spcPts val="200"/>
+              </a:spcAft>
+            </a:pPr>
+            <a:r>
+              <a:rPr sz="1700" b="1">
+                <a:solidFill>
+                  <a:srgbClr val="243447"/>
+                </a:solidFill>
+                <a:latin typeface="Apple SD Gothic Neo"/>
+                <a:ea typeface="Apple SD Gothic Neo"/>
+              </a:rPr>
+              <a:t>부품으로서의 시계열 FM(ICL) 비교 — 조기 슬롯 자격은 Chronos-2만 충족</a:t>
+            </a:r>
+          </a:p>
+        </p:txBody>
+      </p:sp>
+      <p:cxnSp>
+        <p:nvCxnSpPr>
+          <p:cNvPr id="4" name="Connector 3"/>
+          <p:cNvCxnSpPr/>
+          <p:nvPr/>
+        </p:nvCxnSpPr>
+        <p:spPr>
+          <a:xfrm>
+            <a:off x="548640" y="1115568"/>
+            <a:ext cx="11091672" cy="0"/>
+          </a:xfrm>
+          <a:prstGeom prst="line">
+            <a:avLst/>
+          </a:prstGeom>
+          <a:ln w="15240">
+            <a:solidFill>
+              <a:srgbClr val="243447"/>
+            </a:solidFill>
+          </a:ln>
+        </p:spPr>
+        <p:style>
+          <a:lnRef idx="2">
+            <a:schemeClr val="accent1"/>
+          </a:lnRef>
+          <a:fillRef idx="0">
+            <a:schemeClr val="accent1"/>
+          </a:fillRef>
+          <a:effectRef idx="1">
+            <a:schemeClr val="accent1"/>
+          </a:effectRef>
+          <a:fontRef idx="minor">
+            <a:schemeClr val="tx1"/>
+          </a:fontRef>
+        </p:style>
+      </p:cxnSp>
+      <p:sp>
+        <p:nvSpPr>
+          <p:cNvPr id="5" name="TextBox 4"/>
+          <p:cNvSpPr txBox="1"/>
+          <p:nvPr/>
+        </p:nvSpPr>
+        <p:spPr>
+          <a:xfrm>
+            <a:off x="548640" y="1280160"/>
+            <a:ext cx="11064240" cy="548640"/>
+          </a:xfrm>
+          <a:prstGeom prst="rect">
+            <a:avLst/>
+          </a:prstGeom>
+          <a:noFill/>
+        </p:spPr>
+        <p:txBody>
+          <a:bodyPr wrap="square" anchor="t" lIns="18288" rIns="18288" tIns="9144" bIns="9144">
+            <a:spAutoFit/>
+          </a:bodyPr>
+          <a:lstStyle/>
+          <a:p>
+            <a:pPr algn="l">
+              <a:spcAft>
+                <a:spcPts val="200"/>
+              </a:spcAft>
+            </a:pPr>
+            <a:r>
+              <a:rPr sz="1000" b="1">
+                <a:solidFill>
+                  <a:srgbClr val="243447"/>
+                </a:solidFill>
+                <a:latin typeface="Apple SD Gothic Neo"/>
+                <a:ea typeface="Apple SD Gothic Neo"/>
+              </a:rPr>
+              <a:t>실험 설계  </a:t>
+            </a:r>
+            <a:r>
+              <a:rPr sz="1000" b="0">
+                <a:solidFill>
+                  <a:srgbClr val="262626"/>
+                </a:solidFill>
+                <a:latin typeface="Apple SD Gothic Neo"/>
+                <a:ea typeface="Apple SD Gothic Neo"/>
+              </a:rPr>
+              <a:t>검증된 주차별 결합의 조기 슬롯에 시계열 FM을 부품으로 장착해 비교. 두 모델 모두 파라미터 갱신 없이 과거 데이터를 문맥으로 사용(ICL·zero-shot), 입력·과제·평가 완전 동일 — DFM 스냅샷 + 공변량 10종 + 빠른신호 4종, 분기말 외삽, 32분기 실시간 그리드.</a:t>
+            </a:r>
+          </a:p>
+          <a:p>
+            <a:pPr algn="l">
+              <a:spcAft>
+                <a:spcPts val="200"/>
+              </a:spcAft>
+            </a:pPr>
+            <a:r>
+              <a:rPr sz="930" b="1">
+                <a:solidFill>
+                  <a:srgbClr val="243447"/>
+                </a:solidFill>
+                <a:latin typeface="Apple SD Gothic Neo"/>
+                <a:ea typeface="Apple SD Gothic Neo"/>
+              </a:rPr>
+              <a:t>비교 대상  </a:t>
+            </a:r>
+            <a:r>
+              <a:rPr sz="930" b="0">
+                <a:solidFill>
+                  <a:srgbClr val="6B6B6B"/>
+                </a:solidFill>
+                <a:latin typeface="Apple SD Gothic Neo"/>
+                <a:ea typeface="Apple SD Gothic Neo"/>
+              </a:rPr>
+              <a:t>Chronos-2(아마존, 120M) vs BISTRO(BIS WP 1337, Moirai-base 91M을 BIS 거시 4,925계열로 미세조정 — 공개 체크포인트) · 참고: 직접학습 LSTM · LLM 기반 ICL은 학습데이터 오염으로 채점 제외.</a:t>
+            </a:r>
+          </a:p>
+        </p:txBody>
+      </p:sp>
+      <p:pic>
+        <p:nvPicPr>
+          <p:cNvPr id="6" name="Picture 5" descr="fm_parts.png"/>
+          <p:cNvPicPr>
+            <a:picLocks noChangeAspect="1"/>
+          </p:cNvPicPr>
+          <p:nvPr/>
+        </p:nvPicPr>
+        <p:blipFill>
+          <a:blip r:embed="rId2"/>
+          <a:stretch>
+            <a:fillRect/>
+          </a:stretch>
+        </p:blipFill>
+        <p:spPr>
+          <a:xfrm>
+            <a:off x="457200" y="1965960"/>
+            <a:ext cx="6675120" cy="3027889"/>
+          </a:xfrm>
+          <a:prstGeom prst="rect">
+            <a:avLst/>
+          </a:prstGeom>
+        </p:spPr>
+      </p:pic>
+      <p:sp>
+        <p:nvSpPr>
+          <p:cNvPr id="7" name="TextBox 6"/>
+          <p:cNvSpPr txBox="1"/>
+          <p:nvPr/>
+        </p:nvSpPr>
+        <p:spPr>
+          <a:xfrm>
+            <a:off x="548640" y="5230368"/>
+            <a:ext cx="6492240" cy="274320"/>
+          </a:xfrm>
+          <a:prstGeom prst="rect">
+            <a:avLst/>
+          </a:prstGeom>
+          <a:noFill/>
+        </p:spPr>
+        <p:txBody>
+          <a:bodyPr wrap="square" anchor="t" lIns="18288" rIns="18288" tIns="9144" bIns="9144">
+            <a:spAutoFit/>
+          </a:bodyPr>
+          <a:lstStyle/>
+          <a:p>
+            <a:pPr algn="l">
+              <a:spcAft>
+                <a:spcPts val="200"/>
+              </a:spcAft>
+            </a:pPr>
+            <a:r>
+              <a:rPr sz="1100" b="1">
+                <a:solidFill>
+                  <a:srgbClr val="243447"/>
+                </a:solidFill>
+                <a:latin typeface="Apple SD Gothic Neo"/>
+                <a:ea typeface="Apple SD Gothic Neo"/>
+              </a:rPr>
+              <a:t>결과 요약</a:t>
+            </a:r>
+          </a:p>
+        </p:txBody>
+      </p:sp>
+      <p:cxnSp>
+        <p:nvCxnSpPr>
+          <p:cNvPr id="8" name="Connector 7"/>
+          <p:cNvCxnSpPr/>
+          <p:nvPr/>
+        </p:nvCxnSpPr>
+        <p:spPr>
+          <a:xfrm>
+            <a:off x="548640" y="5504688"/>
+            <a:ext cx="6492239" cy="0"/>
+          </a:xfrm>
+          <a:prstGeom prst="line">
+            <a:avLst/>
+          </a:prstGeom>
+          <a:ln w="9525">
+            <a:solidFill>
+              <a:srgbClr val="C9C9C9"/>
+            </a:solidFill>
+          </a:ln>
+        </p:spPr>
+        <p:style>
+          <a:lnRef idx="2">
+            <a:schemeClr val="accent1"/>
+          </a:lnRef>
+          <a:fillRef idx="0">
+            <a:schemeClr val="accent1"/>
+          </a:fillRef>
+          <a:effectRef idx="1">
+            <a:schemeClr val="accent1"/>
+          </a:effectRef>
+          <a:fontRef idx="minor">
+            <a:schemeClr val="tx1"/>
+          </a:fontRef>
+        </p:style>
+      </p:cxnSp>
+      <p:sp>
+        <p:nvSpPr>
+          <p:cNvPr id="9" name="TextBox 8"/>
+          <p:cNvSpPr txBox="1"/>
+          <p:nvPr/>
+        </p:nvSpPr>
+        <p:spPr>
+          <a:xfrm>
+            <a:off x="548640" y="5577840"/>
+            <a:ext cx="6492240" cy="777240"/>
+          </a:xfrm>
+          <a:prstGeom prst="rect">
+            <a:avLst/>
+          </a:prstGeom>
+          <a:noFill/>
+        </p:spPr>
+        <p:txBody>
+          <a:bodyPr wrap="square" anchor="t" lIns="18288" rIns="18288" tIns="9144" bIns="9144">
+            <a:spAutoFit/>
+          </a:bodyPr>
+          <a:lstStyle/>
+          <a:p>
+            <a:pPr algn="l">
+              <a:spcAft>
+                <a:spcPts val="200"/>
+              </a:spcAft>
+            </a:pPr>
+            <a:r>
+              <a:rPr sz="900" b="0">
+                <a:solidFill>
+                  <a:srgbClr val="262626"/>
+                </a:solidFill>
+                <a:latin typeface="Apple SD Gothic Neo"/>
+                <a:ea typeface="Apple SD Gothic Neo"/>
+              </a:rPr>
+              <a:t>· 단독 성능: Chronos-2f 0.808 &lt; BISTRO 0.871 ≈ 기반 Moirai-small 0.873 — BIS 거시 미세조정의 효과는 소폭(조기 구간 1.021→1.005)</a:t>
+            </a:r>
+          </a:p>
+          <a:p>
+            <a:pPr algn="l">
+              <a:spcAft>
+                <a:spcPts val="200"/>
+              </a:spcAft>
+            </a:pPr>
+            <a:r>
+              <a:rPr sz="900" b="0">
+                <a:solidFill>
+                  <a:srgbClr val="262626"/>
+                </a:solidFill>
+                <a:latin typeface="Apple SD Gothic Neo"/>
+                <a:ea typeface="Apple SD Gothic Neo"/>
+              </a:rPr>
+              <a:t>· 슬롯 장착: Chronos-2f만 개선(0.750→0.740). BISTRO는 동률(0.750), 두 FM 병용(0.744)도 C2f 단독에 미달</a:t>
+            </a:r>
+          </a:p>
+          <a:p>
+            <a:pPr algn="l">
+              <a:spcAft>
+                <a:spcPts val="200"/>
+              </a:spcAft>
+            </a:pPr>
+            <a:r>
+              <a:rPr sz="900" b="0">
+                <a:solidFill>
+                  <a:srgbClr val="262626"/>
+                </a:solidFill>
+                <a:latin typeface="Apple SD Gothic Neo"/>
+                <a:ea typeface="Apple SD Gothic Neo"/>
+              </a:rPr>
+              <a:t>· 참고: 직접학습 LSTM은 동일 입력에도 1.019(조기 1.286) — 소표본 직접학습 한계 재확인</a:t>
+            </a:r>
+          </a:p>
+        </p:txBody>
+      </p:sp>
+      <p:sp>
+        <p:nvSpPr>
+          <p:cNvPr id="10" name="Rectangle 9"/>
+          <p:cNvSpPr/>
+          <p:nvPr/>
+        </p:nvSpPr>
+        <p:spPr>
+          <a:xfrm>
+            <a:off x="7452360" y="1965960"/>
+            <a:ext cx="41148" cy="1325880"/>
+          </a:xfrm>
+          <a:prstGeom prst="rect">
+            <a:avLst/>
+          </a:prstGeom>
+          <a:solidFill>
+            <a:srgbClr val="008A3E"/>
+          </a:solidFill>
+          <a:ln>
+            <a:noFill/>
+          </a:ln>
+          <a:effectLst/>
+        </p:spPr>
+        <p:style>
+          <a:lnRef idx="1">
+            <a:schemeClr val="accent1"/>
+          </a:lnRef>
+          <a:fillRef idx="3">
+            <a:schemeClr val="accent1"/>
+          </a:fillRef>
+          <a:effectRef idx="2">
+            <a:schemeClr val="accent1"/>
+          </a:effectRef>
+          <a:fontRef idx="minor">
+            <a:schemeClr val="lt1"/>
+          </a:fontRef>
+        </p:style>
+        <p:txBody>
+          <a:bodyPr rtlCol="0" anchor="ctr"/>
+          <a:lstStyle/>
+          <a:p>
+            <a:pPr algn="ctr"/>
+          </a:p>
+        </p:txBody>
+      </p:sp>
+      <p:sp>
+        <p:nvSpPr>
+          <p:cNvPr id="11" name="TextBox 10"/>
+          <p:cNvSpPr txBox="1"/>
+          <p:nvPr/>
+        </p:nvSpPr>
+        <p:spPr>
+          <a:xfrm>
+            <a:off x="7635240" y="1965960"/>
+            <a:ext cx="4023359" cy="1371600"/>
+          </a:xfrm>
+          <a:prstGeom prst="rect">
+            <a:avLst/>
+          </a:prstGeom>
+          <a:noFill/>
+        </p:spPr>
+        <p:txBody>
+          <a:bodyPr wrap="square" anchor="t" lIns="18288" rIns="18288" tIns="9144" bIns="9144">
+            <a:spAutoFit/>
+          </a:bodyPr>
+          <a:lstStyle/>
+          <a:p>
+            <a:pPr algn="l">
+              <a:spcAft>
+                <a:spcPts val="200"/>
+              </a:spcAft>
+            </a:pPr>
+            <a:r>
+              <a:rPr sz="1100" b="1">
+                <a:solidFill>
+                  <a:srgbClr val="243447"/>
+                </a:solidFill>
+                <a:latin typeface="Apple SD Gothic Neo"/>
+                <a:ea typeface="Apple SD Gothic Neo"/>
+              </a:rPr>
+              <a:t>슬롯 자격 — 조기 구간에서 GBM과 대등할 것</a:t>
+            </a:r>
+          </a:p>
+          <a:p>
+            <a:pPr algn="l">
+              <a:spcAft>
+                <a:spcPts val="200"/>
+              </a:spcAft>
+            </a:pPr>
+            <a:r>
+              <a:rPr sz="930" b="0">
+                <a:solidFill>
+                  <a:srgbClr val="262626"/>
+                </a:solidFill>
+                <a:latin typeface="Apple SD Gothic Neo"/>
+                <a:ea typeface="Apple SD Gothic Neo"/>
+              </a:rPr>
+              <a:t>· 조기 구간 단독: Chronos-2f 0.924 ≈ GBM 0.924 (충족) /</a:t>
+            </a:r>
+          </a:p>
+          <a:p>
+            <a:pPr algn="l">
+              <a:spcAft>
+                <a:spcPts val="200"/>
+              </a:spcAft>
+            </a:pPr>
+            <a:r>
+              <a:rPr sz="930" b="0">
+                <a:solidFill>
+                  <a:srgbClr val="262626"/>
+                </a:solidFill>
+                <a:latin typeface="Apple SD Gothic Neo"/>
+                <a:ea typeface="Apple SD Gothic Neo"/>
+              </a:rPr>
+              <a:t>  BISTRO 1.005 · LSTM 1.286 (미충족)</a:t>
+            </a:r>
+          </a:p>
+          <a:p>
+            <a:pPr algn="l">
+              <a:spcAft>
+                <a:spcPts val="200"/>
+              </a:spcAft>
+            </a:pPr>
+            <a:r>
+              <a:rPr sz="930" b="0">
+                <a:solidFill>
+                  <a:srgbClr val="262626"/>
+                </a:solidFill>
+                <a:latin typeface="Apple SD Gothic Neo"/>
+                <a:ea typeface="Apple SD Gothic Neo"/>
+              </a:rPr>
+              <a:t>· 슬롯 결과가 자격 판정과 일치: C2f 0.740(개선) / BISTRO</a:t>
+            </a:r>
+          </a:p>
+          <a:p>
+            <a:pPr algn="l">
+              <a:spcAft>
+                <a:spcPts val="200"/>
+              </a:spcAft>
+            </a:pPr>
+            <a:r>
+              <a:rPr sz="930" b="0">
+                <a:solidFill>
+                  <a:srgbClr val="262626"/>
+                </a:solidFill>
+                <a:latin typeface="Apple SD Gothic Neo"/>
+                <a:ea typeface="Apple SD Gothic Neo"/>
+              </a:rPr>
+              <a:t>  0.750(동률) / 병용 0.744 — C2f 단독 미달 (오차 상관 0.926)</a:t>
+            </a:r>
+          </a:p>
+        </p:txBody>
+      </p:sp>
+      <p:sp>
+        <p:nvSpPr>
+          <p:cNvPr id="12" name="Rectangle 11"/>
+          <p:cNvSpPr/>
+          <p:nvPr/>
+        </p:nvSpPr>
+        <p:spPr>
+          <a:xfrm>
+            <a:off x="7452360" y="3429000"/>
+            <a:ext cx="41148" cy="2240280"/>
+          </a:xfrm>
+          <a:prstGeom prst="rect">
+            <a:avLst/>
+          </a:prstGeom>
+          <a:solidFill>
+            <a:srgbClr val="243447"/>
+          </a:solidFill>
+          <a:ln>
+            <a:noFill/>
+          </a:ln>
+          <a:effectLst/>
+        </p:spPr>
+        <p:style>
+          <a:lnRef idx="1">
+            <a:schemeClr val="accent1"/>
+          </a:lnRef>
+          <a:fillRef idx="3">
+            <a:schemeClr val="accent1"/>
+          </a:fillRef>
+          <a:effectRef idx="2">
+            <a:schemeClr val="accent1"/>
+          </a:effectRef>
+          <a:fontRef idx="minor">
+            <a:schemeClr val="lt1"/>
+          </a:fontRef>
+        </p:style>
+        <p:txBody>
+          <a:bodyPr rtlCol="0" anchor="ctr"/>
+          <a:lstStyle/>
+          <a:p>
+            <a:pPr algn="ctr"/>
+          </a:p>
+        </p:txBody>
+      </p:sp>
+      <p:sp>
+        <p:nvSpPr>
+          <p:cNvPr id="13" name="TextBox 12"/>
+          <p:cNvSpPr txBox="1"/>
+          <p:nvPr/>
+        </p:nvSpPr>
+        <p:spPr>
+          <a:xfrm>
+            <a:off x="7635240" y="3429000"/>
+            <a:ext cx="4023359" cy="2286000"/>
+          </a:xfrm>
+          <a:prstGeom prst="rect">
+            <a:avLst/>
+          </a:prstGeom>
+          <a:noFill/>
+        </p:spPr>
+        <p:txBody>
+          <a:bodyPr wrap="square" anchor="t" lIns="18288" rIns="18288" tIns="9144" bIns="9144">
+            <a:spAutoFit/>
+          </a:bodyPr>
+          <a:lstStyle/>
+          <a:p>
+            <a:pPr algn="l">
+              <a:spcAft>
+                <a:spcPts val="160"/>
+              </a:spcAft>
+            </a:pPr>
+            <a:r>
+              <a:rPr sz="1100" b="1">
+                <a:solidFill>
+                  <a:srgbClr val="243447"/>
+                </a:solidFill>
+                <a:latin typeface="Apple SD Gothic Neo"/>
+                <a:ea typeface="Apple SD Gothic Neo"/>
+              </a:rPr>
+              <a:t>성능 차이의 원인 — 공변량 절제 실험</a:t>
+            </a:r>
+          </a:p>
+          <a:p>
+            <a:pPr algn="l">
+              <a:spcAft>
+                <a:spcPts val="160"/>
+              </a:spcAft>
+            </a:pPr>
+            <a:r>
+              <a:rPr sz="880" b="0">
+                <a:solidFill>
+                  <a:srgbClr val="262626"/>
+                </a:solidFill>
+                <a:latin typeface="Apple SD Gothic Neo"/>
+                <a:ea typeface="Apple SD Gothic Neo"/>
+              </a:rPr>
+              <a:t>· 같은 빠른신호(주가·환율) 추가 시: </a:t>
+            </a:r>
+            <a:r>
+              <a:rPr sz="880" b="1">
+                <a:solidFill>
+                  <a:srgbClr val="008A3E"/>
+                </a:solidFill>
+                <a:latin typeface="Apple SD Gothic Neo"/>
+                <a:ea typeface="Apple SD Gothic Neo"/>
+              </a:rPr>
+              <a:t>C2 -3.4%</a:t>
+            </a:r>
+            <a:r>
+              <a:rPr sz="830" b="0">
+                <a:solidFill>
+                  <a:srgbClr val="6B6B6B"/>
+                </a:solidFill>
+                <a:latin typeface="Apple SD Gothic Neo"/>
+                <a:ea typeface="Apple SD Gothic Neo"/>
+              </a:rPr>
+              <a:t> (0.836→0.808)</a:t>
+            </a:r>
+          </a:p>
+          <a:p>
+            <a:pPr algn="l">
+              <a:spcAft>
+                <a:spcPts val="160"/>
+              </a:spcAft>
+            </a:pPr>
+            <a:r>
+              <a:rPr sz="880" b="0">
+                <a:solidFill>
+                  <a:srgbClr val="262626"/>
+                </a:solidFill>
+                <a:latin typeface="Apple SD Gothic Neo"/>
+                <a:ea typeface="Apple SD Gothic Neo"/>
+              </a:rPr>
+              <a:t>  vs </a:t>
+            </a:r>
+            <a:r>
+              <a:rPr sz="880" b="1">
+                <a:solidFill>
+                  <a:srgbClr val="B0532F"/>
+                </a:solidFill>
+                <a:latin typeface="Apple SD Gothic Neo"/>
+                <a:ea typeface="Apple SD Gothic Neo"/>
+              </a:rPr>
+              <a:t>BISTRO +0.1% 무이득</a:t>
+            </a:r>
+            <a:r>
+              <a:rPr sz="830" b="0">
+                <a:solidFill>
+                  <a:srgbClr val="6B6B6B"/>
+                </a:solidFill>
+                <a:latin typeface="Apple SD Gothic Neo"/>
+                <a:ea typeface="Apple SD Gothic Neo"/>
+              </a:rPr>
+              <a:t> (0.870→0.871)</a:t>
+            </a:r>
+          </a:p>
+          <a:p>
+            <a:pPr algn="l">
+              <a:spcAft>
+                <a:spcPts val="160"/>
+              </a:spcAft>
+            </a:pPr>
+            <a:r>
+              <a:rPr sz="880" b="0">
+                <a:solidFill>
+                  <a:srgbClr val="262626"/>
+                </a:solidFill>
+                <a:latin typeface="Apple SD Gothic Neo"/>
+                <a:ea typeface="Apple SD Gothic Neo"/>
+              </a:rPr>
+              <a:t>· 공식지표 10종 추가: BISTRO -0.5% — 미미</a:t>
+            </a:r>
+          </a:p>
+          <a:p>
+            <a:pPr algn="l">
+              <a:spcAft>
+                <a:spcPts val="160"/>
+              </a:spcAft>
+            </a:pPr>
+            <a:r>
+              <a:rPr sz="880" b="0">
+                <a:solidFill>
+                  <a:srgbClr val="262626"/>
+                </a:solidFill>
+                <a:latin typeface="Apple SD Gothic Neo"/>
+                <a:ea typeface="Apple SD Gothic Neo"/>
+              </a:rPr>
+              <a:t>· 원인은 사전학습의 채점 범위 차이:</a:t>
+            </a:r>
+          </a:p>
+          <a:p>
+            <a:pPr algn="l">
+              <a:spcAft>
+                <a:spcPts val="160"/>
+              </a:spcAft>
+            </a:pPr>
+            <a:r>
+              <a:rPr sz="880" b="0">
+                <a:solidFill>
+                  <a:srgbClr val="262626"/>
+                </a:solidFill>
+                <a:latin typeface="Apple SD Gothic Neo"/>
+                <a:ea typeface="Apple SD Gothic Neo"/>
+              </a:rPr>
+              <a:t>  - Moirai/BISTRO: (공변량, 타깃)과거 → </a:t>
+            </a:r>
+            <a:r>
+              <a:rPr sz="880" b="1">
+                <a:solidFill>
+                  <a:srgbClr val="262626"/>
+                </a:solidFill>
+                <a:latin typeface="Apple SD Gothic Neo"/>
+                <a:ea typeface="Apple SD Gothic Neo"/>
+              </a:rPr>
+              <a:t>(공변량, 타깃)미래 전부 채점</a:t>
+            </a:r>
+          </a:p>
+          <a:p>
+            <a:pPr algn="l">
+              <a:spcAft>
+                <a:spcPts val="160"/>
+              </a:spcAft>
+            </a:pPr>
+            <a:r>
+              <a:rPr sz="880" b="0">
+                <a:solidFill>
+                  <a:srgbClr val="262626"/>
+                </a:solidFill>
+                <a:latin typeface="Apple SD Gothic Neo"/>
+                <a:ea typeface="Apple SD Gothic Neo"/>
+              </a:rPr>
+              <a:t>    = 공변량도 예측 대상(이웃). 거시 미세조정 후에도 구조 동일</a:t>
+            </a:r>
+          </a:p>
+          <a:p>
+            <a:pPr algn="l">
+              <a:spcAft>
+                <a:spcPts val="160"/>
+              </a:spcAft>
+            </a:pPr>
+            <a:r>
+              <a:rPr sz="880" b="0">
+                <a:solidFill>
+                  <a:srgbClr val="262626"/>
+                </a:solidFill>
+                <a:latin typeface="Apple SD Gothic Neo"/>
+                <a:ea typeface="Apple SD Gothic Neo"/>
+              </a:rPr>
+              <a:t>  - Chronos-2: (공변량, 타깃)과거 → </a:t>
+            </a:r>
+            <a:r>
+              <a:rPr sz="880" b="1">
+                <a:solidFill>
+                  <a:srgbClr val="262626"/>
+                </a:solidFill>
+                <a:latin typeface="Apple SD Gothic Neo"/>
+                <a:ea typeface="Apple SD Gothic Neo"/>
+              </a:rPr>
+              <a:t>타깃만 채점</a:t>
+            </a:r>
+          </a:p>
+          <a:p>
+            <a:pPr algn="l">
+              <a:spcAft>
+                <a:spcPts val="160"/>
+              </a:spcAft>
+            </a:pPr>
+            <a:r>
+              <a:rPr sz="880" b="0">
+                <a:solidFill>
+                  <a:srgbClr val="262626"/>
+                </a:solidFill>
+                <a:latin typeface="Apple SD Gothic Neo"/>
+                <a:ea typeface="Apple SD Gothic Neo"/>
+              </a:rPr>
+              <a:t>    = 공변량은 힌트. 힌트 없이는 손실을 줄일 수 없는 사례로 훈련</a:t>
+            </a:r>
+          </a:p>
+          <a:p>
+            <a:pPr algn="l">
+              <a:spcAft>
+                <a:spcPts val="160"/>
+              </a:spcAft>
+            </a:pPr>
+            <a:r>
+              <a:rPr sz="880" b="0">
+                <a:solidFill>
+                  <a:srgbClr val="262626"/>
+                </a:solidFill>
+                <a:latin typeface="Apple SD Gothic Neo"/>
+                <a:ea typeface="Apple SD Gothic Neo"/>
+              </a:rPr>
+              <a:t>· 체급 유사(91M vs 120M) → 격차 원인은 체급이 아닌 훈련 방식</a:t>
+            </a:r>
+          </a:p>
+        </p:txBody>
+      </p:sp>
+      <p:sp>
+        <p:nvSpPr>
+          <p:cNvPr id="14" name="Rectangle 13"/>
+          <p:cNvSpPr/>
+          <p:nvPr/>
+        </p:nvSpPr>
+        <p:spPr>
+          <a:xfrm>
+            <a:off x="7452360" y="5806440"/>
+            <a:ext cx="4206240" cy="640080"/>
+          </a:xfrm>
+          <a:prstGeom prst="rect">
+            <a:avLst/>
+          </a:prstGeom>
+          <a:solidFill>
+            <a:srgbClr val="F5F5F4"/>
+          </a:solidFill>
+          <a:ln>
+            <a:noFill/>
+          </a:ln>
+          <a:effectLst/>
+        </p:spPr>
+        <p:style>
+          <a:lnRef idx="1">
+            <a:schemeClr val="accent1"/>
+          </a:lnRef>
+          <a:fillRef idx="3">
+            <a:schemeClr val="accent1"/>
+          </a:fillRef>
+          <a:effectRef idx="2">
+            <a:schemeClr val="accent1"/>
+          </a:effectRef>
+          <a:fontRef idx="minor">
+            <a:schemeClr val="lt1"/>
+          </a:fontRef>
+        </p:style>
+        <p:txBody>
+          <a:bodyPr rtlCol="0" anchor="ctr"/>
+          <a:lstStyle/>
+          <a:p>
+            <a:pPr algn="ctr"/>
+          </a:p>
+        </p:txBody>
+      </p:sp>
+      <p:sp>
+        <p:nvSpPr>
+          <p:cNvPr id="15" name="Rectangle 14"/>
+          <p:cNvSpPr/>
+          <p:nvPr/>
+        </p:nvSpPr>
+        <p:spPr>
+          <a:xfrm>
+            <a:off x="7452360" y="5806440"/>
+            <a:ext cx="41148" cy="640080"/>
+          </a:xfrm>
+          <a:prstGeom prst="rect">
+            <a:avLst/>
+          </a:prstGeom>
+          <a:solidFill>
+            <a:srgbClr val="6B6B6B"/>
+          </a:solidFill>
+          <a:ln>
+            <a:noFill/>
+          </a:ln>
+          <a:effectLst/>
+        </p:spPr>
+        <p:style>
+          <a:lnRef idx="1">
+            <a:schemeClr val="accent1"/>
+          </a:lnRef>
+          <a:fillRef idx="3">
+            <a:schemeClr val="accent1"/>
+          </a:fillRef>
+          <a:effectRef idx="2">
+            <a:schemeClr val="accent1"/>
+          </a:effectRef>
+          <a:fontRef idx="minor">
+            <a:schemeClr val="lt1"/>
+          </a:fontRef>
+        </p:style>
+        <p:txBody>
+          <a:bodyPr rtlCol="0" anchor="ctr"/>
+          <a:lstStyle/>
+          <a:p>
+            <a:pPr algn="ctr"/>
+          </a:p>
+        </p:txBody>
+      </p:sp>
+      <p:sp>
+        <p:nvSpPr>
+          <p:cNvPr id="16" name="TextBox 15"/>
+          <p:cNvSpPr txBox="1"/>
+          <p:nvPr/>
+        </p:nvSpPr>
+        <p:spPr>
+          <a:xfrm>
+            <a:off x="7635240" y="5852160"/>
+            <a:ext cx="3840479" cy="548640"/>
+          </a:xfrm>
+          <a:prstGeom prst="rect">
+            <a:avLst/>
+          </a:prstGeom>
+          <a:noFill/>
+        </p:spPr>
+        <p:txBody>
+          <a:bodyPr wrap="square" anchor="t" lIns="18288" rIns="18288" tIns="9144" bIns="9144">
+            <a:spAutoFit/>
+          </a:bodyPr>
+          <a:lstStyle/>
+          <a:p>
+            <a:pPr algn="l">
+              <a:spcAft>
+                <a:spcPts val="130"/>
+              </a:spcAft>
+            </a:pPr>
+            <a:r>
+              <a:rPr sz="830" b="0">
+                <a:solidFill>
+                  <a:srgbClr val="6B6B6B"/>
+                </a:solidFill>
+                <a:latin typeface="Apple SD Gothic Neo"/>
+                <a:ea typeface="Apple SD Gothic Neo"/>
+              </a:rPr>
+              <a:t>유의  개선폭은 모두 통계적 유의성 미달(DM p&gt;0.18) — 비열등·개선 방향 수위.</a:t>
+            </a:r>
+          </a:p>
+          <a:p>
+            <a:pPr algn="l">
+              <a:spcAft>
+                <a:spcPts val="130"/>
+              </a:spcAft>
+            </a:pPr>
+            <a:r>
+              <a:rPr sz="830" b="0">
+                <a:solidFill>
+                  <a:srgbClr val="6B6B6B"/>
+                </a:solidFill>
+                <a:latin typeface="Apple SD Gothic Neo"/>
+                <a:ea typeface="Apple SD Gothic Neo"/>
+              </a:rPr>
+              <a:t>BISTRO는 공개 체크포인트를 논문 표준 사용법(zero-shot) 그대로 적용, 한국 GDP</a:t>
+            </a:r>
+          </a:p>
+          <a:p>
+            <a:pPr algn="l">
+              <a:spcAft>
+                <a:spcPts val="130"/>
+              </a:spcAft>
+            </a:pPr>
+            <a:r>
+              <a:rPr sz="830" b="0">
+                <a:solidFill>
+                  <a:srgbClr val="6B6B6B"/>
+                </a:solidFill>
+                <a:latin typeface="Apple SD Gothic Neo"/>
+                <a:ea typeface="Apple SD Gothic Neo"/>
+              </a:rPr>
+              <a:t>과제용 추가 미세조정 없음. 저자: Koyuncu·Kwon·Lombardi·Perez-Cruz·Shin.</a:t>
+            </a:r>
+          </a:p>
+        </p:txBody>
+      </p:sp>
+      <p:sp>
+        <p:nvSpPr>
+          <p:cNvPr id="17" name="TextBox 16"/>
+          <p:cNvSpPr txBox="1"/>
+          <p:nvPr/>
+        </p:nvSpPr>
+        <p:spPr>
+          <a:xfrm>
+            <a:off x="548640" y="6455664"/>
+            <a:ext cx="9875520" cy="274320"/>
+          </a:xfrm>
+          <a:prstGeom prst="rect">
+            <a:avLst/>
+          </a:prstGeom>
+          <a:noFill/>
+        </p:spPr>
+        <p:txBody>
+          <a:bodyPr wrap="square" anchor="t" lIns="18288" rIns="18288" tIns="9144" bIns="9144">
+            <a:spAutoFit/>
+          </a:bodyPr>
+          <a:lstStyle/>
+          <a:p>
+            <a:pPr algn="l">
+              <a:spcAft>
+                <a:spcPts val="200"/>
+              </a:spcAft>
+            </a:pPr>
+            <a:r>
+              <a:rPr sz="800" b="0">
+                <a:solidFill>
+                  <a:srgbClr val="6B6B6B"/>
+                </a:solidFill>
+                <a:latin typeface="Apple SD Gothic Neo"/>
+                <a:ea typeface="Apple SD Gothic Neo"/>
+              </a:rPr>
+              <a:t>주: 실시간 빈티지 · 속보치 기준 · 전망주차 w[-19,-1] 평균 RMSE · 2018Q1~2025Q4(32개 분기) · 예측단위 개정(schema v2) 반영. 낮을수록 정확. 슬롯 교체 = 조기(발표 19~14주 전)=(GBM+부품)÷2, 이후 XGBoost. BISTRO 출처: github.com/bis-med-it/bistro (Apache 2.0).</a:t>
+            </a:r>
+          </a:p>
+        </p:txBody>
+      </p:sp>
+      <p:sp>
+        <p:nvSpPr>
+          <p:cNvPr id="18" name="TextBox 17"/>
+          <p:cNvSpPr txBox="1"/>
+          <p:nvPr/>
+        </p:nvSpPr>
+        <p:spPr>
+          <a:xfrm>
+            <a:off x="11292840" y="6455664"/>
+            <a:ext cx="457200" cy="274320"/>
+          </a:xfrm>
+          <a:prstGeom prst="rect">
+            <a:avLst/>
+          </a:prstGeom>
+          <a:noFill/>
+        </p:spPr>
+        <p:txBody>
+          <a:bodyPr wrap="square" anchor="t" lIns="18288" rIns="18288" tIns="9144" bIns="9144">
+            <a:spAutoFit/>
+          </a:bodyPr>
+          <a:lstStyle/>
+          <a:p>
+            <a:pPr algn="r">
+              <a:spcAft>
+                <a:spcPts val="200"/>
+              </a:spcAft>
+            </a:pPr>
+            <a:r>
+              <a:rPr sz="900" b="0">
+                <a:solidFill>
+                  <a:srgbClr val="6B6B6B"/>
+                </a:solidFill>
+                <a:latin typeface="Apple SD Gothic Neo"/>
+                <a:ea typeface="Apple SD Gothic Neo"/>
+              </a:rPr>
+              <a:t>9</a:t>
             </a:r>
           </a:p>
         </p:txBody>

--- a/docs/GDP_Nowcasting_종합리포트_한은_2026-08-10.pptx
+++ b/docs/GDP_Nowcasting_종합리포트_한은_2026-08-10.pptx
@@ -11592,7 +11592,7 @@
                 <a:latin typeface="Apple SD Gothic Neo"/>
                 <a:ea typeface="Apple SD Gothic Neo"/>
               </a:rPr>
-              <a:t>주: 실시간 빈티지 · 속보치 기준 · 전망주차 w[-19,-1] 평균 RMSE · 2018Q1~2025Q4(32개 분기) · 예측단위 개정(schema v2) 반영. 낮을수록 정확. 슬롯 교체 = 조기(발표 19~14주 전)=(GBM+부품)÷2, 이후 XGBoost. BISTRO 출처: github.com/bis-med-it/bistro (Apache 2.0).</a:t>
+              <a:t>주: 실시간 빈티지 · 속보치 기준 · 전망주차 w[-19,-1] 평균 RMSE · 2018Q1~2025Q4(32개 분기) · 예측단위 개정(schema v2) 반영. 낮을수록 정확. 슬롯 교체 = 조기(발표 19~14주 전)=(GBM+부품)÷2, 이후 XGBoost. 조기 경계(-14주)는 예측구간 보정에서 선정의된 값 — 조기 4~7주 어디로 잘라도 0.740~0.741로 동일(경계 비의존). BISTRO 출처: github.com/bis-med-it/bistro (Apache 2.0).</a:t>
             </a:r>
           </a:p>
         </p:txBody>

--- a/docs/GDP_Nowcasting_종합리포트_한은_2026-08-10.pptx
+++ b/docs/GDP_Nowcasting_종합리포트_한은_2026-08-10.pptx
@@ -4,18 +4,21 @@
   <p:sldMasterIdLst>
     <p:sldMasterId id="2147483648" r:id="rId1"/>
   </p:sldMasterIdLst>
+  <p:notesMasterIdLst>
+    <p:notesMasterId r:id="rId11"/>
+  </p:notesMasterIdLst>
   <p:sldIdLst>
-    <p:sldId id="256" r:id="rId7"/>
-    <p:sldId id="257" r:id="rId9"/>
-    <p:sldId id="258" r:id="rId10"/>
-    <p:sldId id="259" r:id="rId11"/>
-    <p:sldId id="260" r:id="rId12"/>
-    <p:sldId id="261" r:id="rId13"/>
-    <p:sldId id="262" r:id="rId14"/>
-    <p:sldId id="263" r:id="rId15"/>
-    <p:sldId id="264" r:id="rId16"/>
+    <p:sldId id="256" r:id="rId2"/>
+    <p:sldId id="257" r:id="rId3"/>
+    <p:sldId id="258" r:id="rId4"/>
+    <p:sldId id="259" r:id="rId5"/>
+    <p:sldId id="260" r:id="rId6"/>
+    <p:sldId id="261" r:id="rId7"/>
+    <p:sldId id="262" r:id="rId8"/>
+    <p:sldId id="263" r:id="rId9"/>
+    <p:sldId id="264" r:id="rId10"/>
   </p:sldIdLst>
-  <p:sldSz cx="12191695" cy="6858000" type="screen4x3"/>
+  <p:sldSz cx="12192000" cy="6858000"/>
   <p:notesSz cx="6858000" cy="9144000"/>
   <p:defaultTextStyle>
     <a:defPPr>
@@ -112,11 +115,27 @@
       </a:defRPr>
     </a:lvl9pPr>
   </p:defaultTextStyle>
+  <p:extLst>
+    <p:ext uri="{EFAFB233-063F-42B5-8137-9DF3F51BA10A}">
+      <p15:sldGuideLst xmlns:p15="http://schemas.microsoft.com/office/powerpoint/2012/main">
+        <p15:guide id="1" orient="horz" pos="2160">
+          <p15:clr>
+            <a:srgbClr val="A4A3A4"/>
+          </p15:clr>
+        </p15:guide>
+        <p15:guide id="2" pos="2880">
+          <p15:clr>
+            <a:srgbClr val="A4A3A4"/>
+          </p15:clr>
+        </p15:guide>
+      </p15:sldGuideLst>
+    </p:ext>
+  </p:extLst>
 </p:presentation>
 </file>
 
 <file path=ppt/notesMasters/notesMaster1.xml><?xml version="1.0" encoding="utf-8"?>
-<p:notesMaster xmlns:a="http://schemas.openxmlformats.org/drawingml/2006/main" xmlns:p="http://schemas.openxmlformats.org/presentationml/2006/main" xmlns:r="http://schemas.openxmlformats.org/officeDocument/2006/relationships">
+<p:notesMaster xmlns:a="http://schemas.openxmlformats.org/drawingml/2006/main" xmlns:r="http://schemas.openxmlformats.org/officeDocument/2006/relationships" xmlns:p="http://schemas.openxmlformats.org/presentationml/2006/main">
   <p:cSld>
     <p:bg>
       <p:bgRef idx="1001">
@@ -137,241 +156,16 @@
           <a:chExt cx="0" cy="0"/>
         </a:xfrm>
       </p:grpSpPr>
-      <p:sp>
-        <p:nvSpPr>
-          <p:cNvPr id="2" name="Header Placeholder 1"/>
-          <p:cNvSpPr>
-            <a:spLocks noGrp="1"/>
-          </p:cNvSpPr>
-          <p:nvPr>
-            <p:ph type="hdr" sz="quarter"/>
-          </p:nvPr>
-        </p:nvSpPr>
-        <p:spPr>
-          <a:xfrm>
-            <a:off x="0" y="0"/>
-            <a:ext cx="2971800" cy="457200"/>
-          </a:xfrm>
-          <a:prstGeom prst="rect">
-            <a:avLst/>
-          </a:prstGeom>
-        </p:spPr>
-        <p:txBody>
-          <a:bodyPr vert="horz" lIns="91440" tIns="45720" rIns="91440" bIns="45720" rtlCol="0"/>
-          <a:lstStyle>
-            <a:lvl1pPr algn="l">
-              <a:defRPr sz="1200"/>
-            </a:lvl1pPr>
-          </a:lstStyle>
-          <a:p>
-            <a:endParaRPr lang="en-US"/>
-          </a:p>
-        </p:txBody>
-      </p:sp>
-      <p:sp>
-        <p:nvSpPr>
-          <p:cNvPr id="3" name="Date Placeholder 2"/>
-          <p:cNvSpPr>
-            <a:spLocks noGrp="1"/>
-          </p:cNvSpPr>
-          <p:nvPr>
-            <p:ph type="dt" idx="1"/>
-          </p:nvPr>
-        </p:nvSpPr>
-        <p:spPr>
-          <a:xfrm>
-            <a:off x="3884613" y="0"/>
-            <a:ext cx="2971800" cy="457200"/>
-          </a:xfrm>
-          <a:prstGeom prst="rect">
-            <a:avLst/>
-          </a:prstGeom>
-        </p:spPr>
-        <p:txBody>
-          <a:bodyPr vert="horz" lIns="91440" tIns="45720" rIns="91440" bIns="45720" rtlCol="0"/>
-          <a:lstStyle>
-            <a:lvl1pPr algn="r">
-              <a:defRPr sz="1200"/>
-            </a:lvl1pPr>
-          </a:lstStyle>
-          <a:p>
-            <a:fld id="{0F89C1C7-3DCD-1040-A9CF-14679D8B5DDD}" type="datetimeFigureOut">
-              <a:rPr lang="en-US" smtClean="0"/>
-              <a:t>10/17/16</a:t>
-            </a:fld>
-            <a:endParaRPr lang="en-US"/>
-          </a:p>
-        </p:txBody>
-      </p:sp>
-      <p:sp>
-        <p:nvSpPr>
-          <p:cNvPr id="4" name="Slide Image Placeholder 3"/>
-          <p:cNvSpPr>
-            <a:spLocks noGrp="1" noRot="1" noChangeAspect="1"/>
-          </p:cNvSpPr>
-          <p:nvPr>
-            <p:ph type="sldImg" idx="2"/>
-          </p:nvPr>
-        </p:nvSpPr>
-        <p:spPr>
-          <a:xfrm>
-            <a:off x="1143000" y="685800"/>
-            <a:ext cx="4572000" cy="3429000"/>
-          </a:xfrm>
-          <a:prstGeom prst="rect">
-            <a:avLst/>
-          </a:prstGeom>
-          <a:noFill/>
-          <a:ln w="12700">
-            <a:solidFill>
-              <a:prstClr val="black"/>
-            </a:solidFill>
-          </a:ln>
-        </p:spPr>
-        <p:txBody>
-          <a:bodyPr vert="horz" lIns="91440" tIns="45720" rIns="91440" bIns="45720" rtlCol="0" anchor="ctr"/>
-          <a:lstStyle/>
-          <a:p>
-            <a:endParaRPr lang="en-US"/>
-          </a:p>
-        </p:txBody>
-      </p:sp>
-      <p:sp>
-        <p:nvSpPr>
-          <p:cNvPr id="5" name="Notes Placeholder 4"/>
-          <p:cNvSpPr>
-            <a:spLocks noGrp="1"/>
-          </p:cNvSpPr>
-          <p:nvPr>
-            <p:ph type="body" sz="quarter" idx="3"/>
-          </p:nvPr>
-        </p:nvSpPr>
-        <p:spPr>
-          <a:xfrm>
-            <a:off x="685800" y="4343400"/>
-            <a:ext cx="5486400" cy="4114800"/>
-          </a:xfrm>
-          <a:prstGeom prst="rect">
-            <a:avLst/>
-          </a:prstGeom>
-        </p:spPr>
-        <p:txBody>
-          <a:bodyPr vert="horz" lIns="91440" tIns="45720" rIns="91440" bIns="45720" rtlCol="0"/>
-          <a:lstStyle/>
-          <a:p>
-            <a:pPr lvl="0"/>
-            <a:r>
-              <a:rPr lang="en-US" smtClean="0"/>
-              <a:t>Click to edit Master text styles</a:t>
-            </a:r>
-          </a:p>
-          <a:p>
-            <a:pPr lvl="1"/>
-            <a:r>
-              <a:rPr lang="en-US" smtClean="0"/>
-              <a:t>Second level</a:t>
-            </a:r>
-          </a:p>
-          <a:p>
-            <a:pPr lvl="2"/>
-            <a:r>
-              <a:rPr lang="en-US" smtClean="0"/>
-              <a:t>Third level</a:t>
-            </a:r>
-          </a:p>
-          <a:p>
-            <a:pPr lvl="3"/>
-            <a:r>
-              <a:rPr lang="en-US" smtClean="0"/>
-              <a:t>Fourth level</a:t>
-            </a:r>
-          </a:p>
-          <a:p>
-            <a:pPr lvl="4"/>
-            <a:r>
-              <a:rPr lang="en-US" smtClean="0"/>
-              <a:t>Fifth level</a:t>
-            </a:r>
-            <a:endParaRPr lang="en-US"/>
-          </a:p>
-        </p:txBody>
-      </p:sp>
-      <p:sp>
-        <p:nvSpPr>
-          <p:cNvPr id="6" name="Footer Placeholder 5"/>
-          <p:cNvSpPr>
-            <a:spLocks noGrp="1"/>
-          </p:cNvSpPr>
-          <p:nvPr>
-            <p:ph type="ftr" sz="quarter" idx="4"/>
-          </p:nvPr>
-        </p:nvSpPr>
-        <p:spPr>
-          <a:xfrm>
-            <a:off x="0" y="8685213"/>
-            <a:ext cx="2971800" cy="457200"/>
-          </a:xfrm>
-          <a:prstGeom prst="rect">
-            <a:avLst/>
-          </a:prstGeom>
-        </p:spPr>
-        <p:txBody>
-          <a:bodyPr vert="horz" lIns="91440" tIns="45720" rIns="91440" bIns="45720" rtlCol="0" anchor="b"/>
-          <a:lstStyle>
-            <a:lvl1pPr algn="l">
-              <a:defRPr sz="1200"/>
-            </a:lvl1pPr>
-          </a:lstStyle>
-          <a:p>
-            <a:endParaRPr lang="en-US"/>
-          </a:p>
-        </p:txBody>
-      </p:sp>
-      <p:sp>
-        <p:nvSpPr>
-          <p:cNvPr id="7" name="Slide Number Placeholder 6"/>
-          <p:cNvSpPr>
-            <a:spLocks noGrp="1"/>
-          </p:cNvSpPr>
-          <p:nvPr>
-            <p:ph type="sldNum" sz="quarter" idx="5"/>
-          </p:nvPr>
-        </p:nvSpPr>
-        <p:spPr>
-          <a:xfrm>
-            <a:off x="3884613" y="8685213"/>
-            <a:ext cx="2971800" cy="457200"/>
-          </a:xfrm>
-          <a:prstGeom prst="rect">
-            <a:avLst/>
-          </a:prstGeom>
-        </p:spPr>
-        <p:txBody>
-          <a:bodyPr vert="horz" lIns="91440" tIns="45720" rIns="91440" bIns="45720" rtlCol="0" anchor="b"/>
-          <a:lstStyle>
-            <a:lvl1pPr algn="r">
-              <a:defRPr sz="1200"/>
-            </a:lvl1pPr>
-          </a:lstStyle>
-          <a:p>
-            <a:fld id="{BB5E49A5-4136-284D-997B-48E1D791AD67}" type="slidenum">
-              <a:rPr lang="en-US" smtClean="0"/>
-              <a:t>‹#›</a:t>
-            </a:fld>
-            <a:endParaRPr lang="en-US"/>
-          </a:p>
-        </p:txBody>
-      </p:sp>
     </p:spTree>
     <p:extLst>
       <p:ext uri="{BB962C8B-B14F-4D97-AF65-F5344CB8AC3E}">
-        <p14:creationId xmlns:p14="http://schemas.microsoft.com/office/powerpoint/2010/main" val="2623252185"/>
+        <p14:creationId xmlns:p14="http://schemas.microsoft.com/office/powerpoint/2010/main" val="114856722"/>
       </p:ext>
     </p:extLst>
   </p:cSld>
   <p:clrMap bg1="lt1" tx1="dk1" bg2="lt2" tx2="dk2" accent1="accent1" accent2="accent2" accent3="accent3" accent4="accent4" accent5="accent5" accent6="accent6" hlink="hlink" folHlink="folHlink"/>
   <p:notesStyle>
-    <a:lvl1pPr marL="0" algn="l" defTabSz="457200" rtl="0" eaLnBrk="1" latinLnBrk="0" hangingPunct="1">
+    <a:lvl1pPr marL="0" algn="l" defTabSz="914400" rtl="0" eaLnBrk="1" latinLnBrk="1" hangingPunct="1">
       <a:defRPr sz="1200" kern="1200">
         <a:solidFill>
           <a:schemeClr val="tx1"/>
@@ -381,7 +175,7 @@
         <a:cs typeface="+mn-cs"/>
       </a:defRPr>
     </a:lvl1pPr>
-    <a:lvl2pPr marL="457200" algn="l" defTabSz="457200" rtl="0" eaLnBrk="1" latinLnBrk="0" hangingPunct="1">
+    <a:lvl2pPr marL="457200" algn="l" defTabSz="914400" rtl="0" eaLnBrk="1" latinLnBrk="1" hangingPunct="1">
       <a:defRPr sz="1200" kern="1200">
         <a:solidFill>
           <a:schemeClr val="tx1"/>
@@ -391,7 +185,7 @@
         <a:cs typeface="+mn-cs"/>
       </a:defRPr>
     </a:lvl2pPr>
-    <a:lvl3pPr marL="914400" algn="l" defTabSz="457200" rtl="0" eaLnBrk="1" latinLnBrk="0" hangingPunct="1">
+    <a:lvl3pPr marL="914400" algn="l" defTabSz="914400" rtl="0" eaLnBrk="1" latinLnBrk="1" hangingPunct="1">
       <a:defRPr sz="1200" kern="1200">
         <a:solidFill>
           <a:schemeClr val="tx1"/>
@@ -401,7 +195,7 @@
         <a:cs typeface="+mn-cs"/>
       </a:defRPr>
     </a:lvl3pPr>
-    <a:lvl4pPr marL="1371600" algn="l" defTabSz="457200" rtl="0" eaLnBrk="1" latinLnBrk="0" hangingPunct="1">
+    <a:lvl4pPr marL="1371600" algn="l" defTabSz="914400" rtl="0" eaLnBrk="1" latinLnBrk="1" hangingPunct="1">
       <a:defRPr sz="1200" kern="1200">
         <a:solidFill>
           <a:schemeClr val="tx1"/>
@@ -411,7 +205,7 @@
         <a:cs typeface="+mn-cs"/>
       </a:defRPr>
     </a:lvl4pPr>
-    <a:lvl5pPr marL="1828800" algn="l" defTabSz="457200" rtl="0" eaLnBrk="1" latinLnBrk="0" hangingPunct="1">
+    <a:lvl5pPr marL="1828800" algn="l" defTabSz="914400" rtl="0" eaLnBrk="1" latinLnBrk="1" hangingPunct="1">
       <a:defRPr sz="1200" kern="1200">
         <a:solidFill>
           <a:schemeClr val="tx1"/>
@@ -421,7 +215,7 @@
         <a:cs typeface="+mn-cs"/>
       </a:defRPr>
     </a:lvl5pPr>
-    <a:lvl6pPr marL="2286000" algn="l" defTabSz="457200" rtl="0" eaLnBrk="1" latinLnBrk="0" hangingPunct="1">
+    <a:lvl6pPr marL="2286000" algn="l" defTabSz="914400" rtl="0" eaLnBrk="1" latinLnBrk="1" hangingPunct="1">
       <a:defRPr sz="1200" kern="1200">
         <a:solidFill>
           <a:schemeClr val="tx1"/>
@@ -431,7 +225,7 @@
         <a:cs typeface="+mn-cs"/>
       </a:defRPr>
     </a:lvl6pPr>
-    <a:lvl7pPr marL="2743200" algn="l" defTabSz="457200" rtl="0" eaLnBrk="1" latinLnBrk="0" hangingPunct="1">
+    <a:lvl7pPr marL="2743200" algn="l" defTabSz="914400" rtl="0" eaLnBrk="1" latinLnBrk="1" hangingPunct="1">
       <a:defRPr sz="1200" kern="1200">
         <a:solidFill>
           <a:schemeClr val="tx1"/>
@@ -441,7 +235,7 @@
         <a:cs typeface="+mn-cs"/>
       </a:defRPr>
     </a:lvl7pPr>
-    <a:lvl8pPr marL="3200400" algn="l" defTabSz="457200" rtl="0" eaLnBrk="1" latinLnBrk="0" hangingPunct="1">
+    <a:lvl8pPr marL="3200400" algn="l" defTabSz="914400" rtl="0" eaLnBrk="1" latinLnBrk="1" hangingPunct="1">
       <a:defRPr sz="1200" kern="1200">
         <a:solidFill>
           <a:schemeClr val="tx1"/>
@@ -451,7 +245,7 @@
         <a:cs typeface="+mn-cs"/>
       </a:defRPr>
     </a:lvl8pPr>
-    <a:lvl9pPr marL="3657600" algn="l" defTabSz="457200" rtl="0" eaLnBrk="1" latinLnBrk="0" hangingPunct="1">
+    <a:lvl9pPr marL="3657600" algn="l" defTabSz="914400" rtl="0" eaLnBrk="1" latinLnBrk="1" hangingPunct="1">
       <a:defRPr sz="1200" kern="1200">
         <a:solidFill>
           <a:schemeClr val="tx1"/>
@@ -466,7 +260,7 @@
 </file>
 
 <file path=ppt/notesSlides/notesSlide1.xml><?xml version="1.0" encoding="utf-8"?>
-<p:notes xmlns:a="http://schemas.openxmlformats.org/drawingml/2006/main" xmlns:p="http://schemas.openxmlformats.org/presentationml/2006/main" xmlns:r="http://schemas.openxmlformats.org/officeDocument/2006/relationships">
+<p:notes xmlns:a="http://schemas.openxmlformats.org/drawingml/2006/main" xmlns:r="http://schemas.openxmlformats.org/officeDocument/2006/relationships" xmlns:p="http://schemas.openxmlformats.org/presentationml/2006/main">
   <p:cSld>
     <p:spTree>
       <p:nvGrpSpPr>
@@ -486,7 +280,7 @@
         <p:nvSpPr>
           <p:cNvPr id="2" name="Slide Image Placeholder 1"/>
           <p:cNvSpPr>
-            <a:spLocks noGrp="1"/>
+            <a:spLocks noGrp="1" noRot="1" noChangeAspect="1"/>
           </p:cNvSpPr>
           <p:nvPr>
             <p:ph type="sldImg" idx="2"/>
@@ -501,7 +295,7 @@
             <a:spLocks noGrp="1"/>
           </p:cNvSpPr>
           <p:nvPr>
-            <p:ph type="body" idx="3" sz="quarter"/>
+            <p:ph type="body" sz="quarter" idx="3"/>
           </p:nvPr>
         </p:nvSpPr>
         <p:spPr/>
@@ -522,7 +316,7 @@
             <a:spLocks noGrp="1"/>
           </p:cNvSpPr>
           <p:nvPr>
-            <p:ph type="sldNum" idx="5" sz="quarter"/>
+            <p:ph type="sldNum" sz="quarter" idx="5"/>
           </p:nvPr>
         </p:nvSpPr>
         <p:spPr/>
@@ -536,7 +330,7 @@
 </file>
 
 <file path=ppt/notesSlides/notesSlide2.xml><?xml version="1.0" encoding="utf-8"?>
-<p:notes xmlns:a="http://schemas.openxmlformats.org/drawingml/2006/main" xmlns:p="http://schemas.openxmlformats.org/presentationml/2006/main" xmlns:r="http://schemas.openxmlformats.org/officeDocument/2006/relationships">
+<p:notes xmlns:a="http://schemas.openxmlformats.org/drawingml/2006/main" xmlns:r="http://schemas.openxmlformats.org/officeDocument/2006/relationships" xmlns:p="http://schemas.openxmlformats.org/presentationml/2006/main">
   <p:cSld>
     <p:spTree>
       <p:nvGrpSpPr>
@@ -556,7 +350,7 @@
         <p:nvSpPr>
           <p:cNvPr id="2" name="Slide Image Placeholder 1"/>
           <p:cNvSpPr>
-            <a:spLocks noGrp="1"/>
+            <a:spLocks noGrp="1" noRot="1" noChangeAspect="1"/>
           </p:cNvSpPr>
           <p:nvPr>
             <p:ph type="sldImg" idx="2"/>
@@ -571,7 +365,7 @@
             <a:spLocks noGrp="1"/>
           </p:cNvSpPr>
           <p:nvPr>
-            <p:ph type="body" idx="3" sz="quarter"/>
+            <p:ph type="body" sz="quarter" idx="3"/>
           </p:nvPr>
         </p:nvSpPr>
         <p:spPr/>
@@ -592,7 +386,7 @@
             <a:spLocks noGrp="1"/>
           </p:cNvSpPr>
           <p:nvPr>
-            <p:ph type="sldNum" idx="5" sz="quarter"/>
+            <p:ph type="sldNum" sz="quarter" idx="5"/>
           </p:nvPr>
         </p:nvSpPr>
         <p:spPr/>
@@ -606,7 +400,7 @@
 </file>
 
 <file path=ppt/notesSlides/notesSlide3.xml><?xml version="1.0" encoding="utf-8"?>
-<p:notes xmlns:a="http://schemas.openxmlformats.org/drawingml/2006/main" xmlns:p="http://schemas.openxmlformats.org/presentationml/2006/main" xmlns:r="http://schemas.openxmlformats.org/officeDocument/2006/relationships">
+<p:notes xmlns:a="http://schemas.openxmlformats.org/drawingml/2006/main" xmlns:r="http://schemas.openxmlformats.org/officeDocument/2006/relationships" xmlns:p="http://schemas.openxmlformats.org/presentationml/2006/main">
   <p:cSld>
     <p:spTree>
       <p:nvGrpSpPr>
@@ -626,7 +420,7 @@
         <p:nvSpPr>
           <p:cNvPr id="2" name="Slide Image Placeholder 1"/>
           <p:cNvSpPr>
-            <a:spLocks noGrp="1"/>
+            <a:spLocks noGrp="1" noRot="1" noChangeAspect="1"/>
           </p:cNvSpPr>
           <p:nvPr>
             <p:ph type="sldImg" idx="2"/>
@@ -641,7 +435,7 @@
             <a:spLocks noGrp="1"/>
           </p:cNvSpPr>
           <p:nvPr>
-            <p:ph type="body" idx="3" sz="quarter"/>
+            <p:ph type="body" sz="quarter" idx="3"/>
           </p:nvPr>
         </p:nvSpPr>
         <p:spPr/>
@@ -662,7 +456,7 @@
             <a:spLocks noGrp="1"/>
           </p:cNvSpPr>
           <p:nvPr>
-            <p:ph type="sldNum" idx="5" sz="quarter"/>
+            <p:ph type="sldNum" sz="quarter" idx="5"/>
           </p:nvPr>
         </p:nvSpPr>
         <p:spPr/>
@@ -676,7 +470,7 @@
 </file>
 
 <file path=ppt/notesSlides/notesSlide4.xml><?xml version="1.0" encoding="utf-8"?>
-<p:notes xmlns:a="http://schemas.openxmlformats.org/drawingml/2006/main" xmlns:p="http://schemas.openxmlformats.org/presentationml/2006/main" xmlns:r="http://schemas.openxmlformats.org/officeDocument/2006/relationships">
+<p:notes xmlns:a="http://schemas.openxmlformats.org/drawingml/2006/main" xmlns:r="http://schemas.openxmlformats.org/officeDocument/2006/relationships" xmlns:p="http://schemas.openxmlformats.org/presentationml/2006/main">
   <p:cSld>
     <p:spTree>
       <p:nvGrpSpPr>
@@ -696,7 +490,7 @@
         <p:nvSpPr>
           <p:cNvPr id="2" name="Slide Image Placeholder 1"/>
           <p:cNvSpPr>
-            <a:spLocks noGrp="1"/>
+            <a:spLocks noGrp="1" noRot="1" noChangeAspect="1"/>
           </p:cNvSpPr>
           <p:nvPr>
             <p:ph type="sldImg" idx="2"/>
@@ -711,7 +505,7 @@
             <a:spLocks noGrp="1"/>
           </p:cNvSpPr>
           <p:nvPr>
-            <p:ph type="body" idx="3" sz="quarter"/>
+            <p:ph type="body" sz="quarter" idx="3"/>
           </p:nvPr>
         </p:nvSpPr>
         <p:spPr/>
@@ -732,7 +526,7 @@
             <a:spLocks noGrp="1"/>
           </p:cNvSpPr>
           <p:nvPr>
-            <p:ph type="sldNum" idx="5" sz="quarter"/>
+            <p:ph type="sldNum" sz="quarter" idx="5"/>
           </p:nvPr>
         </p:nvSpPr>
         <p:spPr/>
@@ -746,7 +540,7 @@
 </file>
 
 <file path=ppt/notesSlides/notesSlide5.xml><?xml version="1.0" encoding="utf-8"?>
-<p:notes xmlns:a="http://schemas.openxmlformats.org/drawingml/2006/main" xmlns:p="http://schemas.openxmlformats.org/presentationml/2006/main" xmlns:r="http://schemas.openxmlformats.org/officeDocument/2006/relationships">
+<p:notes xmlns:a="http://schemas.openxmlformats.org/drawingml/2006/main" xmlns:r="http://schemas.openxmlformats.org/officeDocument/2006/relationships" xmlns:p="http://schemas.openxmlformats.org/presentationml/2006/main">
   <p:cSld>
     <p:spTree>
       <p:nvGrpSpPr>
@@ -766,7 +560,7 @@
         <p:nvSpPr>
           <p:cNvPr id="2" name="Slide Image Placeholder 1"/>
           <p:cNvSpPr>
-            <a:spLocks noGrp="1"/>
+            <a:spLocks noGrp="1" noRot="1" noChangeAspect="1"/>
           </p:cNvSpPr>
           <p:nvPr>
             <p:ph type="sldImg" idx="2"/>
@@ -781,7 +575,7 @@
             <a:spLocks noGrp="1"/>
           </p:cNvSpPr>
           <p:nvPr>
-            <p:ph type="body" idx="3" sz="quarter"/>
+            <p:ph type="body" sz="quarter" idx="3"/>
           </p:nvPr>
         </p:nvSpPr>
         <p:spPr/>
@@ -802,7 +596,7 @@
             <a:spLocks noGrp="1"/>
           </p:cNvSpPr>
           <p:nvPr>
-            <p:ph type="sldNum" idx="5" sz="quarter"/>
+            <p:ph type="sldNum" sz="quarter" idx="5"/>
           </p:nvPr>
         </p:nvSpPr>
         <p:spPr/>
@@ -816,7 +610,7 @@
 </file>
 
 <file path=ppt/notesSlides/notesSlide6.xml><?xml version="1.0" encoding="utf-8"?>
-<p:notes xmlns:a="http://schemas.openxmlformats.org/drawingml/2006/main" xmlns:p="http://schemas.openxmlformats.org/presentationml/2006/main" xmlns:r="http://schemas.openxmlformats.org/officeDocument/2006/relationships">
+<p:notes xmlns:a="http://schemas.openxmlformats.org/drawingml/2006/main" xmlns:r="http://schemas.openxmlformats.org/officeDocument/2006/relationships" xmlns:p="http://schemas.openxmlformats.org/presentationml/2006/main">
   <p:cSld>
     <p:spTree>
       <p:nvGrpSpPr>
@@ -836,7 +630,7 @@
         <p:nvSpPr>
           <p:cNvPr id="2" name="Slide Image Placeholder 1"/>
           <p:cNvSpPr>
-            <a:spLocks noGrp="1"/>
+            <a:spLocks noGrp="1" noRot="1" noChangeAspect="1"/>
           </p:cNvSpPr>
           <p:nvPr>
             <p:ph type="sldImg" idx="2"/>
@@ -851,7 +645,7 @@
             <a:spLocks noGrp="1"/>
           </p:cNvSpPr>
           <p:nvPr>
-            <p:ph type="body" idx="3" sz="quarter"/>
+            <p:ph type="body" sz="quarter" idx="3"/>
           </p:nvPr>
         </p:nvSpPr>
         <p:spPr/>
@@ -872,7 +666,7 @@
             <a:spLocks noGrp="1"/>
           </p:cNvSpPr>
           <p:nvPr>
-            <p:ph type="sldNum" idx="5" sz="quarter"/>
+            <p:ph type="sldNum" sz="quarter" idx="5"/>
           </p:nvPr>
         </p:nvSpPr>
         <p:spPr/>
@@ -886,7 +680,7 @@
 </file>
 
 <file path=ppt/notesSlides/notesSlide7.xml><?xml version="1.0" encoding="utf-8"?>
-<p:notes xmlns:a="http://schemas.openxmlformats.org/drawingml/2006/main" xmlns:p="http://schemas.openxmlformats.org/presentationml/2006/main" xmlns:r="http://schemas.openxmlformats.org/officeDocument/2006/relationships">
+<p:notes xmlns:a="http://schemas.openxmlformats.org/drawingml/2006/main" xmlns:r="http://schemas.openxmlformats.org/officeDocument/2006/relationships" xmlns:p="http://schemas.openxmlformats.org/presentationml/2006/main">
   <p:cSld>
     <p:spTree>
       <p:nvGrpSpPr>
@@ -906,7 +700,7 @@
         <p:nvSpPr>
           <p:cNvPr id="2" name="Slide Image Placeholder 1"/>
           <p:cNvSpPr>
-            <a:spLocks noGrp="1"/>
+            <a:spLocks noGrp="1" noRot="1" noChangeAspect="1"/>
           </p:cNvSpPr>
           <p:nvPr>
             <p:ph type="sldImg" idx="2"/>
@@ -921,7 +715,7 @@
             <a:spLocks noGrp="1"/>
           </p:cNvSpPr>
           <p:nvPr>
-            <p:ph type="body" idx="3" sz="quarter"/>
+            <p:ph type="body" sz="quarter" idx="3"/>
           </p:nvPr>
         </p:nvSpPr>
         <p:spPr/>
@@ -942,7 +736,7 @@
             <a:spLocks noGrp="1"/>
           </p:cNvSpPr>
           <p:nvPr>
-            <p:ph type="sldNum" idx="5" sz="quarter"/>
+            <p:ph type="sldNum" sz="quarter" idx="5"/>
           </p:nvPr>
         </p:nvSpPr>
         <p:spPr/>
@@ -956,7 +750,7 @@
 </file>
 
 <file path=ppt/notesSlides/notesSlide8.xml><?xml version="1.0" encoding="utf-8"?>
-<p:notes xmlns:a="http://schemas.openxmlformats.org/drawingml/2006/main" xmlns:p="http://schemas.openxmlformats.org/presentationml/2006/main" xmlns:r="http://schemas.openxmlformats.org/officeDocument/2006/relationships">
+<p:notes xmlns:a="http://schemas.openxmlformats.org/drawingml/2006/main" xmlns:r="http://schemas.openxmlformats.org/officeDocument/2006/relationships" xmlns:p="http://schemas.openxmlformats.org/presentationml/2006/main">
   <p:cSld>
     <p:spTree>
       <p:nvGrpSpPr>
@@ -976,7 +770,7 @@
         <p:nvSpPr>
           <p:cNvPr id="2" name="Slide Image Placeholder 1"/>
           <p:cNvSpPr>
-            <a:spLocks noGrp="1"/>
+            <a:spLocks noGrp="1" noRot="1" noChangeAspect="1"/>
           </p:cNvSpPr>
           <p:nvPr>
             <p:ph type="sldImg" idx="2"/>
@@ -991,7 +785,7 @@
             <a:spLocks noGrp="1"/>
           </p:cNvSpPr>
           <p:nvPr>
-            <p:ph type="body" idx="3" sz="quarter"/>
+            <p:ph type="body" sz="quarter" idx="3"/>
           </p:nvPr>
         </p:nvSpPr>
         <p:spPr/>
@@ -1012,7 +806,7 @@
             <a:spLocks noGrp="1"/>
           </p:cNvSpPr>
           <p:nvPr>
-            <p:ph type="sldNum" idx="5" sz="quarter"/>
+            <p:ph type="sldNum" sz="quarter" idx="5"/>
           </p:nvPr>
         </p:nvSpPr>
         <p:spPr/>
@@ -1026,7 +820,7 @@
 </file>
 
 <file path=ppt/notesSlides/notesSlide9.xml><?xml version="1.0" encoding="utf-8"?>
-<p:notes xmlns:a="http://schemas.openxmlformats.org/drawingml/2006/main" xmlns:p="http://schemas.openxmlformats.org/presentationml/2006/main" xmlns:r="http://schemas.openxmlformats.org/officeDocument/2006/relationships">
+<p:notes xmlns:a="http://schemas.openxmlformats.org/drawingml/2006/main" xmlns:r="http://schemas.openxmlformats.org/officeDocument/2006/relationships" xmlns:p="http://schemas.openxmlformats.org/presentationml/2006/main">
   <p:cSld>
     <p:spTree>
       <p:nvGrpSpPr>
@@ -1046,7 +840,7 @@
         <p:nvSpPr>
           <p:cNvPr id="2" name="Slide Image Placeholder 1"/>
           <p:cNvSpPr>
-            <a:spLocks noGrp="1"/>
+            <a:spLocks noGrp="1" noRot="1" noChangeAspect="1"/>
           </p:cNvSpPr>
           <p:nvPr>
             <p:ph type="sldImg" idx="2"/>
@@ -1061,7 +855,7 @@
             <a:spLocks noGrp="1"/>
           </p:cNvSpPr>
           <p:nvPr>
-            <p:ph type="body" idx="3" sz="quarter"/>
+            <p:ph type="body" sz="quarter" idx="3"/>
           </p:nvPr>
         </p:nvSpPr>
         <p:spPr/>
@@ -1082,7 +876,7 @@
             <a:spLocks noGrp="1"/>
           </p:cNvSpPr>
           <p:nvPr>
-            <p:ph type="sldNum" idx="5" sz="quarter"/>
+            <p:ph type="sldNum" sz="quarter" idx="5"/>
           </p:nvPr>
         </p:nvSpPr>
         <p:spPr/>
@@ -1133,10 +927,9 @@
           <a:lstStyle/>
           <a:p>
             <a:r>
-              <a:rPr lang="en-US" smtClean="0"/>
+              <a:rPr lang="en-US"/>
               <a:t>Click to edit Master title style</a:t>
             </a:r>
-            <a:endParaRPr lang="en-US"/>
           </a:p>
         </p:txBody>
       </p:sp>
@@ -1252,10 +1045,9 @@
           </a:lstStyle>
           <a:p>
             <a:r>
-              <a:rPr lang="en-US" smtClean="0"/>
+              <a:rPr lang="en-US"/>
               <a:t>Click to edit Master subtitle style</a:t>
             </a:r>
-            <a:endParaRPr lang="en-US"/>
           </a:p>
         </p:txBody>
       </p:sp>
@@ -1276,7 +1068,7 @@
           <a:p>
             <a:fld id="{5BCAD085-E8A6-8845-BD4E-CB4CCA059FC4}" type="datetimeFigureOut">
               <a:rPr lang="en-US" smtClean="0"/>
-              <a:t>1/27/13</a:t>
+              <a:t>8/18/26</a:t>
             </a:fld>
             <a:endParaRPr lang="en-US"/>
           </a:p>
@@ -1370,10 +1162,9 @@
           <a:lstStyle/>
           <a:p>
             <a:r>
-              <a:rPr lang="en-US" smtClean="0"/>
+              <a:rPr lang="en-US"/>
               <a:t>Click to edit Master title style</a:t>
             </a:r>
-            <a:endParaRPr lang="en-US"/>
           </a:p>
         </p:txBody>
       </p:sp>
@@ -1394,38 +1185,37 @@
           <a:p>
             <a:pPr lvl="0"/>
             <a:r>
-              <a:rPr lang="en-US" smtClean="0"/>
+              <a:rPr lang="en-US"/>
               <a:t>Click to edit Master text styles</a:t>
             </a:r>
           </a:p>
           <a:p>
             <a:pPr lvl="1"/>
             <a:r>
-              <a:rPr lang="en-US" smtClean="0"/>
+              <a:rPr lang="en-US"/>
               <a:t>Second level</a:t>
             </a:r>
           </a:p>
           <a:p>
             <a:pPr lvl="2"/>
             <a:r>
-              <a:rPr lang="en-US" smtClean="0"/>
+              <a:rPr lang="en-US"/>
               <a:t>Third level</a:t>
             </a:r>
           </a:p>
           <a:p>
             <a:pPr lvl="3"/>
             <a:r>
-              <a:rPr lang="en-US" smtClean="0"/>
+              <a:rPr lang="en-US"/>
               <a:t>Fourth level</a:t>
             </a:r>
           </a:p>
           <a:p>
             <a:pPr lvl="4"/>
             <a:r>
-              <a:rPr lang="en-US" smtClean="0"/>
+              <a:rPr lang="en-US"/>
               <a:t>Fifth level</a:t>
             </a:r>
-            <a:endParaRPr lang="en-US"/>
           </a:p>
         </p:txBody>
       </p:sp>
@@ -1446,7 +1236,7 @@
           <a:p>
             <a:fld id="{5BCAD085-E8A6-8845-BD4E-CB4CCA059FC4}" type="datetimeFigureOut">
               <a:rPr lang="en-US" smtClean="0"/>
-              <a:t>1/27/13</a:t>
+              <a:t>8/18/26</a:t>
             </a:fld>
             <a:endParaRPr lang="en-US"/>
           </a:p>
@@ -1545,10 +1335,9 @@
           <a:lstStyle/>
           <a:p>
             <a:r>
-              <a:rPr lang="en-US" smtClean="0"/>
+              <a:rPr lang="en-US"/>
               <a:t>Click to edit Master title style</a:t>
             </a:r>
-            <a:endParaRPr lang="en-US"/>
           </a:p>
         </p:txBody>
       </p:sp>
@@ -1574,38 +1363,37 @@
           <a:p>
             <a:pPr lvl="0"/>
             <a:r>
-              <a:rPr lang="en-US" smtClean="0"/>
+              <a:rPr lang="en-US"/>
               <a:t>Click to edit Master text styles</a:t>
             </a:r>
           </a:p>
           <a:p>
             <a:pPr lvl="1"/>
             <a:r>
-              <a:rPr lang="en-US" smtClean="0"/>
+              <a:rPr lang="en-US"/>
               <a:t>Second level</a:t>
             </a:r>
           </a:p>
           <a:p>
             <a:pPr lvl="2"/>
             <a:r>
-              <a:rPr lang="en-US" smtClean="0"/>
+              <a:rPr lang="en-US"/>
               <a:t>Third level</a:t>
             </a:r>
           </a:p>
           <a:p>
             <a:pPr lvl="3"/>
             <a:r>
-              <a:rPr lang="en-US" smtClean="0"/>
+              <a:rPr lang="en-US"/>
               <a:t>Fourth level</a:t>
             </a:r>
           </a:p>
           <a:p>
             <a:pPr lvl="4"/>
             <a:r>
-              <a:rPr lang="en-US" smtClean="0"/>
+              <a:rPr lang="en-US"/>
               <a:t>Fifth level</a:t>
             </a:r>
-            <a:endParaRPr lang="en-US"/>
           </a:p>
         </p:txBody>
       </p:sp>
@@ -1626,7 +1414,7 @@
           <a:p>
             <a:fld id="{5BCAD085-E8A6-8845-BD4E-CB4CCA059FC4}" type="datetimeFigureOut">
               <a:rPr lang="en-US" smtClean="0"/>
-              <a:t>1/27/13</a:t>
+              <a:t>8/18/26</a:t>
             </a:fld>
             <a:endParaRPr lang="en-US"/>
           </a:p>
@@ -1720,10 +1508,9 @@
           <a:lstStyle/>
           <a:p>
             <a:r>
-              <a:rPr lang="en-US" smtClean="0"/>
+              <a:rPr lang="en-US"/>
               <a:t>Click to edit Master title style</a:t>
             </a:r>
-            <a:endParaRPr lang="en-US"/>
           </a:p>
         </p:txBody>
       </p:sp>
@@ -1744,38 +1531,37 @@
           <a:p>
             <a:pPr lvl="0"/>
             <a:r>
-              <a:rPr lang="en-US" smtClean="0"/>
+              <a:rPr lang="en-US"/>
               <a:t>Click to edit Master text styles</a:t>
             </a:r>
           </a:p>
           <a:p>
             <a:pPr lvl="1"/>
             <a:r>
-              <a:rPr lang="en-US" smtClean="0"/>
+              <a:rPr lang="en-US"/>
               <a:t>Second level</a:t>
             </a:r>
           </a:p>
           <a:p>
             <a:pPr lvl="2"/>
             <a:r>
-              <a:rPr lang="en-US" smtClean="0"/>
+              <a:rPr lang="en-US"/>
               <a:t>Third level</a:t>
             </a:r>
           </a:p>
           <a:p>
             <a:pPr lvl="3"/>
             <a:r>
-              <a:rPr lang="en-US" smtClean="0"/>
+              <a:rPr lang="en-US"/>
               <a:t>Fourth level</a:t>
             </a:r>
           </a:p>
           <a:p>
             <a:pPr lvl="4"/>
             <a:r>
-              <a:rPr lang="en-US" smtClean="0"/>
+              <a:rPr lang="en-US"/>
               <a:t>Fifth level</a:t>
             </a:r>
-            <a:endParaRPr lang="en-US"/>
           </a:p>
         </p:txBody>
       </p:sp>
@@ -1796,7 +1582,7 @@
           <a:p>
             <a:fld id="{5BCAD085-E8A6-8845-BD4E-CB4CCA059FC4}" type="datetimeFigureOut">
               <a:rPr lang="en-US" smtClean="0"/>
-              <a:t>1/27/13</a:t>
+              <a:t>8/18/26</a:t>
             </a:fld>
             <a:endParaRPr lang="en-US"/>
           </a:p>
@@ -1899,10 +1685,9 @@
           </a:lstStyle>
           <a:p>
             <a:r>
-              <a:rPr lang="en-US" smtClean="0"/>
+              <a:rPr lang="en-US"/>
               <a:t>Click to edit Master title style</a:t>
             </a:r>
-            <a:endParaRPr lang="en-US"/>
           </a:p>
         </p:txBody>
       </p:sp>
@@ -2019,7 +1804,7 @@
           <a:p>
             <a:pPr lvl="0"/>
             <a:r>
-              <a:rPr lang="en-US" smtClean="0"/>
+              <a:rPr lang="en-US"/>
               <a:t>Click to edit Master text styles</a:t>
             </a:r>
           </a:p>
@@ -2042,7 +1827,7 @@
           <a:p>
             <a:fld id="{5BCAD085-E8A6-8845-BD4E-CB4CCA059FC4}" type="datetimeFigureOut">
               <a:rPr lang="en-US" smtClean="0"/>
-              <a:t>1/27/13</a:t>
+              <a:t>8/18/26</a:t>
             </a:fld>
             <a:endParaRPr lang="en-US"/>
           </a:p>
@@ -2136,10 +1921,9 @@
           <a:lstStyle/>
           <a:p>
             <a:r>
-              <a:rPr lang="en-US" smtClean="0"/>
+              <a:rPr lang="en-US"/>
               <a:t>Click to edit Master title style</a:t>
             </a:r>
-            <a:endParaRPr lang="en-US"/>
           </a:p>
         </p:txBody>
       </p:sp>
@@ -2193,38 +1977,37 @@
           <a:p>
             <a:pPr lvl="0"/>
             <a:r>
-              <a:rPr lang="en-US" smtClean="0"/>
+              <a:rPr lang="en-US"/>
               <a:t>Click to edit Master text styles</a:t>
             </a:r>
           </a:p>
           <a:p>
             <a:pPr lvl="1"/>
             <a:r>
-              <a:rPr lang="en-US" smtClean="0"/>
+              <a:rPr lang="en-US"/>
               <a:t>Second level</a:t>
             </a:r>
           </a:p>
           <a:p>
             <a:pPr lvl="2"/>
             <a:r>
-              <a:rPr lang="en-US" smtClean="0"/>
+              <a:rPr lang="en-US"/>
               <a:t>Third level</a:t>
             </a:r>
           </a:p>
           <a:p>
             <a:pPr lvl="3"/>
             <a:r>
-              <a:rPr lang="en-US" smtClean="0"/>
+              <a:rPr lang="en-US"/>
               <a:t>Fourth level</a:t>
             </a:r>
           </a:p>
           <a:p>
             <a:pPr lvl="4"/>
             <a:r>
-              <a:rPr lang="en-US" smtClean="0"/>
+              <a:rPr lang="en-US"/>
               <a:t>Fifth level</a:t>
             </a:r>
-            <a:endParaRPr lang="en-US"/>
           </a:p>
         </p:txBody>
       </p:sp>
@@ -2278,38 +2061,37 @@
           <a:p>
             <a:pPr lvl="0"/>
             <a:r>
-              <a:rPr lang="en-US" smtClean="0"/>
+              <a:rPr lang="en-US"/>
               <a:t>Click to edit Master text styles</a:t>
             </a:r>
           </a:p>
           <a:p>
             <a:pPr lvl="1"/>
             <a:r>
-              <a:rPr lang="en-US" smtClean="0"/>
+              <a:rPr lang="en-US"/>
               <a:t>Second level</a:t>
             </a:r>
           </a:p>
           <a:p>
             <a:pPr lvl="2"/>
             <a:r>
-              <a:rPr lang="en-US" smtClean="0"/>
+              <a:rPr lang="en-US"/>
               <a:t>Third level</a:t>
             </a:r>
           </a:p>
           <a:p>
             <a:pPr lvl="3"/>
             <a:r>
-              <a:rPr lang="en-US" smtClean="0"/>
+              <a:rPr lang="en-US"/>
               <a:t>Fourth level</a:t>
             </a:r>
           </a:p>
           <a:p>
             <a:pPr lvl="4"/>
             <a:r>
-              <a:rPr lang="en-US" smtClean="0"/>
+              <a:rPr lang="en-US"/>
               <a:t>Fifth level</a:t>
             </a:r>
-            <a:endParaRPr lang="en-US"/>
           </a:p>
         </p:txBody>
       </p:sp>
@@ -2330,7 +2112,7 @@
           <a:p>
             <a:fld id="{5BCAD085-E8A6-8845-BD4E-CB4CCA059FC4}" type="datetimeFigureOut">
               <a:rPr lang="en-US" smtClean="0"/>
-              <a:t>1/27/13</a:t>
+              <a:t>8/18/26</a:t>
             </a:fld>
             <a:endParaRPr lang="en-US"/>
           </a:p>
@@ -2428,10 +2210,9 @@
           </a:lstStyle>
           <a:p>
             <a:r>
-              <a:rPr lang="en-US" smtClean="0"/>
+              <a:rPr lang="en-US"/>
               <a:t>Click to edit Master title style</a:t>
             </a:r>
-            <a:endParaRPr lang="en-US"/>
           </a:p>
         </p:txBody>
       </p:sp>
@@ -2494,7 +2275,7 @@
           <a:p>
             <a:pPr lvl="0"/>
             <a:r>
-              <a:rPr lang="en-US" smtClean="0"/>
+              <a:rPr lang="en-US"/>
               <a:t>Click to edit Master text styles</a:t>
             </a:r>
           </a:p>
@@ -2550,38 +2331,37 @@
           <a:p>
             <a:pPr lvl="0"/>
             <a:r>
-              <a:rPr lang="en-US" smtClean="0"/>
+              <a:rPr lang="en-US"/>
               <a:t>Click to edit Master text styles</a:t>
             </a:r>
           </a:p>
           <a:p>
             <a:pPr lvl="1"/>
             <a:r>
-              <a:rPr lang="en-US" smtClean="0"/>
+              <a:rPr lang="en-US"/>
               <a:t>Second level</a:t>
             </a:r>
           </a:p>
           <a:p>
             <a:pPr lvl="2"/>
             <a:r>
-              <a:rPr lang="en-US" smtClean="0"/>
+              <a:rPr lang="en-US"/>
               <a:t>Third level</a:t>
             </a:r>
           </a:p>
           <a:p>
             <a:pPr lvl="3"/>
             <a:r>
-              <a:rPr lang="en-US" smtClean="0"/>
+              <a:rPr lang="en-US"/>
               <a:t>Fourth level</a:t>
             </a:r>
           </a:p>
           <a:p>
             <a:pPr lvl="4"/>
             <a:r>
-              <a:rPr lang="en-US" smtClean="0"/>
+              <a:rPr lang="en-US"/>
               <a:t>Fifth level</a:t>
             </a:r>
-            <a:endParaRPr lang="en-US"/>
           </a:p>
         </p:txBody>
       </p:sp>
@@ -2644,7 +2424,7 @@
           <a:p>
             <a:pPr lvl="0"/>
             <a:r>
-              <a:rPr lang="en-US" smtClean="0"/>
+              <a:rPr lang="en-US"/>
               <a:t>Click to edit Master text styles</a:t>
             </a:r>
           </a:p>
@@ -2700,38 +2480,37 @@
           <a:p>
             <a:pPr lvl="0"/>
             <a:r>
-              <a:rPr lang="en-US" smtClean="0"/>
+              <a:rPr lang="en-US"/>
               <a:t>Click to edit Master text styles</a:t>
             </a:r>
           </a:p>
           <a:p>
             <a:pPr lvl="1"/>
             <a:r>
-              <a:rPr lang="en-US" smtClean="0"/>
+              <a:rPr lang="en-US"/>
               <a:t>Second level</a:t>
             </a:r>
           </a:p>
           <a:p>
             <a:pPr lvl="2"/>
             <a:r>
-              <a:rPr lang="en-US" smtClean="0"/>
+              <a:rPr lang="en-US"/>
               <a:t>Third level</a:t>
             </a:r>
           </a:p>
           <a:p>
             <a:pPr lvl="3"/>
             <a:r>
-              <a:rPr lang="en-US" smtClean="0"/>
+              <a:rPr lang="en-US"/>
               <a:t>Fourth level</a:t>
             </a:r>
           </a:p>
           <a:p>
             <a:pPr lvl="4"/>
             <a:r>
-              <a:rPr lang="en-US" smtClean="0"/>
+              <a:rPr lang="en-US"/>
               <a:t>Fifth level</a:t>
             </a:r>
-            <a:endParaRPr lang="en-US"/>
           </a:p>
         </p:txBody>
       </p:sp>
@@ -2752,7 +2531,7 @@
           <a:p>
             <a:fld id="{5BCAD085-E8A6-8845-BD4E-CB4CCA059FC4}" type="datetimeFigureOut">
               <a:rPr lang="en-US" smtClean="0"/>
-              <a:t>1/27/13</a:t>
+              <a:t>8/18/26</a:t>
             </a:fld>
             <a:endParaRPr lang="en-US"/>
           </a:p>
@@ -2846,10 +2625,9 @@
           <a:lstStyle/>
           <a:p>
             <a:r>
-              <a:rPr lang="en-US" smtClean="0"/>
+              <a:rPr lang="en-US"/>
               <a:t>Click to edit Master title style</a:t>
             </a:r>
-            <a:endParaRPr lang="en-US"/>
           </a:p>
         </p:txBody>
       </p:sp>
@@ -2870,7 +2648,7 @@
           <a:p>
             <a:fld id="{5BCAD085-E8A6-8845-BD4E-CB4CCA059FC4}" type="datetimeFigureOut">
               <a:rPr lang="en-US" smtClean="0"/>
-              <a:t>1/27/13</a:t>
+              <a:t>8/18/26</a:t>
             </a:fld>
             <a:endParaRPr lang="en-US"/>
           </a:p>
@@ -2965,7 +2743,7 @@
           <a:p>
             <a:fld id="{5BCAD085-E8A6-8845-BD4E-CB4CCA059FC4}" type="datetimeFigureOut">
               <a:rPr lang="en-US" smtClean="0"/>
-              <a:t>1/27/13</a:t>
+              <a:t>8/18/26</a:t>
             </a:fld>
             <a:endParaRPr lang="en-US"/>
           </a:p>
@@ -3068,10 +2846,9 @@
           </a:lstStyle>
           <a:p>
             <a:r>
-              <a:rPr lang="en-US" smtClean="0"/>
+              <a:rPr lang="en-US"/>
               <a:t>Click to edit Master title style</a:t>
             </a:r>
-            <a:endParaRPr lang="en-US"/>
           </a:p>
         </p:txBody>
       </p:sp>
@@ -3125,38 +2902,37 @@
           <a:p>
             <a:pPr lvl="0"/>
             <a:r>
-              <a:rPr lang="en-US" smtClean="0"/>
+              <a:rPr lang="en-US"/>
               <a:t>Click to edit Master text styles</a:t>
             </a:r>
           </a:p>
           <a:p>
             <a:pPr lvl="1"/>
             <a:r>
-              <a:rPr lang="en-US" smtClean="0"/>
+              <a:rPr lang="en-US"/>
               <a:t>Second level</a:t>
             </a:r>
           </a:p>
           <a:p>
             <a:pPr lvl="2"/>
             <a:r>
-              <a:rPr lang="en-US" smtClean="0"/>
+              <a:rPr lang="en-US"/>
               <a:t>Third level</a:t>
             </a:r>
           </a:p>
           <a:p>
             <a:pPr lvl="3"/>
             <a:r>
-              <a:rPr lang="en-US" smtClean="0"/>
+              <a:rPr lang="en-US"/>
               <a:t>Fourth level</a:t>
             </a:r>
           </a:p>
           <a:p>
             <a:pPr lvl="4"/>
             <a:r>
-              <a:rPr lang="en-US" smtClean="0"/>
+              <a:rPr lang="en-US"/>
               <a:t>Fifth level</a:t>
             </a:r>
-            <a:endParaRPr lang="en-US"/>
           </a:p>
         </p:txBody>
       </p:sp>
@@ -3219,7 +2995,7 @@
           <a:p>
             <a:pPr lvl="0"/>
             <a:r>
-              <a:rPr lang="en-US" smtClean="0"/>
+              <a:rPr lang="en-US"/>
               <a:t>Click to edit Master text styles</a:t>
             </a:r>
           </a:p>
@@ -3242,7 +3018,7 @@
           <a:p>
             <a:fld id="{5BCAD085-E8A6-8845-BD4E-CB4CCA059FC4}" type="datetimeFigureOut">
               <a:rPr lang="en-US" smtClean="0"/>
-              <a:t>1/27/13</a:t>
+              <a:t>8/18/26</a:t>
             </a:fld>
             <a:endParaRPr lang="en-US"/>
           </a:p>
@@ -3345,10 +3121,9 @@
           </a:lstStyle>
           <a:p>
             <a:r>
-              <a:rPr lang="en-US" smtClean="0"/>
+              <a:rPr lang="en-US"/>
               <a:t>Click to edit Master title style</a:t>
             </a:r>
-            <a:endParaRPr lang="en-US"/>
           </a:p>
         </p:txBody>
       </p:sp>
@@ -3472,7 +3247,7 @@
           <a:p>
             <a:pPr lvl="0"/>
             <a:r>
-              <a:rPr lang="en-US" smtClean="0"/>
+              <a:rPr lang="en-US"/>
               <a:t>Click to edit Master text styles</a:t>
             </a:r>
           </a:p>
@@ -3495,7 +3270,7 @@
           <a:p>
             <a:fld id="{5BCAD085-E8A6-8845-BD4E-CB4CCA059FC4}" type="datetimeFigureOut">
               <a:rPr lang="en-US" smtClean="0"/>
-              <a:t>1/27/13</a:t>
+              <a:t>8/18/26</a:t>
             </a:fld>
             <a:endParaRPr lang="en-US"/>
           </a:p>
@@ -3604,10 +3379,9 @@
           <a:lstStyle/>
           <a:p>
             <a:r>
-              <a:rPr lang="en-US" smtClean="0"/>
+              <a:rPr lang="en-US"/>
               <a:t>Click to edit Master title style</a:t>
             </a:r>
-            <a:endParaRPr lang="en-US"/>
           </a:p>
         </p:txBody>
       </p:sp>
@@ -3638,38 +3412,37 @@
           <a:p>
             <a:pPr lvl="0"/>
             <a:r>
-              <a:rPr lang="en-US" smtClean="0"/>
+              <a:rPr lang="en-US"/>
               <a:t>Click to edit Master text styles</a:t>
             </a:r>
           </a:p>
           <a:p>
             <a:pPr lvl="1"/>
             <a:r>
-              <a:rPr lang="en-US" smtClean="0"/>
+              <a:rPr lang="en-US"/>
               <a:t>Second level</a:t>
             </a:r>
           </a:p>
           <a:p>
             <a:pPr lvl="2"/>
             <a:r>
-              <a:rPr lang="en-US" smtClean="0"/>
+              <a:rPr lang="en-US"/>
               <a:t>Third level</a:t>
             </a:r>
           </a:p>
           <a:p>
             <a:pPr lvl="3"/>
             <a:r>
-              <a:rPr lang="en-US" smtClean="0"/>
+              <a:rPr lang="en-US"/>
               <a:t>Fourth level</a:t>
             </a:r>
           </a:p>
           <a:p>
             <a:pPr lvl="4"/>
             <a:r>
-              <a:rPr lang="en-US" smtClean="0"/>
+              <a:rPr lang="en-US"/>
               <a:t>Fifth level</a:t>
             </a:r>
-            <a:endParaRPr lang="en-US"/>
           </a:p>
         </p:txBody>
       </p:sp>
@@ -3708,7 +3481,7 @@
           <a:p>
             <a:fld id="{5BCAD085-E8A6-8845-BD4E-CB4CCA059FC4}" type="datetimeFigureOut">
               <a:rPr lang="en-US" smtClean="0"/>
-              <a:t>1/27/13</a:t>
+              <a:t>8/18/26</a:t>
             </a:fld>
             <a:endParaRPr lang="en-US"/>
           </a:p>
@@ -4067,7 +3840,7 @@
 </file>
 
 <file path=ppt/slides/slide1.xml><?xml version="1.0" encoding="utf-8"?>
-<p:sld xmlns:a="http://schemas.openxmlformats.org/drawingml/2006/main" xmlns:p="http://schemas.openxmlformats.org/presentationml/2006/main" xmlns:r="http://schemas.openxmlformats.org/officeDocument/2006/relationships">
+<p:sld xmlns:a="http://schemas.openxmlformats.org/drawingml/2006/main" xmlns:r="http://schemas.openxmlformats.org/officeDocument/2006/relationships" xmlns:p="http://schemas.openxmlformats.org/presentationml/2006/main">
   <p:cSld>
     <p:spTree>
       <p:nvGrpSpPr>
@@ -4075,7 +3848,14 @@
         <p:cNvGrpSpPr/>
         <p:nvPr/>
       </p:nvGrpSpPr>
-      <p:grpSpPr/>
+      <p:grpSpPr>
+        <a:xfrm>
+          <a:off x="0" y="0"/>
+          <a:ext cx="0" cy="0"/>
+          <a:chOff x="0" y="0"/>
+          <a:chExt cx="0" cy="0"/>
+        </a:xfrm>
+      </p:grpSpPr>
       <p:sp>
         <p:nvSpPr>
           <p:cNvPr id="2" name="TextBox 1"/>
@@ -4093,7 +3873,7 @@
           <a:noFill/>
         </p:spPr>
         <p:txBody>
-          <a:bodyPr wrap="square" anchor="t" lIns="18288" rIns="18288" tIns="9144" bIns="9144">
+          <a:bodyPr wrap="square" lIns="18288" tIns="9144" rIns="18288" bIns="9144" anchor="t">
             <a:spAutoFit/>
           </a:bodyPr>
           <a:lstStyle/>
@@ -4133,7 +3913,7 @@
           <a:noFill/>
         </p:spPr>
         <p:txBody>
-          <a:bodyPr wrap="square" anchor="t" lIns="18288" rIns="18288" tIns="9144" bIns="9144">
+          <a:bodyPr wrap="square" lIns="18288" tIns="9144" rIns="18288" bIns="9144" anchor="t">
             <a:spAutoFit/>
           </a:bodyPr>
           <a:lstStyle/>
@@ -4160,16 +3940,13 @@
                 <a:spcPts val="200"/>
               </a:spcAft>
             </a:pPr>
-            <a:r>
-              <a:rPr sz="800" b="0">
-                <a:solidFill>
-                  <a:srgbClr val="262626"/>
-                </a:solidFill>
-                <a:latin typeface="Apple SD Gothic Neo"/>
-                <a:ea typeface="Apple SD Gothic Neo"/>
-              </a:rPr>
-              <a:t/>
-            </a:r>
+            <a:endParaRPr sz="3300" b="1">
+              <a:solidFill>
+                <a:srgbClr val="243447"/>
+              </a:solidFill>
+              <a:latin typeface="Apple SD Gothic Neo"/>
+              <a:ea typeface="Apple SD Gothic Neo"/>
+            </a:endParaRPr>
           </a:p>
           <a:p>
             <a:pPr algn="l">
@@ -4242,7 +4019,7 @@
           <a:noFill/>
         </p:spPr>
         <p:txBody>
-          <a:bodyPr wrap="square" anchor="t" lIns="18288" rIns="18288" tIns="9144" bIns="9144">
+          <a:bodyPr wrap="square" lIns="18288" tIns="9144" rIns="18288" bIns="9144" anchor="t">
             <a:spAutoFit/>
           </a:bodyPr>
           <a:lstStyle/>
@@ -4299,7 +4076,7 @@
           <a:noFill/>
         </p:spPr>
         <p:txBody>
-          <a:bodyPr wrap="square" anchor="t" lIns="18288" rIns="18288" tIns="9144" bIns="9144">
+          <a:bodyPr wrap="square" lIns="18288" tIns="9144" rIns="18288" bIns="9144" anchor="t">
             <a:spAutoFit/>
           </a:bodyPr>
           <a:lstStyle/>
@@ -4331,7 +4108,7 @@
 </file>
 
 <file path=ppt/slides/slide2.xml><?xml version="1.0" encoding="utf-8"?>
-<p:sld xmlns:a="http://schemas.openxmlformats.org/drawingml/2006/main" xmlns:p="http://schemas.openxmlformats.org/presentationml/2006/main" xmlns:r="http://schemas.openxmlformats.org/officeDocument/2006/relationships">
+<p:sld xmlns:a="http://schemas.openxmlformats.org/drawingml/2006/main" xmlns:r="http://schemas.openxmlformats.org/officeDocument/2006/relationships" xmlns:p="http://schemas.openxmlformats.org/presentationml/2006/main">
   <p:cSld>
     <p:spTree>
       <p:nvGrpSpPr>
@@ -4339,7 +4116,14 @@
         <p:cNvGrpSpPr/>
         <p:nvPr/>
       </p:nvGrpSpPr>
-      <p:grpSpPr/>
+      <p:grpSpPr>
+        <a:xfrm>
+          <a:off x="0" y="0"/>
+          <a:ext cx="0" cy="0"/>
+          <a:chOff x="0" y="0"/>
+          <a:chExt cx="0" cy="0"/>
+        </a:xfrm>
+      </p:grpSpPr>
       <p:sp>
         <p:nvSpPr>
           <p:cNvPr id="2" name="TextBox 1"/>
@@ -4357,7 +4141,7 @@
           <a:noFill/>
         </p:spPr>
         <p:txBody>
-          <a:bodyPr wrap="square" anchor="t" lIns="18288" rIns="18288" tIns="9144" bIns="9144">
+          <a:bodyPr wrap="square" lIns="18288" tIns="9144" rIns="18288" bIns="9144" anchor="t">
             <a:spAutoFit/>
           </a:bodyPr>
           <a:lstStyle/>
@@ -4397,7 +4181,7 @@
           <a:noFill/>
         </p:spPr>
         <p:txBody>
-          <a:bodyPr wrap="square" anchor="t" lIns="18288" rIns="18288" tIns="9144" bIns="9144">
+          <a:bodyPr wrap="square" lIns="18288" tIns="9144" rIns="18288" bIns="9144" anchor="t">
             <a:spAutoFit/>
           </a:bodyPr>
           <a:lstStyle/>
@@ -4464,7 +4248,7 @@
           <p:nvPr/>
         </p:nvPicPr>
         <p:blipFill>
-          <a:blip r:embed="rId2"/>
+          <a:blip r:embed="rId3"/>
           <a:stretch>
             <a:fillRect/>
           </a:stretch>
@@ -4520,6 +4304,7 @@
           <a:lstStyle/>
           <a:p>
             <a:pPr algn="ctr"/>
+            <a:endParaRPr/>
           </a:p>
         </p:txBody>
       </p:sp>
@@ -4540,7 +4325,7 @@
           <a:noFill/>
         </p:spPr>
         <p:txBody>
-          <a:bodyPr wrap="square" anchor="t" lIns="18288" rIns="18288" tIns="9144" bIns="9144">
+          <a:bodyPr wrap="square" lIns="18288" tIns="9144" rIns="18288" bIns="9144" anchor="t">
             <a:spAutoFit/>
           </a:bodyPr>
           <a:lstStyle/>
@@ -4655,6 +4440,7 @@
           <a:lstStyle/>
           <a:p>
             <a:pPr algn="ctr"/>
+            <a:endParaRPr/>
           </a:p>
         </p:txBody>
       </p:sp>
@@ -4675,7 +4461,7 @@
           <a:noFill/>
         </p:spPr>
         <p:txBody>
-          <a:bodyPr wrap="square" anchor="t" lIns="18288" rIns="18288" tIns="9144" bIns="9144">
+          <a:bodyPr wrap="square" lIns="18288" tIns="9144" rIns="18288" bIns="9144" anchor="t">
             <a:spAutoFit/>
           </a:bodyPr>
           <a:lstStyle/>
@@ -4790,6 +4576,7 @@
           <a:lstStyle/>
           <a:p>
             <a:pPr algn="ctr"/>
+            <a:endParaRPr/>
           </a:p>
         </p:txBody>
       </p:sp>
@@ -4810,7 +4597,7 @@
           <a:noFill/>
         </p:spPr>
         <p:txBody>
-          <a:bodyPr wrap="square" anchor="t" lIns="18288" rIns="18288" tIns="9144" bIns="9144">
+          <a:bodyPr wrap="square" lIns="18288" tIns="9144" rIns="18288" bIns="9144" anchor="t">
             <a:spAutoFit/>
           </a:bodyPr>
           <a:lstStyle/>
@@ -4884,7 +4671,7 @@
           <a:noFill/>
         </p:spPr>
         <p:txBody>
-          <a:bodyPr wrap="square" anchor="t" lIns="18288" rIns="18288" tIns="9144" bIns="9144">
+          <a:bodyPr wrap="square" lIns="18288" tIns="9144" rIns="18288" bIns="9144" anchor="t">
             <a:spAutoFit/>
           </a:bodyPr>
           <a:lstStyle/>
@@ -4924,7 +4711,7 @@
           <a:noFill/>
         </p:spPr>
         <p:txBody>
-          <a:bodyPr wrap="square" anchor="t" lIns="18288" rIns="18288" tIns="9144" bIns="9144">
+          <a:bodyPr wrap="square" lIns="18288" tIns="9144" rIns="18288" bIns="9144" anchor="t">
             <a:spAutoFit/>
           </a:bodyPr>
           <a:lstStyle/>
@@ -4956,7 +4743,7 @@
 </file>
 
 <file path=ppt/slides/slide3.xml><?xml version="1.0" encoding="utf-8"?>
-<p:sld xmlns:a="http://schemas.openxmlformats.org/drawingml/2006/main" xmlns:p="http://schemas.openxmlformats.org/presentationml/2006/main" xmlns:r="http://schemas.openxmlformats.org/officeDocument/2006/relationships">
+<p:sld xmlns:a="http://schemas.openxmlformats.org/drawingml/2006/main" xmlns:r="http://schemas.openxmlformats.org/officeDocument/2006/relationships" xmlns:p="http://schemas.openxmlformats.org/presentationml/2006/main">
   <p:cSld>
     <p:spTree>
       <p:nvGrpSpPr>
@@ -4964,7 +4751,14 @@
         <p:cNvGrpSpPr/>
         <p:nvPr/>
       </p:nvGrpSpPr>
-      <p:grpSpPr/>
+      <p:grpSpPr>
+        <a:xfrm>
+          <a:off x="0" y="0"/>
+          <a:ext cx="0" cy="0"/>
+          <a:chOff x="0" y="0"/>
+          <a:chExt cx="0" cy="0"/>
+        </a:xfrm>
+      </p:grpSpPr>
       <p:sp>
         <p:nvSpPr>
           <p:cNvPr id="2" name="TextBox 1"/>
@@ -4982,7 +4776,7 @@
           <a:noFill/>
         </p:spPr>
         <p:txBody>
-          <a:bodyPr wrap="square" anchor="t" lIns="18288" rIns="18288" tIns="9144" bIns="9144">
+          <a:bodyPr wrap="square" lIns="18288" tIns="9144" rIns="18288" bIns="9144" anchor="t">
             <a:spAutoFit/>
           </a:bodyPr>
           <a:lstStyle/>
@@ -5022,7 +4816,7 @@
           <a:noFill/>
         </p:spPr>
         <p:txBody>
-          <a:bodyPr wrap="square" anchor="t" lIns="18288" rIns="18288" tIns="9144" bIns="9144">
+          <a:bodyPr wrap="square" lIns="18288" tIns="9144" rIns="18288" bIns="9144" anchor="t">
             <a:spAutoFit/>
           </a:bodyPr>
           <a:lstStyle/>
@@ -5121,6 +4915,7 @@
           <a:lstStyle/>
           <a:p>
             <a:pPr algn="ctr"/>
+            <a:endParaRPr/>
           </a:p>
         </p:txBody>
       </p:sp>
@@ -5141,7 +4936,7 @@
           <a:noFill/>
         </p:spPr>
         <p:txBody>
-          <a:bodyPr wrap="square" anchor="t" lIns="18288" rIns="18288" tIns="9144" bIns="9144">
+          <a:bodyPr wrap="square" lIns="18288" tIns="9144" rIns="18288" bIns="9144" anchor="t">
             <a:spAutoFit/>
           </a:bodyPr>
           <a:lstStyle/>
@@ -5159,17 +4954,7 @@
                 <a:latin typeface="Apple SD Gothic Neo"/>
                 <a:ea typeface="Apple SD Gothic Neo"/>
               </a:rPr>
-              <a:t>1.  </a:t>
-            </a:r>
-            <a:r>
-              <a:rPr sz="1300" b="1">
-                <a:solidFill>
-                  <a:srgbClr val="243447"/>
-                </a:solidFill>
-                <a:latin typeface="Apple SD Gothic Neo"/>
-                <a:ea typeface="Apple SD Gothic Neo"/>
-              </a:rPr>
-              <a:t>소표본에서는 단순한 고정 구조만 살아남았습니다</a:t>
+              <a:t>1.  소표본에서는 단순한 고정 구조만 살아남았습니다</a:t>
             </a:r>
           </a:p>
         </p:txBody>
@@ -5191,7 +4976,7 @@
           <a:noFill/>
         </p:spPr>
         <p:txBody>
-          <a:bodyPr wrap="square" anchor="t" lIns="18288" rIns="18288" tIns="9144" bIns="9144">
+          <a:bodyPr wrap="square" lIns="18288" tIns="9144" rIns="18288" bIns="9144" anchor="t">
             <a:spAutoFit/>
           </a:bodyPr>
           <a:lstStyle/>
@@ -5289,6 +5074,7 @@
           <a:lstStyle/>
           <a:p>
             <a:pPr algn="ctr"/>
+            <a:endParaRPr/>
           </a:p>
         </p:txBody>
       </p:sp>
@@ -5309,7 +5095,7 @@
           <a:noFill/>
         </p:spPr>
         <p:txBody>
-          <a:bodyPr wrap="square" anchor="t" lIns="18288" rIns="18288" tIns="9144" bIns="9144">
+          <a:bodyPr wrap="square" lIns="18288" tIns="9144" rIns="18288" bIns="9144" anchor="t">
             <a:spAutoFit/>
           </a:bodyPr>
           <a:lstStyle/>
@@ -5327,17 +5113,7 @@
                 <a:latin typeface="Apple SD Gothic Neo"/>
                 <a:ea typeface="Apple SD Gothic Neo"/>
               </a:rPr>
-              <a:t>2.  </a:t>
-            </a:r>
-            <a:r>
-              <a:rPr sz="1300" b="1">
-                <a:solidFill>
-                  <a:srgbClr val="243447"/>
-                </a:solidFill>
-                <a:latin typeface="Apple SD Gothic Neo"/>
-                <a:ea typeface="Apple SD Gothic Neo"/>
-              </a:rPr>
-              <a:t>이 표본에서는 어떤 우월성도 통계적으로 입증되지 않습니다</a:t>
+              <a:t>2.  이 표본에서는 어떤 우월성도 통계적으로 입증되지 않습니다</a:t>
             </a:r>
           </a:p>
         </p:txBody>
@@ -5359,7 +5135,7 @@
           <a:noFill/>
         </p:spPr>
         <p:txBody>
-          <a:bodyPr wrap="square" anchor="t" lIns="18288" rIns="18288" tIns="9144" bIns="9144">
+          <a:bodyPr wrap="square" lIns="18288" tIns="9144" rIns="18288" bIns="9144" anchor="t">
             <a:spAutoFit/>
           </a:bodyPr>
           <a:lstStyle/>
@@ -5457,6 +5233,7 @@
           <a:lstStyle/>
           <a:p>
             <a:pPr algn="ctr"/>
+            <a:endParaRPr/>
           </a:p>
         </p:txBody>
       </p:sp>
@@ -5477,7 +5254,7 @@
           <a:noFill/>
         </p:spPr>
         <p:txBody>
-          <a:bodyPr wrap="square" anchor="t" lIns="18288" rIns="18288" tIns="9144" bIns="9144">
+          <a:bodyPr wrap="square" lIns="18288" tIns="9144" rIns="18288" bIns="9144" anchor="t">
             <a:spAutoFit/>
           </a:bodyPr>
           <a:lstStyle/>
@@ -5495,17 +5272,7 @@
                 <a:latin typeface="Apple SD Gothic Neo"/>
                 <a:ea typeface="Apple SD Gothic Neo"/>
               </a:rPr>
-              <a:t>3.  </a:t>
-            </a:r>
-            <a:r>
-              <a:rPr sz="1300" b="1">
-                <a:solidFill>
-                  <a:srgbClr val="008A3E"/>
-                </a:solidFill>
-                <a:latin typeface="Apple SD Gothic Neo"/>
-                <a:ea typeface="Apple SD Gothic Neo"/>
-              </a:rPr>
-              <a:t>질문을 “누가 이기나”에서 “언제 기여하나”로 바꾸면 답이 있습니다</a:t>
+              <a:t>3.  질문을 “누가 이기나”에서 “언제 기여하나”로 바꾸면 답이 있습니다</a:t>
             </a:r>
           </a:p>
         </p:txBody>
@@ -5527,7 +5294,7 @@
           <a:noFill/>
         </p:spPr>
         <p:txBody>
-          <a:bodyPr wrap="square" anchor="t" lIns="18288" rIns="18288" tIns="9144" bIns="9144">
+          <a:bodyPr wrap="square" lIns="18288" tIns="9144" rIns="18288" bIns="9144" anchor="t">
             <a:spAutoFit/>
           </a:bodyPr>
           <a:lstStyle/>
@@ -5584,7 +5351,7 @@
           <a:noFill/>
         </p:spPr>
         <p:txBody>
-          <a:bodyPr wrap="square" anchor="t" lIns="18288" rIns="18288" tIns="9144" bIns="9144">
+          <a:bodyPr wrap="square" lIns="18288" tIns="9144" rIns="18288" bIns="9144" anchor="t">
             <a:spAutoFit/>
           </a:bodyPr>
           <a:lstStyle/>
@@ -5624,7 +5391,7 @@
           <a:noFill/>
         </p:spPr>
         <p:txBody>
-          <a:bodyPr wrap="square" anchor="t" lIns="18288" rIns="18288" tIns="9144" bIns="9144">
+          <a:bodyPr wrap="square" lIns="18288" tIns="9144" rIns="18288" bIns="9144" anchor="t">
             <a:spAutoFit/>
           </a:bodyPr>
           <a:lstStyle/>
@@ -5656,7 +5423,7 @@
 </file>
 
 <file path=ppt/slides/slide4.xml><?xml version="1.0" encoding="utf-8"?>
-<p:sld xmlns:a="http://schemas.openxmlformats.org/drawingml/2006/main" xmlns:p="http://schemas.openxmlformats.org/presentationml/2006/main" xmlns:r="http://schemas.openxmlformats.org/officeDocument/2006/relationships">
+<p:sld xmlns:a="http://schemas.openxmlformats.org/drawingml/2006/main" xmlns:r="http://schemas.openxmlformats.org/officeDocument/2006/relationships" xmlns:p="http://schemas.openxmlformats.org/presentationml/2006/main">
   <p:cSld>
     <p:spTree>
       <p:nvGrpSpPr>
@@ -5664,7 +5431,14 @@
         <p:cNvGrpSpPr/>
         <p:nvPr/>
       </p:nvGrpSpPr>
-      <p:grpSpPr/>
+      <p:grpSpPr>
+        <a:xfrm>
+          <a:off x="0" y="0"/>
+          <a:ext cx="0" cy="0"/>
+          <a:chOff x="0" y="0"/>
+          <a:chExt cx="0" cy="0"/>
+        </a:xfrm>
+      </p:grpSpPr>
       <p:sp>
         <p:nvSpPr>
           <p:cNvPr id="2" name="TextBox 1"/>
@@ -5682,7 +5456,7 @@
           <a:noFill/>
         </p:spPr>
         <p:txBody>
-          <a:bodyPr wrap="square" anchor="t" lIns="18288" rIns="18288" tIns="9144" bIns="9144">
+          <a:bodyPr wrap="square" lIns="18288" tIns="9144" rIns="18288" bIns="9144" anchor="t">
             <a:spAutoFit/>
           </a:bodyPr>
           <a:lstStyle/>
@@ -5722,7 +5496,7 @@
           <a:noFill/>
         </p:spPr>
         <p:txBody>
-          <a:bodyPr wrap="square" anchor="t" lIns="18288" rIns="18288" tIns="9144" bIns="9144">
+          <a:bodyPr wrap="square" lIns="18288" tIns="9144" rIns="18288" bIns="9144" anchor="t">
             <a:spAutoFit/>
           </a:bodyPr>
           <a:lstStyle/>
@@ -5789,7 +5563,7 @@
           <p:nvPr/>
         </p:nvPicPr>
         <p:blipFill>
-          <a:blip r:embed="rId2"/>
+          <a:blip r:embed="rId3"/>
           <a:stretch>
             <a:fillRect/>
           </a:stretch>
@@ -5821,7 +5595,7 @@
           <a:noFill/>
         </p:spPr>
         <p:txBody>
-          <a:bodyPr wrap="square" anchor="t" lIns="18288" rIns="18288" tIns="9144" bIns="9144">
+          <a:bodyPr wrap="square" lIns="18288" tIns="9144" rIns="18288" bIns="9144" anchor="t">
             <a:spAutoFit/>
           </a:bodyPr>
           <a:lstStyle/>
@@ -5899,16 +5673,13 @@
                 <a:spcPts val="200"/>
               </a:spcAft>
             </a:pPr>
-            <a:r>
-              <a:rPr sz="500" b="0">
-                <a:solidFill>
-                  <a:srgbClr val="262626"/>
-                </a:solidFill>
-                <a:latin typeface="Apple SD Gothic Neo"/>
-                <a:ea typeface="Apple SD Gothic Neo"/>
-              </a:rPr>
-              <a:t/>
-            </a:r>
+            <a:endParaRPr sz="1050" b="1">
+              <a:solidFill>
+                <a:srgbClr val="262626"/>
+              </a:solidFill>
+              <a:latin typeface="Apple SD Gothic Neo"/>
+              <a:ea typeface="Apple SD Gothic Neo"/>
+            </a:endParaRPr>
           </a:p>
           <a:p>
             <a:pPr algn="l">
@@ -5980,7 +5751,7 @@
           <a:noFill/>
         </p:spPr>
         <p:txBody>
-          <a:bodyPr wrap="square" anchor="t" lIns="18288" rIns="18288" tIns="9144" bIns="9144">
+          <a:bodyPr wrap="square" lIns="18288" tIns="9144" rIns="18288" bIns="9144" anchor="t">
             <a:spAutoFit/>
           </a:bodyPr>
           <a:lstStyle/>
@@ -6079,6 +5850,7 @@
           <a:lstStyle/>
           <a:p>
             <a:pPr algn="ctr"/>
+            <a:endParaRPr/>
           </a:p>
         </p:txBody>
       </p:sp>
@@ -6123,6 +5895,7 @@
           <a:lstStyle/>
           <a:p>
             <a:pPr algn="ctr"/>
+            <a:endParaRPr/>
           </a:p>
         </p:txBody>
       </p:sp>
@@ -6143,7 +5916,7 @@
           <a:noFill/>
         </p:spPr>
         <p:txBody>
-          <a:bodyPr wrap="square" anchor="t" lIns="18288" rIns="18288" tIns="9144" bIns="9144">
+          <a:bodyPr wrap="square" lIns="18288" tIns="9144" rIns="18288" bIns="9144" anchor="t">
             <a:spAutoFit/>
           </a:bodyPr>
           <a:lstStyle/>
@@ -6183,7 +5956,7 @@
           <a:noFill/>
         </p:spPr>
         <p:txBody>
-          <a:bodyPr wrap="square" anchor="t" lIns="18288" rIns="18288" tIns="9144" bIns="9144">
+          <a:bodyPr wrap="square" lIns="18288" tIns="9144" rIns="18288" bIns="9144" anchor="t">
             <a:spAutoFit/>
           </a:bodyPr>
           <a:lstStyle/>
@@ -6223,7 +5996,7 @@
           <a:noFill/>
         </p:spPr>
         <p:txBody>
-          <a:bodyPr wrap="square" anchor="t" lIns="18288" rIns="18288" tIns="9144" bIns="9144">
+          <a:bodyPr wrap="square" lIns="18288" tIns="9144" rIns="18288" bIns="9144" anchor="t">
             <a:spAutoFit/>
           </a:bodyPr>
           <a:lstStyle/>
@@ -6280,7 +6053,7 @@
           <a:noFill/>
         </p:spPr>
         <p:txBody>
-          <a:bodyPr wrap="square" anchor="t" lIns="18288" rIns="18288" tIns="9144" bIns="9144">
+          <a:bodyPr wrap="square" lIns="18288" tIns="9144" rIns="18288" bIns="9144" anchor="t">
             <a:spAutoFit/>
           </a:bodyPr>
           <a:lstStyle/>
@@ -6337,7 +6110,7 @@
           <a:noFill/>
         </p:spPr>
         <p:txBody>
-          <a:bodyPr wrap="square" anchor="t" lIns="18288" rIns="18288" tIns="9144" bIns="9144">
+          <a:bodyPr wrap="square" lIns="18288" tIns="9144" rIns="18288" bIns="9144" anchor="t">
             <a:spAutoFit/>
           </a:bodyPr>
           <a:lstStyle/>
@@ -6394,7 +6167,7 @@
           <a:noFill/>
         </p:spPr>
         <p:txBody>
-          <a:bodyPr wrap="square" anchor="t" lIns="18288" rIns="18288" tIns="9144" bIns="9144">
+          <a:bodyPr wrap="square" lIns="18288" tIns="9144" rIns="18288" bIns="9144" anchor="t">
             <a:spAutoFit/>
           </a:bodyPr>
           <a:lstStyle/>
@@ -6434,7 +6207,7 @@
           <a:noFill/>
         </p:spPr>
         <p:txBody>
-          <a:bodyPr wrap="square" anchor="t" lIns="18288" rIns="18288" tIns="9144" bIns="9144">
+          <a:bodyPr wrap="square" lIns="18288" tIns="9144" rIns="18288" bIns="9144" anchor="t">
             <a:spAutoFit/>
           </a:bodyPr>
           <a:lstStyle/>
@@ -6466,7 +6239,7 @@
 </file>
 
 <file path=ppt/slides/slide5.xml><?xml version="1.0" encoding="utf-8"?>
-<p:sld xmlns:a="http://schemas.openxmlformats.org/drawingml/2006/main" xmlns:p="http://schemas.openxmlformats.org/presentationml/2006/main" xmlns:r="http://schemas.openxmlformats.org/officeDocument/2006/relationships">
+<p:sld xmlns:a="http://schemas.openxmlformats.org/drawingml/2006/main" xmlns:r="http://schemas.openxmlformats.org/officeDocument/2006/relationships" xmlns:p="http://schemas.openxmlformats.org/presentationml/2006/main">
   <p:cSld>
     <p:spTree>
       <p:nvGrpSpPr>
@@ -6474,7 +6247,14 @@
         <p:cNvGrpSpPr/>
         <p:nvPr/>
       </p:nvGrpSpPr>
-      <p:grpSpPr/>
+      <p:grpSpPr>
+        <a:xfrm>
+          <a:off x="0" y="0"/>
+          <a:ext cx="0" cy="0"/>
+          <a:chOff x="0" y="0"/>
+          <a:chExt cx="0" cy="0"/>
+        </a:xfrm>
+      </p:grpSpPr>
       <p:sp>
         <p:nvSpPr>
           <p:cNvPr id="2" name="TextBox 1"/>
@@ -6492,7 +6272,7 @@
           <a:noFill/>
         </p:spPr>
         <p:txBody>
-          <a:bodyPr wrap="square" anchor="t" lIns="18288" rIns="18288" tIns="9144" bIns="9144">
+          <a:bodyPr wrap="square" lIns="18288" tIns="9144" rIns="18288" bIns="9144" anchor="t">
             <a:spAutoFit/>
           </a:bodyPr>
           <a:lstStyle/>
@@ -6532,7 +6312,7 @@
           <a:noFill/>
         </p:spPr>
         <p:txBody>
-          <a:bodyPr wrap="square" anchor="t" lIns="18288" rIns="18288" tIns="9144" bIns="9144">
+          <a:bodyPr wrap="square" lIns="18288" tIns="9144" rIns="18288" bIns="9144" anchor="t">
             <a:spAutoFit/>
           </a:bodyPr>
           <a:lstStyle/>
@@ -6607,7 +6387,7 @@
           <a:noFill/>
         </p:spPr>
         <p:txBody>
-          <a:bodyPr wrap="square" anchor="t" lIns="18288" rIns="18288" tIns="9144" bIns="9144">
+          <a:bodyPr wrap="square" lIns="18288" tIns="9144" rIns="18288" bIns="9144" anchor="t">
             <a:spAutoFit/>
           </a:bodyPr>
           <a:lstStyle/>
@@ -6647,7 +6427,7 @@
           <a:noFill/>
         </p:spPr>
         <p:txBody>
-          <a:bodyPr wrap="square" anchor="t" lIns="18288" rIns="18288" tIns="9144" bIns="9144">
+          <a:bodyPr wrap="square" lIns="18288" tIns="9144" rIns="18288" bIns="9144" anchor="t">
             <a:spAutoFit/>
           </a:bodyPr>
           <a:lstStyle/>
@@ -6722,7 +6502,7 @@
           <a:noFill/>
         </p:spPr>
         <p:txBody>
-          <a:bodyPr wrap="square" anchor="t" lIns="18288" rIns="18288" tIns="9144" bIns="9144">
+          <a:bodyPr wrap="square" lIns="18288" tIns="9144" rIns="18288" bIns="9144" anchor="t">
             <a:spAutoFit/>
           </a:bodyPr>
           <a:lstStyle/>
@@ -6827,33 +6607,47 @@
                 <a:spcPts val="200"/>
               </a:spcAft>
             </a:pPr>
-            <a:r>
-              <a:rPr sz="600" b="0">
+            <a:endParaRPr sz="930" b="0">
+              <a:solidFill>
+                <a:srgbClr val="6B6B6B"/>
+              </a:solidFill>
+              <a:latin typeface="Apple SD Gothic Neo"/>
+              <a:ea typeface="Apple SD Gothic Neo"/>
+            </a:endParaRPr>
+          </a:p>
+          <a:p>
+            <a:pPr algn="l">
+              <a:spcAft>
+                <a:spcPts val="200"/>
+              </a:spcAft>
+            </a:pPr>
+            <a:r>
+              <a:rPr sz="1050" b="1">
+                <a:solidFill>
+                  <a:srgbClr val="B0532F"/>
+                </a:solidFill>
+                <a:latin typeface="Apple SD Gothic Neo"/>
+                <a:ea typeface="Apple SD Gothic Neo"/>
+              </a:rPr>
+              <a:t>재현성과 감사가능성. </a:t>
+            </a:r>
+            <a:r>
+              <a:rPr sz="1050" b="0">
                 <a:solidFill>
                   <a:srgbClr val="262626"/>
                 </a:solidFill>
                 <a:latin typeface="Apple SD Gothic Neo"/>
                 <a:ea typeface="Apple SD Gothic Neo"/>
               </a:rPr>
-              <a:t/>
-            </a:r>
-          </a:p>
-          <a:p>
-            <a:pPr algn="l">
-              <a:spcAft>
-                <a:spcPts val="200"/>
-              </a:spcAft>
-            </a:pPr>
-            <a:r>
-              <a:rPr sz="1050" b="1">
-                <a:solidFill>
-                  <a:srgbClr val="B0532F"/>
-                </a:solidFill>
-                <a:latin typeface="Apple SD Gothic Neo"/>
-                <a:ea typeface="Apple SD Gothic Neo"/>
-              </a:rPr>
-              <a:t>재현성과 감사가능성. </a:t>
-            </a:r>
+              <a:t>동일 입력에도 출력이 변동하고 모델 버전</a:t>
+            </a:r>
+          </a:p>
+          <a:p>
+            <a:pPr algn="l">
+              <a:spcAft>
+                <a:spcPts val="200"/>
+              </a:spcAft>
+            </a:pPr>
             <a:r>
               <a:rPr sz="1050" b="0">
                 <a:solidFill>
@@ -6862,7 +6656,7 @@
                 <a:latin typeface="Apple SD Gothic Neo"/>
                 <a:ea typeface="Apple SD Gothic Neo"/>
               </a:rPr>
-              <a:t>동일 입력에도 출력이 변동하고 모델 버전</a:t>
+              <a:t>변경 시 결과가 복원되지 않습니다 — 중앙은행 운영 요건(재현·</a:t>
             </a:r>
           </a:p>
           <a:p>
@@ -6879,23 +6673,6 @@
                 <a:latin typeface="Apple SD Gothic Neo"/>
                 <a:ea typeface="Apple SD Gothic Neo"/>
               </a:rPr>
-              <a:t>변경 시 결과가 복원되지 않습니다 — 중앙은행 운영 요건(재현·</a:t>
-            </a:r>
-          </a:p>
-          <a:p>
-            <a:pPr algn="l">
-              <a:spcAft>
-                <a:spcPts val="200"/>
-              </a:spcAft>
-            </a:pPr>
-            <a:r>
-              <a:rPr sz="1050" b="0">
-                <a:solidFill>
-                  <a:srgbClr val="262626"/>
-                </a:solidFill>
-                <a:latin typeface="Apple SD Gothic Neo"/>
-                <a:ea typeface="Apple SD Gothic Neo"/>
-              </a:rPr>
               <a:t>감사·설명책임)과 정면으로 충돌합니다.</a:t>
             </a:r>
           </a:p>
@@ -6905,16 +6682,13 @@
                 <a:spcPts val="200"/>
               </a:spcAft>
             </a:pPr>
-            <a:r>
-              <a:rPr sz="600" b="0">
-                <a:solidFill>
-                  <a:srgbClr val="262626"/>
-                </a:solidFill>
-                <a:latin typeface="Apple SD Gothic Neo"/>
-                <a:ea typeface="Apple SD Gothic Neo"/>
-              </a:rPr>
-              <a:t/>
-            </a:r>
+            <a:endParaRPr sz="1050" b="0">
+              <a:solidFill>
+                <a:srgbClr val="262626"/>
+              </a:solidFill>
+              <a:latin typeface="Apple SD Gothic Neo"/>
+              <a:ea typeface="Apple SD Gothic Neo"/>
+            </a:endParaRPr>
           </a:p>
           <a:p>
             <a:pPr algn="l">
@@ -6962,7 +6736,7 @@
           <a:noFill/>
         </p:spPr>
         <p:txBody>
-          <a:bodyPr wrap="square" anchor="t" lIns="18288" rIns="18288" tIns="9144" bIns="9144">
+          <a:bodyPr wrap="square" lIns="18288" tIns="9144" rIns="18288" bIns="9144" anchor="t">
             <a:spAutoFit/>
           </a:bodyPr>
           <a:lstStyle/>
@@ -7037,7 +6811,7 @@
           <a:noFill/>
         </p:spPr>
         <p:txBody>
-          <a:bodyPr wrap="square" anchor="t" lIns="18288" rIns="18288" tIns="9144" bIns="9144">
+          <a:bodyPr wrap="square" lIns="18288" tIns="9144" rIns="18288" bIns="9144" anchor="t">
             <a:spAutoFit/>
           </a:bodyPr>
           <a:lstStyle/>
@@ -7081,16 +6855,13 @@
                 <a:spcPts val="250"/>
               </a:spcAft>
             </a:pPr>
-            <a:r>
-              <a:rPr sz="500" b="0">
-                <a:solidFill>
-                  <a:srgbClr val="262626"/>
-                </a:solidFill>
-                <a:latin typeface="Apple SD Gothic Neo"/>
-                <a:ea typeface="Apple SD Gothic Neo"/>
-              </a:rPr>
-              <a:t/>
-            </a:r>
+            <a:endParaRPr sz="1050" b="0">
+              <a:solidFill>
+                <a:srgbClr val="262626"/>
+              </a:solidFill>
+              <a:latin typeface="Apple SD Gothic Neo"/>
+              <a:ea typeface="Apple SD Gothic Neo"/>
+            </a:endParaRPr>
           </a:p>
           <a:p>
             <a:pPr algn="l">
@@ -7220,6 +6991,7 @@
           <a:lstStyle/>
           <a:p>
             <a:pPr algn="ctr"/>
+            <a:endParaRPr/>
           </a:p>
         </p:txBody>
       </p:sp>
@@ -7264,6 +7036,7 @@
           <a:lstStyle/>
           <a:p>
             <a:pPr algn="ctr"/>
+            <a:endParaRPr/>
           </a:p>
         </p:txBody>
       </p:sp>
@@ -7284,7 +7057,7 @@
           <a:noFill/>
         </p:spPr>
         <p:txBody>
-          <a:bodyPr wrap="square" anchor="t" lIns="18288" rIns="18288" tIns="9144" bIns="9144">
+          <a:bodyPr wrap="square" lIns="18288" tIns="9144" rIns="18288" bIns="9144" anchor="t">
             <a:spAutoFit/>
           </a:bodyPr>
           <a:lstStyle/>
@@ -7358,7 +7131,7 @@
           <a:noFill/>
         </p:spPr>
         <p:txBody>
-          <a:bodyPr wrap="square" anchor="t" lIns="18288" rIns="18288" tIns="9144" bIns="9144">
+          <a:bodyPr wrap="square" lIns="18288" tIns="9144" rIns="18288" bIns="9144" anchor="t">
             <a:spAutoFit/>
           </a:bodyPr>
           <a:lstStyle/>
@@ -7398,7 +7171,7 @@
           <a:noFill/>
         </p:spPr>
         <p:txBody>
-          <a:bodyPr wrap="square" anchor="t" lIns="18288" rIns="18288" tIns="9144" bIns="9144">
+          <a:bodyPr wrap="square" lIns="18288" tIns="9144" rIns="18288" bIns="9144" anchor="t">
             <a:spAutoFit/>
           </a:bodyPr>
           <a:lstStyle/>
@@ -7430,7 +7203,7 @@
 </file>
 
 <file path=ppt/slides/slide6.xml><?xml version="1.0" encoding="utf-8"?>
-<p:sld xmlns:a="http://schemas.openxmlformats.org/drawingml/2006/main" xmlns:p="http://schemas.openxmlformats.org/presentationml/2006/main" xmlns:r="http://schemas.openxmlformats.org/officeDocument/2006/relationships">
+<p:sld xmlns:a="http://schemas.openxmlformats.org/drawingml/2006/main" xmlns:r="http://schemas.openxmlformats.org/officeDocument/2006/relationships" xmlns:p="http://schemas.openxmlformats.org/presentationml/2006/main">
   <p:cSld>
     <p:spTree>
       <p:nvGrpSpPr>
@@ -7438,7 +7211,14 @@
         <p:cNvGrpSpPr/>
         <p:nvPr/>
       </p:nvGrpSpPr>
-      <p:grpSpPr/>
+      <p:grpSpPr>
+        <a:xfrm>
+          <a:off x="0" y="0"/>
+          <a:ext cx="0" cy="0"/>
+          <a:chOff x="0" y="0"/>
+          <a:chExt cx="0" cy="0"/>
+        </a:xfrm>
+      </p:grpSpPr>
       <p:sp>
         <p:nvSpPr>
           <p:cNvPr id="2" name="TextBox 1"/>
@@ -7456,7 +7236,7 @@
           <a:noFill/>
         </p:spPr>
         <p:txBody>
-          <a:bodyPr wrap="square" anchor="t" lIns="18288" rIns="18288" tIns="9144" bIns="9144">
+          <a:bodyPr wrap="square" lIns="18288" tIns="9144" rIns="18288" bIns="9144" anchor="t">
             <a:spAutoFit/>
           </a:bodyPr>
           <a:lstStyle/>
@@ -7496,7 +7276,7 @@
           <a:noFill/>
         </p:spPr>
         <p:txBody>
-          <a:bodyPr wrap="square" anchor="t" lIns="18288" rIns="18288" tIns="9144" bIns="9144">
+          <a:bodyPr wrap="square" lIns="18288" tIns="9144" rIns="18288" bIns="9144" anchor="t">
             <a:spAutoFit/>
           </a:bodyPr>
           <a:lstStyle/>
@@ -7571,7 +7351,7 @@
           <a:noFill/>
         </p:spPr>
         <p:txBody>
-          <a:bodyPr wrap="square" anchor="t" lIns="18288" rIns="18288" tIns="9144" bIns="9144">
+          <a:bodyPr wrap="square" lIns="18288" tIns="9144" rIns="18288" bIns="9144" anchor="t">
             <a:spAutoFit/>
           </a:bodyPr>
           <a:lstStyle/>
@@ -7646,7 +7426,7 @@
           <a:noFill/>
         </p:spPr>
         <p:txBody>
-          <a:bodyPr wrap="square" anchor="t" lIns="18288" rIns="18288" tIns="9144" bIns="9144">
+          <a:bodyPr wrap="square" lIns="18288" tIns="9144" rIns="18288" bIns="9144" anchor="t">
             <a:spAutoFit/>
           </a:bodyPr>
           <a:lstStyle/>
@@ -7696,7 +7476,7 @@
           <a:noFill/>
         </p:spPr>
         <p:txBody>
-          <a:bodyPr wrap="square" anchor="t" lIns="18288" rIns="18288" tIns="9144" bIns="9144">
+          <a:bodyPr wrap="square" lIns="18288" tIns="9144" rIns="18288" bIns="9144" anchor="t">
             <a:spAutoFit/>
           </a:bodyPr>
           <a:lstStyle/>
@@ -7736,7 +7516,7 @@
           <a:noFill/>
         </p:spPr>
         <p:txBody>
-          <a:bodyPr wrap="square" anchor="t" lIns="18288" rIns="18288" tIns="9144" bIns="9144">
+          <a:bodyPr wrap="square" lIns="18288" tIns="9144" rIns="18288" bIns="9144" anchor="t">
             <a:spAutoFit/>
           </a:bodyPr>
           <a:lstStyle/>
@@ -7786,7 +7566,7 @@
           <a:noFill/>
         </p:spPr>
         <p:txBody>
-          <a:bodyPr wrap="square" anchor="t" lIns="18288" rIns="18288" tIns="9144" bIns="9144">
+          <a:bodyPr wrap="square" lIns="18288" tIns="9144" rIns="18288" bIns="9144" anchor="t">
             <a:spAutoFit/>
           </a:bodyPr>
           <a:lstStyle/>
@@ -7826,7 +7606,7 @@
           <a:noFill/>
         </p:spPr>
         <p:txBody>
-          <a:bodyPr wrap="square" anchor="t" lIns="18288" rIns="18288" tIns="9144" bIns="9144">
+          <a:bodyPr wrap="square" lIns="18288" tIns="9144" rIns="18288" bIns="9144" anchor="t">
             <a:spAutoFit/>
           </a:bodyPr>
           <a:lstStyle/>
@@ -7876,7 +7656,7 @@
           <a:noFill/>
         </p:spPr>
         <p:txBody>
-          <a:bodyPr wrap="square" anchor="t" lIns="18288" rIns="18288" tIns="9144" bIns="9144">
+          <a:bodyPr wrap="square" lIns="18288" tIns="9144" rIns="18288" bIns="9144" anchor="t">
             <a:spAutoFit/>
           </a:bodyPr>
           <a:lstStyle/>
@@ -7916,7 +7696,7 @@
           <a:noFill/>
         </p:spPr>
         <p:txBody>
-          <a:bodyPr wrap="square" anchor="t" lIns="18288" rIns="18288" tIns="9144" bIns="9144">
+          <a:bodyPr wrap="square" lIns="18288" tIns="9144" rIns="18288" bIns="9144" anchor="t">
             <a:spAutoFit/>
           </a:bodyPr>
           <a:lstStyle/>
@@ -7966,7 +7746,7 @@
           <a:noFill/>
         </p:spPr>
         <p:txBody>
-          <a:bodyPr wrap="square" anchor="t" lIns="18288" rIns="18288" tIns="9144" bIns="9144">
+          <a:bodyPr wrap="square" lIns="18288" tIns="9144" rIns="18288" bIns="9144" anchor="t">
             <a:spAutoFit/>
           </a:bodyPr>
           <a:lstStyle/>
@@ -8030,6 +7810,7 @@
           <a:lstStyle/>
           <a:p>
             <a:pPr algn="ctr"/>
+            <a:endParaRPr/>
           </a:p>
         </p:txBody>
       </p:sp>
@@ -8074,6 +7855,7 @@
           <a:lstStyle/>
           <a:p>
             <a:pPr algn="ctr"/>
+            <a:endParaRPr/>
           </a:p>
         </p:txBody>
       </p:sp>
@@ -8094,7 +7876,7 @@
           <a:noFill/>
         </p:spPr>
         <p:txBody>
-          <a:bodyPr wrap="square" anchor="t" lIns="18288" rIns="18288" tIns="9144" bIns="9144">
+          <a:bodyPr wrap="square" lIns="18288" tIns="9144" rIns="18288" bIns="9144" anchor="t">
             <a:spAutoFit/>
           </a:bodyPr>
           <a:lstStyle/>
@@ -8121,16 +7903,88 @@
                 <a:spcPts val="200"/>
               </a:spcAft>
             </a:pPr>
-            <a:r>
-              <a:rPr sz="500" b="0">
+            <a:endParaRPr sz="1250" b="1">
+              <a:solidFill>
+                <a:srgbClr val="008A3E"/>
+              </a:solidFill>
+              <a:latin typeface="Apple SD Gothic Neo"/>
+              <a:ea typeface="Apple SD Gothic Neo"/>
+            </a:endParaRPr>
+          </a:p>
+          <a:p>
+            <a:pPr algn="l">
+              <a:spcAft>
+                <a:spcPts val="200"/>
+              </a:spcAft>
+            </a:pPr>
+            <a:r>
+              <a:rPr sz="1050" b="1">
                 <a:solidFill>
                   <a:srgbClr val="262626"/>
                 </a:solidFill>
                 <a:latin typeface="Apple SD Gothic Neo"/>
                 <a:ea typeface="Apple SD Gothic Neo"/>
               </a:rPr>
-              <a:t/>
-            </a:r>
+              <a:t>지표 공백 구간. </a:t>
+            </a:r>
+            <a:r>
+              <a:rPr sz="1050" b="0">
+                <a:solidFill>
+                  <a:srgbClr val="262626"/>
+                </a:solidFill>
+                <a:latin typeface="Apple SD Gothic Neo"/>
+                <a:ea typeface="Apple SD Gothic Neo"/>
+              </a:rPr>
+              <a:t>발표 19~14주 전 — 해당 분기</a:t>
+            </a:r>
+          </a:p>
+          <a:p>
+            <a:pPr algn="l">
+              <a:spcAft>
+                <a:spcPts val="200"/>
+              </a:spcAft>
+            </a:pPr>
+            <a:r>
+              <a:rPr sz="1050" b="0">
+                <a:solidFill>
+                  <a:srgbClr val="262626"/>
+                </a:solidFill>
+                <a:latin typeface="Apple SD Gothic Neo"/>
+                <a:ea typeface="Apple SD Gothic Neo"/>
+              </a:rPr>
+              <a:t>공식지표가 나오기 전의 공백을 세계 지식과</a:t>
+            </a:r>
+          </a:p>
+          <a:p>
+            <a:pPr algn="l">
+              <a:spcAft>
+                <a:spcPts val="200"/>
+              </a:spcAft>
+            </a:pPr>
+            <a:r>
+              <a:rPr sz="1050" b="0">
+                <a:solidFill>
+                  <a:srgbClr val="262626"/>
+                </a:solidFill>
+                <a:latin typeface="Apple SD Gothic Neo"/>
+                <a:ea typeface="Apple SD Gothic Neo"/>
+              </a:rPr>
+              <a:t>일별 신호로 보완합니다(3장).</a:t>
+            </a:r>
+          </a:p>
+          <a:p>
+            <a:pPr algn="l">
+              <a:spcAft>
+                <a:spcPts val="200"/>
+              </a:spcAft>
+            </a:pPr>
+            <a:endParaRPr sz="1050" b="0">
+              <a:solidFill>
+                <a:srgbClr val="262626"/>
+              </a:solidFill>
+              <a:latin typeface="Apple SD Gothic Neo"/>
+              <a:ea typeface="Apple SD Gothic Neo"/>
+            </a:endParaRPr>
           </a:p>
           <a:p>
             <a:pPr algn="l">
@@ -8146,7 +8000,7 @@
                 <a:latin typeface="Apple SD Gothic Neo"/>
                 <a:ea typeface="Apple SD Gothic Neo"/>
               </a:rPr>
-              <a:t>지표 공백 구간. </a:t>
+              <a:t>경기 반등기. </a:t>
             </a:r>
             <a:r>
               <a:rPr sz="1050" b="0">
@@ -8156,7 +8010,7 @@
                 <a:latin typeface="Apple SD Gothic Neo"/>
                 <a:ea typeface="Apple SD Gothic Neo"/>
               </a:rPr>
-              <a:t>발표 19~14주 전 — 해당 분기</a:t>
+              <a:t>반등 6개 분기 평균 0.581로</a:t>
             </a:r>
           </a:p>
           <a:p>
@@ -8173,7 +8027,7 @@
                 <a:latin typeface="Apple SD Gothic Neo"/>
                 <a:ea typeface="Apple SD Gothic Neo"/>
               </a:rPr>
-              <a:t>공식지표가 나오기 전의 공백을 세계 지식과</a:t>
+              <a:t>전 구성 중 최강 — 주가·환율·심리 원지수가</a:t>
             </a:r>
           </a:p>
           <a:p>
@@ -8190,42 +8044,56 @@
                 <a:latin typeface="Apple SD Gothic Neo"/>
                 <a:ea typeface="Apple SD Gothic Neo"/>
               </a:rPr>
-              <a:t>일별 신호로 보완합니다(3장).</a:t>
-            </a:r>
-          </a:p>
-          <a:p>
-            <a:pPr algn="l">
-              <a:spcAft>
-                <a:spcPts val="200"/>
-              </a:spcAft>
-            </a:pPr>
-            <a:r>
-              <a:rPr sz="500" b="0">
+              <a:t>공식 지표의 발표 시차를 메웁니다.</a:t>
+            </a:r>
+          </a:p>
+          <a:p>
+            <a:pPr algn="l">
+              <a:spcAft>
+                <a:spcPts val="200"/>
+              </a:spcAft>
+            </a:pPr>
+            <a:endParaRPr sz="1050" b="0">
+              <a:solidFill>
+                <a:srgbClr val="262626"/>
+              </a:solidFill>
+              <a:latin typeface="Apple SD Gothic Neo"/>
+              <a:ea typeface="Apple SD Gothic Neo"/>
+            </a:endParaRPr>
+          </a:p>
+          <a:p>
+            <a:pPr algn="l">
+              <a:spcAft>
+                <a:spcPts val="200"/>
+              </a:spcAft>
+            </a:pPr>
+            <a:r>
+              <a:rPr sz="1050" b="1">
                 <a:solidFill>
                   <a:srgbClr val="262626"/>
                 </a:solidFill>
                 <a:latin typeface="Apple SD Gothic Neo"/>
                 <a:ea typeface="Apple SD Gothic Neo"/>
               </a:rPr>
-              <a:t/>
-            </a:r>
-          </a:p>
-          <a:p>
-            <a:pPr algn="l">
-              <a:spcAft>
-                <a:spcPts val="200"/>
-              </a:spcAft>
-            </a:pPr>
-            <a:r>
-              <a:rPr sz="1050" b="1">
+              <a:t>불확실성 정량화 재료. </a:t>
+            </a:r>
+            <a:r>
+              <a:rPr sz="1050" b="0">
                 <a:solidFill>
                   <a:srgbClr val="262626"/>
                 </a:solidFill>
                 <a:latin typeface="Apple SD Gothic Neo"/>
                 <a:ea typeface="Apple SD Gothic Neo"/>
               </a:rPr>
-              <a:t>경기 반등기. </a:t>
-            </a:r>
+              <a:t>보정(conformal)</a:t>
+            </a:r>
+          </a:p>
+          <a:p>
+            <a:pPr algn="l">
+              <a:spcAft>
+                <a:spcPts val="200"/>
+              </a:spcAft>
+            </a:pPr>
             <a:r>
               <a:rPr sz="1050" b="0">
                 <a:solidFill>
@@ -8234,7 +8102,7 @@
                 <a:latin typeface="Apple SD Gothic Neo"/>
                 <a:ea typeface="Apple SD Gothic Neo"/>
               </a:rPr>
-              <a:t>반등 6개 분기 평균 0.581로</a:t>
+              <a:t>결합 시 예측구간 품질 개선을 확인 — 연구</a:t>
             </a:r>
           </a:p>
           <a:p>
@@ -8251,101 +8119,6 @@
                 <a:latin typeface="Apple SD Gothic Neo"/>
                 <a:ea typeface="Apple SD Gothic Neo"/>
               </a:rPr>
-              <a:t>전 구성 중 최강 — 주가·환율·심리 원지수가</a:t>
-            </a:r>
-          </a:p>
-          <a:p>
-            <a:pPr algn="l">
-              <a:spcAft>
-                <a:spcPts val="200"/>
-              </a:spcAft>
-            </a:pPr>
-            <a:r>
-              <a:rPr sz="1050" b="0">
-                <a:solidFill>
-                  <a:srgbClr val="262626"/>
-                </a:solidFill>
-                <a:latin typeface="Apple SD Gothic Neo"/>
-                <a:ea typeface="Apple SD Gothic Neo"/>
-              </a:rPr>
-              <a:t>공식 지표의 발표 시차를 메웁니다.</a:t>
-            </a:r>
-          </a:p>
-          <a:p>
-            <a:pPr algn="l">
-              <a:spcAft>
-                <a:spcPts val="200"/>
-              </a:spcAft>
-            </a:pPr>
-            <a:r>
-              <a:rPr sz="500" b="0">
-                <a:solidFill>
-                  <a:srgbClr val="262626"/>
-                </a:solidFill>
-                <a:latin typeface="Apple SD Gothic Neo"/>
-                <a:ea typeface="Apple SD Gothic Neo"/>
-              </a:rPr>
-              <a:t/>
-            </a:r>
-          </a:p>
-          <a:p>
-            <a:pPr algn="l">
-              <a:spcAft>
-                <a:spcPts val="200"/>
-              </a:spcAft>
-            </a:pPr>
-            <a:r>
-              <a:rPr sz="1050" b="1">
-                <a:solidFill>
-                  <a:srgbClr val="262626"/>
-                </a:solidFill>
-                <a:latin typeface="Apple SD Gothic Neo"/>
-                <a:ea typeface="Apple SD Gothic Neo"/>
-              </a:rPr>
-              <a:t>불확실성 정량화 재료. </a:t>
-            </a:r>
-            <a:r>
-              <a:rPr sz="1050" b="0">
-                <a:solidFill>
-                  <a:srgbClr val="262626"/>
-                </a:solidFill>
-                <a:latin typeface="Apple SD Gothic Neo"/>
-                <a:ea typeface="Apple SD Gothic Neo"/>
-              </a:rPr>
-              <a:t>보정(conformal)</a:t>
-            </a:r>
-          </a:p>
-          <a:p>
-            <a:pPr algn="l">
-              <a:spcAft>
-                <a:spcPts val="200"/>
-              </a:spcAft>
-            </a:pPr>
-            <a:r>
-              <a:rPr sz="1050" b="0">
-                <a:solidFill>
-                  <a:srgbClr val="262626"/>
-                </a:solidFill>
-                <a:latin typeface="Apple SD Gothic Neo"/>
-                <a:ea typeface="Apple SD Gothic Neo"/>
-              </a:rPr>
-              <a:t>결합 시 예측구간 품질 개선을 확인 — 연구</a:t>
-            </a:r>
-          </a:p>
-          <a:p>
-            <a:pPr algn="l">
-              <a:spcAft>
-                <a:spcPts val="200"/>
-              </a:spcAft>
-            </a:pPr>
-            <a:r>
-              <a:rPr sz="1050" b="0">
-                <a:solidFill>
-                  <a:srgbClr val="262626"/>
-                </a:solidFill>
-                <a:latin typeface="Apple SD Gothic Neo"/>
-                <a:ea typeface="Apple SD Gothic Neo"/>
-              </a:rPr>
               <a:t>재료로 유효합니다.</a:t>
             </a:r>
           </a:p>
@@ -8355,16 +8128,13 @@
                 <a:spcPts val="200"/>
               </a:spcAft>
             </a:pPr>
-            <a:r>
-              <a:rPr sz="600" b="0">
-                <a:solidFill>
-                  <a:srgbClr val="262626"/>
-                </a:solidFill>
-                <a:latin typeface="Apple SD Gothic Neo"/>
-                <a:ea typeface="Apple SD Gothic Neo"/>
-              </a:rPr>
-              <a:t/>
-            </a:r>
+            <a:endParaRPr sz="1050" b="0">
+              <a:solidFill>
+                <a:srgbClr val="262626"/>
+              </a:solidFill>
+              <a:latin typeface="Apple SD Gothic Neo"/>
+              <a:ea typeface="Apple SD Gothic Neo"/>
+            </a:endParaRPr>
           </a:p>
           <a:p>
             <a:pPr algn="l">
@@ -8402,7 +8172,7 @@
           <a:noFill/>
         </p:spPr>
         <p:txBody>
-          <a:bodyPr wrap="square" anchor="t" lIns="18288" rIns="18288" tIns="9144" bIns="9144">
+          <a:bodyPr wrap="square" lIns="18288" tIns="9144" rIns="18288" bIns="9144" anchor="t">
             <a:spAutoFit/>
           </a:bodyPr>
           <a:lstStyle/>
@@ -8442,7 +8212,7 @@
           <a:noFill/>
         </p:spPr>
         <p:txBody>
-          <a:bodyPr wrap="square" anchor="t" lIns="18288" rIns="18288" tIns="9144" bIns="9144">
+          <a:bodyPr wrap="square" lIns="18288" tIns="9144" rIns="18288" bIns="9144" anchor="t">
             <a:spAutoFit/>
           </a:bodyPr>
           <a:lstStyle/>
@@ -8474,7 +8244,7 @@
 </file>
 
 <file path=ppt/slides/slide7.xml><?xml version="1.0" encoding="utf-8"?>
-<p:sld xmlns:a="http://schemas.openxmlformats.org/drawingml/2006/main" xmlns:p="http://schemas.openxmlformats.org/presentationml/2006/main" xmlns:r="http://schemas.openxmlformats.org/officeDocument/2006/relationships">
+<p:sld xmlns:a="http://schemas.openxmlformats.org/drawingml/2006/main" xmlns:r="http://schemas.openxmlformats.org/officeDocument/2006/relationships" xmlns:p="http://schemas.openxmlformats.org/presentationml/2006/main">
   <p:cSld>
     <p:spTree>
       <p:nvGrpSpPr>
@@ -8482,7 +8252,14 @@
         <p:cNvGrpSpPr/>
         <p:nvPr/>
       </p:nvGrpSpPr>
-      <p:grpSpPr/>
+      <p:grpSpPr>
+        <a:xfrm>
+          <a:off x="0" y="0"/>
+          <a:ext cx="0" cy="0"/>
+          <a:chOff x="0" y="0"/>
+          <a:chExt cx="0" cy="0"/>
+        </a:xfrm>
+      </p:grpSpPr>
       <p:sp>
         <p:nvSpPr>
           <p:cNvPr id="2" name="TextBox 1"/>
@@ -8500,7 +8277,7 @@
           <a:noFill/>
         </p:spPr>
         <p:txBody>
-          <a:bodyPr wrap="square" anchor="t" lIns="18288" rIns="18288" tIns="9144" bIns="9144">
+          <a:bodyPr wrap="square" lIns="18288" tIns="9144" rIns="18288" bIns="9144" anchor="t">
             <a:spAutoFit/>
           </a:bodyPr>
           <a:lstStyle/>
@@ -8540,7 +8317,7 @@
           <a:noFill/>
         </p:spPr>
         <p:txBody>
-          <a:bodyPr wrap="square" anchor="t" lIns="18288" rIns="18288" tIns="9144" bIns="9144">
+          <a:bodyPr wrap="square" lIns="18288" tIns="9144" rIns="18288" bIns="9144" anchor="t">
             <a:spAutoFit/>
           </a:bodyPr>
           <a:lstStyle/>
@@ -8615,7 +8392,7 @@
           <a:noFill/>
         </p:spPr>
         <p:txBody>
-          <a:bodyPr wrap="square" anchor="t" lIns="18288" rIns="18288" tIns="9144" bIns="9144">
+          <a:bodyPr wrap="square" lIns="18288" tIns="9144" rIns="18288" bIns="9144" anchor="t">
             <a:spAutoFit/>
           </a:bodyPr>
           <a:lstStyle/>
@@ -8675,7 +8452,7 @@
           <a:noFill/>
         </p:spPr>
         <p:txBody>
-          <a:bodyPr wrap="square" anchor="t" lIns="18288" rIns="18288" tIns="9144" bIns="9144">
+          <a:bodyPr wrap="square" lIns="18288" tIns="9144" rIns="18288" bIns="9144" anchor="t">
             <a:spAutoFit/>
           </a:bodyPr>
           <a:lstStyle/>
@@ -8750,7 +8527,7 @@
           <a:noFill/>
         </p:spPr>
         <p:txBody>
-          <a:bodyPr wrap="square" anchor="t" lIns="18288" rIns="18288" tIns="9144" bIns="9144">
+          <a:bodyPr wrap="square" lIns="18288" tIns="9144" rIns="18288" bIns="9144" anchor="t">
             <a:spAutoFit/>
           </a:bodyPr>
           <a:lstStyle/>
@@ -8800,7 +8577,7 @@
           <a:noFill/>
         </p:spPr>
         <p:txBody>
-          <a:bodyPr wrap="square" anchor="t" lIns="18288" rIns="18288" tIns="9144" bIns="9144">
+          <a:bodyPr wrap="square" lIns="18288" tIns="9144" rIns="18288" bIns="9144" anchor="t">
             <a:spAutoFit/>
           </a:bodyPr>
           <a:lstStyle/>
@@ -8840,7 +8617,7 @@
           <a:noFill/>
         </p:spPr>
         <p:txBody>
-          <a:bodyPr wrap="square" anchor="t" lIns="18288" rIns="18288" tIns="9144" bIns="9144">
+          <a:bodyPr wrap="square" lIns="18288" tIns="9144" rIns="18288" bIns="9144" anchor="t">
             <a:spAutoFit/>
           </a:bodyPr>
           <a:lstStyle/>
@@ -8890,7 +8667,7 @@
           <a:noFill/>
         </p:spPr>
         <p:txBody>
-          <a:bodyPr wrap="square" anchor="t" lIns="18288" rIns="18288" tIns="9144" bIns="9144">
+          <a:bodyPr wrap="square" lIns="18288" tIns="9144" rIns="18288" bIns="9144" anchor="t">
             <a:spAutoFit/>
           </a:bodyPr>
           <a:lstStyle/>
@@ -8930,7 +8707,7 @@
           <a:noFill/>
         </p:spPr>
         <p:txBody>
-          <a:bodyPr wrap="square" anchor="t" lIns="18288" rIns="18288" tIns="9144" bIns="9144">
+          <a:bodyPr wrap="square" lIns="18288" tIns="9144" rIns="18288" bIns="9144" anchor="t">
             <a:spAutoFit/>
           </a:bodyPr>
           <a:lstStyle/>
@@ -8980,7 +8757,7 @@
           <a:noFill/>
         </p:spPr>
         <p:txBody>
-          <a:bodyPr wrap="square" anchor="t" lIns="18288" rIns="18288" tIns="9144" bIns="9144">
+          <a:bodyPr wrap="square" lIns="18288" tIns="9144" rIns="18288" bIns="9144" anchor="t">
             <a:spAutoFit/>
           </a:bodyPr>
           <a:lstStyle/>
@@ -9020,7 +8797,7 @@
           <a:noFill/>
         </p:spPr>
         <p:txBody>
-          <a:bodyPr wrap="square" anchor="t" lIns="18288" rIns="18288" tIns="9144" bIns="9144">
+          <a:bodyPr wrap="square" lIns="18288" tIns="9144" rIns="18288" bIns="9144" anchor="t">
             <a:spAutoFit/>
           </a:bodyPr>
           <a:lstStyle/>
@@ -9070,7 +8847,7 @@
           <a:noFill/>
         </p:spPr>
         <p:txBody>
-          <a:bodyPr wrap="square" anchor="t" lIns="18288" rIns="18288" tIns="9144" bIns="9144">
+          <a:bodyPr wrap="square" lIns="18288" tIns="9144" rIns="18288" bIns="9144" anchor="t">
             <a:spAutoFit/>
           </a:bodyPr>
           <a:lstStyle/>
@@ -9110,7 +8887,7 @@
           <a:noFill/>
         </p:spPr>
         <p:txBody>
-          <a:bodyPr wrap="square" anchor="t" lIns="18288" rIns="18288" tIns="9144" bIns="9144">
+          <a:bodyPr wrap="square" lIns="18288" tIns="9144" rIns="18288" bIns="9144" anchor="t">
             <a:spAutoFit/>
           </a:bodyPr>
           <a:lstStyle/>
@@ -9160,7 +8937,7 @@
           <a:noFill/>
         </p:spPr>
         <p:txBody>
-          <a:bodyPr wrap="square" anchor="t" lIns="18288" rIns="18288" tIns="9144" bIns="9144">
+          <a:bodyPr wrap="square" lIns="18288" tIns="9144" rIns="18288" bIns="9144" anchor="t">
             <a:spAutoFit/>
           </a:bodyPr>
           <a:lstStyle/>
@@ -9200,7 +8977,7 @@
           <a:noFill/>
         </p:spPr>
         <p:txBody>
-          <a:bodyPr wrap="square" anchor="t" lIns="18288" rIns="18288" tIns="9144" bIns="9144">
+          <a:bodyPr wrap="square" lIns="18288" tIns="9144" rIns="18288" bIns="9144" anchor="t">
             <a:spAutoFit/>
           </a:bodyPr>
           <a:lstStyle/>
@@ -9277,7 +9054,7 @@
           <a:noFill/>
         </p:spPr>
         <p:txBody>
-          <a:bodyPr wrap="square" anchor="t" lIns="18288" rIns="18288" tIns="9144" bIns="9144">
+          <a:bodyPr wrap="square" lIns="18288" tIns="9144" rIns="18288" bIns="9144" anchor="t">
             <a:spAutoFit/>
           </a:bodyPr>
           <a:lstStyle/>
@@ -9352,7 +9129,7 @@
           <a:noFill/>
         </p:spPr>
         <p:txBody>
-          <a:bodyPr wrap="square" anchor="t" lIns="18288" rIns="18288" tIns="9144" bIns="9144">
+          <a:bodyPr wrap="square" lIns="18288" tIns="9144" rIns="18288" bIns="9144" anchor="t">
             <a:spAutoFit/>
           </a:bodyPr>
           <a:lstStyle/>
@@ -9423,33 +9200,47 @@
                 <a:spcPts val="200"/>
               </a:spcAft>
             </a:pPr>
-            <a:r>
-              <a:rPr sz="600" b="0">
+            <a:endParaRPr sz="1050" b="0">
+              <a:solidFill>
+                <a:srgbClr val="262626"/>
+              </a:solidFill>
+              <a:latin typeface="Apple SD Gothic Neo"/>
+              <a:ea typeface="Apple SD Gothic Neo"/>
+            </a:endParaRPr>
+          </a:p>
+          <a:p>
+            <a:pPr algn="l">
+              <a:spcAft>
+                <a:spcPts val="200"/>
+              </a:spcAft>
+            </a:pPr>
+            <a:r>
+              <a:rPr sz="1050" b="1">
                 <a:solidFill>
                   <a:srgbClr val="262626"/>
                 </a:solidFill>
                 <a:latin typeface="Apple SD Gothic Neo"/>
                 <a:ea typeface="Apple SD Gothic Neo"/>
               </a:rPr>
-              <a:t/>
-            </a:r>
-          </a:p>
-          <a:p>
-            <a:pPr algn="l">
-              <a:spcAft>
-                <a:spcPts val="200"/>
-              </a:spcAft>
-            </a:pPr>
-            <a:r>
-              <a:rPr sz="1050" b="1">
+              <a:t>사전등록 라이브 추적. </a:t>
+            </a:r>
+            <a:r>
+              <a:rPr sz="1050" b="0">
                 <a:solidFill>
                   <a:srgbClr val="262626"/>
                 </a:solidFill>
                 <a:latin typeface="Apple SD Gothic Neo"/>
                 <a:ea typeface="Apple SD Gothic Neo"/>
               </a:rPr>
-              <a:t>사전등록 라이브 추적. </a:t>
-            </a:r>
+              <a:t>주차별 결합 구성을 고정·공개한</a:t>
+            </a:r>
+          </a:p>
+          <a:p>
+            <a:pPr algn="l">
+              <a:spcAft>
+                <a:spcPts val="200"/>
+              </a:spcAft>
+            </a:pPr>
             <a:r>
               <a:rPr sz="1050" b="0">
                 <a:solidFill>
@@ -9458,7 +9249,7 @@
                 <a:latin typeface="Apple SD Gothic Neo"/>
                 <a:ea typeface="Apple SD Gothic Neo"/>
               </a:rPr>
-              <a:t>주차별 결합 구성을 고정·공개한</a:t>
+              <a:t>뒤 향후 분기를 실전 축적 — 선택편의 없는 표본외 증거를</a:t>
             </a:r>
           </a:p>
           <a:p>
@@ -9475,23 +9266,6 @@
                 <a:latin typeface="Apple SD Gothic Neo"/>
                 <a:ea typeface="Apple SD Gothic Neo"/>
               </a:rPr>
-              <a:t>뒤 향후 분기를 실전 축적 — 선택편의 없는 표본외 증거를</a:t>
-            </a:r>
-          </a:p>
-          <a:p>
-            <a:pPr algn="l">
-              <a:spcAft>
-                <a:spcPts val="200"/>
-              </a:spcAft>
-            </a:pPr>
-            <a:r>
-              <a:rPr sz="1050" b="0">
-                <a:solidFill>
-                  <a:srgbClr val="262626"/>
-                </a:solidFill>
-                <a:latin typeface="Apple SD Gothic Neo"/>
-                <a:ea typeface="Apple SD Gothic Neo"/>
-              </a:rPr>
               <a:t>만듭니다.</a:t>
             </a:r>
           </a:p>
@@ -9501,16 +9275,13 @@
                 <a:spcPts val="200"/>
               </a:spcAft>
             </a:pPr>
-            <a:r>
-              <a:rPr sz="600" b="0">
-                <a:solidFill>
-                  <a:srgbClr val="262626"/>
-                </a:solidFill>
-                <a:latin typeface="Apple SD Gothic Neo"/>
-                <a:ea typeface="Apple SD Gothic Neo"/>
-              </a:rPr>
-              <a:t/>
-            </a:r>
+            <a:endParaRPr sz="1050" b="0">
+              <a:solidFill>
+                <a:srgbClr val="262626"/>
+              </a:solidFill>
+              <a:latin typeface="Apple SD Gothic Neo"/>
+              <a:ea typeface="Apple SD Gothic Neo"/>
+            </a:endParaRPr>
           </a:p>
           <a:p>
             <a:pPr algn="l">
@@ -9592,7 +9363,7 @@
           <a:noFill/>
         </p:spPr>
         <p:txBody>
-          <a:bodyPr wrap="square" anchor="t" lIns="18288" rIns="18288" tIns="9144" bIns="9144">
+          <a:bodyPr wrap="square" lIns="18288" tIns="9144" rIns="18288" bIns="9144" anchor="t">
             <a:spAutoFit/>
           </a:bodyPr>
           <a:lstStyle/>
@@ -9632,7 +9403,7 @@
           <a:noFill/>
         </p:spPr>
         <p:txBody>
-          <a:bodyPr wrap="square" anchor="t" lIns="18288" rIns="18288" tIns="9144" bIns="9144">
+          <a:bodyPr wrap="square" lIns="18288" tIns="9144" rIns="18288" bIns="9144" anchor="t">
             <a:spAutoFit/>
           </a:bodyPr>
           <a:lstStyle/>
@@ -9664,7 +9435,7 @@
 </file>
 
 <file path=ppt/slides/slide8.xml><?xml version="1.0" encoding="utf-8"?>
-<p:sld xmlns:a="http://schemas.openxmlformats.org/drawingml/2006/main" xmlns:p="http://schemas.openxmlformats.org/presentationml/2006/main" xmlns:r="http://schemas.openxmlformats.org/officeDocument/2006/relationships">
+<p:sld xmlns:a="http://schemas.openxmlformats.org/drawingml/2006/main" xmlns:r="http://schemas.openxmlformats.org/officeDocument/2006/relationships" xmlns:p="http://schemas.openxmlformats.org/presentationml/2006/main">
   <p:cSld>
     <p:spTree>
       <p:nvGrpSpPr>
@@ -9672,7 +9443,14 @@
         <p:cNvGrpSpPr/>
         <p:nvPr/>
       </p:nvGrpSpPr>
-      <p:grpSpPr/>
+      <p:grpSpPr>
+        <a:xfrm>
+          <a:off x="0" y="0"/>
+          <a:ext cx="0" cy="0"/>
+          <a:chOff x="0" y="0"/>
+          <a:chExt cx="0" cy="0"/>
+        </a:xfrm>
+      </p:grpSpPr>
       <p:sp>
         <p:nvSpPr>
           <p:cNvPr id="2" name="TextBox 1"/>
@@ -9690,7 +9468,7 @@
           <a:noFill/>
         </p:spPr>
         <p:txBody>
-          <a:bodyPr wrap="square" anchor="t" lIns="18288" rIns="18288" tIns="9144" bIns="9144">
+          <a:bodyPr wrap="square" lIns="18288" tIns="9144" rIns="18288" bIns="9144" anchor="t">
             <a:spAutoFit/>
           </a:bodyPr>
           <a:lstStyle/>
@@ -9730,7 +9508,7 @@
           <a:noFill/>
         </p:spPr>
         <p:txBody>
-          <a:bodyPr wrap="square" anchor="t" lIns="18288" rIns="18288" tIns="9144" bIns="9144">
+          <a:bodyPr wrap="square" lIns="18288" tIns="9144" rIns="18288" bIns="9144" anchor="t">
             <a:spAutoFit/>
           </a:bodyPr>
           <a:lstStyle/>
@@ -9840,7 +9618,7 @@
           <a:noFill/>
         </p:spPr>
         <p:txBody>
-          <a:bodyPr wrap="square" anchor="t" lIns="18288" rIns="18288" tIns="9144" bIns="9144">
+          <a:bodyPr wrap="square" lIns="18288" tIns="9144" rIns="18288" bIns="9144" anchor="t">
             <a:spAutoFit/>
           </a:bodyPr>
           <a:lstStyle/>
@@ -9880,7 +9658,7 @@
           <a:noFill/>
         </p:spPr>
         <p:txBody>
-          <a:bodyPr wrap="square" anchor="t" lIns="18288" rIns="18288" tIns="9144" bIns="9144">
+          <a:bodyPr wrap="square" lIns="18288" tIns="9144" rIns="18288" bIns="9144" anchor="t">
             <a:spAutoFit/>
           </a:bodyPr>
           <a:lstStyle/>
@@ -9920,7 +9698,7 @@
           <a:noFill/>
         </p:spPr>
         <p:txBody>
-          <a:bodyPr wrap="square" anchor="t" lIns="18288" rIns="18288" tIns="9144" bIns="9144">
+          <a:bodyPr wrap="square" lIns="18288" tIns="9144" rIns="18288" bIns="9144" anchor="t">
             <a:spAutoFit/>
           </a:bodyPr>
           <a:lstStyle/>
@@ -9995,7 +9773,7 @@
           <a:noFill/>
         </p:spPr>
         <p:txBody>
-          <a:bodyPr wrap="square" anchor="t" lIns="18288" rIns="18288" tIns="9144" bIns="9144">
+          <a:bodyPr wrap="square" lIns="18288" tIns="9144" rIns="18288" bIns="9144" anchor="t">
             <a:spAutoFit/>
           </a:bodyPr>
           <a:lstStyle/>
@@ -10035,7 +9813,7 @@
           <a:noFill/>
         </p:spPr>
         <p:txBody>
-          <a:bodyPr wrap="square" anchor="t" lIns="18288" rIns="18288" tIns="9144" bIns="9144">
+          <a:bodyPr wrap="square" lIns="18288" tIns="9144" rIns="18288" bIns="9144" anchor="t">
             <a:spAutoFit/>
           </a:bodyPr>
           <a:lstStyle/>
@@ -10075,7 +9853,7 @@
           <a:noFill/>
         </p:spPr>
         <p:txBody>
-          <a:bodyPr wrap="square" anchor="t" lIns="18288" rIns="18288" tIns="9144" bIns="9144">
+          <a:bodyPr wrap="square" lIns="18288" tIns="9144" rIns="18288" bIns="9144" anchor="t">
             <a:spAutoFit/>
           </a:bodyPr>
           <a:lstStyle/>
@@ -10150,7 +9928,7 @@
           <a:noFill/>
         </p:spPr>
         <p:txBody>
-          <a:bodyPr wrap="square" anchor="t" lIns="18288" rIns="18288" tIns="9144" bIns="9144">
+          <a:bodyPr wrap="square" lIns="18288" tIns="9144" rIns="18288" bIns="9144" anchor="t">
             <a:spAutoFit/>
           </a:bodyPr>
           <a:lstStyle/>
@@ -10190,7 +9968,7 @@
           <a:noFill/>
         </p:spPr>
         <p:txBody>
-          <a:bodyPr wrap="square" anchor="t" lIns="18288" rIns="18288" tIns="9144" bIns="9144">
+          <a:bodyPr wrap="square" lIns="18288" tIns="9144" rIns="18288" bIns="9144" anchor="t">
             <a:spAutoFit/>
           </a:bodyPr>
           <a:lstStyle/>
@@ -10230,7 +10008,7 @@
           <a:noFill/>
         </p:spPr>
         <p:txBody>
-          <a:bodyPr wrap="square" anchor="t" lIns="18288" rIns="18288" tIns="9144" bIns="9144">
+          <a:bodyPr wrap="square" lIns="18288" tIns="9144" rIns="18288" bIns="9144" anchor="t">
             <a:spAutoFit/>
           </a:bodyPr>
           <a:lstStyle/>
@@ -10305,7 +10083,7 @@
           <a:noFill/>
         </p:spPr>
         <p:txBody>
-          <a:bodyPr wrap="square" anchor="t" lIns="18288" rIns="18288" tIns="9144" bIns="9144">
+          <a:bodyPr wrap="square" lIns="18288" tIns="9144" rIns="18288" bIns="9144" anchor="t">
             <a:spAutoFit/>
           </a:bodyPr>
           <a:lstStyle/>
@@ -10345,7 +10123,7 @@
           <a:noFill/>
         </p:spPr>
         <p:txBody>
-          <a:bodyPr wrap="square" anchor="t" lIns="18288" rIns="18288" tIns="9144" bIns="9144">
+          <a:bodyPr wrap="square" lIns="18288" tIns="9144" rIns="18288" bIns="9144" anchor="t">
             <a:spAutoFit/>
           </a:bodyPr>
           <a:lstStyle/>
@@ -10385,7 +10163,7 @@
           <a:noFill/>
         </p:spPr>
         <p:txBody>
-          <a:bodyPr wrap="square" anchor="t" lIns="18288" rIns="18288" tIns="9144" bIns="9144">
+          <a:bodyPr wrap="square" lIns="18288" tIns="9144" rIns="18288" bIns="9144" anchor="t">
             <a:spAutoFit/>
           </a:bodyPr>
           <a:lstStyle/>
@@ -10460,7 +10238,7 @@
           <a:noFill/>
         </p:spPr>
         <p:txBody>
-          <a:bodyPr wrap="square" anchor="t" lIns="18288" rIns="18288" tIns="9144" bIns="9144">
+          <a:bodyPr wrap="square" lIns="18288" tIns="9144" rIns="18288" bIns="9144" anchor="t">
             <a:spAutoFit/>
           </a:bodyPr>
           <a:lstStyle/>
@@ -10500,7 +10278,7 @@
           <a:noFill/>
         </p:spPr>
         <p:txBody>
-          <a:bodyPr wrap="square" anchor="t" lIns="18288" rIns="18288" tIns="9144" bIns="9144">
+          <a:bodyPr wrap="square" lIns="18288" tIns="9144" rIns="18288" bIns="9144" anchor="t">
             <a:spAutoFit/>
           </a:bodyPr>
           <a:lstStyle/>
@@ -10540,7 +10318,7 @@
           <a:noFill/>
         </p:spPr>
         <p:txBody>
-          <a:bodyPr wrap="square" anchor="t" lIns="18288" rIns="18288" tIns="9144" bIns="9144">
+          <a:bodyPr wrap="square" lIns="18288" tIns="9144" rIns="18288" bIns="9144" anchor="t">
             <a:spAutoFit/>
           </a:bodyPr>
           <a:lstStyle/>
@@ -10572,7 +10350,7 @@
 </file>
 
 <file path=ppt/slides/slide9.xml><?xml version="1.0" encoding="utf-8"?>
-<p:sld xmlns:a="http://schemas.openxmlformats.org/drawingml/2006/main" xmlns:p="http://schemas.openxmlformats.org/presentationml/2006/main" xmlns:r="http://schemas.openxmlformats.org/officeDocument/2006/relationships">
+<p:sld xmlns:a="http://schemas.openxmlformats.org/drawingml/2006/main" xmlns:r="http://schemas.openxmlformats.org/officeDocument/2006/relationships" xmlns:p="http://schemas.openxmlformats.org/presentationml/2006/main">
   <p:cSld>
     <p:spTree>
       <p:nvGrpSpPr>
@@ -10580,7 +10358,14 @@
         <p:cNvGrpSpPr/>
         <p:nvPr/>
       </p:nvGrpSpPr>
-      <p:grpSpPr/>
+      <p:grpSpPr>
+        <a:xfrm>
+          <a:off x="0" y="0"/>
+          <a:ext cx="0" cy="0"/>
+          <a:chOff x="0" y="0"/>
+          <a:chExt cx="0" cy="0"/>
+        </a:xfrm>
+      </p:grpSpPr>
       <p:sp>
         <p:nvSpPr>
           <p:cNvPr id="2" name="TextBox 1"/>
@@ -10598,7 +10383,7 @@
           <a:noFill/>
         </p:spPr>
         <p:txBody>
-          <a:bodyPr wrap="square" anchor="t" lIns="18288" rIns="18288" tIns="9144" bIns="9144">
+          <a:bodyPr wrap="square" lIns="18288" tIns="9144" rIns="18288" bIns="9144" anchor="t">
             <a:spAutoFit/>
           </a:bodyPr>
           <a:lstStyle/>
@@ -10638,7 +10423,7 @@
           <a:noFill/>
         </p:spPr>
         <p:txBody>
-          <a:bodyPr wrap="square" anchor="t" lIns="18288" rIns="18288" tIns="9144" bIns="9144">
+          <a:bodyPr wrap="square" lIns="18288" tIns="9144" rIns="18288" bIns="9144" anchor="t">
             <a:spAutoFit/>
           </a:bodyPr>
           <a:lstStyle/>
@@ -10713,7 +10498,7 @@
           <a:noFill/>
         </p:spPr>
         <p:txBody>
-          <a:bodyPr wrap="square" anchor="t" lIns="18288" rIns="18288" tIns="9144" bIns="9144">
+          <a:bodyPr wrap="square" lIns="18288" tIns="9144" rIns="18288" bIns="9144" anchor="t">
             <a:spAutoFit/>
           </a:bodyPr>
           <a:lstStyle/>
@@ -10782,7 +10567,7 @@
           <p:nvPr/>
         </p:nvPicPr>
         <p:blipFill>
-          <a:blip r:embed="rId2"/>
+          <a:blip r:embed="rId3"/>
           <a:stretch>
             <a:fillRect/>
           </a:stretch>
@@ -10814,7 +10599,7 @@
           <a:noFill/>
         </p:spPr>
         <p:txBody>
-          <a:bodyPr wrap="square" anchor="t" lIns="18288" rIns="18288" tIns="9144" bIns="9144">
+          <a:bodyPr wrap="square" lIns="18288" tIns="9144" rIns="18288" bIns="9144" anchor="t">
             <a:spAutoFit/>
           </a:bodyPr>
           <a:lstStyle/>
@@ -10889,7 +10674,7 @@
           <a:noFill/>
         </p:spPr>
         <p:txBody>
-          <a:bodyPr wrap="square" anchor="t" lIns="18288" rIns="18288" tIns="9144" bIns="9144">
+          <a:bodyPr wrap="square" lIns="18288" tIns="9144" rIns="18288" bIns="9144" anchor="t">
             <a:spAutoFit/>
           </a:bodyPr>
           <a:lstStyle/>
@@ -10987,6 +10772,7 @@
           <a:lstStyle/>
           <a:p>
             <a:pPr algn="ctr"/>
+            <a:endParaRPr/>
           </a:p>
         </p:txBody>
       </p:sp>
@@ -11007,7 +10793,7 @@
           <a:noFill/>
         </p:spPr>
         <p:txBody>
-          <a:bodyPr wrap="square" anchor="t" lIns="18288" rIns="18288" tIns="9144" bIns="9144">
+          <a:bodyPr wrap="square" lIns="18288" tIns="9144" rIns="18288" bIns="9144" anchor="t">
             <a:spAutoFit/>
           </a:bodyPr>
           <a:lstStyle/>
@@ -11139,6 +10925,7 @@
           <a:lstStyle/>
           <a:p>
             <a:pPr algn="ctr"/>
+            <a:endParaRPr/>
           </a:p>
         </p:txBody>
       </p:sp>
@@ -11159,7 +10946,7 @@
           <a:noFill/>
         </p:spPr>
         <p:txBody>
-          <a:bodyPr wrap="square" anchor="t" lIns="18288" rIns="18288" tIns="9144" bIns="9144">
+          <a:bodyPr wrap="square" lIns="18288" tIns="9144" rIns="18288" bIns="9144" anchor="t">
             <a:spAutoFit/>
           </a:bodyPr>
           <a:lstStyle/>
@@ -11436,6 +11223,7 @@
           <a:lstStyle/>
           <a:p>
             <a:pPr algn="ctr"/>
+            <a:endParaRPr/>
           </a:p>
         </p:txBody>
       </p:sp>
@@ -11480,6 +11268,7 @@
           <a:lstStyle/>
           <a:p>
             <a:pPr algn="ctr"/>
+            <a:endParaRPr/>
           </a:p>
         </p:txBody>
       </p:sp>
@@ -11500,7 +11289,7 @@
           <a:noFill/>
         </p:spPr>
         <p:txBody>
-          <a:bodyPr wrap="square" anchor="t" lIns="18288" rIns="18288" tIns="9144" bIns="9144">
+          <a:bodyPr wrap="square" lIns="18288" tIns="9144" rIns="18288" bIns="9144" anchor="t">
             <a:spAutoFit/>
           </a:bodyPr>
           <a:lstStyle/>
@@ -11574,7 +11363,7 @@
           <a:noFill/>
         </p:spPr>
         <p:txBody>
-          <a:bodyPr wrap="square" anchor="t" lIns="18288" rIns="18288" tIns="9144" bIns="9144">
+          <a:bodyPr wrap="square" lIns="18288" tIns="9144" rIns="18288" bIns="9144" anchor="t">
             <a:spAutoFit/>
           </a:bodyPr>
           <a:lstStyle/>
@@ -11614,7 +11403,7 @@
           <a:noFill/>
         </p:spPr>
         <p:txBody>
-          <a:bodyPr wrap="square" anchor="t" lIns="18288" rIns="18288" tIns="9144" bIns="9144">
+          <a:bodyPr wrap="square" lIns="18288" tIns="9144" rIns="18288" bIns="9144" anchor="t">
             <a:spAutoFit/>
           </a:bodyPr>
           <a:lstStyle/>
@@ -11966,7 +11755,7 @@
 </file>
 
 <file path=ppt/theme/theme2.xml><?xml version="1.0" encoding="utf-8"?>
-<a:theme xmlns:a="http://schemas.openxmlformats.org/drawingml/2006/main" name="Office Theme">
+<a:theme xmlns:a="http://schemas.openxmlformats.org/drawingml/2006/main" name="Office 테마">
   <a:themeElements>
     <a:clrScheme name="Office">
       <a:dk1>
@@ -11976,44 +11765,44 @@
         <a:sysClr val="window" lastClr="FFFFFF"/>
       </a:lt1>
       <a:dk2>
-        <a:srgbClr val="1F497D"/>
+        <a:srgbClr val="0E2841"/>
       </a:dk2>
       <a:lt2>
-        <a:srgbClr val="EEECE1"/>
+        <a:srgbClr val="E8E8E8"/>
       </a:lt2>
       <a:accent1>
-        <a:srgbClr val="4F81BD"/>
+        <a:srgbClr val="156082"/>
       </a:accent1>
       <a:accent2>
-        <a:srgbClr val="C0504D"/>
+        <a:srgbClr val="E97132"/>
       </a:accent2>
       <a:accent3>
-        <a:srgbClr val="9BBB59"/>
+        <a:srgbClr val="196B24"/>
       </a:accent3>
       <a:accent4>
-        <a:srgbClr val="8064A2"/>
+        <a:srgbClr val="0F9ED5"/>
       </a:accent4>
       <a:accent5>
-        <a:srgbClr val="4BACC6"/>
+        <a:srgbClr val="A02B93"/>
       </a:accent5>
       <a:accent6>
-        <a:srgbClr val="F79646"/>
+        <a:srgbClr val="4EA72E"/>
       </a:accent6>
       <a:hlink>
-        <a:srgbClr val="0000FF"/>
+        <a:srgbClr val="467886"/>
       </a:hlink>
       <a:folHlink>
-        <a:srgbClr val="800080"/>
+        <a:srgbClr val="96607D"/>
       </a:folHlink>
     </a:clrScheme>
     <a:fontScheme name="Office">
       <a:majorFont>
-        <a:latin typeface="Calibri"/>
+        <a:latin typeface="맑은 고딕" panose="02110004020202020204"/>
         <a:ea typeface=""/>
         <a:cs typeface=""/>
-        <a:font script="Jpan" typeface="ＭＳ Ｐゴシック"/>
+        <a:font script="Jpan" typeface="游ゴシック Light"/>
         <a:font script="Hang" typeface="맑은 고딕"/>
-        <a:font script="Hans" typeface="宋体"/>
+        <a:font script="Hans" typeface="等线 Light"/>
         <a:font script="Hant" typeface="新細明體"/>
         <a:font script="Arab" typeface="Times New Roman"/>
         <a:font script="Hebr" typeface="Times New Roman"/>
@@ -12041,14 +11830,31 @@
         <a:font script="Viet" typeface="Times New Roman"/>
         <a:font script="Uigh" typeface="Microsoft Uighur"/>
         <a:font script="Geor" typeface="Sylfaen"/>
+        <a:font script="Armn" typeface="Arial"/>
+        <a:font script="Bugi" typeface="Leelawadee UI"/>
+        <a:font script="Bopo" typeface="Microsoft JhengHei"/>
+        <a:font script="Java" typeface="Javanese Text"/>
+        <a:font script="Lisu" typeface="Segoe UI"/>
+        <a:font script="Mymr" typeface="Myanmar Text"/>
+        <a:font script="Nkoo" typeface="Ebrima"/>
+        <a:font script="Olck" typeface="Nirmala UI"/>
+        <a:font script="Osma" typeface="Ebrima"/>
+        <a:font script="Phag" typeface="Phagspa"/>
+        <a:font script="Syrn" typeface="Estrangelo Edessa"/>
+        <a:font script="Syrj" typeface="Estrangelo Edessa"/>
+        <a:font script="Syre" typeface="Estrangelo Edessa"/>
+        <a:font script="Sora" typeface="Nirmala UI"/>
+        <a:font script="Tale" typeface="Microsoft Tai Le"/>
+        <a:font script="Talu" typeface="Microsoft New Tai Lue"/>
+        <a:font script="Tfng" typeface="Ebrima"/>
       </a:majorFont>
       <a:minorFont>
-        <a:latin typeface="Calibri"/>
+        <a:latin typeface="맑은 고딕" panose="02110004020202020204"/>
         <a:ea typeface=""/>
         <a:cs typeface=""/>
-        <a:font script="Jpan" typeface="ＭＳ Ｐゴシック"/>
+        <a:font script="Jpan" typeface="游ゴシック"/>
         <a:font script="Hang" typeface="맑은 고딕"/>
-        <a:font script="Hans" typeface="宋体"/>
+        <a:font script="Hans" typeface="等线"/>
         <a:font script="Hant" typeface="新細明體"/>
         <a:font script="Arab" typeface="Arial"/>
         <a:font script="Hebr" typeface="Arial"/>
@@ -12076,6 +11882,23 @@
         <a:font script="Viet" typeface="Arial"/>
         <a:font script="Uigh" typeface="Microsoft Uighur"/>
         <a:font script="Geor" typeface="Sylfaen"/>
+        <a:font script="Armn" typeface="Arial"/>
+        <a:font script="Bugi" typeface="Leelawadee UI"/>
+        <a:font script="Bopo" typeface="Microsoft JhengHei"/>
+        <a:font script="Java" typeface="Javanese Text"/>
+        <a:font script="Lisu" typeface="Segoe UI"/>
+        <a:font script="Mymr" typeface="Myanmar Text"/>
+        <a:font script="Nkoo" typeface="Ebrima"/>
+        <a:font script="Olck" typeface="Nirmala UI"/>
+        <a:font script="Osma" typeface="Ebrima"/>
+        <a:font script="Phag" typeface="Phagspa"/>
+        <a:font script="Syrn" typeface="Estrangelo Edessa"/>
+        <a:font script="Syrj" typeface="Estrangelo Edessa"/>
+        <a:font script="Syre" typeface="Estrangelo Edessa"/>
+        <a:font script="Sora" typeface="Nirmala UI"/>
+        <a:font script="Tale" typeface="Microsoft Tai Le"/>
+        <a:font script="Talu" typeface="Microsoft New Tai Lue"/>
+        <a:font script="Tfng" typeface="Ebrima"/>
       </a:minorFont>
     </a:fontScheme>
     <a:fmtScheme name="Office">
@@ -12087,180 +11910,136 @@
           <a:gsLst>
             <a:gs pos="0">
               <a:schemeClr val="phClr">
-                <a:tint val="50000"/>
-                <a:satMod val="300000"/>
+                <a:lumMod val="110000"/>
+                <a:satMod val="105000"/>
+                <a:tint val="67000"/>
               </a:schemeClr>
             </a:gs>
-            <a:gs pos="35000">
+            <a:gs pos="50000">
               <a:schemeClr val="phClr">
-                <a:tint val="37000"/>
-                <a:satMod val="300000"/>
+                <a:lumMod val="105000"/>
+                <a:satMod val="103000"/>
+                <a:tint val="73000"/>
               </a:schemeClr>
             </a:gs>
             <a:gs pos="100000">
               <a:schemeClr val="phClr">
-                <a:tint val="15000"/>
-                <a:satMod val="350000"/>
+                <a:lumMod val="105000"/>
+                <a:satMod val="109000"/>
+                <a:tint val="81000"/>
               </a:schemeClr>
             </a:gs>
           </a:gsLst>
-          <a:lin ang="16200000" scaled="1"/>
+          <a:lin ang="5400000" scaled="0"/>
         </a:gradFill>
         <a:gradFill rotWithShape="1">
           <a:gsLst>
             <a:gs pos="0">
               <a:schemeClr val="phClr">
-                <a:tint val="100000"/>
+                <a:satMod val="103000"/>
+                <a:lumMod val="102000"/>
+                <a:tint val="94000"/>
+              </a:schemeClr>
+            </a:gs>
+            <a:gs pos="50000">
+              <a:schemeClr val="phClr">
+                <a:satMod val="110000"/>
+                <a:lumMod val="100000"/>
                 <a:shade val="100000"/>
-                <a:satMod val="130000"/>
               </a:schemeClr>
             </a:gs>
             <a:gs pos="100000">
               <a:schemeClr val="phClr">
-                <a:tint val="50000"/>
-                <a:shade val="100000"/>
-                <a:satMod val="350000"/>
+                <a:lumMod val="99000"/>
+                <a:satMod val="120000"/>
+                <a:shade val="78000"/>
               </a:schemeClr>
             </a:gs>
           </a:gsLst>
-          <a:lin ang="16200000" scaled="0"/>
+          <a:lin ang="5400000" scaled="0"/>
         </a:gradFill>
       </a:fillStyleLst>
       <a:lnStyleLst>
-        <a:ln w="9525" cap="flat" cmpd="sng" algn="ctr">
+        <a:ln w="12700" cap="flat" cmpd="sng" algn="ctr">
           <a:solidFill>
-            <a:schemeClr val="phClr">
-              <a:shade val="95000"/>
-              <a:satMod val="105000"/>
-            </a:schemeClr>
+            <a:schemeClr val="phClr"/>
           </a:solidFill>
           <a:prstDash val="solid"/>
+          <a:miter lim="800000"/>
+        </a:ln>
+        <a:ln w="19050" cap="flat" cmpd="sng" algn="ctr">
+          <a:solidFill>
+            <a:schemeClr val="phClr"/>
+          </a:solidFill>
+          <a:prstDash val="solid"/>
+          <a:miter lim="800000"/>
         </a:ln>
         <a:ln w="25400" cap="flat" cmpd="sng" algn="ctr">
           <a:solidFill>
             <a:schemeClr val="phClr"/>
           </a:solidFill>
           <a:prstDash val="solid"/>
-        </a:ln>
-        <a:ln w="38100" cap="flat" cmpd="sng" algn="ctr">
-          <a:solidFill>
-            <a:schemeClr val="phClr"/>
-          </a:solidFill>
-          <a:prstDash val="solid"/>
+          <a:miter lim="800000"/>
         </a:ln>
       </a:lnStyleLst>
       <a:effectStyleLst>
         <a:effectStyle>
+          <a:effectLst/>
+        </a:effectStyle>
+        <a:effectStyle>
+          <a:effectLst/>
+        </a:effectStyle>
+        <a:effectStyle>
           <a:effectLst>
-            <a:outerShdw blurRad="40000" dist="20000" dir="5400000" rotWithShape="0">
+            <a:outerShdw blurRad="57150" dist="19050" dir="5400000" algn="ctr" rotWithShape="0">
               <a:srgbClr val="000000">
-                <a:alpha val="38000"/>
+                <a:alpha val="63000"/>
               </a:srgbClr>
             </a:outerShdw>
           </a:effectLst>
-        </a:effectStyle>
-        <a:effectStyle>
-          <a:effectLst>
-            <a:outerShdw blurRad="40000" dist="23000" dir="5400000" rotWithShape="0">
-              <a:srgbClr val="000000">
-                <a:alpha val="35000"/>
-              </a:srgbClr>
-            </a:outerShdw>
-          </a:effectLst>
-        </a:effectStyle>
-        <a:effectStyle>
-          <a:effectLst>
-            <a:outerShdw blurRad="40000" dist="23000" dir="5400000" rotWithShape="0">
-              <a:srgbClr val="000000">
-                <a:alpha val="35000"/>
-              </a:srgbClr>
-            </a:outerShdw>
-          </a:effectLst>
-          <a:scene3d>
-            <a:camera prst="orthographicFront">
-              <a:rot lat="0" lon="0" rev="0"/>
-            </a:camera>
-            <a:lightRig rig="threePt" dir="t">
-              <a:rot lat="0" lon="0" rev="1200000"/>
-            </a:lightRig>
-          </a:scene3d>
-          <a:sp3d>
-            <a:bevelT w="63500" h="25400"/>
-          </a:sp3d>
         </a:effectStyle>
       </a:effectStyleLst>
       <a:bgFillStyleLst>
         <a:solidFill>
           <a:schemeClr val="phClr"/>
         </a:solidFill>
+        <a:solidFill>
+          <a:schemeClr val="phClr">
+            <a:tint val="95000"/>
+            <a:satMod val="170000"/>
+          </a:schemeClr>
+        </a:solidFill>
         <a:gradFill rotWithShape="1">
           <a:gsLst>
             <a:gs pos="0">
               <a:schemeClr val="phClr">
-                <a:tint val="40000"/>
-                <a:satMod val="350000"/>
+                <a:tint val="93000"/>
+                <a:satMod val="150000"/>
+                <a:shade val="98000"/>
+                <a:lumMod val="102000"/>
               </a:schemeClr>
             </a:gs>
-            <a:gs pos="40000">
+            <a:gs pos="50000">
               <a:schemeClr val="phClr">
-                <a:tint val="45000"/>
-                <a:shade val="99000"/>
-                <a:satMod val="350000"/>
+                <a:tint val="98000"/>
+                <a:satMod val="130000"/>
+                <a:shade val="90000"/>
+                <a:lumMod val="103000"/>
               </a:schemeClr>
             </a:gs>
             <a:gs pos="100000">
               <a:schemeClr val="phClr">
-                <a:shade val="20000"/>
-                <a:satMod val="255000"/>
+                <a:shade val="63000"/>
+                <a:satMod val="120000"/>
               </a:schemeClr>
             </a:gs>
           </a:gsLst>
-          <a:path path="circle">
-            <a:fillToRect l="50000" t="-80000" r="50000" b="180000"/>
-          </a:path>
-        </a:gradFill>
-        <a:gradFill rotWithShape="1">
-          <a:gsLst>
-            <a:gs pos="0">
-              <a:schemeClr val="phClr">
-                <a:tint val="80000"/>
-                <a:satMod val="300000"/>
-              </a:schemeClr>
-            </a:gs>
-            <a:gs pos="100000">
-              <a:schemeClr val="phClr">
-                <a:shade val="30000"/>
-                <a:satMod val="200000"/>
-              </a:schemeClr>
-            </a:gs>
-          </a:gsLst>
-          <a:path path="circle">
-            <a:fillToRect l="50000" t="50000" r="50000" b="50000"/>
-          </a:path>
+          <a:lin ang="5400000" scaled="0"/>
         </a:gradFill>
       </a:bgFillStyleLst>
     </a:fmtScheme>
   </a:themeElements>
   <a:objectDefaults>
-    <a:spDef>
-      <a:spPr/>
-      <a:bodyPr/>
-      <a:lstStyle/>
-      <a:style>
-        <a:lnRef idx="1">
-          <a:schemeClr val="accent1"/>
-        </a:lnRef>
-        <a:fillRef idx="3">
-          <a:schemeClr val="accent1"/>
-        </a:fillRef>
-        <a:effectRef idx="2">
-          <a:schemeClr val="accent1"/>
-        </a:effectRef>
-        <a:fontRef idx="minor">
-          <a:schemeClr val="lt1"/>
-        </a:fontRef>
-      </a:style>
-    </a:spDef>
     <a:lnDef>
       <a:spPr/>
       <a:bodyPr/>
@@ -12282,5 +12061,10 @@
     </a:lnDef>
   </a:objectDefaults>
   <a:extraClrSchemeLst/>
+  <a:extLst>
+    <a:ext uri="{05A4C25C-085E-4340-85A3-A5531E510DB2}">
+      <thm15:themeFamily xmlns:thm15="http://schemas.microsoft.com/office/thememl/2012/main" name="Office Theme" id="{2E142A2C-CD16-42D6-873A-C26D2A0506FA}" vid="{1BDDFF52-6CD6-40A5-AB3C-68EB2F1E4D0A}"/>
+    </a:ext>
+  </a:extLst>
 </a:theme>
 </file>